--- a/downloads/presentations/modules/lesson-05-geospatial-ai-and-spatial-epidemiology.pptx
+++ b/downloads/presentations/modules/lesson-05-geospatial-ai-and-spatial-epidemiology.pptx
@@ -25,9 +25,11 @@
     <p:sldId id="273" r:id="rId19"/>
     <p:sldId id="274" r:id="rId20"/>
     <p:sldId id="275" r:id="rId21"/>
+    <p:sldId id="276" r:id="rId22"/>
+    <p:sldId id="277" r:id="rId23"/>
   </p:sldIdLst>
   <p:notesMasterIdLst>
-    <p:notesMasterId r:id="rId22"/>
+    <p:notesMasterId r:id="rId24"/>
   </p:notesMasterIdLst>
   <p:sldSz cx="12192000" cy="6858000"/>
   <p:notesSz cx="6858000" cy="12192000"/>
@@ -610,10 +612,10 @@
           <a:p>
             <a:r>
               <a:rPr lang="en-US" dirty="0"/>
-              <a:t>Risks, Failure Modes, and Guardrails
-Geocoding bias. Some populations and locations are harder to geocode accurately. Guardrails include geocoding quality checks, manual review for unmatched records, and documentation of missingness.
-Small-area privacy risk. Detailed maps can reveal sensitive patterns or identities. Guardrails include aggregation, suppression, role-based access, and public release review.
-Overinterpretation of hotspots. Spatial clusters may reflect testing or reporting patterns. Guardrails include denominator review, baseline comparison, and epidemiologic confirmation.</a:t>
+              <a:t>Technical Deep Dive
+Geospatial AI begins with location data, and location data are rarely perfect. Addresses may be missing, misspelled, outdated, rural route-based, temporary, or unstable. People experiencing homelessness, migration, displacement, incarceration, or housing instability may be poorly represented by address-based analysis. Geocoding errors can shift records across boundaries and distort rates for small areas.
+Spatial scale shapes interpretation. County-level maps may hide neighborhood-level inequities. Census tract maps may reveal meaningful local variation but increase privacy risks. ZIP codes are convenient but were created for mail delivery, not public health analysis. Staff should choose geographic units based on the question, data quality, privacy requirements, and actionability.
+AI-supported hotspot detection requires baseline context. An apparent cluster may reflect higher testing volume, better reporting, a facility-specific outbreak, or a true increase in incidence. Algorithms can detect unusual patterns, but epidemiologists must assess plausibility, data quality, denominator stability, and reporting artifacts. Automated hotspot alerts should be treated as signals for review, not conclusions.</a:t>
             </a:r>
             <a:endParaRPr lang="en-US" dirty="0"/>
           </a:p>
@@ -701,8 +703,9 @@
           <a:p>
             <a:r>
               <a:rPr lang="en-US" dirty="0"/>
-              <a:t>Risks, Failure Modes, and Guardrails
-Stigmatizing communities. Maps can unintentionally label communities as problems. Guardrails include equity framing, community engagement, careful language, and focus on structural supports.</a:t>
+              <a:t>Technical Deep Dive
+Geospatial models may use spatial proxies for social conditions. Social vulnerability, deprivation, rurality, housing burden, transportation access, and environmental exposure indicators can improve public health planning. They can also be misused if they stigmatize communities or support restrictive decisions. Agencies should use these indicators to guide supportive action and resource allocation, not blame.
+Privacy protection should be planned before analysis. Techniques include aggregation, suppression, geomasking, minimum cell-size rules, role-based access, public/private map separation, and review of small-area outputs before publication. For internal AI tools, access controls and audit logs should apply to spatial data just as they do to clinical or case data.</a:t>
             </a:r>
             <a:endParaRPr lang="en-US" dirty="0"/>
           </a:p>
@@ -790,9 +793,10 @@
           <a:p>
             <a:r>
               <a:rPr lang="en-US" dirty="0"/>
-              <a:t>Application to AI-Supported Workflows
-Geospatial AI may support predictive analytics, emergency response, inspection prioritization, environmental monitoring, and service planning. Generative AI may summarize spatial patterns for leaders, but it must not overstate certainty or ignore limitations. RAG tools may retrieve local plans, maps, and protocols, while agentic workflows may propose outreach routes or inspection assignments that require human approval.
-The responsible application of geospatial AI requires explicit attention to privacy, geography, and equity. A spatial output should answer a public health question, support a feasible action, and include enough context for staff and communities to interpret it appropriately.</a:t>
+              <a:t>Risks, Failure Modes, and Guardrails
+Geocoding bias. Some populations and locations are harder to geocode accurately. Guardrails include geocoding quality checks, manual review for unmatched records, and documentation of missingness.
+Small-area privacy risk. Detailed maps can reveal sensitive patterns or identities. Guardrails include aggregation, suppression, role-based access, and public release review.
+Overinterpretation of hotspots. Spatial clusters may reflect testing or reporting patterns. Guardrails include denominator review, baseline comparison, and epidemiologic confirmation.</a:t>
             </a:r>
             <a:endParaRPr lang="en-US" dirty="0"/>
           </a:p>
@@ -880,10 +884,8 @@
           <a:p>
             <a:r>
               <a:rPr lang="en-US" dirty="0"/>
-              <a:t>Reflection Questions
-What location data are used, and how complete and accurate are they?
-Which geographic unit best matches the public health action?
-Could missing or poor-quality location data affect certain populations more than others?</a:t>
+              <a:t>Risks, Failure Modes, and Guardrails
+Stigmatizing communities. Maps can unintentionally label communities as problems. Guardrails include equity framing, community engagement, careful language, and focus on structural supports.</a:t>
             </a:r>
             <a:endParaRPr lang="en-US" dirty="0"/>
           </a:p>
@@ -971,9 +973,9 @@
           <a:p>
             <a:r>
               <a:rPr lang="en-US" dirty="0"/>
-              <a:t>Reflection Questions
-What privacy safeguards are needed for internal and public maps?
-How will community context be included before action is taken?</a:t>
+              <a:t>Application to AI-Supported Workflows
+Geospatial AI may support predictive analytics, emergency response, inspection prioritization, environmental monitoring, and service planning. Generative AI may summarize spatial patterns for leaders, but it must not overstate certainty or ignore limitations. RAG tools may retrieve local plans, maps, and protocols, while agentic workflows may propose outreach routes or inspection assignments that require human approval.
+The responsible application of geospatial AI requires explicit attention to privacy, geography, and equity. A spatial output should answer a public health question, support a feasible action, and include enough context for staff and communities to interpret it appropriately.</a:t>
             </a:r>
             <a:endParaRPr lang="en-US" dirty="0"/>
           </a:p>
@@ -1061,9 +1063,10 @@
           <a:p>
             <a:r>
               <a:rPr lang="en-US" dirty="0"/>
-              <a:t>Practical Exercise
-Create a geospatial AI readiness worksheet for one public health workflow. Include the public health question, location data sources, geocoding method, geographic unit, denominator, privacy safeguards, equity concerns, AI-supported task, human review process, and communication plan.
-The worksheet should identify at least one way the map could be misinterpreted and one safeguard that would reduce the risk of harm.</a:t>
+              <a:t>Reflection Questions
+What location data are used, and how complete and accurate are they?
+Which geographic unit best matches the public health action?
+Could missing or poor-quality location data affect certain populations more than others?</a:t>
             </a:r>
             <a:endParaRPr lang="en-US" dirty="0"/>
           </a:p>
@@ -1151,10 +1154,9 @@
           <a:p>
             <a:r>
               <a:rPr lang="en-US" dirty="0"/>
-              <a:t>Expected Artifact or Evidence
-Geospatial AI readiness worksheet
-Map interpretation and limitations memo
-Privacy and suppression review notes</a:t>
+              <a:t>Reflection Questions
+What privacy safeguards are needed for internal and public maps?
+How will community context be included before action is taken?</a:t>
             </a:r>
             <a:endParaRPr lang="en-US" dirty="0"/>
           </a:p>
@@ -1242,8 +1244,9 @@
           <a:p>
             <a:r>
               <a:rPr lang="en-US" dirty="0"/>
-              <a:t>Expected Artifact or Evidence
-Community context and action plan</a:t>
+              <a:t>Practical Exercise
+Create a geospatial AI readiness worksheet for one public health workflow. Include the public health question, location data sources, geocoding method, geographic unit, denominator, privacy safeguards, equity concerns, AI-supported task, human review process, and communication plan.
+The worksheet should identify at least one way the map could be misinterpreted and one safeguard that would reduce the risk of harm.</a:t>
             </a:r>
             <a:endParaRPr lang="en-US" dirty="0"/>
           </a:p>
@@ -1331,11 +1334,10 @@
           <a:p>
             <a:r>
               <a:rPr lang="en-US" dirty="0"/>
-              <a:t>Expected Assignment
+              <a:t>Expected Artifact or Evidence
 Geospatial AI readiness worksheet
 Map interpretation and limitations memo
-Privacy and suppression review notes
-Community context and action plan</a:t>
+Privacy and suppression review notes</a:t>
             </a:r>
             <a:endParaRPr lang="en-US" dirty="0"/>
           </a:p>
@@ -1423,12 +1425,8 @@
           <a:p>
             <a:r>
               <a:rPr lang="en-US" dirty="0"/>
-              <a:t>Knowledge Check
-1. What is geocoding?
-2. Why can maps create misleading impressions?
-3. What is the modifiable areal unit problem?
-4. Which safeguard is appropriate before publishing a small-area health map?
-5. What is strong completion evidence for this module?</a:t>
+              <a:t>Expected Artifact or Evidence
+Community context and action plan</a:t>
             </a:r>
             <a:endParaRPr lang="en-US" dirty="0"/>
           </a:p>
@@ -1608,11 +1606,11 @@
           <a:p>
             <a:r>
               <a:rPr lang="en-US" dirty="0"/>
-              <a:t>References and Resources
-CDC GIS and Public Health Resources: https://www.cdc.gov/gis/
-NIST Artificial Intelligence Risk Management Framework: https://www.nist.gov/itl/ai-risk-management-framework
-NIST Privacy Framework: https://www.nist.gov/privacy-framework
-CDC Public Health Data Strategy: https://www.cdc.gov/public-health-data-strategy/php/about/index.html</a:t>
+              <a:t>Expected Assignment
+Geospatial AI readiness worksheet
+Map interpretation and limitations memo
+Privacy and suppression review notes
+Community context and action plan</a:t>
             </a:r>
             <a:endParaRPr lang="en-US" dirty="0"/>
           </a:p>
@@ -1636,6 +1634,191 @@
             <a:fld id="{F7021451-1387-4CA6-816F-3879F97B5CBC}" type="slidenum">
               <a:rPr lang="en-US"/>
               <a:t>20</a:t>
+            </a:fld>
+            <a:endParaRPr lang="en-US"/>
+          </a:p>
+        </p:txBody>
+      </p:sp>
+    </p:spTree>
+    <p:extLst>
+      <p:ext uri="{BB962C8B-B14F-4D97-AF65-F5344CB8AC3E}">
+        <p14:creationId xmlns:p14="http://schemas.microsoft.com/office/powerpoint/2010/main" val="1024086991"/>
+      </p:ext>
+    </p:extLst>
+  </p:cSld>
+  <p:clrMapOvr>
+    <a:masterClrMapping/>
+  </p:clrMapOvr>
+</p:notes>
+</file>
+
+<file path=ppt/notesSlides/notesSlide21.xml><?xml version="1.0" encoding="utf-8"?>
+<p:notes xmlns:a="http://schemas.openxmlformats.org/drawingml/2006/main" xmlns:r="http://schemas.openxmlformats.org/officeDocument/2006/relationships" xmlns:p="http://schemas.openxmlformats.org/presentationml/2006/main">
+  <p:cSld>
+    <p:spTree>
+      <p:nvGrpSpPr>
+        <p:cNvPr id="1" name=""/>
+        <p:cNvGrpSpPr/>
+        <p:nvPr/>
+      </p:nvGrpSpPr>
+      <p:grpSpPr>
+        <a:xfrm>
+          <a:off x="0" y="0"/>
+          <a:ext cx="0" cy="0"/>
+          <a:chOff x="0" y="0"/>
+          <a:chExt cx="0" cy="0"/>
+        </a:xfrm>
+      </p:grpSpPr>
+      <p:sp>
+        <p:nvSpPr>
+          <p:cNvPr id="2" name="Slide Image Placeholder 1"/>
+          <p:cNvSpPr>
+            <a:spLocks noGrp="1" noRot="1" noChangeAspect="1"/>
+          </p:cNvSpPr>
+          <p:nvPr>
+            <p:ph type="sldImg"/>
+          </p:nvPr>
+        </p:nvSpPr>
+        <p:spPr/>
+      </p:sp>
+      <p:sp>
+        <p:nvSpPr>
+          <p:cNvPr id="3" name="Notes Placeholder 2"/>
+          <p:cNvSpPr>
+            <a:spLocks noGrp="1"/>
+          </p:cNvSpPr>
+          <p:nvPr>
+            <p:ph type="body" idx="1"/>
+          </p:nvPr>
+        </p:nvSpPr>
+        <p:spPr/>
+        <p:txBody>
+          <a:bodyPr/>
+          <a:lstStyle/>
+          <a:p>
+            <a:r>
+              <a:rPr lang="en-US" dirty="0"/>
+              <a:t>Knowledge Check
+1. What is geocoding?
+2. Why can maps create misleading impressions?
+3. What is the modifiable areal unit problem?
+4. Which safeguard is appropriate before publishing a small-area health map?
+5. What is strong completion evidence for this module?</a:t>
+            </a:r>
+            <a:endParaRPr lang="en-US" dirty="0"/>
+          </a:p>
+        </p:txBody>
+      </p:sp>
+      <p:sp>
+        <p:nvSpPr>
+          <p:cNvPr id="4" name="Slide Number Placeholder 3"/>
+          <p:cNvSpPr>
+            <a:spLocks noGrp="1"/>
+          </p:cNvSpPr>
+          <p:nvPr>
+            <p:ph type="sldNum" sz="quarter" idx="10"/>
+          </p:nvPr>
+        </p:nvSpPr>
+        <p:spPr/>
+        <p:txBody>
+          <a:bodyPr/>
+          <a:lstStyle/>
+          <a:p>
+            <a:fld id="{F7021451-1387-4CA6-816F-3879F97B5CBC}" type="slidenum">
+              <a:rPr lang="en-US"/>
+              <a:t>21</a:t>
+            </a:fld>
+            <a:endParaRPr lang="en-US"/>
+          </a:p>
+        </p:txBody>
+      </p:sp>
+    </p:spTree>
+    <p:extLst>
+      <p:ext uri="{BB962C8B-B14F-4D97-AF65-F5344CB8AC3E}">
+        <p14:creationId xmlns:p14="http://schemas.microsoft.com/office/powerpoint/2010/main" val="1024086991"/>
+      </p:ext>
+    </p:extLst>
+  </p:cSld>
+  <p:clrMapOvr>
+    <a:masterClrMapping/>
+  </p:clrMapOvr>
+</p:notes>
+</file>
+
+<file path=ppt/notesSlides/notesSlide22.xml><?xml version="1.0" encoding="utf-8"?>
+<p:notes xmlns:a="http://schemas.openxmlformats.org/drawingml/2006/main" xmlns:r="http://schemas.openxmlformats.org/officeDocument/2006/relationships" xmlns:p="http://schemas.openxmlformats.org/presentationml/2006/main">
+  <p:cSld>
+    <p:spTree>
+      <p:nvGrpSpPr>
+        <p:cNvPr id="1" name=""/>
+        <p:cNvGrpSpPr/>
+        <p:nvPr/>
+      </p:nvGrpSpPr>
+      <p:grpSpPr>
+        <a:xfrm>
+          <a:off x="0" y="0"/>
+          <a:ext cx="0" cy="0"/>
+          <a:chOff x="0" y="0"/>
+          <a:chExt cx="0" cy="0"/>
+        </a:xfrm>
+      </p:grpSpPr>
+      <p:sp>
+        <p:nvSpPr>
+          <p:cNvPr id="2" name="Slide Image Placeholder 1"/>
+          <p:cNvSpPr>
+            <a:spLocks noGrp="1" noRot="1" noChangeAspect="1"/>
+          </p:cNvSpPr>
+          <p:nvPr>
+            <p:ph type="sldImg"/>
+          </p:nvPr>
+        </p:nvSpPr>
+        <p:spPr/>
+      </p:sp>
+      <p:sp>
+        <p:nvSpPr>
+          <p:cNvPr id="3" name="Notes Placeholder 2"/>
+          <p:cNvSpPr>
+            <a:spLocks noGrp="1"/>
+          </p:cNvSpPr>
+          <p:nvPr>
+            <p:ph type="body" idx="1"/>
+          </p:nvPr>
+        </p:nvSpPr>
+        <p:spPr/>
+        <p:txBody>
+          <a:bodyPr/>
+          <a:lstStyle/>
+          <a:p>
+            <a:r>
+              <a:rPr lang="en-US" dirty="0"/>
+              <a:t>References and Resources
+CDC GIS and Public Health Resources: https://www.cdc.gov/gis/
+NIST Artificial Intelligence Risk Management Framework: https://www.nist.gov/itl/ai-risk-management-framework
+NIST Privacy Framework: https://www.nist.gov/privacy-framework
+CDC Public Health Data Strategy: https://www.cdc.gov/public-health-data-strategy/php/about/index.html</a:t>
+            </a:r>
+            <a:endParaRPr lang="en-US" dirty="0"/>
+          </a:p>
+        </p:txBody>
+      </p:sp>
+      <p:sp>
+        <p:nvSpPr>
+          <p:cNvPr id="4" name="Slide Number Placeholder 3"/>
+          <p:cNvSpPr>
+            <a:spLocks noGrp="1"/>
+          </p:cNvSpPr>
+          <p:nvPr>
+            <p:ph type="sldNum" sz="quarter" idx="10"/>
+          </p:nvPr>
+        </p:nvSpPr>
+        <p:spPr/>
+        <p:txBody>
+          <a:bodyPr/>
+          <a:lstStyle/>
+          <a:p>
+            <a:fld id="{F7021451-1387-4CA6-816F-3879F97B5CBC}" type="slidenum">
+              <a:rPr lang="en-US"/>
+              <a:t>22</a:t>
             </a:fld>
             <a:endParaRPr lang="en-US"/>
           </a:p>
@@ -1700,12 +1883,11 @@
           <a:p>
             <a:r>
               <a:rPr lang="en-US" dirty="0"/>
-              <a:t>Learning Objectives
-Define geospatial AI and spatial epidemiology in public health terms.
-Explain how geocoding, aggregation, spatial scale, and data quality affect AI-supported maps and analyses.
-Identify privacy and re-identification risks related to location data.
-Recognize spatial bias, modifiable areal unit problems, and ecological interpretation risks.
-Design guardrails for AI-supported spatial analysis, hotspot detection, service planning, or emergency response.</a:t>
+              <a:t>Related Playbook Plays
+Play 11: Build and Deploy AI Solutions - This lesson informs Play 11 by helping learners connect the lesson topic to build and deploy ai solutions work in the AI Playbook.
+Play 2: Readiness Assessment - This lesson informs Play 2 by helping learners connect the lesson topic to readiness assessment work in the AI Playbook sequence.
+Play 1: Vision &amp; Guardrails - This lesson informs Play 1 by helping learners connect the lesson topic to vision &amp; guardrails work in the AI Playbook sequence.
+Play 7: Prioritize Use Cases - This lesson informs Play 7 by helping learners connect the lesson topic to prioritize use cases work in the AI Playbook sequence.</a:t>
             </a:r>
             <a:endParaRPr lang="en-US" dirty="0"/>
           </a:p>
@@ -1793,8 +1975,13 @@
           <a:p>
             <a:r>
               <a:rPr lang="en-US" dirty="0"/>
-              <a:t>Learning Objectives
-Produce a geospatial AI readiness worksheet for a public health workflow.</a:t>
+              <a:t>Related Toolkit Resources
+Tool 3: Equity Impact Assessment Checklist (Checklist) - Use this tool to complete or strengthen the practical exercise for the module using fictional, de-identified, or generalized.
+Tool 4: AI Policy Landscape Scan (Worksheet) - Use AI Policy Landscape Scan to translate this lesson into a documented public health AI planning, governance, implementation,.
+Tool 5: AI Environmental and Resource Impact Review (Checklist) - Use AI Environmental and Resource Impact Review to translate this lesson into a documented public health AI planning,.
+Tool 6: Human-Centered AI Decision Rule Checklist (Checklist) - Use Human-Centered AI Decision Rule Checklist to translate this lesson into a documented public health AI planning, governance,.
+Tool 8: AI Project Charter (Planning) - Use AI Project Charter to translate this lesson into a documented public health AI planning, governance, implementation, or.
+Tool 9: Data Quality Assessment Checklist (Checklist) - Use this tool to complete or strengthen the practical exercise for the module using fictional, de-identified, or generalized.</a:t>
             </a:r>
             <a:endParaRPr lang="en-US" dirty="0"/>
           </a:p>
@@ -1882,10 +2069,12 @@
           <a:p>
             <a:r>
               <a:rPr lang="en-US" dirty="0"/>
-              <a:t>Module Overview
-Geospatial AI combines spatial data, geographic analysis, and AI methods to identify patterns across place. In public health, spatial analysis is already central to outbreak response, environmental health, emergency preparedness, community health assessment, service planning, and health equity work. AI can strengthen these activities when it helps detect clusters, estimate access barriers, classify imagery, prioritize field work, or synthesize spatial information for decision-makers.
-This module introduces the technical and governance issues that arise when AI uses location. Location data can be powerful, but it can also be sensitive. Even when names are removed, detailed geography can reveal identity, community characteristics, or sensitive health patterns. Public health staff must understand geocoding quality, aggregation, spatial bias, privacy, and the limits of maps.
-Learners will examine how geospatial AI can support public health while avoiding common mistakes, such as treating maps as neutral, ignoring missing addresses, overinterpreting small-area patterns, or using spatial proxies that reproduce inequity.</a:t>
+              <a:t>Learning Objectives
+Define geospatial AI and spatial epidemiology in public health terms.
+Explain how geocoding, aggregation, spatial scale, and data quality affect AI-supported maps and analyses.
+Identify privacy and re-identification risks related to location data.
+Recognize spatial bias, modifiable areal unit problems, and ecological interpretation risks.
+Design guardrails for AI-supported spatial analysis, hotspot detection, service planning, or emergency response.</a:t>
             </a:r>
             <a:endParaRPr lang="en-US" dirty="0"/>
           </a:p>
@@ -1973,10 +2162,8 @@
           <a:p>
             <a:r>
               <a:rPr lang="en-US" dirty="0"/>
-              <a:t>Why This Topic Matters for Public Health AI
-Geospatial AI matters because public health decisions are often place-based. Agencies decide where to conduct outreach, deploy mobile services, inspect facilities, respond to environmental hazards, monitor outbreaks, and communicate risks. AI-supported spatial tools can help analyze large volumes of geographic information and identify patterns that may not be visible in simple tables.
-However, maps can create a false sense of objectivity. A hotspot may reflect where data are collected, who has access to testing, which providers report electronically, or which addresses are easier to geocode. Areas with missing or poor-quality data may appear low risk when they are actually under-observed. Spatial AI therefore requires careful review of data completeness, spatial scale, and community context.
-Location data also raises privacy and trust concerns. Public health agencies have authority to collect and use sensitive information, but that authority should be matched with safeguards. When AI tools combine health data, address data, demographic data, mobility data, environmental data, or social vulnerability indicators, agencies must consider re-identification, stigmatization, public communication, and community impact.</a:t>
+              <a:t>Learning Objectives
+Produce a geospatial AI readiness worksheet for a public health workflow.</a:t>
             </a:r>
             <a:endParaRPr lang="en-US" dirty="0"/>
           </a:p>
@@ -2064,9 +2251,10 @@
           <a:p>
             <a:r>
               <a:rPr lang="en-US" dirty="0"/>
-              <a:t>Public Health Example
-A health department may use AI-supported geospatial analysis to identify areas where mobile vaccination clinics could improve access. The tool may combine immunization coverage, school locations, transportation routes, census variables, provider locations, and appointment availability. The output may recommend priority areas for outreach and clinic placement.
-This workflow can advance equity if it identifies access barriers and supports community partnership. It can cause harm if it labels neighborhoods as low-performing without context, uses outdated population denominators, ignores language access, or fails to engage local organizations. The geospatial analysis should be paired with community review, accessibility planning, and transparent explanation of limitations.</a:t>
+              <a:t>Module Overview
+Geospatial AI combines spatial data, geographic analysis, and AI methods to identify patterns across place. In public health, spatial analysis is already central to outbreak response, environmental health, emergency preparedness, community health assessment, service planning, and health equity work. AI can strengthen these activities when it helps detect clusters, estimate access barriers, classify imagery, prioritize field work, or synthesize spatial information for decision-makers.
+This module introduces the technical and governance issues that arise when AI uses location. Location data can be powerful, but it can also be sensitive. Even when names are removed, detailed geography can reveal identity, community characteristics, or sensitive health patterns. Public health staff must understand geocoding quality, aggregation, spatial bias, privacy, and the limits of maps.
+Learners will examine how geospatial AI can support public health while avoiding common mistakes, such as treating maps as neutral, ignoring missing addresses, overinterpreting small-area patterns, or using spatial proxies that reproduce inequity.</a:t>
             </a:r>
             <a:endParaRPr lang="en-US" dirty="0"/>
           </a:p>
@@ -2154,10 +2342,10 @@
           <a:p>
             <a:r>
               <a:rPr lang="en-US" dirty="0"/>
-              <a:t>Technical Deep Dive
-Geospatial AI begins with location data, and location data are rarely perfect. Addresses may be missing, misspelled, outdated, rural route-based, temporary, or unstable. People experiencing homelessness, migration, displacement, incarceration, or housing instability may be poorly represented by address-based analysis. Geocoding errors can shift records across boundaries and distort rates for small areas.
-Spatial scale shapes interpretation. County-level maps may hide neighborhood-level inequities. Census tract maps may reveal meaningful local variation but increase privacy risks. ZIP codes are convenient but were created for mail delivery, not public health analysis. Staff should choose geographic units based on the question, data quality, privacy requirements, and actionability.
-AI-supported hotspot detection requires baseline context. An apparent cluster may reflect higher testing volume, better reporting, a facility-specific outbreak, or a true increase in incidence. Algorithms can detect unusual patterns, but epidemiologists must assess plausibility, data quality, denominator stability, and reporting artifacts. Automated hotspot alerts should be treated as signals for review, not conclusions.</a:t>
+              <a:t>Why This Topic Matters for Public Health AI
+Geospatial AI matters because public health decisions are often place-based. Agencies decide where to conduct outreach, deploy mobile services, inspect facilities, respond to environmental hazards, monitor outbreaks, and communicate risks. AI-supported spatial tools can help analyze large volumes of geographic information and identify patterns that may not be visible in simple tables.
+However, maps can create a false sense of objectivity. A hotspot may reflect where data are collected, who has access to testing, which providers report electronically, or which addresses are easier to geocode. Areas with missing or poor-quality data may appear low risk when they are actually under-observed. Spatial AI therefore requires careful review of data completeness, spatial scale, and community context.
+Location data also raises privacy and trust concerns. Public health agencies have authority to collect and use sensitive information, but that authority should be matched with safeguards. When AI tools combine health data, address data, demographic data, mobility data, environmental data, or social vulnerability indicators, agencies must consider re-identification, stigmatization, public communication, and community impact.</a:t>
             </a:r>
             <a:endParaRPr lang="en-US" dirty="0"/>
           </a:p>
@@ -2245,9 +2433,9 @@
           <a:p>
             <a:r>
               <a:rPr lang="en-US" dirty="0"/>
-              <a:t>Technical Deep Dive
-Geospatial models may use spatial proxies for social conditions. Social vulnerability, deprivation, rurality, housing burden, transportation access, and environmental exposure indicators can improve public health planning. They can also be misused if they stigmatize communities or support restrictive decisions. Agencies should use these indicators to guide supportive action and resource allocation, not blame.
-Privacy protection should be planned before analysis. Techniques include aggregation, suppression, geomasking, minimum cell-size rules, role-based access, public/private map separation, and review of small-area outputs before publication. For internal AI tools, access controls and audit logs should apply to spatial data just as they do to clinical or case data.</a:t>
+              <a:t>Public Health Example
+A health department may use AI-supported geospatial analysis to identify areas where mobile vaccination clinics could improve access. The tool may combine immunization coverage, school locations, transportation routes, census variables, provider locations, and appointment availability. The output may recommend priority areas for outreach and clinic placement.
+This workflow can advance equity if it identifies access barriers and supports community partnership. It can cause harm if it labels neighborhoods as low-performing without context, uses outdated population denominators, ignores language access, or fails to engage local organizations. The geospatial analysis should be paired with community review, accessibility planning, and transparent explanation of limitations.</a:t>
             </a:r>
             <a:endParaRPr lang="en-US" dirty="0"/>
           </a:p>
@@ -2870,7 +3058,32 @@
       </p:sp>
       <p:sp>
         <p:nvSpPr>
-          <p:cNvPr id="3" name="Text 1"/>
+          <p:cNvPr id="3" name="Shape 1"/>
+          <p:cNvSpPr/>
+          <p:nvPr/>
+        </p:nvSpPr>
+        <p:spPr>
+          <a:xfrm>
+            <a:off x="0" y="164592"/>
+            <a:ext cx="146304" cy="6693408"/>
+          </a:xfrm>
+          <a:prstGeom prst="rect">
+            <a:avLst/>
+          </a:prstGeom>
+          <a:solidFill>
+            <a:srgbClr val="2F8A28"/>
+          </a:solidFill>
+          <a:ln w="12700">
+            <a:solidFill>
+              <a:srgbClr val="2F8A28"/>
+            </a:solidFill>
+            <a:prstDash val="solid"/>
+          </a:ln>
+        </p:spPr>
+      </p:sp>
+      <p:sp>
+        <p:nvSpPr>
+          <p:cNvPr id="4" name="Text 2"/>
           <p:cNvSpPr/>
           <p:nvPr/>
         </p:nvSpPr>
@@ -2909,7 +3122,7 @@
       </p:sp>
       <p:sp>
         <p:nvSpPr>
-          <p:cNvPr id="4" name="Text 2"/>
+          <p:cNvPr id="5" name="Text 3"/>
           <p:cNvSpPr/>
           <p:nvPr/>
         </p:nvSpPr>
@@ -2948,7 +3161,7 @@
       </p:sp>
       <p:sp>
         <p:nvSpPr>
-          <p:cNvPr id="5" name="Text 3"/>
+          <p:cNvPr id="6" name="Text 4"/>
           <p:cNvSpPr/>
           <p:nvPr/>
         </p:nvSpPr>
@@ -2987,13 +3200,77 @@
       </p:sp>
       <p:sp>
         <p:nvSpPr>
-          <p:cNvPr id="6" name="Text 4"/>
+          <p:cNvPr id="7" name="Shape 5"/>
           <p:cNvSpPr/>
           <p:nvPr/>
         </p:nvSpPr>
         <p:spPr>
           <a:xfrm>
             <a:off x="640080" y="658368"/>
+            <a:ext cx="420624" cy="420624"/>
+          </a:xfrm>
+          <a:prstGeom prst="ellipse">
+            <a:avLst/>
+          </a:prstGeom>
+          <a:solidFill>
+            <a:srgbClr val="0068B7"/>
+          </a:solidFill>
+          <a:ln w="12700">
+            <a:solidFill>
+              <a:srgbClr val="0068B7"/>
+            </a:solidFill>
+            <a:prstDash val="solid"/>
+          </a:ln>
+        </p:spPr>
+      </p:sp>
+      <p:sp>
+        <p:nvSpPr>
+          <p:cNvPr id="8" name="Text 6"/>
+          <p:cNvSpPr/>
+          <p:nvPr/>
+        </p:nvSpPr>
+        <p:spPr>
+          <a:xfrm>
+            <a:off x="640080" y="731520"/>
+            <a:ext cx="420624" cy="164592"/>
+          </a:xfrm>
+          <a:prstGeom prst="rect">
+            <a:avLst/>
+          </a:prstGeom>
+          <a:noFill/>
+          <a:ln/>
+        </p:spPr>
+        <p:txBody>
+          <a:bodyPr wrap="square" lIns="0" tIns="0" rIns="0" bIns="0" rtlCol="0" anchor="ctr"/>
+          <a:lstStyle/>
+          <a:p>
+            <a:pPr algn="ctr" indent="0" marL="0">
+              <a:buNone/>
+            </a:pPr>
+            <a:r>
+              <a:rPr lang="en-US" sz="1100" b="1" dirty="0">
+                <a:solidFill>
+                  <a:srgbClr val="FFFFFF"/>
+                </a:solidFill>
+                <a:latin typeface="Aptos" pitchFamily="34" charset="0"/>
+                <a:ea typeface="Aptos" pitchFamily="34" charset="-122"/>
+                <a:cs typeface="Aptos" pitchFamily="34" charset="-120"/>
+              </a:rPr>
+              <a:t>5</a:t>
+            </a:r>
+            <a:endParaRPr lang="en-US" sz="1100" dirty="0"/>
+          </a:p>
+        </p:txBody>
+      </p:sp>
+      <p:sp>
+        <p:nvSpPr>
+          <p:cNvPr id="9" name="Text 7"/>
+          <p:cNvSpPr/>
+          <p:nvPr/>
+        </p:nvSpPr>
+        <p:spPr>
+          <a:xfrm>
+            <a:off x="640080" y="621792"/>
             <a:ext cx="10881360" cy="566928"/>
           </a:xfrm>
           <a:prstGeom prst="rect">
@@ -3020,7 +3297,7 @@
                 <a:ea typeface="Aptos Display" pitchFamily="34" charset="-122"/>
                 <a:cs typeface="Aptos Display" pitchFamily="34" charset="-120"/>
               </a:rPr>
-              <a:t>Risks, Failure Modes, and Guardrails</a:t>
+              <a:t>Technical Deep Dive</a:t>
             </a:r>
             <a:endParaRPr lang="en-US" sz="2700" dirty="0"/>
           </a:p>
@@ -3028,32 +3305,178 @@
       </p:sp>
       <p:sp>
         <p:nvSpPr>
-          <p:cNvPr id="7" name="Text 5"/>
-          <p:cNvSpPr/>
-          <p:nvPr/>
-        </p:nvSpPr>
-        <p:spPr>
-          <a:xfrm>
-            <a:off x="822960" y="1325880"/>
-            <a:ext cx="10378440" cy="4800600"/>
-          </a:xfrm>
-          <a:prstGeom prst="rect">
-            <a:avLst/>
-          </a:prstGeom>
-          <a:noFill/>
-          <a:ln/>
-        </p:spPr>
-        <p:txBody>
-          <a:bodyPr wrap="square" lIns="1016" tIns="1016" rIns="1016" bIns="1016" rtlCol="0" anchor="t">
+          <p:cNvPr id="10" name="Text 8"/>
+          <p:cNvSpPr/>
+          <p:nvPr/>
+        </p:nvSpPr>
+        <p:spPr>
+          <a:xfrm>
+            <a:off x="868680" y="1417320"/>
+            <a:ext cx="6675120" cy="4434840"/>
+          </a:xfrm>
+          <a:prstGeom prst="rect">
+            <a:avLst/>
+          </a:prstGeom>
+          <a:noFill/>
+          <a:ln/>
+        </p:spPr>
+        <p:txBody>
+          <a:bodyPr wrap="square" lIns="635" tIns="635" rIns="635" bIns="635" rtlCol="0" anchor="t">
             <a:normAutofit/>
           </a:bodyPr>
           <a:lstStyle/>
           <a:p>
+            <a:r>
+              <a:rPr lang="en-US" sz="1700" dirty="0">
+                <a:solidFill>
+                  <a:srgbClr val="17364A"/>
+                </a:solidFill>
+                <a:latin typeface="Aptos" pitchFamily="34" charset="0"/>
+                <a:ea typeface="Aptos" pitchFamily="34" charset="-122"/>
+                <a:cs typeface="Aptos" pitchFamily="34" charset="-120"/>
+              </a:rPr>
+              <a:t>Geospatial AI begins with location data, and location data are rarely perfect.</a:t>
+            </a:r>
+            <a:endParaRPr lang="en-US" sz="1700" dirty="0"/>
+          </a:p>
+          <a:p>
+            <a:r>
+              <a:rPr lang="en-US" sz="1700" dirty="0">
+                <a:solidFill>
+                  <a:srgbClr val="17364A"/>
+                </a:solidFill>
+                <a:latin typeface="Aptos" pitchFamily="34" charset="0"/>
+                <a:ea typeface="Aptos" pitchFamily="34" charset="-122"/>
+                <a:cs typeface="Aptos" pitchFamily="34" charset="-120"/>
+              </a:rPr>
+              <a:t>Addresses may be missing, misspelled, outdated, rural route-based, temporary, or unstable.</a:t>
+            </a:r>
+            <a:endParaRPr lang="en-US" sz="1700" dirty="0"/>
+          </a:p>
+          <a:p>
+            <a:r>
+              <a:rPr lang="en-US" sz="1700" dirty="0">
+                <a:solidFill>
+                  <a:srgbClr val="17364A"/>
+                </a:solidFill>
+                <a:latin typeface="Aptos" pitchFamily="34" charset="0"/>
+                <a:ea typeface="Aptos" pitchFamily="34" charset="-122"/>
+                <a:cs typeface="Aptos" pitchFamily="34" charset="-120"/>
+              </a:rPr>
+              <a:t>People experiencing homelessness, migration, displacement, incarceration, or housing instability may be poorly represented.</a:t>
+            </a:r>
+            <a:endParaRPr lang="en-US" sz="1700" dirty="0"/>
+          </a:p>
+          <a:p>
+            <a:r>
+              <a:rPr lang="en-US" sz="1700" dirty="0">
+                <a:solidFill>
+                  <a:srgbClr val="17364A"/>
+                </a:solidFill>
+                <a:latin typeface="Aptos" pitchFamily="34" charset="0"/>
+                <a:ea typeface="Aptos" pitchFamily="34" charset="-122"/>
+                <a:cs typeface="Aptos" pitchFamily="34" charset="-120"/>
+              </a:rPr>
+              <a:t>Geocoding errors can shift records across boundaries and distort rates for small areas.</a:t>
+            </a:r>
+            <a:endParaRPr lang="en-US" sz="1700" dirty="0"/>
+          </a:p>
+        </p:txBody>
+      </p:sp>
+      <p:sp>
+        <p:nvSpPr>
+          <p:cNvPr id="11" name="Shape 9"/>
+          <p:cNvSpPr/>
+          <p:nvPr/>
+        </p:nvSpPr>
+        <p:spPr>
+          <a:xfrm>
+            <a:off x="7909560" y="1417320"/>
+            <a:ext cx="3154680" cy="1828800"/>
+          </a:xfrm>
+          <a:prstGeom prst="roundRect">
+            <a:avLst>
+              <a:gd name="adj" fmla="val 6000"/>
+            </a:avLst>
+          </a:prstGeom>
+          <a:solidFill>
+            <a:srgbClr val="EEF8ED"/>
+          </a:solidFill>
+          <a:ln w="12700">
+            <a:solidFill>
+              <a:srgbClr val="B9D7E6"/>
+            </a:solidFill>
+            <a:prstDash val="solid"/>
+          </a:ln>
+        </p:spPr>
+      </p:sp>
+      <p:sp>
+        <p:nvSpPr>
+          <p:cNvPr id="12" name="Text 10"/>
+          <p:cNvSpPr/>
+          <p:nvPr/>
+        </p:nvSpPr>
+        <p:spPr>
+          <a:xfrm>
+            <a:off x="8074152" y="1563624"/>
+            <a:ext cx="2825496" cy="201168"/>
+          </a:xfrm>
+          <a:prstGeom prst="rect">
+            <a:avLst/>
+          </a:prstGeom>
+          <a:noFill/>
+          <a:ln/>
+        </p:spPr>
+        <p:txBody>
+          <a:bodyPr wrap="square" lIns="0" tIns="0" rIns="0" bIns="0" rtlCol="0" anchor="ctr"/>
+          <a:lstStyle/>
+          <a:p>
             <a:pPr indent="0" marL="0">
               <a:buNone/>
             </a:pPr>
             <a:r>
-              <a:rPr lang="en-US" sz="1420" dirty="0">
+              <a:rPr lang="en-US" sz="950" b="1" dirty="0">
+                <a:solidFill>
+                  <a:srgbClr val="0068B7"/>
+                </a:solidFill>
+                <a:latin typeface="Aptos" pitchFamily="34" charset="0"/>
+                <a:ea typeface="Aptos" pitchFamily="34" charset="-122"/>
+                <a:cs typeface="Aptos" pitchFamily="34" charset="-120"/>
+              </a:rPr>
+              <a:t>Key idea</a:t>
+            </a:r>
+            <a:endParaRPr lang="en-US" sz="950" dirty="0"/>
+          </a:p>
+        </p:txBody>
+      </p:sp>
+      <p:sp>
+        <p:nvSpPr>
+          <p:cNvPr id="13" name="Text 11"/>
+          <p:cNvSpPr/>
+          <p:nvPr/>
+        </p:nvSpPr>
+        <p:spPr>
+          <a:xfrm>
+            <a:off x="8074152" y="1856232"/>
+            <a:ext cx="2825496" cy="1261872"/>
+          </a:xfrm>
+          <a:prstGeom prst="rect">
+            <a:avLst/>
+          </a:prstGeom>
+          <a:noFill/>
+          <a:ln/>
+        </p:spPr>
+        <p:txBody>
+          <a:bodyPr wrap="square" lIns="0" tIns="0" rIns="0" bIns="0" rtlCol="0" anchor="t">
+            <a:normAutofit/>
+          </a:bodyPr>
+          <a:lstStyle/>
+          <a:p>
+            <a:pPr indent="0" marL="0">
+              <a:buNone/>
+            </a:pPr>
+            <a:r>
+              <a:rPr lang="en-US" sz="1250" dirty="0">
                 <a:solidFill>
                   <a:srgbClr val="17364A"/>
                 </a:solidFill>
@@ -3061,9 +3484,116 @@
                 <a:ea typeface="Aptos" pitchFamily="34" charset="-122"/>
                 <a:cs typeface="Aptos" pitchFamily="34" charset="-120"/>
               </a:rPr>
-              <a:t>Geocoding bias. Some populations and locations are harder to geocode accurately. Guardrails include geocoding quality checks, manual review for unmatched records, and documentation of missingness. Small-area privacy risk. Detailed maps can reveal sensitive patterns or identities. Guardrails include aggregation, suppression, role-based access, and public release review. Overinterpretation of hotspots. Spatial clusters may reflect testing or reporting patterns. Guardrails include denominator review, baseline comparison, and epidemiologic confirmation.</a:t>
-            </a:r>
-            <a:endParaRPr lang="en-US" sz="1420" dirty="0"/>
+              <a:t>Geospatial AI begins with location data, and location data are rarely perfect.</a:t>
+            </a:r>
+            <a:endParaRPr lang="en-US" sz="1250" dirty="0"/>
+          </a:p>
+        </p:txBody>
+      </p:sp>
+      <p:sp>
+        <p:nvSpPr>
+          <p:cNvPr id="14" name="Shape 12"/>
+          <p:cNvSpPr/>
+          <p:nvPr/>
+        </p:nvSpPr>
+        <p:spPr>
+          <a:xfrm>
+            <a:off x="7909560" y="3520440"/>
+            <a:ext cx="3154680" cy="1737360"/>
+          </a:xfrm>
+          <a:prstGeom prst="roundRect">
+            <a:avLst>
+              <a:gd name="adj" fmla="val 6316"/>
+            </a:avLst>
+          </a:prstGeom>
+          <a:solidFill>
+            <a:srgbClr val="EAF6F8"/>
+          </a:solidFill>
+          <a:ln w="12700">
+            <a:solidFill>
+              <a:srgbClr val="B9D7E6"/>
+            </a:solidFill>
+            <a:prstDash val="solid"/>
+          </a:ln>
+        </p:spPr>
+      </p:sp>
+      <p:sp>
+        <p:nvSpPr>
+          <p:cNvPr id="15" name="Text 13"/>
+          <p:cNvSpPr/>
+          <p:nvPr/>
+        </p:nvSpPr>
+        <p:spPr>
+          <a:xfrm>
+            <a:off x="8074152" y="3666744"/>
+            <a:ext cx="2825496" cy="201168"/>
+          </a:xfrm>
+          <a:prstGeom prst="rect">
+            <a:avLst/>
+          </a:prstGeom>
+          <a:noFill/>
+          <a:ln/>
+        </p:spPr>
+        <p:txBody>
+          <a:bodyPr wrap="square" lIns="0" tIns="0" rIns="0" bIns="0" rtlCol="0" anchor="ctr"/>
+          <a:lstStyle/>
+          <a:p>
+            <a:pPr indent="0" marL="0">
+              <a:buNone/>
+            </a:pPr>
+            <a:r>
+              <a:rPr lang="en-US" sz="950" b="1" dirty="0">
+                <a:solidFill>
+                  <a:srgbClr val="0068B7"/>
+                </a:solidFill>
+                <a:latin typeface="Aptos" pitchFamily="34" charset="0"/>
+                <a:ea typeface="Aptos" pitchFamily="34" charset="-122"/>
+                <a:cs typeface="Aptos" pitchFamily="34" charset="-120"/>
+              </a:rPr>
+              <a:t>Use this for</a:t>
+            </a:r>
+            <a:endParaRPr lang="en-US" sz="950" dirty="0"/>
+          </a:p>
+        </p:txBody>
+      </p:sp>
+      <p:sp>
+        <p:nvSpPr>
+          <p:cNvPr id="16" name="Text 14"/>
+          <p:cNvSpPr/>
+          <p:nvPr/>
+        </p:nvSpPr>
+        <p:spPr>
+          <a:xfrm>
+            <a:off x="8074152" y="3959352"/>
+            <a:ext cx="2825496" cy="1170432"/>
+          </a:xfrm>
+          <a:prstGeom prst="rect">
+            <a:avLst/>
+          </a:prstGeom>
+          <a:noFill/>
+          <a:ln/>
+        </p:spPr>
+        <p:txBody>
+          <a:bodyPr wrap="square" lIns="0" tIns="0" rIns="0" bIns="0" rtlCol="0" anchor="t">
+            <a:normAutofit/>
+          </a:bodyPr>
+          <a:lstStyle/>
+          <a:p>
+            <a:pPr indent="0" marL="0">
+              <a:buNone/>
+            </a:pPr>
+            <a:r>
+              <a:rPr lang="en-US" sz="1250" dirty="0">
+                <a:solidFill>
+                  <a:srgbClr val="17364A"/>
+                </a:solidFill>
+                <a:latin typeface="Aptos" pitchFamily="34" charset="0"/>
+                <a:ea typeface="Aptos" pitchFamily="34" charset="-122"/>
+                <a:cs typeface="Aptos" pitchFamily="34" charset="-120"/>
+              </a:rPr>
+              <a:t>Connect the concept to public health decisions, safeguards, documentation, or implementation work.</a:t>
+            </a:r>
+            <a:endParaRPr lang="en-US" sz="1250" dirty="0"/>
           </a:p>
         </p:txBody>
       </p:sp>
@@ -3126,7 +3656,32 @@
       </p:sp>
       <p:sp>
         <p:nvSpPr>
-          <p:cNvPr id="3" name="Text 1"/>
+          <p:cNvPr id="3" name="Shape 1"/>
+          <p:cNvSpPr/>
+          <p:nvPr/>
+        </p:nvSpPr>
+        <p:spPr>
+          <a:xfrm>
+            <a:off x="0" y="164592"/>
+            <a:ext cx="146304" cy="6693408"/>
+          </a:xfrm>
+          <a:prstGeom prst="rect">
+            <a:avLst/>
+          </a:prstGeom>
+          <a:solidFill>
+            <a:srgbClr val="2F8A28"/>
+          </a:solidFill>
+          <a:ln w="12700">
+            <a:solidFill>
+              <a:srgbClr val="2F8A28"/>
+            </a:solidFill>
+            <a:prstDash val="solid"/>
+          </a:ln>
+        </p:spPr>
+      </p:sp>
+      <p:sp>
+        <p:nvSpPr>
+          <p:cNvPr id="4" name="Text 2"/>
           <p:cNvSpPr/>
           <p:nvPr/>
         </p:nvSpPr>
@@ -3165,7 +3720,7 @@
       </p:sp>
       <p:sp>
         <p:nvSpPr>
-          <p:cNvPr id="4" name="Text 2"/>
+          <p:cNvPr id="5" name="Text 3"/>
           <p:cNvSpPr/>
           <p:nvPr/>
         </p:nvSpPr>
@@ -3204,7 +3759,7 @@
       </p:sp>
       <p:sp>
         <p:nvSpPr>
-          <p:cNvPr id="5" name="Text 3"/>
+          <p:cNvPr id="6" name="Text 4"/>
           <p:cNvSpPr/>
           <p:nvPr/>
         </p:nvSpPr>
@@ -3243,7 +3798,7 @@
       </p:sp>
       <p:sp>
         <p:nvSpPr>
-          <p:cNvPr id="6" name="Text 4"/>
+          <p:cNvPr id="7" name="Text 5"/>
           <p:cNvSpPr/>
           <p:nvPr/>
         </p:nvSpPr>
@@ -3276,7 +3831,7 @@
                 <a:ea typeface="Aptos Display" pitchFamily="34" charset="-122"/>
                 <a:cs typeface="Aptos Display" pitchFamily="34" charset="-120"/>
               </a:rPr>
-              <a:t>Risks, Failure Modes, and Guardrails Continued</a:t>
+              <a:t>Technical Deep Dive Continued</a:t>
             </a:r>
             <a:endParaRPr lang="en-US" sz="2700" dirty="0"/>
           </a:p>
@@ -3284,32 +3839,178 @@
       </p:sp>
       <p:sp>
         <p:nvSpPr>
-          <p:cNvPr id="7" name="Text 5"/>
-          <p:cNvSpPr/>
-          <p:nvPr/>
-        </p:nvSpPr>
-        <p:spPr>
-          <a:xfrm>
-            <a:off x="822960" y="1325880"/>
-            <a:ext cx="10378440" cy="4800600"/>
-          </a:xfrm>
-          <a:prstGeom prst="rect">
-            <a:avLst/>
-          </a:prstGeom>
-          <a:noFill/>
-          <a:ln/>
-        </p:spPr>
-        <p:txBody>
-          <a:bodyPr wrap="square" lIns="1016" tIns="1016" rIns="1016" bIns="1016" rtlCol="0" anchor="t">
+          <p:cNvPr id="8" name="Text 6"/>
+          <p:cNvSpPr/>
+          <p:nvPr/>
+        </p:nvSpPr>
+        <p:spPr>
+          <a:xfrm>
+            <a:off x="868680" y="1417320"/>
+            <a:ext cx="6675120" cy="4434840"/>
+          </a:xfrm>
+          <a:prstGeom prst="rect">
+            <a:avLst/>
+          </a:prstGeom>
+          <a:noFill/>
+          <a:ln/>
+        </p:spPr>
+        <p:txBody>
+          <a:bodyPr wrap="square" lIns="635" tIns="635" rIns="635" bIns="635" rtlCol="0" anchor="t">
             <a:normAutofit/>
           </a:bodyPr>
           <a:lstStyle/>
           <a:p>
+            <a:r>
+              <a:rPr lang="en-US" sz="1700" dirty="0">
+                <a:solidFill>
+                  <a:srgbClr val="17364A"/>
+                </a:solidFill>
+                <a:latin typeface="Aptos" pitchFamily="34" charset="0"/>
+                <a:ea typeface="Aptos" pitchFamily="34" charset="-122"/>
+                <a:cs typeface="Aptos" pitchFamily="34" charset="-120"/>
+              </a:rPr>
+              <a:t>Geospatial models may use spatial proxies for social conditions.</a:t>
+            </a:r>
+            <a:endParaRPr lang="en-US" sz="1700" dirty="0"/>
+          </a:p>
+          <a:p>
+            <a:r>
+              <a:rPr lang="en-US" sz="1700" dirty="0">
+                <a:solidFill>
+                  <a:srgbClr val="17364A"/>
+                </a:solidFill>
+                <a:latin typeface="Aptos" pitchFamily="34" charset="0"/>
+                <a:ea typeface="Aptos" pitchFamily="34" charset="-122"/>
+                <a:cs typeface="Aptos" pitchFamily="34" charset="-120"/>
+              </a:rPr>
+              <a:t>Social vulnerability, deprivation, rurality, housing burden, transportation access, and environmental exposure indicators.</a:t>
+            </a:r>
+            <a:endParaRPr lang="en-US" sz="1700" dirty="0"/>
+          </a:p>
+          <a:p>
+            <a:r>
+              <a:rPr lang="en-US" sz="1700" dirty="0">
+                <a:solidFill>
+                  <a:srgbClr val="17364A"/>
+                </a:solidFill>
+                <a:latin typeface="Aptos" pitchFamily="34" charset="0"/>
+                <a:ea typeface="Aptos" pitchFamily="34" charset="-122"/>
+                <a:cs typeface="Aptos" pitchFamily="34" charset="-120"/>
+              </a:rPr>
+              <a:t>They can also be misused if they stigmatize communities or support restrictive decisions.</a:t>
+            </a:r>
+            <a:endParaRPr lang="en-US" sz="1700" dirty="0"/>
+          </a:p>
+          <a:p>
+            <a:r>
+              <a:rPr lang="en-US" sz="1700" dirty="0">
+                <a:solidFill>
+                  <a:srgbClr val="17364A"/>
+                </a:solidFill>
+                <a:latin typeface="Aptos" pitchFamily="34" charset="0"/>
+                <a:ea typeface="Aptos" pitchFamily="34" charset="-122"/>
+                <a:cs typeface="Aptos" pitchFamily="34" charset="-120"/>
+              </a:rPr>
+              <a:t>Agencies should use these indicators to guide supportive action and resource allocation, not blame.</a:t>
+            </a:r>
+            <a:endParaRPr lang="en-US" sz="1700" dirty="0"/>
+          </a:p>
+        </p:txBody>
+      </p:sp>
+      <p:sp>
+        <p:nvSpPr>
+          <p:cNvPr id="9" name="Shape 7"/>
+          <p:cNvSpPr/>
+          <p:nvPr/>
+        </p:nvSpPr>
+        <p:spPr>
+          <a:xfrm>
+            <a:off x="7909560" y="1417320"/>
+            <a:ext cx="3154680" cy="1828800"/>
+          </a:xfrm>
+          <a:prstGeom prst="roundRect">
+            <a:avLst>
+              <a:gd name="adj" fmla="val 6000"/>
+            </a:avLst>
+          </a:prstGeom>
+          <a:solidFill>
+            <a:srgbClr val="EEF8ED"/>
+          </a:solidFill>
+          <a:ln w="12700">
+            <a:solidFill>
+              <a:srgbClr val="B9D7E6"/>
+            </a:solidFill>
+            <a:prstDash val="solid"/>
+          </a:ln>
+        </p:spPr>
+      </p:sp>
+      <p:sp>
+        <p:nvSpPr>
+          <p:cNvPr id="10" name="Text 8"/>
+          <p:cNvSpPr/>
+          <p:nvPr/>
+        </p:nvSpPr>
+        <p:spPr>
+          <a:xfrm>
+            <a:off x="8074152" y="1563624"/>
+            <a:ext cx="2825496" cy="201168"/>
+          </a:xfrm>
+          <a:prstGeom prst="rect">
+            <a:avLst/>
+          </a:prstGeom>
+          <a:noFill/>
+          <a:ln/>
+        </p:spPr>
+        <p:txBody>
+          <a:bodyPr wrap="square" lIns="0" tIns="0" rIns="0" bIns="0" rtlCol="0" anchor="ctr"/>
+          <a:lstStyle/>
+          <a:p>
             <a:pPr indent="0" marL="0">
               <a:buNone/>
             </a:pPr>
             <a:r>
-              <a:rPr lang="en-US" sz="1420" dirty="0">
+              <a:rPr lang="en-US" sz="950" b="1" dirty="0">
+                <a:solidFill>
+                  <a:srgbClr val="0068B7"/>
+                </a:solidFill>
+                <a:latin typeface="Aptos" pitchFamily="34" charset="0"/>
+                <a:ea typeface="Aptos" pitchFamily="34" charset="-122"/>
+                <a:cs typeface="Aptos" pitchFamily="34" charset="-120"/>
+              </a:rPr>
+              <a:t>Key idea</a:t>
+            </a:r>
+            <a:endParaRPr lang="en-US" sz="950" dirty="0"/>
+          </a:p>
+        </p:txBody>
+      </p:sp>
+      <p:sp>
+        <p:nvSpPr>
+          <p:cNvPr id="11" name="Text 9"/>
+          <p:cNvSpPr/>
+          <p:nvPr/>
+        </p:nvSpPr>
+        <p:spPr>
+          <a:xfrm>
+            <a:off x="8074152" y="1856232"/>
+            <a:ext cx="2825496" cy="1261872"/>
+          </a:xfrm>
+          <a:prstGeom prst="rect">
+            <a:avLst/>
+          </a:prstGeom>
+          <a:noFill/>
+          <a:ln/>
+        </p:spPr>
+        <p:txBody>
+          <a:bodyPr wrap="square" lIns="0" tIns="0" rIns="0" bIns="0" rtlCol="0" anchor="t">
+            <a:normAutofit/>
+          </a:bodyPr>
+          <a:lstStyle/>
+          <a:p>
+            <a:pPr indent="0" marL="0">
+              <a:buNone/>
+            </a:pPr>
+            <a:r>
+              <a:rPr lang="en-US" sz="1250" dirty="0">
                 <a:solidFill>
                   <a:srgbClr val="17364A"/>
                 </a:solidFill>
@@ -3317,9 +4018,116 @@
                 <a:ea typeface="Aptos" pitchFamily="34" charset="-122"/>
                 <a:cs typeface="Aptos" pitchFamily="34" charset="-120"/>
               </a:rPr>
-              <a:t>Stigmatizing communities. Maps can unintentionally label communities as problems. Guardrails include equity framing, community engagement, careful language, and focus on structural supports.</a:t>
-            </a:r>
-            <a:endParaRPr lang="en-US" sz="1420" dirty="0"/>
+              <a:t>Geospatial models may use spatial proxies for social conditions.</a:t>
+            </a:r>
+            <a:endParaRPr lang="en-US" sz="1250" dirty="0"/>
+          </a:p>
+        </p:txBody>
+      </p:sp>
+      <p:sp>
+        <p:nvSpPr>
+          <p:cNvPr id="12" name="Shape 10"/>
+          <p:cNvSpPr/>
+          <p:nvPr/>
+        </p:nvSpPr>
+        <p:spPr>
+          <a:xfrm>
+            <a:off x="7909560" y="3520440"/>
+            <a:ext cx="3154680" cy="1737360"/>
+          </a:xfrm>
+          <a:prstGeom prst="roundRect">
+            <a:avLst>
+              <a:gd name="adj" fmla="val 6316"/>
+            </a:avLst>
+          </a:prstGeom>
+          <a:solidFill>
+            <a:srgbClr val="EAF6F8"/>
+          </a:solidFill>
+          <a:ln w="12700">
+            <a:solidFill>
+              <a:srgbClr val="B9D7E6"/>
+            </a:solidFill>
+            <a:prstDash val="solid"/>
+          </a:ln>
+        </p:spPr>
+      </p:sp>
+      <p:sp>
+        <p:nvSpPr>
+          <p:cNvPr id="13" name="Text 11"/>
+          <p:cNvSpPr/>
+          <p:nvPr/>
+        </p:nvSpPr>
+        <p:spPr>
+          <a:xfrm>
+            <a:off x="8074152" y="3666744"/>
+            <a:ext cx="2825496" cy="201168"/>
+          </a:xfrm>
+          <a:prstGeom prst="rect">
+            <a:avLst/>
+          </a:prstGeom>
+          <a:noFill/>
+          <a:ln/>
+        </p:spPr>
+        <p:txBody>
+          <a:bodyPr wrap="square" lIns="0" tIns="0" rIns="0" bIns="0" rtlCol="0" anchor="ctr"/>
+          <a:lstStyle/>
+          <a:p>
+            <a:pPr indent="0" marL="0">
+              <a:buNone/>
+            </a:pPr>
+            <a:r>
+              <a:rPr lang="en-US" sz="950" b="1" dirty="0">
+                <a:solidFill>
+                  <a:srgbClr val="0068B7"/>
+                </a:solidFill>
+                <a:latin typeface="Aptos" pitchFamily="34" charset="0"/>
+                <a:ea typeface="Aptos" pitchFamily="34" charset="-122"/>
+                <a:cs typeface="Aptos" pitchFamily="34" charset="-120"/>
+              </a:rPr>
+              <a:t>Use this for</a:t>
+            </a:r>
+            <a:endParaRPr lang="en-US" sz="950" dirty="0"/>
+          </a:p>
+        </p:txBody>
+      </p:sp>
+      <p:sp>
+        <p:nvSpPr>
+          <p:cNvPr id="14" name="Text 12"/>
+          <p:cNvSpPr/>
+          <p:nvPr/>
+        </p:nvSpPr>
+        <p:spPr>
+          <a:xfrm>
+            <a:off x="8074152" y="3959352"/>
+            <a:ext cx="2825496" cy="1170432"/>
+          </a:xfrm>
+          <a:prstGeom prst="rect">
+            <a:avLst/>
+          </a:prstGeom>
+          <a:noFill/>
+          <a:ln/>
+        </p:spPr>
+        <p:txBody>
+          <a:bodyPr wrap="square" lIns="0" tIns="0" rIns="0" bIns="0" rtlCol="0" anchor="t">
+            <a:normAutofit/>
+          </a:bodyPr>
+          <a:lstStyle/>
+          <a:p>
+            <a:pPr indent="0" marL="0">
+              <a:buNone/>
+            </a:pPr>
+            <a:r>
+              <a:rPr lang="en-US" sz="1250" dirty="0">
+                <a:solidFill>
+                  <a:srgbClr val="17364A"/>
+                </a:solidFill>
+                <a:latin typeface="Aptos" pitchFamily="34" charset="0"/>
+                <a:ea typeface="Aptos" pitchFamily="34" charset="-122"/>
+                <a:cs typeface="Aptos" pitchFamily="34" charset="-120"/>
+              </a:rPr>
+              <a:t>Connect the concept to public health decisions, safeguards, documentation, or implementation work.</a:t>
+            </a:r>
+            <a:endParaRPr lang="en-US" sz="1250" dirty="0"/>
           </a:p>
         </p:txBody>
       </p:sp>
@@ -3382,7 +4190,32 @@
       </p:sp>
       <p:sp>
         <p:nvSpPr>
-          <p:cNvPr id="3" name="Text 1"/>
+          <p:cNvPr id="3" name="Shape 1"/>
+          <p:cNvSpPr/>
+          <p:nvPr/>
+        </p:nvSpPr>
+        <p:spPr>
+          <a:xfrm>
+            <a:off x="0" y="164592"/>
+            <a:ext cx="146304" cy="6693408"/>
+          </a:xfrm>
+          <a:prstGeom prst="rect">
+            <a:avLst/>
+          </a:prstGeom>
+          <a:solidFill>
+            <a:srgbClr val="2F8A28"/>
+          </a:solidFill>
+          <a:ln w="12700">
+            <a:solidFill>
+              <a:srgbClr val="2F8A28"/>
+            </a:solidFill>
+            <a:prstDash val="solid"/>
+          </a:ln>
+        </p:spPr>
+      </p:sp>
+      <p:sp>
+        <p:nvSpPr>
+          <p:cNvPr id="4" name="Text 2"/>
           <p:cNvSpPr/>
           <p:nvPr/>
         </p:nvSpPr>
@@ -3421,7 +4254,7 @@
       </p:sp>
       <p:sp>
         <p:nvSpPr>
-          <p:cNvPr id="4" name="Text 2"/>
+          <p:cNvPr id="5" name="Text 3"/>
           <p:cNvSpPr/>
           <p:nvPr/>
         </p:nvSpPr>
@@ -3460,7 +4293,7 @@
       </p:sp>
       <p:sp>
         <p:nvSpPr>
-          <p:cNvPr id="5" name="Text 3"/>
+          <p:cNvPr id="6" name="Text 4"/>
           <p:cNvSpPr/>
           <p:nvPr/>
         </p:nvSpPr>
@@ -3499,13 +4332,77 @@
       </p:sp>
       <p:sp>
         <p:nvSpPr>
-          <p:cNvPr id="6" name="Text 4"/>
+          <p:cNvPr id="7" name="Shape 5"/>
           <p:cNvSpPr/>
           <p:nvPr/>
         </p:nvSpPr>
         <p:spPr>
           <a:xfrm>
             <a:off x="640080" y="658368"/>
+            <a:ext cx="420624" cy="420624"/>
+          </a:xfrm>
+          <a:prstGeom prst="ellipse">
+            <a:avLst/>
+          </a:prstGeom>
+          <a:solidFill>
+            <a:srgbClr val="0068B7"/>
+          </a:solidFill>
+          <a:ln w="12700">
+            <a:solidFill>
+              <a:srgbClr val="0068B7"/>
+            </a:solidFill>
+            <a:prstDash val="solid"/>
+          </a:ln>
+        </p:spPr>
+      </p:sp>
+      <p:sp>
+        <p:nvSpPr>
+          <p:cNvPr id="8" name="Text 6"/>
+          <p:cNvSpPr/>
+          <p:nvPr/>
+        </p:nvSpPr>
+        <p:spPr>
+          <a:xfrm>
+            <a:off x="640080" y="731520"/>
+            <a:ext cx="420624" cy="164592"/>
+          </a:xfrm>
+          <a:prstGeom prst="rect">
+            <a:avLst/>
+          </a:prstGeom>
+          <a:noFill/>
+          <a:ln/>
+        </p:spPr>
+        <p:txBody>
+          <a:bodyPr wrap="square" lIns="0" tIns="0" rIns="0" bIns="0" rtlCol="0" anchor="ctr"/>
+          <a:lstStyle/>
+          <a:p>
+            <a:pPr algn="ctr" indent="0" marL="0">
+              <a:buNone/>
+            </a:pPr>
+            <a:r>
+              <a:rPr lang="en-US" sz="1100" b="1" dirty="0">
+                <a:solidFill>
+                  <a:srgbClr val="FFFFFF"/>
+                </a:solidFill>
+                <a:latin typeface="Aptos" pitchFamily="34" charset="0"/>
+                <a:ea typeface="Aptos" pitchFamily="34" charset="-122"/>
+                <a:cs typeface="Aptos" pitchFamily="34" charset="-120"/>
+              </a:rPr>
+              <a:t>6</a:t>
+            </a:r>
+            <a:endParaRPr lang="en-US" sz="1100" dirty="0"/>
+          </a:p>
+        </p:txBody>
+      </p:sp>
+      <p:sp>
+        <p:nvSpPr>
+          <p:cNvPr id="9" name="Text 7"/>
+          <p:cNvSpPr/>
+          <p:nvPr/>
+        </p:nvSpPr>
+        <p:spPr>
+          <a:xfrm>
+            <a:off x="640080" y="621792"/>
             <a:ext cx="10881360" cy="566928"/>
           </a:xfrm>
           <a:prstGeom prst="rect">
@@ -3532,7 +4429,7 @@
                 <a:ea typeface="Aptos Display" pitchFamily="34" charset="-122"/>
                 <a:cs typeface="Aptos Display" pitchFamily="34" charset="-120"/>
               </a:rPr>
-              <a:t>Application to AI-Supported Workflows</a:t>
+              <a:t>Risks, Failure Modes, and Guardrails</a:t>
             </a:r>
             <a:endParaRPr lang="en-US" sz="2700" dirty="0"/>
           </a:p>
@@ -3540,32 +4437,178 @@
       </p:sp>
       <p:sp>
         <p:nvSpPr>
-          <p:cNvPr id="7" name="Text 5"/>
-          <p:cNvSpPr/>
-          <p:nvPr/>
-        </p:nvSpPr>
-        <p:spPr>
-          <a:xfrm>
-            <a:off x="822960" y="1325880"/>
-            <a:ext cx="10378440" cy="4800600"/>
-          </a:xfrm>
-          <a:prstGeom prst="rect">
-            <a:avLst/>
-          </a:prstGeom>
-          <a:noFill/>
-          <a:ln/>
-        </p:spPr>
-        <p:txBody>
-          <a:bodyPr wrap="square" lIns="1016" tIns="1016" rIns="1016" bIns="1016" rtlCol="0" anchor="t">
+          <p:cNvPr id="10" name="Text 8"/>
+          <p:cNvSpPr/>
+          <p:nvPr/>
+        </p:nvSpPr>
+        <p:spPr>
+          <a:xfrm>
+            <a:off x="868680" y="1417320"/>
+            <a:ext cx="6675120" cy="4434840"/>
+          </a:xfrm>
+          <a:prstGeom prst="rect">
+            <a:avLst/>
+          </a:prstGeom>
+          <a:noFill/>
+          <a:ln/>
+        </p:spPr>
+        <p:txBody>
+          <a:bodyPr wrap="square" lIns="635" tIns="635" rIns="635" bIns="635" rtlCol="0" anchor="t">
             <a:normAutofit/>
           </a:bodyPr>
           <a:lstStyle/>
           <a:p>
+            <a:r>
+              <a:rPr lang="en-US" sz="1700" dirty="0">
+                <a:solidFill>
+                  <a:srgbClr val="17364A"/>
+                </a:solidFill>
+                <a:latin typeface="Aptos" pitchFamily="34" charset="0"/>
+                <a:ea typeface="Aptos" pitchFamily="34" charset="-122"/>
+                <a:cs typeface="Aptos" pitchFamily="34" charset="-120"/>
+              </a:rPr>
+              <a:t>Geocoding bias.</a:t>
+            </a:r>
+            <a:endParaRPr lang="en-US" sz="1700" dirty="0"/>
+          </a:p>
+          <a:p>
+            <a:r>
+              <a:rPr lang="en-US" sz="1700" dirty="0">
+                <a:solidFill>
+                  <a:srgbClr val="17364A"/>
+                </a:solidFill>
+                <a:latin typeface="Aptos" pitchFamily="34" charset="0"/>
+                <a:ea typeface="Aptos" pitchFamily="34" charset="-122"/>
+                <a:cs typeface="Aptos" pitchFamily="34" charset="-120"/>
+              </a:rPr>
+              <a:t>Some populations and locations are harder to geocode accurately.</a:t>
+            </a:r>
+            <a:endParaRPr lang="en-US" sz="1700" dirty="0"/>
+          </a:p>
+          <a:p>
+            <a:r>
+              <a:rPr lang="en-US" sz="1700" dirty="0">
+                <a:solidFill>
+                  <a:srgbClr val="17364A"/>
+                </a:solidFill>
+                <a:latin typeface="Aptos" pitchFamily="34" charset="0"/>
+                <a:ea typeface="Aptos" pitchFamily="34" charset="-122"/>
+                <a:cs typeface="Aptos" pitchFamily="34" charset="-120"/>
+              </a:rPr>
+              <a:t>Guardrails include geocoding quality checks, manual review for unmatched records, and documentation of missingness.</a:t>
+            </a:r>
+            <a:endParaRPr lang="en-US" sz="1700" dirty="0"/>
+          </a:p>
+          <a:p>
+            <a:r>
+              <a:rPr lang="en-US" sz="1700" dirty="0">
+                <a:solidFill>
+                  <a:srgbClr val="17364A"/>
+                </a:solidFill>
+                <a:latin typeface="Aptos" pitchFamily="34" charset="0"/>
+                <a:ea typeface="Aptos" pitchFamily="34" charset="-122"/>
+                <a:cs typeface="Aptos" pitchFamily="34" charset="-120"/>
+              </a:rPr>
+              <a:t>Small-area privacy risk.</a:t>
+            </a:r>
+            <a:endParaRPr lang="en-US" sz="1700" dirty="0"/>
+          </a:p>
+        </p:txBody>
+      </p:sp>
+      <p:sp>
+        <p:nvSpPr>
+          <p:cNvPr id="11" name="Shape 9"/>
+          <p:cNvSpPr/>
+          <p:nvPr/>
+        </p:nvSpPr>
+        <p:spPr>
+          <a:xfrm>
+            <a:off x="7909560" y="1417320"/>
+            <a:ext cx="3154680" cy="1828800"/>
+          </a:xfrm>
+          <a:prstGeom prst="roundRect">
+            <a:avLst>
+              <a:gd name="adj" fmla="val 6000"/>
+            </a:avLst>
+          </a:prstGeom>
+          <a:solidFill>
+            <a:srgbClr val="EEF8ED"/>
+          </a:solidFill>
+          <a:ln w="12700">
+            <a:solidFill>
+              <a:srgbClr val="B9D7E6"/>
+            </a:solidFill>
+            <a:prstDash val="solid"/>
+          </a:ln>
+        </p:spPr>
+      </p:sp>
+      <p:sp>
+        <p:nvSpPr>
+          <p:cNvPr id="12" name="Text 10"/>
+          <p:cNvSpPr/>
+          <p:nvPr/>
+        </p:nvSpPr>
+        <p:spPr>
+          <a:xfrm>
+            <a:off x="8074152" y="1563624"/>
+            <a:ext cx="2825496" cy="201168"/>
+          </a:xfrm>
+          <a:prstGeom prst="rect">
+            <a:avLst/>
+          </a:prstGeom>
+          <a:noFill/>
+          <a:ln/>
+        </p:spPr>
+        <p:txBody>
+          <a:bodyPr wrap="square" lIns="0" tIns="0" rIns="0" bIns="0" rtlCol="0" anchor="ctr"/>
+          <a:lstStyle/>
+          <a:p>
             <a:pPr indent="0" marL="0">
               <a:buNone/>
             </a:pPr>
             <a:r>
-              <a:rPr lang="en-US" sz="1420" dirty="0">
+              <a:rPr lang="en-US" sz="950" b="1" dirty="0">
+                <a:solidFill>
+                  <a:srgbClr val="0068B7"/>
+                </a:solidFill>
+                <a:latin typeface="Aptos" pitchFamily="34" charset="0"/>
+                <a:ea typeface="Aptos" pitchFamily="34" charset="-122"/>
+                <a:cs typeface="Aptos" pitchFamily="34" charset="-120"/>
+              </a:rPr>
+              <a:t>Key idea</a:t>
+            </a:r>
+            <a:endParaRPr lang="en-US" sz="950" dirty="0"/>
+          </a:p>
+        </p:txBody>
+      </p:sp>
+      <p:sp>
+        <p:nvSpPr>
+          <p:cNvPr id="13" name="Text 11"/>
+          <p:cNvSpPr/>
+          <p:nvPr/>
+        </p:nvSpPr>
+        <p:spPr>
+          <a:xfrm>
+            <a:off x="8074152" y="1856232"/>
+            <a:ext cx="2825496" cy="1261872"/>
+          </a:xfrm>
+          <a:prstGeom prst="rect">
+            <a:avLst/>
+          </a:prstGeom>
+          <a:noFill/>
+          <a:ln/>
+        </p:spPr>
+        <p:txBody>
+          <a:bodyPr wrap="square" lIns="0" tIns="0" rIns="0" bIns="0" rtlCol="0" anchor="t">
+            <a:normAutofit/>
+          </a:bodyPr>
+          <a:lstStyle/>
+          <a:p>
+            <a:pPr indent="0" marL="0">
+              <a:buNone/>
+            </a:pPr>
+            <a:r>
+              <a:rPr lang="en-US" sz="1250" dirty="0">
                 <a:solidFill>
                   <a:srgbClr val="17364A"/>
                 </a:solidFill>
@@ -3573,9 +4616,116 @@
                 <a:ea typeface="Aptos" pitchFamily="34" charset="-122"/>
                 <a:cs typeface="Aptos" pitchFamily="34" charset="-120"/>
               </a:rPr>
-              <a:t>Geospatial AI may support predictive analytics, emergency response, inspection prioritization, environmental monitoring, and service planning. Generative AI may summarize spatial patterns for leaders, but it must not overstate certainty or ignore limitations. RAG tools may retrieve local plans, maps, and protocols, while agentic workflows may propose outreach routes or inspection assignments that require human approval. The responsible application of geospatial AI requires explicit attention to privacy, geography, and equity. A spatial output should answer a public health question, support a feasible action, and include enough context for staff and communities to interpret it appropriately.</a:t>
-            </a:r>
-            <a:endParaRPr lang="en-US" sz="1420" dirty="0"/>
+              <a:t>Geocoding bias.</a:t>
+            </a:r>
+            <a:endParaRPr lang="en-US" sz="1250" dirty="0"/>
+          </a:p>
+        </p:txBody>
+      </p:sp>
+      <p:sp>
+        <p:nvSpPr>
+          <p:cNvPr id="14" name="Shape 12"/>
+          <p:cNvSpPr/>
+          <p:nvPr/>
+        </p:nvSpPr>
+        <p:spPr>
+          <a:xfrm>
+            <a:off x="7909560" y="3520440"/>
+            <a:ext cx="3154680" cy="1737360"/>
+          </a:xfrm>
+          <a:prstGeom prst="roundRect">
+            <a:avLst>
+              <a:gd name="adj" fmla="val 6316"/>
+            </a:avLst>
+          </a:prstGeom>
+          <a:solidFill>
+            <a:srgbClr val="EAF6F8"/>
+          </a:solidFill>
+          <a:ln w="12700">
+            <a:solidFill>
+              <a:srgbClr val="B9D7E6"/>
+            </a:solidFill>
+            <a:prstDash val="solid"/>
+          </a:ln>
+        </p:spPr>
+      </p:sp>
+      <p:sp>
+        <p:nvSpPr>
+          <p:cNvPr id="15" name="Text 13"/>
+          <p:cNvSpPr/>
+          <p:nvPr/>
+        </p:nvSpPr>
+        <p:spPr>
+          <a:xfrm>
+            <a:off x="8074152" y="3666744"/>
+            <a:ext cx="2825496" cy="201168"/>
+          </a:xfrm>
+          <a:prstGeom prst="rect">
+            <a:avLst/>
+          </a:prstGeom>
+          <a:noFill/>
+          <a:ln/>
+        </p:spPr>
+        <p:txBody>
+          <a:bodyPr wrap="square" lIns="0" tIns="0" rIns="0" bIns="0" rtlCol="0" anchor="ctr"/>
+          <a:lstStyle/>
+          <a:p>
+            <a:pPr indent="0" marL="0">
+              <a:buNone/>
+            </a:pPr>
+            <a:r>
+              <a:rPr lang="en-US" sz="950" b="1" dirty="0">
+                <a:solidFill>
+                  <a:srgbClr val="0068B7"/>
+                </a:solidFill>
+                <a:latin typeface="Aptos" pitchFamily="34" charset="0"/>
+                <a:ea typeface="Aptos" pitchFamily="34" charset="-122"/>
+                <a:cs typeface="Aptos" pitchFamily="34" charset="-120"/>
+              </a:rPr>
+              <a:t>Use this for</a:t>
+            </a:r>
+            <a:endParaRPr lang="en-US" sz="950" dirty="0"/>
+          </a:p>
+        </p:txBody>
+      </p:sp>
+      <p:sp>
+        <p:nvSpPr>
+          <p:cNvPr id="16" name="Text 14"/>
+          <p:cNvSpPr/>
+          <p:nvPr/>
+        </p:nvSpPr>
+        <p:spPr>
+          <a:xfrm>
+            <a:off x="8074152" y="3959352"/>
+            <a:ext cx="2825496" cy="1170432"/>
+          </a:xfrm>
+          <a:prstGeom prst="rect">
+            <a:avLst/>
+          </a:prstGeom>
+          <a:noFill/>
+          <a:ln/>
+        </p:spPr>
+        <p:txBody>
+          <a:bodyPr wrap="square" lIns="0" tIns="0" rIns="0" bIns="0" rtlCol="0" anchor="t">
+            <a:normAutofit/>
+          </a:bodyPr>
+          <a:lstStyle/>
+          <a:p>
+            <a:pPr indent="0" marL="0">
+              <a:buNone/>
+            </a:pPr>
+            <a:r>
+              <a:rPr lang="en-US" sz="1250" dirty="0">
+                <a:solidFill>
+                  <a:srgbClr val="17364A"/>
+                </a:solidFill>
+                <a:latin typeface="Aptos" pitchFamily="34" charset="0"/>
+                <a:ea typeface="Aptos" pitchFamily="34" charset="-122"/>
+                <a:cs typeface="Aptos" pitchFamily="34" charset="-120"/>
+              </a:rPr>
+              <a:t>Connect the concept to public health decisions, safeguards, documentation, or implementation work.</a:t>
+            </a:r>
+            <a:endParaRPr lang="en-US" sz="1250" dirty="0"/>
           </a:p>
         </p:txBody>
       </p:sp>
@@ -3638,7 +4788,32 @@
       </p:sp>
       <p:sp>
         <p:nvSpPr>
-          <p:cNvPr id="3" name="Text 1"/>
+          <p:cNvPr id="3" name="Shape 1"/>
+          <p:cNvSpPr/>
+          <p:nvPr/>
+        </p:nvSpPr>
+        <p:spPr>
+          <a:xfrm>
+            <a:off x="0" y="164592"/>
+            <a:ext cx="146304" cy="6693408"/>
+          </a:xfrm>
+          <a:prstGeom prst="rect">
+            <a:avLst/>
+          </a:prstGeom>
+          <a:solidFill>
+            <a:srgbClr val="2F8A28"/>
+          </a:solidFill>
+          <a:ln w="12700">
+            <a:solidFill>
+              <a:srgbClr val="2F8A28"/>
+            </a:solidFill>
+            <a:prstDash val="solid"/>
+          </a:ln>
+        </p:spPr>
+      </p:sp>
+      <p:sp>
+        <p:nvSpPr>
+          <p:cNvPr id="4" name="Text 2"/>
           <p:cNvSpPr/>
           <p:nvPr/>
         </p:nvSpPr>
@@ -3677,7 +4852,7 @@
       </p:sp>
       <p:sp>
         <p:nvSpPr>
-          <p:cNvPr id="4" name="Text 2"/>
+          <p:cNvPr id="5" name="Text 3"/>
           <p:cNvSpPr/>
           <p:nvPr/>
         </p:nvSpPr>
@@ -3716,7 +4891,7 @@
       </p:sp>
       <p:sp>
         <p:nvSpPr>
-          <p:cNvPr id="5" name="Text 3"/>
+          <p:cNvPr id="6" name="Text 4"/>
           <p:cNvSpPr/>
           <p:nvPr/>
         </p:nvSpPr>
@@ -3755,7 +4930,7 @@
       </p:sp>
       <p:sp>
         <p:nvSpPr>
-          <p:cNvPr id="6" name="Text 4"/>
+          <p:cNvPr id="7" name="Text 5"/>
           <p:cNvSpPr/>
           <p:nvPr/>
         </p:nvSpPr>
@@ -3788,7 +4963,7 @@
                 <a:ea typeface="Aptos Display" pitchFamily="34" charset="-122"/>
                 <a:cs typeface="Aptos Display" pitchFamily="34" charset="-120"/>
               </a:rPr>
-              <a:t>Reflection Questions</a:t>
+              <a:t>Risks, Failure Modes, and Guardrails Continued</a:t>
             </a:r>
             <a:endParaRPr lang="en-US" sz="2700" dirty="0"/>
           </a:p>
@@ -3796,32 +4971,164 @@
       </p:sp>
       <p:sp>
         <p:nvSpPr>
-          <p:cNvPr id="7" name="Text 5"/>
-          <p:cNvSpPr/>
-          <p:nvPr/>
-        </p:nvSpPr>
-        <p:spPr>
-          <a:xfrm>
-            <a:off x="822960" y="1325880"/>
-            <a:ext cx="10378440" cy="4800600"/>
-          </a:xfrm>
-          <a:prstGeom prst="rect">
-            <a:avLst/>
-          </a:prstGeom>
-          <a:noFill/>
-          <a:ln/>
-        </p:spPr>
-        <p:txBody>
-          <a:bodyPr wrap="square" lIns="1016" tIns="1016" rIns="1016" bIns="1016" rtlCol="0" anchor="t">
+          <p:cNvPr id="8" name="Text 6"/>
+          <p:cNvSpPr/>
+          <p:nvPr/>
+        </p:nvSpPr>
+        <p:spPr>
+          <a:xfrm>
+            <a:off x="868680" y="1417320"/>
+            <a:ext cx="6675120" cy="4434840"/>
+          </a:xfrm>
+          <a:prstGeom prst="rect">
+            <a:avLst/>
+          </a:prstGeom>
+          <a:noFill/>
+          <a:ln/>
+        </p:spPr>
+        <p:txBody>
+          <a:bodyPr wrap="square" lIns="635" tIns="635" rIns="635" bIns="635" rtlCol="0" anchor="t">
             <a:normAutofit/>
           </a:bodyPr>
           <a:lstStyle/>
           <a:p>
+            <a:r>
+              <a:rPr lang="en-US" sz="1700" dirty="0">
+                <a:solidFill>
+                  <a:srgbClr val="17364A"/>
+                </a:solidFill>
+                <a:latin typeface="Aptos" pitchFamily="34" charset="0"/>
+                <a:ea typeface="Aptos" pitchFamily="34" charset="-122"/>
+                <a:cs typeface="Aptos" pitchFamily="34" charset="-120"/>
+              </a:rPr>
+              <a:t>Stigmatizing communities.</a:t>
+            </a:r>
+            <a:endParaRPr lang="en-US" sz="1700" dirty="0"/>
+          </a:p>
+          <a:p>
+            <a:r>
+              <a:rPr lang="en-US" sz="1700" dirty="0">
+                <a:solidFill>
+                  <a:srgbClr val="17364A"/>
+                </a:solidFill>
+                <a:latin typeface="Aptos" pitchFamily="34" charset="0"/>
+                <a:ea typeface="Aptos" pitchFamily="34" charset="-122"/>
+                <a:cs typeface="Aptos" pitchFamily="34" charset="-120"/>
+              </a:rPr>
+              <a:t>Maps can unintentionally label communities as problems.</a:t>
+            </a:r>
+            <a:endParaRPr lang="en-US" sz="1700" dirty="0"/>
+          </a:p>
+          <a:p>
+            <a:r>
+              <a:rPr lang="en-US" sz="1700" dirty="0">
+                <a:solidFill>
+                  <a:srgbClr val="17364A"/>
+                </a:solidFill>
+                <a:latin typeface="Aptos" pitchFamily="34" charset="0"/>
+                <a:ea typeface="Aptos" pitchFamily="34" charset="-122"/>
+                <a:cs typeface="Aptos" pitchFamily="34" charset="-120"/>
+              </a:rPr>
+              <a:t>Guardrails include equity framing, community engagement, careful language, and focus on structural supports.</a:t>
+            </a:r>
+            <a:endParaRPr lang="en-US" sz="1700" dirty="0"/>
+          </a:p>
+        </p:txBody>
+      </p:sp>
+      <p:sp>
+        <p:nvSpPr>
+          <p:cNvPr id="9" name="Shape 7"/>
+          <p:cNvSpPr/>
+          <p:nvPr/>
+        </p:nvSpPr>
+        <p:spPr>
+          <a:xfrm>
+            <a:off x="7909560" y="1417320"/>
+            <a:ext cx="3154680" cy="1828800"/>
+          </a:xfrm>
+          <a:prstGeom prst="roundRect">
+            <a:avLst>
+              <a:gd name="adj" fmla="val 6000"/>
+            </a:avLst>
+          </a:prstGeom>
+          <a:solidFill>
+            <a:srgbClr val="EEF8ED"/>
+          </a:solidFill>
+          <a:ln w="12700">
+            <a:solidFill>
+              <a:srgbClr val="B9D7E6"/>
+            </a:solidFill>
+            <a:prstDash val="solid"/>
+          </a:ln>
+        </p:spPr>
+      </p:sp>
+      <p:sp>
+        <p:nvSpPr>
+          <p:cNvPr id="10" name="Text 8"/>
+          <p:cNvSpPr/>
+          <p:nvPr/>
+        </p:nvSpPr>
+        <p:spPr>
+          <a:xfrm>
+            <a:off x="8074152" y="1563624"/>
+            <a:ext cx="2825496" cy="201168"/>
+          </a:xfrm>
+          <a:prstGeom prst="rect">
+            <a:avLst/>
+          </a:prstGeom>
+          <a:noFill/>
+          <a:ln/>
+        </p:spPr>
+        <p:txBody>
+          <a:bodyPr wrap="square" lIns="0" tIns="0" rIns="0" bIns="0" rtlCol="0" anchor="ctr"/>
+          <a:lstStyle/>
+          <a:p>
             <a:pPr indent="0" marL="0">
               <a:buNone/>
             </a:pPr>
             <a:r>
-              <a:rPr lang="en-US" sz="1420" dirty="0">
+              <a:rPr lang="en-US" sz="950" b="1" dirty="0">
+                <a:solidFill>
+                  <a:srgbClr val="0068B7"/>
+                </a:solidFill>
+                <a:latin typeface="Aptos" pitchFamily="34" charset="0"/>
+                <a:ea typeface="Aptos" pitchFamily="34" charset="-122"/>
+                <a:cs typeface="Aptos" pitchFamily="34" charset="-120"/>
+              </a:rPr>
+              <a:t>Key idea</a:t>
+            </a:r>
+            <a:endParaRPr lang="en-US" sz="950" dirty="0"/>
+          </a:p>
+        </p:txBody>
+      </p:sp>
+      <p:sp>
+        <p:nvSpPr>
+          <p:cNvPr id="11" name="Text 9"/>
+          <p:cNvSpPr/>
+          <p:nvPr/>
+        </p:nvSpPr>
+        <p:spPr>
+          <a:xfrm>
+            <a:off x="8074152" y="1856232"/>
+            <a:ext cx="2825496" cy="1261872"/>
+          </a:xfrm>
+          <a:prstGeom prst="rect">
+            <a:avLst/>
+          </a:prstGeom>
+          <a:noFill/>
+          <a:ln/>
+        </p:spPr>
+        <p:txBody>
+          <a:bodyPr wrap="square" lIns="0" tIns="0" rIns="0" bIns="0" rtlCol="0" anchor="t">
+            <a:normAutofit/>
+          </a:bodyPr>
+          <a:lstStyle/>
+          <a:p>
+            <a:pPr indent="0" marL="0">
+              <a:buNone/>
+            </a:pPr>
+            <a:r>
+              <a:rPr lang="en-US" sz="1250" dirty="0">
                 <a:solidFill>
                   <a:srgbClr val="17364A"/>
                 </a:solidFill>
@@ -3829,9 +5136,116 @@
                 <a:ea typeface="Aptos" pitchFamily="34" charset="-122"/>
                 <a:cs typeface="Aptos" pitchFamily="34" charset="-120"/>
               </a:rPr>
-              <a:t>What location data are used, and how complete and accurate are they? Which geographic unit best matches the public health action? Could missing or poor-quality location data affect certain populations more than others?</a:t>
-            </a:r>
-            <a:endParaRPr lang="en-US" sz="1420" dirty="0"/>
+              <a:t>Stigmatizing communities.</a:t>
+            </a:r>
+            <a:endParaRPr lang="en-US" sz="1250" dirty="0"/>
+          </a:p>
+        </p:txBody>
+      </p:sp>
+      <p:sp>
+        <p:nvSpPr>
+          <p:cNvPr id="12" name="Shape 10"/>
+          <p:cNvSpPr/>
+          <p:nvPr/>
+        </p:nvSpPr>
+        <p:spPr>
+          <a:xfrm>
+            <a:off x="7909560" y="3520440"/>
+            <a:ext cx="3154680" cy="1737360"/>
+          </a:xfrm>
+          <a:prstGeom prst="roundRect">
+            <a:avLst>
+              <a:gd name="adj" fmla="val 6316"/>
+            </a:avLst>
+          </a:prstGeom>
+          <a:solidFill>
+            <a:srgbClr val="EAF6F8"/>
+          </a:solidFill>
+          <a:ln w="12700">
+            <a:solidFill>
+              <a:srgbClr val="B9D7E6"/>
+            </a:solidFill>
+            <a:prstDash val="solid"/>
+          </a:ln>
+        </p:spPr>
+      </p:sp>
+      <p:sp>
+        <p:nvSpPr>
+          <p:cNvPr id="13" name="Text 11"/>
+          <p:cNvSpPr/>
+          <p:nvPr/>
+        </p:nvSpPr>
+        <p:spPr>
+          <a:xfrm>
+            <a:off x="8074152" y="3666744"/>
+            <a:ext cx="2825496" cy="201168"/>
+          </a:xfrm>
+          <a:prstGeom prst="rect">
+            <a:avLst/>
+          </a:prstGeom>
+          <a:noFill/>
+          <a:ln/>
+        </p:spPr>
+        <p:txBody>
+          <a:bodyPr wrap="square" lIns="0" tIns="0" rIns="0" bIns="0" rtlCol="0" anchor="ctr"/>
+          <a:lstStyle/>
+          <a:p>
+            <a:pPr indent="0" marL="0">
+              <a:buNone/>
+            </a:pPr>
+            <a:r>
+              <a:rPr lang="en-US" sz="950" b="1" dirty="0">
+                <a:solidFill>
+                  <a:srgbClr val="0068B7"/>
+                </a:solidFill>
+                <a:latin typeface="Aptos" pitchFamily="34" charset="0"/>
+                <a:ea typeface="Aptos" pitchFamily="34" charset="-122"/>
+                <a:cs typeface="Aptos" pitchFamily="34" charset="-120"/>
+              </a:rPr>
+              <a:t>Use this for</a:t>
+            </a:r>
+            <a:endParaRPr lang="en-US" sz="950" dirty="0"/>
+          </a:p>
+        </p:txBody>
+      </p:sp>
+      <p:sp>
+        <p:nvSpPr>
+          <p:cNvPr id="14" name="Text 12"/>
+          <p:cNvSpPr/>
+          <p:nvPr/>
+        </p:nvSpPr>
+        <p:spPr>
+          <a:xfrm>
+            <a:off x="8074152" y="3959352"/>
+            <a:ext cx="2825496" cy="1170432"/>
+          </a:xfrm>
+          <a:prstGeom prst="rect">
+            <a:avLst/>
+          </a:prstGeom>
+          <a:noFill/>
+          <a:ln/>
+        </p:spPr>
+        <p:txBody>
+          <a:bodyPr wrap="square" lIns="0" tIns="0" rIns="0" bIns="0" rtlCol="0" anchor="t">
+            <a:normAutofit/>
+          </a:bodyPr>
+          <a:lstStyle/>
+          <a:p>
+            <a:pPr indent="0" marL="0">
+              <a:buNone/>
+            </a:pPr>
+            <a:r>
+              <a:rPr lang="en-US" sz="1250" dirty="0">
+                <a:solidFill>
+                  <a:srgbClr val="17364A"/>
+                </a:solidFill>
+                <a:latin typeface="Aptos" pitchFamily="34" charset="0"/>
+                <a:ea typeface="Aptos" pitchFamily="34" charset="-122"/>
+                <a:cs typeface="Aptos" pitchFamily="34" charset="-120"/>
+              </a:rPr>
+              <a:t>Connect the concept to public health decisions, safeguards, documentation, or implementation work.</a:t>
+            </a:r>
+            <a:endParaRPr lang="en-US" sz="1250" dirty="0"/>
           </a:p>
         </p:txBody>
       </p:sp>
@@ -3894,7 +5308,32 @@
       </p:sp>
       <p:sp>
         <p:nvSpPr>
-          <p:cNvPr id="3" name="Text 1"/>
+          <p:cNvPr id="3" name="Shape 1"/>
+          <p:cNvSpPr/>
+          <p:nvPr/>
+        </p:nvSpPr>
+        <p:spPr>
+          <a:xfrm>
+            <a:off x="0" y="164592"/>
+            <a:ext cx="146304" cy="6693408"/>
+          </a:xfrm>
+          <a:prstGeom prst="rect">
+            <a:avLst/>
+          </a:prstGeom>
+          <a:solidFill>
+            <a:srgbClr val="2F8A28"/>
+          </a:solidFill>
+          <a:ln w="12700">
+            <a:solidFill>
+              <a:srgbClr val="2F8A28"/>
+            </a:solidFill>
+            <a:prstDash val="solid"/>
+          </a:ln>
+        </p:spPr>
+      </p:sp>
+      <p:sp>
+        <p:nvSpPr>
+          <p:cNvPr id="4" name="Text 2"/>
           <p:cNvSpPr/>
           <p:nvPr/>
         </p:nvSpPr>
@@ -3933,7 +5372,7 @@
       </p:sp>
       <p:sp>
         <p:nvSpPr>
-          <p:cNvPr id="4" name="Text 2"/>
+          <p:cNvPr id="5" name="Text 3"/>
           <p:cNvSpPr/>
           <p:nvPr/>
         </p:nvSpPr>
@@ -3972,7 +5411,7 @@
       </p:sp>
       <p:sp>
         <p:nvSpPr>
-          <p:cNvPr id="5" name="Text 3"/>
+          <p:cNvPr id="6" name="Text 4"/>
           <p:cNvSpPr/>
           <p:nvPr/>
         </p:nvSpPr>
@@ -4011,13 +5450,77 @@
       </p:sp>
       <p:sp>
         <p:nvSpPr>
-          <p:cNvPr id="6" name="Text 4"/>
+          <p:cNvPr id="7" name="Shape 5"/>
           <p:cNvSpPr/>
           <p:nvPr/>
         </p:nvSpPr>
         <p:spPr>
           <a:xfrm>
             <a:off x="640080" y="658368"/>
+            <a:ext cx="420624" cy="420624"/>
+          </a:xfrm>
+          <a:prstGeom prst="ellipse">
+            <a:avLst/>
+          </a:prstGeom>
+          <a:solidFill>
+            <a:srgbClr val="0068B7"/>
+          </a:solidFill>
+          <a:ln w="12700">
+            <a:solidFill>
+              <a:srgbClr val="0068B7"/>
+            </a:solidFill>
+            <a:prstDash val="solid"/>
+          </a:ln>
+        </p:spPr>
+      </p:sp>
+      <p:sp>
+        <p:nvSpPr>
+          <p:cNvPr id="8" name="Text 6"/>
+          <p:cNvSpPr/>
+          <p:nvPr/>
+        </p:nvSpPr>
+        <p:spPr>
+          <a:xfrm>
+            <a:off x="640080" y="731520"/>
+            <a:ext cx="420624" cy="164592"/>
+          </a:xfrm>
+          <a:prstGeom prst="rect">
+            <a:avLst/>
+          </a:prstGeom>
+          <a:noFill/>
+          <a:ln/>
+        </p:spPr>
+        <p:txBody>
+          <a:bodyPr wrap="square" lIns="0" tIns="0" rIns="0" bIns="0" rtlCol="0" anchor="ctr"/>
+          <a:lstStyle/>
+          <a:p>
+            <a:pPr algn="ctr" indent="0" marL="0">
+              <a:buNone/>
+            </a:pPr>
+            <a:r>
+              <a:rPr lang="en-US" sz="1100" b="1" dirty="0">
+                <a:solidFill>
+                  <a:srgbClr val="FFFFFF"/>
+                </a:solidFill>
+                <a:latin typeface="Aptos" pitchFamily="34" charset="0"/>
+                <a:ea typeface="Aptos" pitchFamily="34" charset="-122"/>
+                <a:cs typeface="Aptos" pitchFamily="34" charset="-120"/>
+              </a:rPr>
+              <a:t>7</a:t>
+            </a:r>
+            <a:endParaRPr lang="en-US" sz="1100" dirty="0"/>
+          </a:p>
+        </p:txBody>
+      </p:sp>
+      <p:sp>
+        <p:nvSpPr>
+          <p:cNvPr id="9" name="Text 7"/>
+          <p:cNvSpPr/>
+          <p:nvPr/>
+        </p:nvSpPr>
+        <p:spPr>
+          <a:xfrm>
+            <a:off x="640080" y="621792"/>
             <a:ext cx="10881360" cy="566928"/>
           </a:xfrm>
           <a:prstGeom prst="rect">
@@ -4044,7 +5547,7 @@
                 <a:ea typeface="Aptos Display" pitchFamily="34" charset="-122"/>
                 <a:cs typeface="Aptos Display" pitchFamily="34" charset="-120"/>
               </a:rPr>
-              <a:t>Reflection Questions Continued</a:t>
+              <a:t>Application to AI-Supported Workflows</a:t>
             </a:r>
             <a:endParaRPr lang="en-US" sz="2700" dirty="0"/>
           </a:p>
@@ -4052,32 +5555,178 @@
       </p:sp>
       <p:sp>
         <p:nvSpPr>
-          <p:cNvPr id="7" name="Text 5"/>
-          <p:cNvSpPr/>
-          <p:nvPr/>
-        </p:nvSpPr>
-        <p:spPr>
-          <a:xfrm>
-            <a:off x="822960" y="1325880"/>
-            <a:ext cx="10378440" cy="4800600"/>
-          </a:xfrm>
-          <a:prstGeom prst="rect">
-            <a:avLst/>
-          </a:prstGeom>
-          <a:noFill/>
-          <a:ln/>
-        </p:spPr>
-        <p:txBody>
-          <a:bodyPr wrap="square" lIns="1016" tIns="1016" rIns="1016" bIns="1016" rtlCol="0" anchor="t">
+          <p:cNvPr id="10" name="Text 8"/>
+          <p:cNvSpPr/>
+          <p:nvPr/>
+        </p:nvSpPr>
+        <p:spPr>
+          <a:xfrm>
+            <a:off x="868680" y="1417320"/>
+            <a:ext cx="6675120" cy="4434840"/>
+          </a:xfrm>
+          <a:prstGeom prst="rect">
+            <a:avLst/>
+          </a:prstGeom>
+          <a:noFill/>
+          <a:ln/>
+        </p:spPr>
+        <p:txBody>
+          <a:bodyPr wrap="square" lIns="635" tIns="635" rIns="635" bIns="635" rtlCol="0" anchor="t">
             <a:normAutofit/>
           </a:bodyPr>
           <a:lstStyle/>
           <a:p>
+            <a:r>
+              <a:rPr lang="en-US" sz="1700" dirty="0">
+                <a:solidFill>
+                  <a:srgbClr val="17364A"/>
+                </a:solidFill>
+                <a:latin typeface="Aptos" pitchFamily="34" charset="0"/>
+                <a:ea typeface="Aptos" pitchFamily="34" charset="-122"/>
+                <a:cs typeface="Aptos" pitchFamily="34" charset="-120"/>
+              </a:rPr>
+              <a:t>Geospatial AI may support predictive analytics, emergency response, inspection prioritization, environmental monitoring,.</a:t>
+            </a:r>
+            <a:endParaRPr lang="en-US" sz="1700" dirty="0"/>
+          </a:p>
+          <a:p>
+            <a:r>
+              <a:rPr lang="en-US" sz="1700" dirty="0">
+                <a:solidFill>
+                  <a:srgbClr val="17364A"/>
+                </a:solidFill>
+                <a:latin typeface="Aptos" pitchFamily="34" charset="0"/>
+                <a:ea typeface="Aptos" pitchFamily="34" charset="-122"/>
+                <a:cs typeface="Aptos" pitchFamily="34" charset="-120"/>
+              </a:rPr>
+              <a:t>Generative AI may summarize spatial patterns for leaders, but it must not overstate certainty or ignore limitations.</a:t>
+            </a:r>
+            <a:endParaRPr lang="en-US" sz="1700" dirty="0"/>
+          </a:p>
+          <a:p>
+            <a:r>
+              <a:rPr lang="en-US" sz="1700" dirty="0">
+                <a:solidFill>
+                  <a:srgbClr val="17364A"/>
+                </a:solidFill>
+                <a:latin typeface="Aptos" pitchFamily="34" charset="0"/>
+                <a:ea typeface="Aptos" pitchFamily="34" charset="-122"/>
+                <a:cs typeface="Aptos" pitchFamily="34" charset="-120"/>
+              </a:rPr>
+              <a:t>RAG tools may retrieve local plans, maps, and protocols, while agentic workflows may propose outreach routes or inspection.</a:t>
+            </a:r>
+            <a:endParaRPr lang="en-US" sz="1700" dirty="0"/>
+          </a:p>
+          <a:p>
+            <a:r>
+              <a:rPr lang="en-US" sz="1700" dirty="0">
+                <a:solidFill>
+                  <a:srgbClr val="17364A"/>
+                </a:solidFill>
+                <a:latin typeface="Aptos" pitchFamily="34" charset="0"/>
+                <a:ea typeface="Aptos" pitchFamily="34" charset="-122"/>
+                <a:cs typeface="Aptos" pitchFamily="34" charset="-120"/>
+              </a:rPr>
+              <a:t>The responsible application of geospatial AI requires explicit attention to privacy, geography, and equity.</a:t>
+            </a:r>
+            <a:endParaRPr lang="en-US" sz="1700" dirty="0"/>
+          </a:p>
+        </p:txBody>
+      </p:sp>
+      <p:sp>
+        <p:nvSpPr>
+          <p:cNvPr id="11" name="Shape 9"/>
+          <p:cNvSpPr/>
+          <p:nvPr/>
+        </p:nvSpPr>
+        <p:spPr>
+          <a:xfrm>
+            <a:off x="7909560" y="1417320"/>
+            <a:ext cx="3154680" cy="1828800"/>
+          </a:xfrm>
+          <a:prstGeom prst="roundRect">
+            <a:avLst>
+              <a:gd name="adj" fmla="val 6000"/>
+            </a:avLst>
+          </a:prstGeom>
+          <a:solidFill>
+            <a:srgbClr val="EEF8ED"/>
+          </a:solidFill>
+          <a:ln w="12700">
+            <a:solidFill>
+              <a:srgbClr val="B9D7E6"/>
+            </a:solidFill>
+            <a:prstDash val="solid"/>
+          </a:ln>
+        </p:spPr>
+      </p:sp>
+      <p:sp>
+        <p:nvSpPr>
+          <p:cNvPr id="12" name="Text 10"/>
+          <p:cNvSpPr/>
+          <p:nvPr/>
+        </p:nvSpPr>
+        <p:spPr>
+          <a:xfrm>
+            <a:off x="8074152" y="1563624"/>
+            <a:ext cx="2825496" cy="201168"/>
+          </a:xfrm>
+          <a:prstGeom prst="rect">
+            <a:avLst/>
+          </a:prstGeom>
+          <a:noFill/>
+          <a:ln/>
+        </p:spPr>
+        <p:txBody>
+          <a:bodyPr wrap="square" lIns="0" tIns="0" rIns="0" bIns="0" rtlCol="0" anchor="ctr"/>
+          <a:lstStyle/>
+          <a:p>
             <a:pPr indent="0" marL="0">
               <a:buNone/>
             </a:pPr>
             <a:r>
-              <a:rPr lang="en-US" sz="1420" dirty="0">
+              <a:rPr lang="en-US" sz="950" b="1" dirty="0">
+                <a:solidFill>
+                  <a:srgbClr val="0068B7"/>
+                </a:solidFill>
+                <a:latin typeface="Aptos" pitchFamily="34" charset="0"/>
+                <a:ea typeface="Aptos" pitchFamily="34" charset="-122"/>
+                <a:cs typeface="Aptos" pitchFamily="34" charset="-120"/>
+              </a:rPr>
+              <a:t>Key idea</a:t>
+            </a:r>
+            <a:endParaRPr lang="en-US" sz="950" dirty="0"/>
+          </a:p>
+        </p:txBody>
+      </p:sp>
+      <p:sp>
+        <p:nvSpPr>
+          <p:cNvPr id="13" name="Text 11"/>
+          <p:cNvSpPr/>
+          <p:nvPr/>
+        </p:nvSpPr>
+        <p:spPr>
+          <a:xfrm>
+            <a:off x="8074152" y="1856232"/>
+            <a:ext cx="2825496" cy="1261872"/>
+          </a:xfrm>
+          <a:prstGeom prst="rect">
+            <a:avLst/>
+          </a:prstGeom>
+          <a:noFill/>
+          <a:ln/>
+        </p:spPr>
+        <p:txBody>
+          <a:bodyPr wrap="square" lIns="0" tIns="0" rIns="0" bIns="0" rtlCol="0" anchor="t">
+            <a:normAutofit/>
+          </a:bodyPr>
+          <a:lstStyle/>
+          <a:p>
+            <a:pPr indent="0" marL="0">
+              <a:buNone/>
+            </a:pPr>
+            <a:r>
+              <a:rPr lang="en-US" sz="1250" dirty="0">
                 <a:solidFill>
                   <a:srgbClr val="17364A"/>
                 </a:solidFill>
@@ -4085,9 +5734,116 @@
                 <a:ea typeface="Aptos" pitchFamily="34" charset="-122"/>
                 <a:cs typeface="Aptos" pitchFamily="34" charset="-120"/>
               </a:rPr>
-              <a:t>What privacy safeguards are needed for internal and public maps? How will community context be included before action is taken?</a:t>
-            </a:r>
-            <a:endParaRPr lang="en-US" sz="1420" dirty="0"/>
+              <a:t>Geospatial AI may support predictive analytics, emergency response, inspection prioritization, environmental monitoring,.</a:t>
+            </a:r>
+            <a:endParaRPr lang="en-US" sz="1250" dirty="0"/>
+          </a:p>
+        </p:txBody>
+      </p:sp>
+      <p:sp>
+        <p:nvSpPr>
+          <p:cNvPr id="14" name="Shape 12"/>
+          <p:cNvSpPr/>
+          <p:nvPr/>
+        </p:nvSpPr>
+        <p:spPr>
+          <a:xfrm>
+            <a:off x="7909560" y="3520440"/>
+            <a:ext cx="3154680" cy="1737360"/>
+          </a:xfrm>
+          <a:prstGeom prst="roundRect">
+            <a:avLst>
+              <a:gd name="adj" fmla="val 6316"/>
+            </a:avLst>
+          </a:prstGeom>
+          <a:solidFill>
+            <a:srgbClr val="EAF6F8"/>
+          </a:solidFill>
+          <a:ln w="12700">
+            <a:solidFill>
+              <a:srgbClr val="B9D7E6"/>
+            </a:solidFill>
+            <a:prstDash val="solid"/>
+          </a:ln>
+        </p:spPr>
+      </p:sp>
+      <p:sp>
+        <p:nvSpPr>
+          <p:cNvPr id="15" name="Text 13"/>
+          <p:cNvSpPr/>
+          <p:nvPr/>
+        </p:nvSpPr>
+        <p:spPr>
+          <a:xfrm>
+            <a:off x="8074152" y="3666744"/>
+            <a:ext cx="2825496" cy="201168"/>
+          </a:xfrm>
+          <a:prstGeom prst="rect">
+            <a:avLst/>
+          </a:prstGeom>
+          <a:noFill/>
+          <a:ln/>
+        </p:spPr>
+        <p:txBody>
+          <a:bodyPr wrap="square" lIns="0" tIns="0" rIns="0" bIns="0" rtlCol="0" anchor="ctr"/>
+          <a:lstStyle/>
+          <a:p>
+            <a:pPr indent="0" marL="0">
+              <a:buNone/>
+            </a:pPr>
+            <a:r>
+              <a:rPr lang="en-US" sz="950" b="1" dirty="0">
+                <a:solidFill>
+                  <a:srgbClr val="0068B7"/>
+                </a:solidFill>
+                <a:latin typeface="Aptos" pitchFamily="34" charset="0"/>
+                <a:ea typeface="Aptos" pitchFamily="34" charset="-122"/>
+                <a:cs typeface="Aptos" pitchFamily="34" charset="-120"/>
+              </a:rPr>
+              <a:t>Use this for</a:t>
+            </a:r>
+            <a:endParaRPr lang="en-US" sz="950" dirty="0"/>
+          </a:p>
+        </p:txBody>
+      </p:sp>
+      <p:sp>
+        <p:nvSpPr>
+          <p:cNvPr id="16" name="Text 14"/>
+          <p:cNvSpPr/>
+          <p:nvPr/>
+        </p:nvSpPr>
+        <p:spPr>
+          <a:xfrm>
+            <a:off x="8074152" y="3959352"/>
+            <a:ext cx="2825496" cy="1170432"/>
+          </a:xfrm>
+          <a:prstGeom prst="rect">
+            <a:avLst/>
+          </a:prstGeom>
+          <a:noFill/>
+          <a:ln/>
+        </p:spPr>
+        <p:txBody>
+          <a:bodyPr wrap="square" lIns="0" tIns="0" rIns="0" bIns="0" rtlCol="0" anchor="t">
+            <a:normAutofit/>
+          </a:bodyPr>
+          <a:lstStyle/>
+          <a:p>
+            <a:pPr indent="0" marL="0">
+              <a:buNone/>
+            </a:pPr>
+            <a:r>
+              <a:rPr lang="en-US" sz="1250" dirty="0">
+                <a:solidFill>
+                  <a:srgbClr val="17364A"/>
+                </a:solidFill>
+                <a:latin typeface="Aptos" pitchFamily="34" charset="0"/>
+                <a:ea typeface="Aptos" pitchFamily="34" charset="-122"/>
+                <a:cs typeface="Aptos" pitchFamily="34" charset="-120"/>
+              </a:rPr>
+              <a:t>Connect the concept to public health decisions, safeguards, documentation, or implementation work.</a:t>
+            </a:r>
+            <a:endParaRPr lang="en-US" sz="1250" dirty="0"/>
           </a:p>
         </p:txBody>
       </p:sp>
@@ -4150,7 +5906,32 @@
       </p:sp>
       <p:sp>
         <p:nvSpPr>
-          <p:cNvPr id="3" name="Text 1"/>
+          <p:cNvPr id="3" name="Shape 1"/>
+          <p:cNvSpPr/>
+          <p:nvPr/>
+        </p:nvSpPr>
+        <p:spPr>
+          <a:xfrm>
+            <a:off x="0" y="164592"/>
+            <a:ext cx="146304" cy="6693408"/>
+          </a:xfrm>
+          <a:prstGeom prst="rect">
+            <a:avLst/>
+          </a:prstGeom>
+          <a:solidFill>
+            <a:srgbClr val="2F8A28"/>
+          </a:solidFill>
+          <a:ln w="12700">
+            <a:solidFill>
+              <a:srgbClr val="2F8A28"/>
+            </a:solidFill>
+            <a:prstDash val="solid"/>
+          </a:ln>
+        </p:spPr>
+      </p:sp>
+      <p:sp>
+        <p:nvSpPr>
+          <p:cNvPr id="4" name="Text 2"/>
           <p:cNvSpPr/>
           <p:nvPr/>
         </p:nvSpPr>
@@ -4189,7 +5970,7 @@
       </p:sp>
       <p:sp>
         <p:nvSpPr>
-          <p:cNvPr id="4" name="Text 2"/>
+          <p:cNvPr id="5" name="Text 3"/>
           <p:cNvSpPr/>
           <p:nvPr/>
         </p:nvSpPr>
@@ -4228,7 +6009,7 @@
       </p:sp>
       <p:sp>
         <p:nvSpPr>
-          <p:cNvPr id="5" name="Text 3"/>
+          <p:cNvPr id="6" name="Text 4"/>
           <p:cNvSpPr/>
           <p:nvPr/>
         </p:nvSpPr>
@@ -4267,13 +6048,77 @@
       </p:sp>
       <p:sp>
         <p:nvSpPr>
-          <p:cNvPr id="6" name="Text 4"/>
+          <p:cNvPr id="7" name="Shape 5"/>
           <p:cNvSpPr/>
           <p:nvPr/>
         </p:nvSpPr>
         <p:spPr>
           <a:xfrm>
             <a:off x="640080" y="658368"/>
+            <a:ext cx="420624" cy="420624"/>
+          </a:xfrm>
+          <a:prstGeom prst="ellipse">
+            <a:avLst/>
+          </a:prstGeom>
+          <a:solidFill>
+            <a:srgbClr val="0068B7"/>
+          </a:solidFill>
+          <a:ln w="12700">
+            <a:solidFill>
+              <a:srgbClr val="0068B7"/>
+            </a:solidFill>
+            <a:prstDash val="solid"/>
+          </a:ln>
+        </p:spPr>
+      </p:sp>
+      <p:sp>
+        <p:nvSpPr>
+          <p:cNvPr id="8" name="Text 6"/>
+          <p:cNvSpPr/>
+          <p:nvPr/>
+        </p:nvSpPr>
+        <p:spPr>
+          <a:xfrm>
+            <a:off x="640080" y="731520"/>
+            <a:ext cx="420624" cy="164592"/>
+          </a:xfrm>
+          <a:prstGeom prst="rect">
+            <a:avLst/>
+          </a:prstGeom>
+          <a:noFill/>
+          <a:ln/>
+        </p:spPr>
+        <p:txBody>
+          <a:bodyPr wrap="square" lIns="0" tIns="0" rIns="0" bIns="0" rtlCol="0" anchor="ctr"/>
+          <a:lstStyle/>
+          <a:p>
+            <a:pPr algn="ctr" indent="0" marL="0">
+              <a:buNone/>
+            </a:pPr>
+            <a:r>
+              <a:rPr lang="en-US" sz="1100" b="1" dirty="0">
+                <a:solidFill>
+                  <a:srgbClr val="FFFFFF"/>
+                </a:solidFill>
+                <a:latin typeface="Aptos" pitchFamily="34" charset="0"/>
+                <a:ea typeface="Aptos" pitchFamily="34" charset="-122"/>
+                <a:cs typeface="Aptos" pitchFamily="34" charset="-120"/>
+              </a:rPr>
+              <a:t>8</a:t>
+            </a:r>
+            <a:endParaRPr lang="en-US" sz="1100" dirty="0"/>
+          </a:p>
+        </p:txBody>
+      </p:sp>
+      <p:sp>
+        <p:nvSpPr>
+          <p:cNvPr id="9" name="Text 7"/>
+          <p:cNvSpPr/>
+          <p:nvPr/>
+        </p:nvSpPr>
+        <p:spPr>
+          <a:xfrm>
+            <a:off x="640080" y="621792"/>
             <a:ext cx="10881360" cy="566928"/>
           </a:xfrm>
           <a:prstGeom prst="rect">
@@ -4300,7 +6145,7 @@
                 <a:ea typeface="Aptos Display" pitchFamily="34" charset="-122"/>
                 <a:cs typeface="Aptos Display" pitchFamily="34" charset="-120"/>
               </a:rPr>
-              <a:t>Practical Exercise</a:t>
+              <a:t>Reflection Questions</a:t>
             </a:r>
             <a:endParaRPr lang="en-US" sz="2700" dirty="0"/>
           </a:p>
@@ -4308,32 +6153,164 @@
       </p:sp>
       <p:sp>
         <p:nvSpPr>
-          <p:cNvPr id="7" name="Text 5"/>
-          <p:cNvSpPr/>
-          <p:nvPr/>
-        </p:nvSpPr>
-        <p:spPr>
-          <a:xfrm>
-            <a:off x="822960" y="1325880"/>
-            <a:ext cx="10378440" cy="4800600"/>
-          </a:xfrm>
-          <a:prstGeom prst="rect">
-            <a:avLst/>
-          </a:prstGeom>
-          <a:noFill/>
-          <a:ln/>
-        </p:spPr>
-        <p:txBody>
-          <a:bodyPr wrap="square" lIns="1016" tIns="1016" rIns="1016" bIns="1016" rtlCol="0" anchor="t">
+          <p:cNvPr id="10" name="Text 8"/>
+          <p:cNvSpPr/>
+          <p:nvPr/>
+        </p:nvSpPr>
+        <p:spPr>
+          <a:xfrm>
+            <a:off x="868680" y="1417320"/>
+            <a:ext cx="6675120" cy="4434840"/>
+          </a:xfrm>
+          <a:prstGeom prst="rect">
+            <a:avLst/>
+          </a:prstGeom>
+          <a:noFill/>
+          <a:ln/>
+        </p:spPr>
+        <p:txBody>
+          <a:bodyPr wrap="square" lIns="635" tIns="635" rIns="635" bIns="635" rtlCol="0" anchor="t">
             <a:normAutofit/>
           </a:bodyPr>
           <a:lstStyle/>
           <a:p>
+            <a:r>
+              <a:rPr lang="en-US" sz="1700" dirty="0">
+                <a:solidFill>
+                  <a:srgbClr val="17364A"/>
+                </a:solidFill>
+                <a:latin typeface="Aptos" pitchFamily="34" charset="0"/>
+                <a:ea typeface="Aptos" pitchFamily="34" charset="-122"/>
+                <a:cs typeface="Aptos" pitchFamily="34" charset="-120"/>
+              </a:rPr>
+              <a:t>What location data are used, and how complete and accurate are they?</a:t>
+            </a:r>
+            <a:endParaRPr lang="en-US" sz="1700" dirty="0"/>
+          </a:p>
+          <a:p>
+            <a:r>
+              <a:rPr lang="en-US" sz="1700" dirty="0">
+                <a:solidFill>
+                  <a:srgbClr val="17364A"/>
+                </a:solidFill>
+                <a:latin typeface="Aptos" pitchFamily="34" charset="0"/>
+                <a:ea typeface="Aptos" pitchFamily="34" charset="-122"/>
+                <a:cs typeface="Aptos" pitchFamily="34" charset="-120"/>
+              </a:rPr>
+              <a:t>Which geographic unit best matches the public health action?</a:t>
+            </a:r>
+            <a:endParaRPr lang="en-US" sz="1700" dirty="0"/>
+          </a:p>
+          <a:p>
+            <a:r>
+              <a:rPr lang="en-US" sz="1700" dirty="0">
+                <a:solidFill>
+                  <a:srgbClr val="17364A"/>
+                </a:solidFill>
+                <a:latin typeface="Aptos" pitchFamily="34" charset="0"/>
+                <a:ea typeface="Aptos" pitchFamily="34" charset="-122"/>
+                <a:cs typeface="Aptos" pitchFamily="34" charset="-120"/>
+              </a:rPr>
+              <a:t>Could missing or poor-quality location data affect certain populations more than others?</a:t>
+            </a:r>
+            <a:endParaRPr lang="en-US" sz="1700" dirty="0"/>
+          </a:p>
+        </p:txBody>
+      </p:sp>
+      <p:sp>
+        <p:nvSpPr>
+          <p:cNvPr id="11" name="Shape 9"/>
+          <p:cNvSpPr/>
+          <p:nvPr/>
+        </p:nvSpPr>
+        <p:spPr>
+          <a:xfrm>
+            <a:off x="7909560" y="1417320"/>
+            <a:ext cx="3154680" cy="1828800"/>
+          </a:xfrm>
+          <a:prstGeom prst="roundRect">
+            <a:avLst>
+              <a:gd name="adj" fmla="val 6000"/>
+            </a:avLst>
+          </a:prstGeom>
+          <a:solidFill>
+            <a:srgbClr val="EEF8ED"/>
+          </a:solidFill>
+          <a:ln w="12700">
+            <a:solidFill>
+              <a:srgbClr val="B9D7E6"/>
+            </a:solidFill>
+            <a:prstDash val="solid"/>
+          </a:ln>
+        </p:spPr>
+      </p:sp>
+      <p:sp>
+        <p:nvSpPr>
+          <p:cNvPr id="12" name="Text 10"/>
+          <p:cNvSpPr/>
+          <p:nvPr/>
+        </p:nvSpPr>
+        <p:spPr>
+          <a:xfrm>
+            <a:off x="8074152" y="1563624"/>
+            <a:ext cx="2825496" cy="201168"/>
+          </a:xfrm>
+          <a:prstGeom prst="rect">
+            <a:avLst/>
+          </a:prstGeom>
+          <a:noFill/>
+          <a:ln/>
+        </p:spPr>
+        <p:txBody>
+          <a:bodyPr wrap="square" lIns="0" tIns="0" rIns="0" bIns="0" rtlCol="0" anchor="ctr"/>
+          <a:lstStyle/>
+          <a:p>
             <a:pPr indent="0" marL="0">
               <a:buNone/>
             </a:pPr>
             <a:r>
-              <a:rPr lang="en-US" sz="1420" dirty="0">
+              <a:rPr lang="en-US" sz="950" b="1" dirty="0">
+                <a:solidFill>
+                  <a:srgbClr val="0068B7"/>
+                </a:solidFill>
+                <a:latin typeface="Aptos" pitchFamily="34" charset="0"/>
+                <a:ea typeface="Aptos" pitchFamily="34" charset="-122"/>
+                <a:cs typeface="Aptos" pitchFamily="34" charset="-120"/>
+              </a:rPr>
+              <a:t>Key idea</a:t>
+            </a:r>
+            <a:endParaRPr lang="en-US" sz="950" dirty="0"/>
+          </a:p>
+        </p:txBody>
+      </p:sp>
+      <p:sp>
+        <p:nvSpPr>
+          <p:cNvPr id="13" name="Text 11"/>
+          <p:cNvSpPr/>
+          <p:nvPr/>
+        </p:nvSpPr>
+        <p:spPr>
+          <a:xfrm>
+            <a:off x="8074152" y="1856232"/>
+            <a:ext cx="2825496" cy="1261872"/>
+          </a:xfrm>
+          <a:prstGeom prst="rect">
+            <a:avLst/>
+          </a:prstGeom>
+          <a:noFill/>
+          <a:ln/>
+        </p:spPr>
+        <p:txBody>
+          <a:bodyPr wrap="square" lIns="0" tIns="0" rIns="0" bIns="0" rtlCol="0" anchor="t">
+            <a:normAutofit/>
+          </a:bodyPr>
+          <a:lstStyle/>
+          <a:p>
+            <a:pPr indent="0" marL="0">
+              <a:buNone/>
+            </a:pPr>
+            <a:r>
+              <a:rPr lang="en-US" sz="1250" dirty="0">
                 <a:solidFill>
                   <a:srgbClr val="17364A"/>
                 </a:solidFill>
@@ -4341,9 +6318,116 @@
                 <a:ea typeface="Aptos" pitchFamily="34" charset="-122"/>
                 <a:cs typeface="Aptos" pitchFamily="34" charset="-120"/>
               </a:rPr>
-              <a:t>Create a geospatial AI readiness worksheet for one public health workflow. Include the public health question, location data sources, geocoding method, geographic unit, denominator, privacy safeguards, equity concerns, AI-supported task, human review process, and communication plan. The worksheet should identify at least one way the map could be misinterpreted and one safeguard that would reduce the risk of harm.</a:t>
-            </a:r>
-            <a:endParaRPr lang="en-US" sz="1420" dirty="0"/>
+              <a:t>What location data are used, and how complete and accurate are they?</a:t>
+            </a:r>
+            <a:endParaRPr lang="en-US" sz="1250" dirty="0"/>
+          </a:p>
+        </p:txBody>
+      </p:sp>
+      <p:sp>
+        <p:nvSpPr>
+          <p:cNvPr id="14" name="Shape 12"/>
+          <p:cNvSpPr/>
+          <p:nvPr/>
+        </p:nvSpPr>
+        <p:spPr>
+          <a:xfrm>
+            <a:off x="7909560" y="3520440"/>
+            <a:ext cx="3154680" cy="1737360"/>
+          </a:xfrm>
+          <a:prstGeom prst="roundRect">
+            <a:avLst>
+              <a:gd name="adj" fmla="val 6316"/>
+            </a:avLst>
+          </a:prstGeom>
+          <a:solidFill>
+            <a:srgbClr val="EAF6F8"/>
+          </a:solidFill>
+          <a:ln w="12700">
+            <a:solidFill>
+              <a:srgbClr val="B9D7E6"/>
+            </a:solidFill>
+            <a:prstDash val="solid"/>
+          </a:ln>
+        </p:spPr>
+      </p:sp>
+      <p:sp>
+        <p:nvSpPr>
+          <p:cNvPr id="15" name="Text 13"/>
+          <p:cNvSpPr/>
+          <p:nvPr/>
+        </p:nvSpPr>
+        <p:spPr>
+          <a:xfrm>
+            <a:off x="8074152" y="3666744"/>
+            <a:ext cx="2825496" cy="201168"/>
+          </a:xfrm>
+          <a:prstGeom prst="rect">
+            <a:avLst/>
+          </a:prstGeom>
+          <a:noFill/>
+          <a:ln/>
+        </p:spPr>
+        <p:txBody>
+          <a:bodyPr wrap="square" lIns="0" tIns="0" rIns="0" bIns="0" rtlCol="0" anchor="ctr"/>
+          <a:lstStyle/>
+          <a:p>
+            <a:pPr indent="0" marL="0">
+              <a:buNone/>
+            </a:pPr>
+            <a:r>
+              <a:rPr lang="en-US" sz="950" b="1" dirty="0">
+                <a:solidFill>
+                  <a:srgbClr val="0068B7"/>
+                </a:solidFill>
+                <a:latin typeface="Aptos" pitchFamily="34" charset="0"/>
+                <a:ea typeface="Aptos" pitchFamily="34" charset="-122"/>
+                <a:cs typeface="Aptos" pitchFamily="34" charset="-120"/>
+              </a:rPr>
+              <a:t>Use this for</a:t>
+            </a:r>
+            <a:endParaRPr lang="en-US" sz="950" dirty="0"/>
+          </a:p>
+        </p:txBody>
+      </p:sp>
+      <p:sp>
+        <p:nvSpPr>
+          <p:cNvPr id="16" name="Text 14"/>
+          <p:cNvSpPr/>
+          <p:nvPr/>
+        </p:nvSpPr>
+        <p:spPr>
+          <a:xfrm>
+            <a:off x="8074152" y="3959352"/>
+            <a:ext cx="2825496" cy="1170432"/>
+          </a:xfrm>
+          <a:prstGeom prst="rect">
+            <a:avLst/>
+          </a:prstGeom>
+          <a:noFill/>
+          <a:ln/>
+        </p:spPr>
+        <p:txBody>
+          <a:bodyPr wrap="square" lIns="0" tIns="0" rIns="0" bIns="0" rtlCol="0" anchor="t">
+            <a:normAutofit/>
+          </a:bodyPr>
+          <a:lstStyle/>
+          <a:p>
+            <a:pPr indent="0" marL="0">
+              <a:buNone/>
+            </a:pPr>
+            <a:r>
+              <a:rPr lang="en-US" sz="1250" dirty="0">
+                <a:solidFill>
+                  <a:srgbClr val="17364A"/>
+                </a:solidFill>
+                <a:latin typeface="Aptos" pitchFamily="34" charset="0"/>
+                <a:ea typeface="Aptos" pitchFamily="34" charset="-122"/>
+                <a:cs typeface="Aptos" pitchFamily="34" charset="-120"/>
+              </a:rPr>
+              <a:t>Connect the concept to public health decisions, safeguards, documentation, or implementation work.</a:t>
+            </a:r>
+            <a:endParaRPr lang="en-US" sz="1250" dirty="0"/>
           </a:p>
         </p:txBody>
       </p:sp>
@@ -4406,7 +6490,32 @@
       </p:sp>
       <p:sp>
         <p:nvSpPr>
-          <p:cNvPr id="3" name="Text 1"/>
+          <p:cNvPr id="3" name="Shape 1"/>
+          <p:cNvSpPr/>
+          <p:nvPr/>
+        </p:nvSpPr>
+        <p:spPr>
+          <a:xfrm>
+            <a:off x="0" y="164592"/>
+            <a:ext cx="146304" cy="6693408"/>
+          </a:xfrm>
+          <a:prstGeom prst="rect">
+            <a:avLst/>
+          </a:prstGeom>
+          <a:solidFill>
+            <a:srgbClr val="2F8A28"/>
+          </a:solidFill>
+          <a:ln w="12700">
+            <a:solidFill>
+              <a:srgbClr val="2F8A28"/>
+            </a:solidFill>
+            <a:prstDash val="solid"/>
+          </a:ln>
+        </p:spPr>
+      </p:sp>
+      <p:sp>
+        <p:nvSpPr>
+          <p:cNvPr id="4" name="Text 2"/>
           <p:cNvSpPr/>
           <p:nvPr/>
         </p:nvSpPr>
@@ -4445,7 +6554,7 @@
       </p:sp>
       <p:sp>
         <p:nvSpPr>
-          <p:cNvPr id="4" name="Text 2"/>
+          <p:cNvPr id="5" name="Text 3"/>
           <p:cNvSpPr/>
           <p:nvPr/>
         </p:nvSpPr>
@@ -4484,7 +6593,7 @@
       </p:sp>
       <p:sp>
         <p:nvSpPr>
-          <p:cNvPr id="5" name="Text 3"/>
+          <p:cNvPr id="6" name="Text 4"/>
           <p:cNvSpPr/>
           <p:nvPr/>
         </p:nvSpPr>
@@ -4523,7 +6632,7 @@
       </p:sp>
       <p:sp>
         <p:nvSpPr>
-          <p:cNvPr id="6" name="Text 4"/>
+          <p:cNvPr id="7" name="Text 5"/>
           <p:cNvSpPr/>
           <p:nvPr/>
         </p:nvSpPr>
@@ -4556,7 +6665,7 @@
                 <a:ea typeface="Aptos Display" pitchFamily="34" charset="-122"/>
                 <a:cs typeface="Aptos Display" pitchFamily="34" charset="-120"/>
               </a:rPr>
-              <a:t>Expected Artifact or Evidence</a:t>
+              <a:t>Reflection Questions Continued</a:t>
             </a:r>
             <a:endParaRPr lang="en-US" sz="2700" dirty="0"/>
           </a:p>
@@ -4564,32 +6673,150 @@
       </p:sp>
       <p:sp>
         <p:nvSpPr>
-          <p:cNvPr id="7" name="Text 5"/>
-          <p:cNvSpPr/>
-          <p:nvPr/>
-        </p:nvSpPr>
-        <p:spPr>
-          <a:xfrm>
-            <a:off x="822960" y="1325880"/>
-            <a:ext cx="10378440" cy="4800600"/>
-          </a:xfrm>
-          <a:prstGeom prst="rect">
-            <a:avLst/>
-          </a:prstGeom>
-          <a:noFill/>
-          <a:ln/>
-        </p:spPr>
-        <p:txBody>
-          <a:bodyPr wrap="square" lIns="1016" tIns="1016" rIns="1016" bIns="1016" rtlCol="0" anchor="t">
+          <p:cNvPr id="8" name="Text 6"/>
+          <p:cNvSpPr/>
+          <p:nvPr/>
+        </p:nvSpPr>
+        <p:spPr>
+          <a:xfrm>
+            <a:off x="868680" y="1417320"/>
+            <a:ext cx="6675120" cy="4434840"/>
+          </a:xfrm>
+          <a:prstGeom prst="rect">
+            <a:avLst/>
+          </a:prstGeom>
+          <a:noFill/>
+          <a:ln/>
+        </p:spPr>
+        <p:txBody>
+          <a:bodyPr wrap="square" lIns="635" tIns="635" rIns="635" bIns="635" rtlCol="0" anchor="t">
             <a:normAutofit/>
           </a:bodyPr>
           <a:lstStyle/>
           <a:p>
+            <a:r>
+              <a:rPr lang="en-US" sz="1700" dirty="0">
+                <a:solidFill>
+                  <a:srgbClr val="17364A"/>
+                </a:solidFill>
+                <a:latin typeface="Aptos" pitchFamily="34" charset="0"/>
+                <a:ea typeface="Aptos" pitchFamily="34" charset="-122"/>
+                <a:cs typeface="Aptos" pitchFamily="34" charset="-120"/>
+              </a:rPr>
+              <a:t>What privacy safeguards are needed for internal and public maps?</a:t>
+            </a:r>
+            <a:endParaRPr lang="en-US" sz="1700" dirty="0"/>
+          </a:p>
+          <a:p>
+            <a:r>
+              <a:rPr lang="en-US" sz="1700" dirty="0">
+                <a:solidFill>
+                  <a:srgbClr val="17364A"/>
+                </a:solidFill>
+                <a:latin typeface="Aptos" pitchFamily="34" charset="0"/>
+                <a:ea typeface="Aptos" pitchFamily="34" charset="-122"/>
+                <a:cs typeface="Aptos" pitchFamily="34" charset="-120"/>
+              </a:rPr>
+              <a:t>How will community context be included before action is taken?</a:t>
+            </a:r>
+            <a:endParaRPr lang="en-US" sz="1700" dirty="0"/>
+          </a:p>
+        </p:txBody>
+      </p:sp>
+      <p:sp>
+        <p:nvSpPr>
+          <p:cNvPr id="9" name="Shape 7"/>
+          <p:cNvSpPr/>
+          <p:nvPr/>
+        </p:nvSpPr>
+        <p:spPr>
+          <a:xfrm>
+            <a:off x="7909560" y="1417320"/>
+            <a:ext cx="3154680" cy="1828800"/>
+          </a:xfrm>
+          <a:prstGeom prst="roundRect">
+            <a:avLst>
+              <a:gd name="adj" fmla="val 6000"/>
+            </a:avLst>
+          </a:prstGeom>
+          <a:solidFill>
+            <a:srgbClr val="EEF8ED"/>
+          </a:solidFill>
+          <a:ln w="12700">
+            <a:solidFill>
+              <a:srgbClr val="B9D7E6"/>
+            </a:solidFill>
+            <a:prstDash val="solid"/>
+          </a:ln>
+        </p:spPr>
+      </p:sp>
+      <p:sp>
+        <p:nvSpPr>
+          <p:cNvPr id="10" name="Text 8"/>
+          <p:cNvSpPr/>
+          <p:nvPr/>
+        </p:nvSpPr>
+        <p:spPr>
+          <a:xfrm>
+            <a:off x="8074152" y="1563624"/>
+            <a:ext cx="2825496" cy="201168"/>
+          </a:xfrm>
+          <a:prstGeom prst="rect">
+            <a:avLst/>
+          </a:prstGeom>
+          <a:noFill/>
+          <a:ln/>
+        </p:spPr>
+        <p:txBody>
+          <a:bodyPr wrap="square" lIns="0" tIns="0" rIns="0" bIns="0" rtlCol="0" anchor="ctr"/>
+          <a:lstStyle/>
+          <a:p>
             <a:pPr indent="0" marL="0">
               <a:buNone/>
             </a:pPr>
             <a:r>
-              <a:rPr lang="en-US" sz="1420" dirty="0">
+              <a:rPr lang="en-US" sz="950" b="1" dirty="0">
+                <a:solidFill>
+                  <a:srgbClr val="0068B7"/>
+                </a:solidFill>
+                <a:latin typeface="Aptos" pitchFamily="34" charset="0"/>
+                <a:ea typeface="Aptos" pitchFamily="34" charset="-122"/>
+                <a:cs typeface="Aptos" pitchFamily="34" charset="-120"/>
+              </a:rPr>
+              <a:t>Key idea</a:t>
+            </a:r>
+            <a:endParaRPr lang="en-US" sz="950" dirty="0"/>
+          </a:p>
+        </p:txBody>
+      </p:sp>
+      <p:sp>
+        <p:nvSpPr>
+          <p:cNvPr id="11" name="Text 9"/>
+          <p:cNvSpPr/>
+          <p:nvPr/>
+        </p:nvSpPr>
+        <p:spPr>
+          <a:xfrm>
+            <a:off x="8074152" y="1856232"/>
+            <a:ext cx="2825496" cy="1261872"/>
+          </a:xfrm>
+          <a:prstGeom prst="rect">
+            <a:avLst/>
+          </a:prstGeom>
+          <a:noFill/>
+          <a:ln/>
+        </p:spPr>
+        <p:txBody>
+          <a:bodyPr wrap="square" lIns="0" tIns="0" rIns="0" bIns="0" rtlCol="0" anchor="t">
+            <a:normAutofit/>
+          </a:bodyPr>
+          <a:lstStyle/>
+          <a:p>
+            <a:pPr indent="0" marL="0">
+              <a:buNone/>
+            </a:pPr>
+            <a:r>
+              <a:rPr lang="en-US" sz="1250" dirty="0">
                 <a:solidFill>
                   <a:srgbClr val="17364A"/>
                 </a:solidFill>
@@ -4597,9 +6824,116 @@
                 <a:ea typeface="Aptos" pitchFamily="34" charset="-122"/>
                 <a:cs typeface="Aptos" pitchFamily="34" charset="-120"/>
               </a:rPr>
-              <a:t>Geospatial AI readiness worksheet Map interpretation and limitations memo Privacy and suppression review notes</a:t>
-            </a:r>
-            <a:endParaRPr lang="en-US" sz="1420" dirty="0"/>
+              <a:t>What privacy safeguards are needed for internal and public maps?</a:t>
+            </a:r>
+            <a:endParaRPr lang="en-US" sz="1250" dirty="0"/>
+          </a:p>
+        </p:txBody>
+      </p:sp>
+      <p:sp>
+        <p:nvSpPr>
+          <p:cNvPr id="12" name="Shape 10"/>
+          <p:cNvSpPr/>
+          <p:nvPr/>
+        </p:nvSpPr>
+        <p:spPr>
+          <a:xfrm>
+            <a:off x="7909560" y="3520440"/>
+            <a:ext cx="3154680" cy="1737360"/>
+          </a:xfrm>
+          <a:prstGeom prst="roundRect">
+            <a:avLst>
+              <a:gd name="adj" fmla="val 6316"/>
+            </a:avLst>
+          </a:prstGeom>
+          <a:solidFill>
+            <a:srgbClr val="EAF6F8"/>
+          </a:solidFill>
+          <a:ln w="12700">
+            <a:solidFill>
+              <a:srgbClr val="B9D7E6"/>
+            </a:solidFill>
+            <a:prstDash val="solid"/>
+          </a:ln>
+        </p:spPr>
+      </p:sp>
+      <p:sp>
+        <p:nvSpPr>
+          <p:cNvPr id="13" name="Text 11"/>
+          <p:cNvSpPr/>
+          <p:nvPr/>
+        </p:nvSpPr>
+        <p:spPr>
+          <a:xfrm>
+            <a:off x="8074152" y="3666744"/>
+            <a:ext cx="2825496" cy="201168"/>
+          </a:xfrm>
+          <a:prstGeom prst="rect">
+            <a:avLst/>
+          </a:prstGeom>
+          <a:noFill/>
+          <a:ln/>
+        </p:spPr>
+        <p:txBody>
+          <a:bodyPr wrap="square" lIns="0" tIns="0" rIns="0" bIns="0" rtlCol="0" anchor="ctr"/>
+          <a:lstStyle/>
+          <a:p>
+            <a:pPr indent="0" marL="0">
+              <a:buNone/>
+            </a:pPr>
+            <a:r>
+              <a:rPr lang="en-US" sz="950" b="1" dirty="0">
+                <a:solidFill>
+                  <a:srgbClr val="0068B7"/>
+                </a:solidFill>
+                <a:latin typeface="Aptos" pitchFamily="34" charset="0"/>
+                <a:ea typeface="Aptos" pitchFamily="34" charset="-122"/>
+                <a:cs typeface="Aptos" pitchFamily="34" charset="-120"/>
+              </a:rPr>
+              <a:t>Use this for</a:t>
+            </a:r>
+            <a:endParaRPr lang="en-US" sz="950" dirty="0"/>
+          </a:p>
+        </p:txBody>
+      </p:sp>
+      <p:sp>
+        <p:nvSpPr>
+          <p:cNvPr id="14" name="Text 12"/>
+          <p:cNvSpPr/>
+          <p:nvPr/>
+        </p:nvSpPr>
+        <p:spPr>
+          <a:xfrm>
+            <a:off x="8074152" y="3959352"/>
+            <a:ext cx="2825496" cy="1170432"/>
+          </a:xfrm>
+          <a:prstGeom prst="rect">
+            <a:avLst/>
+          </a:prstGeom>
+          <a:noFill/>
+          <a:ln/>
+        </p:spPr>
+        <p:txBody>
+          <a:bodyPr wrap="square" lIns="0" tIns="0" rIns="0" bIns="0" rtlCol="0" anchor="t">
+            <a:normAutofit/>
+          </a:bodyPr>
+          <a:lstStyle/>
+          <a:p>
+            <a:pPr indent="0" marL="0">
+              <a:buNone/>
+            </a:pPr>
+            <a:r>
+              <a:rPr lang="en-US" sz="1250" dirty="0">
+                <a:solidFill>
+                  <a:srgbClr val="17364A"/>
+                </a:solidFill>
+                <a:latin typeface="Aptos" pitchFamily="34" charset="0"/>
+                <a:ea typeface="Aptos" pitchFamily="34" charset="-122"/>
+                <a:cs typeface="Aptos" pitchFamily="34" charset="-120"/>
+              </a:rPr>
+              <a:t>Connect the concept to public health decisions, safeguards, documentation, or implementation work.</a:t>
+            </a:r>
+            <a:endParaRPr lang="en-US" sz="1250" dirty="0"/>
           </a:p>
         </p:txBody>
       </p:sp>
@@ -4662,7 +6996,32 @@
       </p:sp>
       <p:sp>
         <p:nvSpPr>
-          <p:cNvPr id="3" name="Text 1"/>
+          <p:cNvPr id="3" name="Shape 1"/>
+          <p:cNvSpPr/>
+          <p:nvPr/>
+        </p:nvSpPr>
+        <p:spPr>
+          <a:xfrm>
+            <a:off x="0" y="164592"/>
+            <a:ext cx="146304" cy="6693408"/>
+          </a:xfrm>
+          <a:prstGeom prst="rect">
+            <a:avLst/>
+          </a:prstGeom>
+          <a:solidFill>
+            <a:srgbClr val="2F8A28"/>
+          </a:solidFill>
+          <a:ln w="12700">
+            <a:solidFill>
+              <a:srgbClr val="2F8A28"/>
+            </a:solidFill>
+            <a:prstDash val="solid"/>
+          </a:ln>
+        </p:spPr>
+      </p:sp>
+      <p:sp>
+        <p:nvSpPr>
+          <p:cNvPr id="4" name="Text 2"/>
           <p:cNvSpPr/>
           <p:nvPr/>
         </p:nvSpPr>
@@ -4701,7 +7060,7 @@
       </p:sp>
       <p:sp>
         <p:nvSpPr>
-          <p:cNvPr id="4" name="Text 2"/>
+          <p:cNvPr id="5" name="Text 3"/>
           <p:cNvSpPr/>
           <p:nvPr/>
         </p:nvSpPr>
@@ -4740,7 +7099,7 @@
       </p:sp>
       <p:sp>
         <p:nvSpPr>
-          <p:cNvPr id="5" name="Text 3"/>
+          <p:cNvPr id="6" name="Text 4"/>
           <p:cNvSpPr/>
           <p:nvPr/>
         </p:nvSpPr>
@@ -4779,13 +7138,77 @@
       </p:sp>
       <p:sp>
         <p:nvSpPr>
-          <p:cNvPr id="6" name="Text 4"/>
+          <p:cNvPr id="7" name="Shape 5"/>
           <p:cNvSpPr/>
           <p:nvPr/>
         </p:nvSpPr>
         <p:spPr>
           <a:xfrm>
             <a:off x="640080" y="658368"/>
+            <a:ext cx="420624" cy="420624"/>
+          </a:xfrm>
+          <a:prstGeom prst="ellipse">
+            <a:avLst/>
+          </a:prstGeom>
+          <a:solidFill>
+            <a:srgbClr val="0068B7"/>
+          </a:solidFill>
+          <a:ln w="12700">
+            <a:solidFill>
+              <a:srgbClr val="0068B7"/>
+            </a:solidFill>
+            <a:prstDash val="solid"/>
+          </a:ln>
+        </p:spPr>
+      </p:sp>
+      <p:sp>
+        <p:nvSpPr>
+          <p:cNvPr id="8" name="Text 6"/>
+          <p:cNvSpPr/>
+          <p:nvPr/>
+        </p:nvSpPr>
+        <p:spPr>
+          <a:xfrm>
+            <a:off x="640080" y="731520"/>
+            <a:ext cx="420624" cy="164592"/>
+          </a:xfrm>
+          <a:prstGeom prst="rect">
+            <a:avLst/>
+          </a:prstGeom>
+          <a:noFill/>
+          <a:ln/>
+        </p:spPr>
+        <p:txBody>
+          <a:bodyPr wrap="square" lIns="0" tIns="0" rIns="0" bIns="0" rtlCol="0" anchor="ctr"/>
+          <a:lstStyle/>
+          <a:p>
+            <a:pPr algn="ctr" indent="0" marL="0">
+              <a:buNone/>
+            </a:pPr>
+            <a:r>
+              <a:rPr lang="en-US" sz="1100" b="1" dirty="0">
+                <a:solidFill>
+                  <a:srgbClr val="FFFFFF"/>
+                </a:solidFill>
+                <a:latin typeface="Aptos" pitchFamily="34" charset="0"/>
+                <a:ea typeface="Aptos" pitchFamily="34" charset="-122"/>
+                <a:cs typeface="Aptos" pitchFamily="34" charset="-120"/>
+              </a:rPr>
+              <a:t>9</a:t>
+            </a:r>
+            <a:endParaRPr lang="en-US" sz="1100" dirty="0"/>
+          </a:p>
+        </p:txBody>
+      </p:sp>
+      <p:sp>
+        <p:nvSpPr>
+          <p:cNvPr id="9" name="Text 7"/>
+          <p:cNvSpPr/>
+          <p:nvPr/>
+        </p:nvSpPr>
+        <p:spPr>
+          <a:xfrm>
+            <a:off x="640080" y="621792"/>
             <a:ext cx="10881360" cy="566928"/>
           </a:xfrm>
           <a:prstGeom prst="rect">
@@ -4812,7 +7235,7 @@
                 <a:ea typeface="Aptos Display" pitchFamily="34" charset="-122"/>
                 <a:cs typeface="Aptos Display" pitchFamily="34" charset="-120"/>
               </a:rPr>
-              <a:t>Expected Artifact or Evidence Continued</a:t>
+              <a:t>Practical Exercise</a:t>
             </a:r>
             <a:endParaRPr lang="en-US" sz="2700" dirty="0"/>
           </a:p>
@@ -4820,32 +7243,164 @@
       </p:sp>
       <p:sp>
         <p:nvSpPr>
-          <p:cNvPr id="7" name="Text 5"/>
-          <p:cNvSpPr/>
-          <p:nvPr/>
-        </p:nvSpPr>
-        <p:spPr>
-          <a:xfrm>
-            <a:off x="822960" y="1325880"/>
-            <a:ext cx="10378440" cy="4800600"/>
-          </a:xfrm>
-          <a:prstGeom prst="rect">
-            <a:avLst/>
-          </a:prstGeom>
-          <a:noFill/>
-          <a:ln/>
-        </p:spPr>
-        <p:txBody>
-          <a:bodyPr wrap="square" lIns="1016" tIns="1016" rIns="1016" bIns="1016" rtlCol="0" anchor="t">
+          <p:cNvPr id="10" name="Text 8"/>
+          <p:cNvSpPr/>
+          <p:nvPr/>
+        </p:nvSpPr>
+        <p:spPr>
+          <a:xfrm>
+            <a:off x="868680" y="1417320"/>
+            <a:ext cx="6675120" cy="4434840"/>
+          </a:xfrm>
+          <a:prstGeom prst="rect">
+            <a:avLst/>
+          </a:prstGeom>
+          <a:noFill/>
+          <a:ln/>
+        </p:spPr>
+        <p:txBody>
+          <a:bodyPr wrap="square" lIns="635" tIns="635" rIns="635" bIns="635" rtlCol="0" anchor="t">
             <a:normAutofit/>
           </a:bodyPr>
           <a:lstStyle/>
           <a:p>
+            <a:r>
+              <a:rPr lang="en-US" sz="1700" dirty="0">
+                <a:solidFill>
+                  <a:srgbClr val="17364A"/>
+                </a:solidFill>
+                <a:latin typeface="Aptos" pitchFamily="34" charset="0"/>
+                <a:ea typeface="Aptos" pitchFamily="34" charset="-122"/>
+                <a:cs typeface="Aptos" pitchFamily="34" charset="-120"/>
+              </a:rPr>
+              <a:t>Create a geospatial AI readiness worksheet for one public health workflow.</a:t>
+            </a:r>
+            <a:endParaRPr lang="en-US" sz="1700" dirty="0"/>
+          </a:p>
+          <a:p>
+            <a:r>
+              <a:rPr lang="en-US" sz="1700" dirty="0">
+                <a:solidFill>
+                  <a:srgbClr val="17364A"/>
+                </a:solidFill>
+                <a:latin typeface="Aptos" pitchFamily="34" charset="0"/>
+                <a:ea typeface="Aptos" pitchFamily="34" charset="-122"/>
+                <a:cs typeface="Aptos" pitchFamily="34" charset="-120"/>
+              </a:rPr>
+              <a:t>Include the public health question, location data sources, geocoding method, geographic unit, denominator, privacy.</a:t>
+            </a:r>
+            <a:endParaRPr lang="en-US" sz="1700" dirty="0"/>
+          </a:p>
+          <a:p>
+            <a:r>
+              <a:rPr lang="en-US" sz="1700" dirty="0">
+                <a:solidFill>
+                  <a:srgbClr val="17364A"/>
+                </a:solidFill>
+                <a:latin typeface="Aptos" pitchFamily="34" charset="0"/>
+                <a:ea typeface="Aptos" pitchFamily="34" charset="-122"/>
+                <a:cs typeface="Aptos" pitchFamily="34" charset="-120"/>
+              </a:rPr>
+              <a:t>The worksheet should identify at least one way the map could be misinterpreted and one safeguard that would reduce the risk.</a:t>
+            </a:r>
+            <a:endParaRPr lang="en-US" sz="1700" dirty="0"/>
+          </a:p>
+        </p:txBody>
+      </p:sp>
+      <p:sp>
+        <p:nvSpPr>
+          <p:cNvPr id="11" name="Shape 9"/>
+          <p:cNvSpPr/>
+          <p:nvPr/>
+        </p:nvSpPr>
+        <p:spPr>
+          <a:xfrm>
+            <a:off x="7909560" y="1417320"/>
+            <a:ext cx="3154680" cy="1828800"/>
+          </a:xfrm>
+          <a:prstGeom prst="roundRect">
+            <a:avLst>
+              <a:gd name="adj" fmla="val 6000"/>
+            </a:avLst>
+          </a:prstGeom>
+          <a:solidFill>
+            <a:srgbClr val="EEF8ED"/>
+          </a:solidFill>
+          <a:ln w="12700">
+            <a:solidFill>
+              <a:srgbClr val="B9D7E6"/>
+            </a:solidFill>
+            <a:prstDash val="solid"/>
+          </a:ln>
+        </p:spPr>
+      </p:sp>
+      <p:sp>
+        <p:nvSpPr>
+          <p:cNvPr id="12" name="Text 10"/>
+          <p:cNvSpPr/>
+          <p:nvPr/>
+        </p:nvSpPr>
+        <p:spPr>
+          <a:xfrm>
+            <a:off x="8074152" y="1563624"/>
+            <a:ext cx="2825496" cy="201168"/>
+          </a:xfrm>
+          <a:prstGeom prst="rect">
+            <a:avLst/>
+          </a:prstGeom>
+          <a:noFill/>
+          <a:ln/>
+        </p:spPr>
+        <p:txBody>
+          <a:bodyPr wrap="square" lIns="0" tIns="0" rIns="0" bIns="0" rtlCol="0" anchor="ctr"/>
+          <a:lstStyle/>
+          <a:p>
             <a:pPr indent="0" marL="0">
               <a:buNone/>
             </a:pPr>
             <a:r>
-              <a:rPr lang="en-US" sz="1420" dirty="0">
+              <a:rPr lang="en-US" sz="950" b="1" dirty="0">
+                <a:solidFill>
+                  <a:srgbClr val="0068B7"/>
+                </a:solidFill>
+                <a:latin typeface="Aptos" pitchFamily="34" charset="0"/>
+                <a:ea typeface="Aptos" pitchFamily="34" charset="-122"/>
+                <a:cs typeface="Aptos" pitchFamily="34" charset="-120"/>
+              </a:rPr>
+              <a:t>Key idea</a:t>
+            </a:r>
+            <a:endParaRPr lang="en-US" sz="950" dirty="0"/>
+          </a:p>
+        </p:txBody>
+      </p:sp>
+      <p:sp>
+        <p:nvSpPr>
+          <p:cNvPr id="13" name="Text 11"/>
+          <p:cNvSpPr/>
+          <p:nvPr/>
+        </p:nvSpPr>
+        <p:spPr>
+          <a:xfrm>
+            <a:off x="8074152" y="1856232"/>
+            <a:ext cx="2825496" cy="1261872"/>
+          </a:xfrm>
+          <a:prstGeom prst="rect">
+            <a:avLst/>
+          </a:prstGeom>
+          <a:noFill/>
+          <a:ln/>
+        </p:spPr>
+        <p:txBody>
+          <a:bodyPr wrap="square" lIns="0" tIns="0" rIns="0" bIns="0" rtlCol="0" anchor="t">
+            <a:normAutofit/>
+          </a:bodyPr>
+          <a:lstStyle/>
+          <a:p>
+            <a:pPr indent="0" marL="0">
+              <a:buNone/>
+            </a:pPr>
+            <a:r>
+              <a:rPr lang="en-US" sz="1250" dirty="0">
                 <a:solidFill>
                   <a:srgbClr val="17364A"/>
                 </a:solidFill>
@@ -4853,9 +7408,116 @@
                 <a:ea typeface="Aptos" pitchFamily="34" charset="-122"/>
                 <a:cs typeface="Aptos" pitchFamily="34" charset="-120"/>
               </a:rPr>
-              <a:t>Community context and action plan</a:t>
-            </a:r>
-            <a:endParaRPr lang="en-US" sz="1420" dirty="0"/>
+              <a:t>Create a geospatial AI readiness worksheet for one public health workflow.</a:t>
+            </a:r>
+            <a:endParaRPr lang="en-US" sz="1250" dirty="0"/>
+          </a:p>
+        </p:txBody>
+      </p:sp>
+      <p:sp>
+        <p:nvSpPr>
+          <p:cNvPr id="14" name="Shape 12"/>
+          <p:cNvSpPr/>
+          <p:nvPr/>
+        </p:nvSpPr>
+        <p:spPr>
+          <a:xfrm>
+            <a:off x="7909560" y="3520440"/>
+            <a:ext cx="3154680" cy="1737360"/>
+          </a:xfrm>
+          <a:prstGeom prst="roundRect">
+            <a:avLst>
+              <a:gd name="adj" fmla="val 6316"/>
+            </a:avLst>
+          </a:prstGeom>
+          <a:solidFill>
+            <a:srgbClr val="EAF6F8"/>
+          </a:solidFill>
+          <a:ln w="12700">
+            <a:solidFill>
+              <a:srgbClr val="B9D7E6"/>
+            </a:solidFill>
+            <a:prstDash val="solid"/>
+          </a:ln>
+        </p:spPr>
+      </p:sp>
+      <p:sp>
+        <p:nvSpPr>
+          <p:cNvPr id="15" name="Text 13"/>
+          <p:cNvSpPr/>
+          <p:nvPr/>
+        </p:nvSpPr>
+        <p:spPr>
+          <a:xfrm>
+            <a:off x="8074152" y="3666744"/>
+            <a:ext cx="2825496" cy="201168"/>
+          </a:xfrm>
+          <a:prstGeom prst="rect">
+            <a:avLst/>
+          </a:prstGeom>
+          <a:noFill/>
+          <a:ln/>
+        </p:spPr>
+        <p:txBody>
+          <a:bodyPr wrap="square" lIns="0" tIns="0" rIns="0" bIns="0" rtlCol="0" anchor="ctr"/>
+          <a:lstStyle/>
+          <a:p>
+            <a:pPr indent="0" marL="0">
+              <a:buNone/>
+            </a:pPr>
+            <a:r>
+              <a:rPr lang="en-US" sz="950" b="1" dirty="0">
+                <a:solidFill>
+                  <a:srgbClr val="0068B7"/>
+                </a:solidFill>
+                <a:latin typeface="Aptos" pitchFamily="34" charset="0"/>
+                <a:ea typeface="Aptos" pitchFamily="34" charset="-122"/>
+                <a:cs typeface="Aptos" pitchFamily="34" charset="-120"/>
+              </a:rPr>
+              <a:t>Use this for</a:t>
+            </a:r>
+            <a:endParaRPr lang="en-US" sz="950" dirty="0"/>
+          </a:p>
+        </p:txBody>
+      </p:sp>
+      <p:sp>
+        <p:nvSpPr>
+          <p:cNvPr id="16" name="Text 14"/>
+          <p:cNvSpPr/>
+          <p:nvPr/>
+        </p:nvSpPr>
+        <p:spPr>
+          <a:xfrm>
+            <a:off x="8074152" y="3959352"/>
+            <a:ext cx="2825496" cy="1170432"/>
+          </a:xfrm>
+          <a:prstGeom prst="rect">
+            <a:avLst/>
+          </a:prstGeom>
+          <a:noFill/>
+          <a:ln/>
+        </p:spPr>
+        <p:txBody>
+          <a:bodyPr wrap="square" lIns="0" tIns="0" rIns="0" bIns="0" rtlCol="0" anchor="t">
+            <a:normAutofit/>
+          </a:bodyPr>
+          <a:lstStyle/>
+          <a:p>
+            <a:pPr indent="0" marL="0">
+              <a:buNone/>
+            </a:pPr>
+            <a:r>
+              <a:rPr lang="en-US" sz="1250" dirty="0">
+                <a:solidFill>
+                  <a:srgbClr val="17364A"/>
+                </a:solidFill>
+                <a:latin typeface="Aptos" pitchFamily="34" charset="0"/>
+                <a:ea typeface="Aptos" pitchFamily="34" charset="-122"/>
+                <a:cs typeface="Aptos" pitchFamily="34" charset="-120"/>
+              </a:rPr>
+              <a:t>Connect the concept to public health decisions, safeguards, documentation, or implementation work.</a:t>
+            </a:r>
+            <a:endParaRPr lang="en-US" sz="1250" dirty="0"/>
           </a:p>
         </p:txBody>
       </p:sp>
@@ -4918,7 +7580,32 @@
       </p:sp>
       <p:sp>
         <p:nvSpPr>
-          <p:cNvPr id="3" name="Text 1"/>
+          <p:cNvPr id="3" name="Shape 1"/>
+          <p:cNvSpPr/>
+          <p:nvPr/>
+        </p:nvSpPr>
+        <p:spPr>
+          <a:xfrm>
+            <a:off x="0" y="164592"/>
+            <a:ext cx="146304" cy="6693408"/>
+          </a:xfrm>
+          <a:prstGeom prst="rect">
+            <a:avLst/>
+          </a:prstGeom>
+          <a:solidFill>
+            <a:srgbClr val="2F8A28"/>
+          </a:solidFill>
+          <a:ln w="12700">
+            <a:solidFill>
+              <a:srgbClr val="2F8A28"/>
+            </a:solidFill>
+            <a:prstDash val="solid"/>
+          </a:ln>
+        </p:spPr>
+      </p:sp>
+      <p:sp>
+        <p:nvSpPr>
+          <p:cNvPr id="4" name="Text 2"/>
           <p:cNvSpPr/>
           <p:nvPr/>
         </p:nvSpPr>
@@ -4957,7 +7644,7 @@
       </p:sp>
       <p:sp>
         <p:nvSpPr>
-          <p:cNvPr id="4" name="Text 2"/>
+          <p:cNvPr id="5" name="Text 3"/>
           <p:cNvSpPr/>
           <p:nvPr/>
         </p:nvSpPr>
@@ -4996,7 +7683,7 @@
       </p:sp>
       <p:sp>
         <p:nvSpPr>
-          <p:cNvPr id="5" name="Text 3"/>
+          <p:cNvPr id="6" name="Text 4"/>
           <p:cNvSpPr/>
           <p:nvPr/>
         </p:nvSpPr>
@@ -5035,13 +7722,77 @@
       </p:sp>
       <p:sp>
         <p:nvSpPr>
-          <p:cNvPr id="6" name="Text 4"/>
+          <p:cNvPr id="7" name="Shape 5"/>
           <p:cNvSpPr/>
           <p:nvPr/>
         </p:nvSpPr>
         <p:spPr>
           <a:xfrm>
             <a:off x="640080" y="658368"/>
+            <a:ext cx="420624" cy="420624"/>
+          </a:xfrm>
+          <a:prstGeom prst="ellipse">
+            <a:avLst/>
+          </a:prstGeom>
+          <a:solidFill>
+            <a:srgbClr val="0068B7"/>
+          </a:solidFill>
+          <a:ln w="12700">
+            <a:solidFill>
+              <a:srgbClr val="0068B7"/>
+            </a:solidFill>
+            <a:prstDash val="solid"/>
+          </a:ln>
+        </p:spPr>
+      </p:sp>
+      <p:sp>
+        <p:nvSpPr>
+          <p:cNvPr id="8" name="Text 6"/>
+          <p:cNvSpPr/>
+          <p:nvPr/>
+        </p:nvSpPr>
+        <p:spPr>
+          <a:xfrm>
+            <a:off x="640080" y="731520"/>
+            <a:ext cx="420624" cy="164592"/>
+          </a:xfrm>
+          <a:prstGeom prst="rect">
+            <a:avLst/>
+          </a:prstGeom>
+          <a:noFill/>
+          <a:ln/>
+        </p:spPr>
+        <p:txBody>
+          <a:bodyPr wrap="square" lIns="0" tIns="0" rIns="0" bIns="0" rtlCol="0" anchor="ctr"/>
+          <a:lstStyle/>
+          <a:p>
+            <a:pPr algn="ctr" indent="0" marL="0">
+              <a:buNone/>
+            </a:pPr>
+            <a:r>
+              <a:rPr lang="en-US" sz="1100" b="1" dirty="0">
+                <a:solidFill>
+                  <a:srgbClr val="FFFFFF"/>
+                </a:solidFill>
+                <a:latin typeface="Aptos" pitchFamily="34" charset="0"/>
+                <a:ea typeface="Aptos" pitchFamily="34" charset="-122"/>
+                <a:cs typeface="Aptos" pitchFamily="34" charset="-120"/>
+              </a:rPr>
+              <a:t>10</a:t>
+            </a:r>
+            <a:endParaRPr lang="en-US" sz="1100" dirty="0"/>
+          </a:p>
+        </p:txBody>
+      </p:sp>
+      <p:sp>
+        <p:nvSpPr>
+          <p:cNvPr id="9" name="Text 7"/>
+          <p:cNvSpPr/>
+          <p:nvPr/>
+        </p:nvSpPr>
+        <p:spPr>
+          <a:xfrm>
+            <a:off x="640080" y="621792"/>
             <a:ext cx="10881360" cy="566928"/>
           </a:xfrm>
           <a:prstGeom prst="rect">
@@ -5068,7 +7819,7 @@
                 <a:ea typeface="Aptos Display" pitchFamily="34" charset="-122"/>
                 <a:cs typeface="Aptos Display" pitchFamily="34" charset="-120"/>
               </a:rPr>
-              <a:t>Expected Assignment</a:t>
+              <a:t>Expected Artifact or Evidence</a:t>
             </a:r>
             <a:endParaRPr lang="en-US" sz="2700" dirty="0"/>
           </a:p>
@@ -5076,14 +7827,14 @@
       </p:sp>
       <p:sp>
         <p:nvSpPr>
-          <p:cNvPr id="7" name="Text 5"/>
-          <p:cNvSpPr/>
-          <p:nvPr/>
-        </p:nvSpPr>
-        <p:spPr>
-          <a:xfrm>
-            <a:off x="822960" y="1325880"/>
-            <a:ext cx="10378440" cy="4800600"/>
+          <p:cNvPr id="10" name="Text 8"/>
+          <p:cNvSpPr/>
+          <p:nvPr/>
+        </p:nvSpPr>
+        <p:spPr>
+          <a:xfrm>
+            <a:off x="868680" y="1417320"/>
+            <a:ext cx="6675120" cy="4434840"/>
           </a:xfrm>
           <a:prstGeom prst="rect">
             <a:avLst/>
@@ -5098,7 +7849,7 @@
           <a:lstStyle/>
           <a:p>
             <a:r>
-              <a:rPr lang="en-US" sz="1450" dirty="0">
+              <a:rPr lang="en-US" sz="1700" dirty="0">
                 <a:solidFill>
                   <a:srgbClr val="17364A"/>
                 </a:solidFill>
@@ -5108,11 +7859,11 @@
               </a:rPr>
               <a:t>Geospatial AI readiness worksheet</a:t>
             </a:r>
-            <a:endParaRPr lang="en-US" sz="1450" dirty="0"/>
-          </a:p>
-          <a:p>
-            <a:r>
-              <a:rPr lang="en-US" sz="1450" dirty="0">
+            <a:endParaRPr lang="en-US" sz="1700" dirty="0"/>
+          </a:p>
+          <a:p>
+            <a:r>
+              <a:rPr lang="en-US" sz="1700" dirty="0">
                 <a:solidFill>
                   <a:srgbClr val="17364A"/>
                 </a:solidFill>
@@ -5122,11 +7873,11 @@
               </a:rPr>
               <a:t>Map interpretation and limitations memo</a:t>
             </a:r>
-            <a:endParaRPr lang="en-US" sz="1450" dirty="0"/>
-          </a:p>
-          <a:p>
-            <a:r>
-              <a:rPr lang="en-US" sz="1450" dirty="0">
+            <a:endParaRPr lang="en-US" sz="1700" dirty="0"/>
+          </a:p>
+          <a:p>
+            <a:r>
+              <a:rPr lang="en-US" sz="1700" dirty="0">
                 <a:solidFill>
                   <a:srgbClr val="17364A"/>
                 </a:solidFill>
@@ -5136,11 +7887,104 @@
               </a:rPr>
               <a:t>Privacy and suppression review notes</a:t>
             </a:r>
-            <a:endParaRPr lang="en-US" sz="1450" dirty="0"/>
-          </a:p>
-          <a:p>
-            <a:r>
-              <a:rPr lang="en-US" sz="1450" dirty="0">
+            <a:endParaRPr lang="en-US" sz="1700" dirty="0"/>
+          </a:p>
+        </p:txBody>
+      </p:sp>
+      <p:sp>
+        <p:nvSpPr>
+          <p:cNvPr id="11" name="Shape 9"/>
+          <p:cNvSpPr/>
+          <p:nvPr/>
+        </p:nvSpPr>
+        <p:spPr>
+          <a:xfrm>
+            <a:off x="7909560" y="1417320"/>
+            <a:ext cx="3154680" cy="1828800"/>
+          </a:xfrm>
+          <a:prstGeom prst="roundRect">
+            <a:avLst>
+              <a:gd name="adj" fmla="val 6000"/>
+            </a:avLst>
+          </a:prstGeom>
+          <a:solidFill>
+            <a:srgbClr val="EEF8ED"/>
+          </a:solidFill>
+          <a:ln w="12700">
+            <a:solidFill>
+              <a:srgbClr val="B9D7E6"/>
+            </a:solidFill>
+            <a:prstDash val="solid"/>
+          </a:ln>
+        </p:spPr>
+      </p:sp>
+      <p:sp>
+        <p:nvSpPr>
+          <p:cNvPr id="12" name="Text 10"/>
+          <p:cNvSpPr/>
+          <p:nvPr/>
+        </p:nvSpPr>
+        <p:spPr>
+          <a:xfrm>
+            <a:off x="8074152" y="1563624"/>
+            <a:ext cx="2825496" cy="201168"/>
+          </a:xfrm>
+          <a:prstGeom prst="rect">
+            <a:avLst/>
+          </a:prstGeom>
+          <a:noFill/>
+          <a:ln/>
+        </p:spPr>
+        <p:txBody>
+          <a:bodyPr wrap="square" lIns="0" tIns="0" rIns="0" bIns="0" rtlCol="0" anchor="ctr"/>
+          <a:lstStyle/>
+          <a:p>
+            <a:pPr indent="0" marL="0">
+              <a:buNone/>
+            </a:pPr>
+            <a:r>
+              <a:rPr lang="en-US" sz="950" b="1" dirty="0">
+                <a:solidFill>
+                  <a:srgbClr val="0068B7"/>
+                </a:solidFill>
+                <a:latin typeface="Aptos" pitchFamily="34" charset="0"/>
+                <a:ea typeface="Aptos" pitchFamily="34" charset="-122"/>
+                <a:cs typeface="Aptos" pitchFamily="34" charset="-120"/>
+              </a:rPr>
+              <a:t>Key idea</a:t>
+            </a:r>
+            <a:endParaRPr lang="en-US" sz="950" dirty="0"/>
+          </a:p>
+        </p:txBody>
+      </p:sp>
+      <p:sp>
+        <p:nvSpPr>
+          <p:cNvPr id="13" name="Text 11"/>
+          <p:cNvSpPr/>
+          <p:nvPr/>
+        </p:nvSpPr>
+        <p:spPr>
+          <a:xfrm>
+            <a:off x="8074152" y="1856232"/>
+            <a:ext cx="2825496" cy="1261872"/>
+          </a:xfrm>
+          <a:prstGeom prst="rect">
+            <a:avLst/>
+          </a:prstGeom>
+          <a:noFill/>
+          <a:ln/>
+        </p:spPr>
+        <p:txBody>
+          <a:bodyPr wrap="square" lIns="0" tIns="0" rIns="0" bIns="0" rtlCol="0" anchor="t">
+            <a:normAutofit/>
+          </a:bodyPr>
+          <a:lstStyle/>
+          <a:p>
+            <a:pPr indent="0" marL="0">
+              <a:buNone/>
+            </a:pPr>
+            <a:r>
+              <a:rPr lang="en-US" sz="1250" dirty="0">
                 <a:solidFill>
                   <a:srgbClr val="17364A"/>
                 </a:solidFill>
@@ -5148,9 +7992,116 @@
                 <a:ea typeface="Aptos" pitchFamily="34" charset="-122"/>
                 <a:cs typeface="Aptos" pitchFamily="34" charset="-120"/>
               </a:rPr>
-              <a:t>Community context and action plan</a:t>
-            </a:r>
-            <a:endParaRPr lang="en-US" sz="1450" dirty="0"/>
+              <a:t>Geospatial AI readiness worksheet</a:t>
+            </a:r>
+            <a:endParaRPr lang="en-US" sz="1250" dirty="0"/>
+          </a:p>
+        </p:txBody>
+      </p:sp>
+      <p:sp>
+        <p:nvSpPr>
+          <p:cNvPr id="14" name="Shape 12"/>
+          <p:cNvSpPr/>
+          <p:nvPr/>
+        </p:nvSpPr>
+        <p:spPr>
+          <a:xfrm>
+            <a:off x="7909560" y="3520440"/>
+            <a:ext cx="3154680" cy="1737360"/>
+          </a:xfrm>
+          <a:prstGeom prst="roundRect">
+            <a:avLst>
+              <a:gd name="adj" fmla="val 6316"/>
+            </a:avLst>
+          </a:prstGeom>
+          <a:solidFill>
+            <a:srgbClr val="EAF6F8"/>
+          </a:solidFill>
+          <a:ln w="12700">
+            <a:solidFill>
+              <a:srgbClr val="B9D7E6"/>
+            </a:solidFill>
+            <a:prstDash val="solid"/>
+          </a:ln>
+        </p:spPr>
+      </p:sp>
+      <p:sp>
+        <p:nvSpPr>
+          <p:cNvPr id="15" name="Text 13"/>
+          <p:cNvSpPr/>
+          <p:nvPr/>
+        </p:nvSpPr>
+        <p:spPr>
+          <a:xfrm>
+            <a:off x="8074152" y="3666744"/>
+            <a:ext cx="2825496" cy="201168"/>
+          </a:xfrm>
+          <a:prstGeom prst="rect">
+            <a:avLst/>
+          </a:prstGeom>
+          <a:noFill/>
+          <a:ln/>
+        </p:spPr>
+        <p:txBody>
+          <a:bodyPr wrap="square" lIns="0" tIns="0" rIns="0" bIns="0" rtlCol="0" anchor="ctr"/>
+          <a:lstStyle/>
+          <a:p>
+            <a:pPr indent="0" marL="0">
+              <a:buNone/>
+            </a:pPr>
+            <a:r>
+              <a:rPr lang="en-US" sz="950" b="1" dirty="0">
+                <a:solidFill>
+                  <a:srgbClr val="0068B7"/>
+                </a:solidFill>
+                <a:latin typeface="Aptos" pitchFamily="34" charset="0"/>
+                <a:ea typeface="Aptos" pitchFamily="34" charset="-122"/>
+                <a:cs typeface="Aptos" pitchFamily="34" charset="-120"/>
+              </a:rPr>
+              <a:t>Use this for</a:t>
+            </a:r>
+            <a:endParaRPr lang="en-US" sz="950" dirty="0"/>
+          </a:p>
+        </p:txBody>
+      </p:sp>
+      <p:sp>
+        <p:nvSpPr>
+          <p:cNvPr id="16" name="Text 14"/>
+          <p:cNvSpPr/>
+          <p:nvPr/>
+        </p:nvSpPr>
+        <p:spPr>
+          <a:xfrm>
+            <a:off x="8074152" y="3959352"/>
+            <a:ext cx="2825496" cy="1170432"/>
+          </a:xfrm>
+          <a:prstGeom prst="rect">
+            <a:avLst/>
+          </a:prstGeom>
+          <a:noFill/>
+          <a:ln/>
+        </p:spPr>
+        <p:txBody>
+          <a:bodyPr wrap="square" lIns="0" tIns="0" rIns="0" bIns="0" rtlCol="0" anchor="t">
+            <a:normAutofit/>
+          </a:bodyPr>
+          <a:lstStyle/>
+          <a:p>
+            <a:pPr indent="0" marL="0">
+              <a:buNone/>
+            </a:pPr>
+            <a:r>
+              <a:rPr lang="en-US" sz="1250" dirty="0">
+                <a:solidFill>
+                  <a:srgbClr val="17364A"/>
+                </a:solidFill>
+                <a:latin typeface="Aptos" pitchFamily="34" charset="0"/>
+                <a:ea typeface="Aptos" pitchFamily="34" charset="-122"/>
+                <a:cs typeface="Aptos" pitchFamily="34" charset="-120"/>
+              </a:rPr>
+              <a:t>Connect the concept to public health decisions, safeguards, documentation, or implementation work.</a:t>
+            </a:r>
+            <a:endParaRPr lang="en-US" sz="1250" dirty="0"/>
           </a:p>
         </p:txBody>
       </p:sp>
@@ -5213,7 +8164,32 @@
       </p:sp>
       <p:sp>
         <p:nvSpPr>
-          <p:cNvPr id="3" name="Text 1"/>
+          <p:cNvPr id="3" name="Shape 1"/>
+          <p:cNvSpPr/>
+          <p:nvPr/>
+        </p:nvSpPr>
+        <p:spPr>
+          <a:xfrm>
+            <a:off x="0" y="164592"/>
+            <a:ext cx="146304" cy="6693408"/>
+          </a:xfrm>
+          <a:prstGeom prst="rect">
+            <a:avLst/>
+          </a:prstGeom>
+          <a:solidFill>
+            <a:srgbClr val="2F8A28"/>
+          </a:solidFill>
+          <a:ln w="12700">
+            <a:solidFill>
+              <a:srgbClr val="2F8A28"/>
+            </a:solidFill>
+            <a:prstDash val="solid"/>
+          </a:ln>
+        </p:spPr>
+      </p:sp>
+      <p:sp>
+        <p:nvSpPr>
+          <p:cNvPr id="4" name="Text 2"/>
           <p:cNvSpPr/>
           <p:nvPr/>
         </p:nvSpPr>
@@ -5252,7 +8228,7 @@
       </p:sp>
       <p:sp>
         <p:nvSpPr>
-          <p:cNvPr id="4" name="Text 2"/>
+          <p:cNvPr id="5" name="Text 3"/>
           <p:cNvSpPr/>
           <p:nvPr/>
         </p:nvSpPr>
@@ -5291,7 +8267,7 @@
       </p:sp>
       <p:sp>
         <p:nvSpPr>
-          <p:cNvPr id="5" name="Text 3"/>
+          <p:cNvPr id="6" name="Text 4"/>
           <p:cNvSpPr/>
           <p:nvPr/>
         </p:nvSpPr>
@@ -5330,7 +8306,7 @@
       </p:sp>
       <p:sp>
         <p:nvSpPr>
-          <p:cNvPr id="6" name="Text 4"/>
+          <p:cNvPr id="7" name="Text 5"/>
           <p:cNvSpPr/>
           <p:nvPr/>
         </p:nvSpPr>
@@ -5363,7 +8339,7 @@
                 <a:ea typeface="Aptos Display" pitchFamily="34" charset="-122"/>
                 <a:cs typeface="Aptos Display" pitchFamily="34" charset="-120"/>
               </a:rPr>
-              <a:t>Knowledge Check</a:t>
+              <a:t>Expected Artifact or Evidence Continued</a:t>
             </a:r>
             <a:endParaRPr lang="en-US" sz="2700" dirty="0"/>
           </a:p>
@@ -5371,14 +8347,14 @@
       </p:sp>
       <p:sp>
         <p:nvSpPr>
-          <p:cNvPr id="7" name="Text 5"/>
-          <p:cNvSpPr/>
-          <p:nvPr/>
-        </p:nvSpPr>
-        <p:spPr>
-          <a:xfrm>
-            <a:off x="822960" y="1325880"/>
-            <a:ext cx="10378440" cy="4800600"/>
+          <p:cNvPr id="8" name="Text 6"/>
+          <p:cNvSpPr/>
+          <p:nvPr/>
+        </p:nvSpPr>
+        <p:spPr>
+          <a:xfrm>
+            <a:off x="868680" y="1417320"/>
+            <a:ext cx="6675120" cy="4434840"/>
           </a:xfrm>
           <a:prstGeom prst="rect">
             <a:avLst/>
@@ -5393,7 +8369,7 @@
           <a:lstStyle/>
           <a:p>
             <a:r>
-              <a:rPr lang="en-US" sz="1450" dirty="0">
+              <a:rPr lang="en-US" sz="1700" dirty="0">
                 <a:solidFill>
                   <a:srgbClr val="17364A"/>
                 </a:solidFill>
@@ -5401,13 +8377,106 @@
                 <a:ea typeface="Aptos" pitchFamily="34" charset="-122"/>
                 <a:cs typeface="Aptos" pitchFamily="34" charset="-120"/>
               </a:rPr>
-              <a:t>1. What is geocoding?</a:t>
-            </a:r>
-            <a:endParaRPr lang="en-US" sz="1450" dirty="0"/>
-          </a:p>
-          <a:p>
-            <a:r>
-              <a:rPr lang="en-US" sz="1450" dirty="0">
+              <a:t>Community context and action plan</a:t>
+            </a:r>
+            <a:endParaRPr lang="en-US" sz="1700" dirty="0"/>
+          </a:p>
+        </p:txBody>
+      </p:sp>
+      <p:sp>
+        <p:nvSpPr>
+          <p:cNvPr id="9" name="Shape 7"/>
+          <p:cNvSpPr/>
+          <p:nvPr/>
+        </p:nvSpPr>
+        <p:spPr>
+          <a:xfrm>
+            <a:off x="7909560" y="1417320"/>
+            <a:ext cx="3154680" cy="1828800"/>
+          </a:xfrm>
+          <a:prstGeom prst="roundRect">
+            <a:avLst>
+              <a:gd name="adj" fmla="val 6000"/>
+            </a:avLst>
+          </a:prstGeom>
+          <a:solidFill>
+            <a:srgbClr val="EEF8ED"/>
+          </a:solidFill>
+          <a:ln w="12700">
+            <a:solidFill>
+              <a:srgbClr val="B9D7E6"/>
+            </a:solidFill>
+            <a:prstDash val="solid"/>
+          </a:ln>
+        </p:spPr>
+      </p:sp>
+      <p:sp>
+        <p:nvSpPr>
+          <p:cNvPr id="10" name="Text 8"/>
+          <p:cNvSpPr/>
+          <p:nvPr/>
+        </p:nvSpPr>
+        <p:spPr>
+          <a:xfrm>
+            <a:off x="8074152" y="1563624"/>
+            <a:ext cx="2825496" cy="201168"/>
+          </a:xfrm>
+          <a:prstGeom prst="rect">
+            <a:avLst/>
+          </a:prstGeom>
+          <a:noFill/>
+          <a:ln/>
+        </p:spPr>
+        <p:txBody>
+          <a:bodyPr wrap="square" lIns="0" tIns="0" rIns="0" bIns="0" rtlCol="0" anchor="ctr"/>
+          <a:lstStyle/>
+          <a:p>
+            <a:pPr indent="0" marL="0">
+              <a:buNone/>
+            </a:pPr>
+            <a:r>
+              <a:rPr lang="en-US" sz="950" b="1" dirty="0">
+                <a:solidFill>
+                  <a:srgbClr val="0068B7"/>
+                </a:solidFill>
+                <a:latin typeface="Aptos" pitchFamily="34" charset="0"/>
+                <a:ea typeface="Aptos" pitchFamily="34" charset="-122"/>
+                <a:cs typeface="Aptos" pitchFamily="34" charset="-120"/>
+              </a:rPr>
+              <a:t>Key idea</a:t>
+            </a:r>
+            <a:endParaRPr lang="en-US" sz="950" dirty="0"/>
+          </a:p>
+        </p:txBody>
+      </p:sp>
+      <p:sp>
+        <p:nvSpPr>
+          <p:cNvPr id="11" name="Text 9"/>
+          <p:cNvSpPr/>
+          <p:nvPr/>
+        </p:nvSpPr>
+        <p:spPr>
+          <a:xfrm>
+            <a:off x="8074152" y="1856232"/>
+            <a:ext cx="2825496" cy="1261872"/>
+          </a:xfrm>
+          <a:prstGeom prst="rect">
+            <a:avLst/>
+          </a:prstGeom>
+          <a:noFill/>
+          <a:ln/>
+        </p:spPr>
+        <p:txBody>
+          <a:bodyPr wrap="square" lIns="0" tIns="0" rIns="0" bIns="0" rtlCol="0" anchor="t">
+            <a:normAutofit/>
+          </a:bodyPr>
+          <a:lstStyle/>
+          <a:p>
+            <a:pPr indent="0" marL="0">
+              <a:buNone/>
+            </a:pPr>
+            <a:r>
+              <a:rPr lang="en-US" sz="1250" dirty="0">
                 <a:solidFill>
                   <a:srgbClr val="17364A"/>
                 </a:solidFill>
@@ -5415,13 +8484,106 @@
                 <a:ea typeface="Aptos" pitchFamily="34" charset="-122"/>
                 <a:cs typeface="Aptos" pitchFamily="34" charset="-120"/>
               </a:rPr>
-              <a:t>2. Why can maps create misleading impressions?</a:t>
-            </a:r>
-            <a:endParaRPr lang="en-US" sz="1450" dirty="0"/>
-          </a:p>
-          <a:p>
-            <a:r>
-              <a:rPr lang="en-US" sz="1450" dirty="0">
+              <a:t>Community context and action plan</a:t>
+            </a:r>
+            <a:endParaRPr lang="en-US" sz="1250" dirty="0"/>
+          </a:p>
+        </p:txBody>
+      </p:sp>
+      <p:sp>
+        <p:nvSpPr>
+          <p:cNvPr id="12" name="Shape 10"/>
+          <p:cNvSpPr/>
+          <p:nvPr/>
+        </p:nvSpPr>
+        <p:spPr>
+          <a:xfrm>
+            <a:off x="7909560" y="3520440"/>
+            <a:ext cx="3154680" cy="1737360"/>
+          </a:xfrm>
+          <a:prstGeom prst="roundRect">
+            <a:avLst>
+              <a:gd name="adj" fmla="val 6316"/>
+            </a:avLst>
+          </a:prstGeom>
+          <a:solidFill>
+            <a:srgbClr val="EAF6F8"/>
+          </a:solidFill>
+          <a:ln w="12700">
+            <a:solidFill>
+              <a:srgbClr val="B9D7E6"/>
+            </a:solidFill>
+            <a:prstDash val="solid"/>
+          </a:ln>
+        </p:spPr>
+      </p:sp>
+      <p:sp>
+        <p:nvSpPr>
+          <p:cNvPr id="13" name="Text 11"/>
+          <p:cNvSpPr/>
+          <p:nvPr/>
+        </p:nvSpPr>
+        <p:spPr>
+          <a:xfrm>
+            <a:off x="8074152" y="3666744"/>
+            <a:ext cx="2825496" cy="201168"/>
+          </a:xfrm>
+          <a:prstGeom prst="rect">
+            <a:avLst/>
+          </a:prstGeom>
+          <a:noFill/>
+          <a:ln/>
+        </p:spPr>
+        <p:txBody>
+          <a:bodyPr wrap="square" lIns="0" tIns="0" rIns="0" bIns="0" rtlCol="0" anchor="ctr"/>
+          <a:lstStyle/>
+          <a:p>
+            <a:pPr indent="0" marL="0">
+              <a:buNone/>
+            </a:pPr>
+            <a:r>
+              <a:rPr lang="en-US" sz="950" b="1" dirty="0">
+                <a:solidFill>
+                  <a:srgbClr val="0068B7"/>
+                </a:solidFill>
+                <a:latin typeface="Aptos" pitchFamily="34" charset="0"/>
+                <a:ea typeface="Aptos" pitchFamily="34" charset="-122"/>
+                <a:cs typeface="Aptos" pitchFamily="34" charset="-120"/>
+              </a:rPr>
+              <a:t>Use this for</a:t>
+            </a:r>
+            <a:endParaRPr lang="en-US" sz="950" dirty="0"/>
+          </a:p>
+        </p:txBody>
+      </p:sp>
+      <p:sp>
+        <p:nvSpPr>
+          <p:cNvPr id="14" name="Text 12"/>
+          <p:cNvSpPr/>
+          <p:nvPr/>
+        </p:nvSpPr>
+        <p:spPr>
+          <a:xfrm>
+            <a:off x="8074152" y="3959352"/>
+            <a:ext cx="2825496" cy="1170432"/>
+          </a:xfrm>
+          <a:prstGeom prst="rect">
+            <a:avLst/>
+          </a:prstGeom>
+          <a:noFill/>
+          <a:ln/>
+        </p:spPr>
+        <p:txBody>
+          <a:bodyPr wrap="square" lIns="0" tIns="0" rIns="0" bIns="0" rtlCol="0" anchor="t">
+            <a:normAutofit/>
+          </a:bodyPr>
+          <a:lstStyle/>
+          <a:p>
+            <a:pPr indent="0" marL="0">
+              <a:buNone/>
+            </a:pPr>
+            <a:r>
+              <a:rPr lang="en-US" sz="1250" dirty="0">
                 <a:solidFill>
                   <a:srgbClr val="17364A"/>
                 </a:solidFill>
@@ -5429,37 +8591,9 @@
                 <a:ea typeface="Aptos" pitchFamily="34" charset="-122"/>
                 <a:cs typeface="Aptos" pitchFamily="34" charset="-120"/>
               </a:rPr>
-              <a:t>3. What is the modifiable areal unit problem?</a:t>
-            </a:r>
-            <a:endParaRPr lang="en-US" sz="1450" dirty="0"/>
-          </a:p>
-          <a:p>
-            <a:r>
-              <a:rPr lang="en-US" sz="1450" dirty="0">
-                <a:solidFill>
-                  <a:srgbClr val="17364A"/>
-                </a:solidFill>
-                <a:latin typeface="Aptos" pitchFamily="34" charset="0"/>
-                <a:ea typeface="Aptos" pitchFamily="34" charset="-122"/>
-                <a:cs typeface="Aptos" pitchFamily="34" charset="-120"/>
-              </a:rPr>
-              <a:t>4. Which safeguard is appropriate before publishing a small-area health map?</a:t>
-            </a:r>
-            <a:endParaRPr lang="en-US" sz="1450" dirty="0"/>
-          </a:p>
-          <a:p>
-            <a:r>
-              <a:rPr lang="en-US" sz="1450" dirty="0">
-                <a:solidFill>
-                  <a:srgbClr val="17364A"/>
-                </a:solidFill>
-                <a:latin typeface="Aptos" pitchFamily="34" charset="0"/>
-                <a:ea typeface="Aptos" pitchFamily="34" charset="-122"/>
-                <a:cs typeface="Aptos" pitchFamily="34" charset="-120"/>
-              </a:rPr>
-              <a:t>5. What is strong completion evidence for this module?</a:t>
-            </a:r>
-            <a:endParaRPr lang="en-US" sz="1450" dirty="0"/>
+              <a:t>Connect the concept to public health decisions, safeguards, documentation, or implementation work.</a:t>
+            </a:r>
+            <a:endParaRPr lang="en-US" sz="1250" dirty="0"/>
           </a:p>
         </p:txBody>
       </p:sp>
@@ -5522,7 +8656,32 @@
       </p:sp>
       <p:sp>
         <p:nvSpPr>
-          <p:cNvPr id="3" name="Text 1"/>
+          <p:cNvPr id="3" name="Shape 1"/>
+          <p:cNvSpPr/>
+          <p:nvPr/>
+        </p:nvSpPr>
+        <p:spPr>
+          <a:xfrm>
+            <a:off x="0" y="164592"/>
+            <a:ext cx="146304" cy="6693408"/>
+          </a:xfrm>
+          <a:prstGeom prst="rect">
+            <a:avLst/>
+          </a:prstGeom>
+          <a:solidFill>
+            <a:srgbClr val="2F8A28"/>
+          </a:solidFill>
+          <a:ln w="12700">
+            <a:solidFill>
+              <a:srgbClr val="2F8A28"/>
+            </a:solidFill>
+            <a:prstDash val="solid"/>
+          </a:ln>
+        </p:spPr>
+      </p:sp>
+      <p:sp>
+        <p:nvSpPr>
+          <p:cNvPr id="4" name="Text 2"/>
           <p:cNvSpPr/>
           <p:nvPr/>
         </p:nvSpPr>
@@ -5561,7 +8720,7 @@
       </p:sp>
       <p:sp>
         <p:nvSpPr>
-          <p:cNvPr id="4" name="Text 2"/>
+          <p:cNvPr id="5" name="Text 3"/>
           <p:cNvSpPr/>
           <p:nvPr/>
         </p:nvSpPr>
@@ -5600,7 +8759,7 @@
       </p:sp>
       <p:sp>
         <p:nvSpPr>
-          <p:cNvPr id="5" name="Text 3"/>
+          <p:cNvPr id="6" name="Text 4"/>
           <p:cNvSpPr/>
           <p:nvPr/>
         </p:nvSpPr>
@@ -5639,7 +8798,7 @@
       </p:sp>
       <p:sp>
         <p:nvSpPr>
-          <p:cNvPr id="6" name="Text 4"/>
+          <p:cNvPr id="7" name="Text 5"/>
           <p:cNvSpPr/>
           <p:nvPr/>
         </p:nvSpPr>
@@ -5672,7 +8831,7 @@
                 <a:ea typeface="Aptos Display" pitchFamily="34" charset="-122"/>
                 <a:cs typeface="Aptos Display" pitchFamily="34" charset="-120"/>
               </a:rPr>
-              <a:t>Module Context</a:t>
+              <a:t>What this module helps you do</a:t>
             </a:r>
             <a:endParaRPr lang="en-US" sz="2700" dirty="0"/>
           </a:p>
@@ -5680,14 +8839,14 @@
       </p:sp>
       <p:sp>
         <p:nvSpPr>
-          <p:cNvPr id="7" name="Text 5"/>
-          <p:cNvSpPr/>
-          <p:nvPr/>
-        </p:nvSpPr>
-        <p:spPr>
-          <a:xfrm>
-            <a:off x="822960" y="1325880"/>
-            <a:ext cx="10378440" cy="1371600"/>
+          <p:cNvPr id="8" name="Text 6"/>
+          <p:cNvSpPr/>
+          <p:nvPr/>
+        </p:nvSpPr>
+        <p:spPr>
+          <a:xfrm>
+            <a:off x="868680" y="1417320"/>
+            <a:ext cx="6675120" cy="3291840"/>
           </a:xfrm>
           <a:prstGeom prst="rect">
             <a:avLst/>
@@ -5702,7 +8861,7 @@
           <a:lstStyle/>
           <a:p>
             <a:r>
-              <a:rPr lang="en-US" sz="1600" dirty="0">
+              <a:rPr lang="en-US" sz="1700" dirty="0">
                 <a:solidFill>
                   <a:srgbClr val="17364A"/>
                 </a:solidFill>
@@ -5710,13 +8869,13 @@
                 <a:ea typeface="Aptos" pitchFamily="34" charset="-122"/>
                 <a:cs typeface="Aptos" pitchFamily="34" charset="-120"/>
               </a:rPr>
-              <a:t>Level: applied/foundational</a:t>
-            </a:r>
-            <a:endParaRPr lang="en-US" sz="1600" dirty="0"/>
-          </a:p>
-          <a:p>
-            <a:r>
-              <a:rPr lang="en-US" sz="1600" dirty="0">
+              <a:t>Geospatial AI combines spatial data, geographic analysis, and AI methods to identify patterns across place.</a:t>
+            </a:r>
+            <a:endParaRPr lang="en-US" sz="1700" dirty="0"/>
+          </a:p>
+          <a:p>
+            <a:r>
+              <a:rPr lang="en-US" sz="1700" dirty="0">
                 <a:solidFill>
                   <a:srgbClr val="17364A"/>
                 </a:solidFill>
@@ -5724,13 +8883,13 @@
                 <a:ea typeface="Aptos" pitchFamily="34" charset="-122"/>
                 <a:cs typeface="Aptos" pitchFamily="34" charset="-120"/>
               </a:rPr>
-              <a:t>Primary track: Analytics and Modeling Track</a:t>
-            </a:r>
-            <a:endParaRPr lang="en-US" sz="1600" dirty="0"/>
-          </a:p>
-          <a:p>
-            <a:r>
-              <a:rPr lang="en-US" sz="1600" dirty="0">
+              <a:t>In public health, spatial analysis is already central to outbreak response, environmental health, emergency preparedness, community health.</a:t>
+            </a:r>
+            <a:endParaRPr lang="en-US" sz="1700" dirty="0"/>
+          </a:p>
+          <a:p>
+            <a:r>
+              <a:rPr lang="en-US" sz="1700" dirty="0">
                 <a:solidFill>
                   <a:srgbClr val="17364A"/>
                 </a:solidFill>
@@ -5738,31 +8897,111 @@
                 <a:ea typeface="Aptos" pitchFamily="34" charset="-122"/>
                 <a:cs typeface="Aptos" pitchFamily="34" charset="-120"/>
               </a:rPr>
-              <a:t>Appears in tracks: analytics-modeling</a:t>
-            </a:r>
-            <a:endParaRPr lang="en-US" sz="1600" dirty="0"/>
-          </a:p>
-        </p:txBody>
-      </p:sp>
-      <p:sp>
-        <p:nvSpPr>
-          <p:cNvPr id="8" name="Text 6"/>
-          <p:cNvSpPr/>
-          <p:nvPr/>
-        </p:nvSpPr>
-        <p:spPr>
-          <a:xfrm>
-            <a:off x="822960" y="2743200"/>
-            <a:ext cx="10378440" cy="2834640"/>
-          </a:xfrm>
-          <a:prstGeom prst="rect">
-            <a:avLst/>
-          </a:prstGeom>
-          <a:noFill/>
-          <a:ln/>
-        </p:spPr>
-        <p:txBody>
-          <a:bodyPr wrap="square" lIns="1016" tIns="1016" rIns="1016" bIns="1016" rtlCol="0" anchor="t">
+              <a:t>AI can strengthen these activities when it helps detect clusters, estimate access barriers, classify imagery, prioritize field work, or synthesize.</a:t>
+            </a:r>
+            <a:endParaRPr lang="en-US" sz="1700" dirty="0"/>
+          </a:p>
+          <a:p>
+            <a:r>
+              <a:rPr lang="en-US" sz="1700" dirty="0">
+                <a:solidFill>
+                  <a:srgbClr val="17364A"/>
+                </a:solidFill>
+                <a:latin typeface="Aptos" pitchFamily="34" charset="0"/>
+                <a:ea typeface="Aptos" pitchFamily="34" charset="-122"/>
+                <a:cs typeface="Aptos" pitchFamily="34" charset="-120"/>
+              </a:rPr>
+              <a:t>This module introduces the technical and governance issues that arise when AI uses location.</a:t>
+            </a:r>
+            <a:endParaRPr lang="en-US" sz="1700" dirty="0"/>
+          </a:p>
+        </p:txBody>
+      </p:sp>
+      <p:sp>
+        <p:nvSpPr>
+          <p:cNvPr id="9" name="Shape 7"/>
+          <p:cNvSpPr/>
+          <p:nvPr/>
+        </p:nvSpPr>
+        <p:spPr>
+          <a:xfrm>
+            <a:off x="7909560" y="1417320"/>
+            <a:ext cx="3154680" cy="1920240"/>
+          </a:xfrm>
+          <a:prstGeom prst="roundRect">
+            <a:avLst>
+              <a:gd name="adj" fmla="val 5714"/>
+            </a:avLst>
+          </a:prstGeom>
+          <a:solidFill>
+            <a:srgbClr val="EAF6F8"/>
+          </a:solidFill>
+          <a:ln w="12700">
+            <a:solidFill>
+              <a:srgbClr val="B9D7E6"/>
+            </a:solidFill>
+            <a:prstDash val="solid"/>
+          </a:ln>
+        </p:spPr>
+      </p:sp>
+      <p:sp>
+        <p:nvSpPr>
+          <p:cNvPr id="10" name="Text 8"/>
+          <p:cNvSpPr/>
+          <p:nvPr/>
+        </p:nvSpPr>
+        <p:spPr>
+          <a:xfrm>
+            <a:off x="8074152" y="1563624"/>
+            <a:ext cx="2825496" cy="201168"/>
+          </a:xfrm>
+          <a:prstGeom prst="rect">
+            <a:avLst/>
+          </a:prstGeom>
+          <a:noFill/>
+          <a:ln/>
+        </p:spPr>
+        <p:txBody>
+          <a:bodyPr wrap="square" lIns="0" tIns="0" rIns="0" bIns="0" rtlCol="0" anchor="ctr"/>
+          <a:lstStyle/>
+          <a:p>
+            <a:pPr indent="0" marL="0">
+              <a:buNone/>
+            </a:pPr>
+            <a:r>
+              <a:rPr lang="en-US" sz="950" b="1" dirty="0">
+                <a:solidFill>
+                  <a:srgbClr val="0068B7"/>
+                </a:solidFill>
+                <a:latin typeface="Aptos" pitchFamily="34" charset="0"/>
+                <a:ea typeface="Aptos" pitchFamily="34" charset="-122"/>
+                <a:cs typeface="Aptos" pitchFamily="34" charset="-120"/>
+              </a:rPr>
+              <a:t>Module details</a:t>
+            </a:r>
+            <a:endParaRPr lang="en-US" sz="950" dirty="0"/>
+          </a:p>
+        </p:txBody>
+      </p:sp>
+      <p:sp>
+        <p:nvSpPr>
+          <p:cNvPr id="11" name="Text 9"/>
+          <p:cNvSpPr/>
+          <p:nvPr/>
+        </p:nvSpPr>
+        <p:spPr>
+          <a:xfrm>
+            <a:off x="8074152" y="1856232"/>
+            <a:ext cx="2825496" cy="1353312"/>
+          </a:xfrm>
+          <a:prstGeom prst="rect">
+            <a:avLst/>
+          </a:prstGeom>
+          <a:noFill/>
+          <a:ln/>
+        </p:spPr>
+        <p:txBody>
+          <a:bodyPr wrap="square" lIns="0" tIns="0" rIns="0" bIns="0" rtlCol="0" anchor="t">
             <a:normAutofit/>
           </a:bodyPr>
           <a:lstStyle/>
@@ -5771,7 +9010,7 @@
               <a:buNone/>
             </a:pPr>
             <a:r>
-              <a:rPr lang="en-US" sz="1400" dirty="0">
+              <a:rPr lang="en-US" sz="1250" dirty="0">
                 <a:solidFill>
                   <a:srgbClr val="17364A"/>
                 </a:solidFill>
@@ -5779,9 +9018,150 @@
                 <a:ea typeface="Aptos" pitchFamily="34" charset="-122"/>
                 <a:cs typeface="Aptos" pitchFamily="34" charset="-120"/>
               </a:rPr>
-              <a:t>Geospatial AI combines spatial data, geographic analysis, and AI methods to identify patterns across place. In public health, spatial analysis is already central to outbreak response, environmental health, emergency preparedness, community health assessment, service planning, and health equity work. AI can strengthen these activities when it helps detect clusters, estimate access barriers, classify imagery, prioritize field work, or synthesize spatial information for decision-makers. This module introduces the technical and governance issues that arise when AI uses location. Location data can be powerful, but it can also be sensitive. Even when names are removed, detailed geography can reveal identity, community characteristics, or sensitive health patterns. Public health staff must understand geocoding quality, aggregation, spatial bias, privacy, and the limits of maps. Learners will examine how geospatial AI can support public health while avoiding common mistakes, such as treating maps as neutral, ignoring missing addresses, overinterpreting small-area patterns, or using spatial proxies that reproduce inequity.</a:t>
-            </a:r>
-            <a:endParaRPr lang="en-US" sz="1400" dirty="0"/>
+              <a:t>Level: applied/foundational</a:t>
+            </a:r>
+            <a:endParaRPr lang="en-US" sz="1250" dirty="0"/>
+          </a:p>
+          <a:p>
+            <a:pPr indent="0" marL="0">
+              <a:buNone/>
+            </a:pPr>
+            <a:r>
+              <a:rPr lang="en-US" sz="1250" dirty="0">
+                <a:solidFill>
+                  <a:srgbClr val="17364A"/>
+                </a:solidFill>
+                <a:latin typeface="Aptos" pitchFamily="34" charset="0"/>
+                <a:ea typeface="Aptos" pitchFamily="34" charset="-122"/>
+                <a:cs typeface="Aptos" pitchFamily="34" charset="-120"/>
+              </a:rPr>
+              <a:t>Primary track: Analytics and Modeling Track</a:t>
+            </a:r>
+            <a:endParaRPr lang="en-US" sz="1250" dirty="0"/>
+          </a:p>
+          <a:p>
+            <a:pPr indent="0" marL="0">
+              <a:buNone/>
+            </a:pPr>
+            <a:r>
+              <a:rPr lang="en-US" sz="1250" dirty="0">
+                <a:solidFill>
+                  <a:srgbClr val="17364A"/>
+                </a:solidFill>
+                <a:latin typeface="Aptos" pitchFamily="34" charset="0"/>
+                <a:ea typeface="Aptos" pitchFamily="34" charset="-122"/>
+                <a:cs typeface="Aptos" pitchFamily="34" charset="-120"/>
+              </a:rPr>
+              <a:t>Appears in tracks: analytics-modeling</a:t>
+            </a:r>
+            <a:endParaRPr lang="en-US" sz="1250" dirty="0"/>
+          </a:p>
+        </p:txBody>
+      </p:sp>
+      <p:sp>
+        <p:nvSpPr>
+          <p:cNvPr id="12" name="Shape 10"/>
+          <p:cNvSpPr/>
+          <p:nvPr/>
+        </p:nvSpPr>
+        <p:spPr>
+          <a:xfrm>
+            <a:off x="7909560" y="3611880"/>
+            <a:ext cx="3154680" cy="1783080"/>
+          </a:xfrm>
+          <a:prstGeom prst="roundRect">
+            <a:avLst>
+              <a:gd name="adj" fmla="val 6154"/>
+            </a:avLst>
+          </a:prstGeom>
+          <a:solidFill>
+            <a:srgbClr val="EEF8ED"/>
+          </a:solidFill>
+          <a:ln w="12700">
+            <a:solidFill>
+              <a:srgbClr val="B9D7E6"/>
+            </a:solidFill>
+            <a:prstDash val="solid"/>
+          </a:ln>
+        </p:spPr>
+      </p:sp>
+      <p:sp>
+        <p:nvSpPr>
+          <p:cNvPr id="13" name="Text 11"/>
+          <p:cNvSpPr/>
+          <p:nvPr/>
+        </p:nvSpPr>
+        <p:spPr>
+          <a:xfrm>
+            <a:off x="8074152" y="3758184"/>
+            <a:ext cx="2825496" cy="201168"/>
+          </a:xfrm>
+          <a:prstGeom prst="rect">
+            <a:avLst/>
+          </a:prstGeom>
+          <a:noFill/>
+          <a:ln/>
+        </p:spPr>
+        <p:txBody>
+          <a:bodyPr wrap="square" lIns="0" tIns="0" rIns="0" bIns="0" rtlCol="0" anchor="ctr"/>
+          <a:lstStyle/>
+          <a:p>
+            <a:pPr indent="0" marL="0">
+              <a:buNone/>
+            </a:pPr>
+            <a:r>
+              <a:rPr lang="en-US" sz="950" b="1" dirty="0">
+                <a:solidFill>
+                  <a:srgbClr val="0068B7"/>
+                </a:solidFill>
+                <a:latin typeface="Aptos" pitchFamily="34" charset="0"/>
+                <a:ea typeface="Aptos" pitchFamily="34" charset="-122"/>
+                <a:cs typeface="Aptos" pitchFamily="34" charset="-120"/>
+              </a:rPr>
+              <a:t>Learning approach</a:t>
+            </a:r>
+            <a:endParaRPr lang="en-US" sz="950" dirty="0"/>
+          </a:p>
+        </p:txBody>
+      </p:sp>
+      <p:sp>
+        <p:nvSpPr>
+          <p:cNvPr id="14" name="Text 12"/>
+          <p:cNvSpPr/>
+          <p:nvPr/>
+        </p:nvSpPr>
+        <p:spPr>
+          <a:xfrm>
+            <a:off x="8074152" y="4050792"/>
+            <a:ext cx="2825496" cy="1216152"/>
+          </a:xfrm>
+          <a:prstGeom prst="rect">
+            <a:avLst/>
+          </a:prstGeom>
+          <a:noFill/>
+          <a:ln/>
+        </p:spPr>
+        <p:txBody>
+          <a:bodyPr wrap="square" lIns="0" tIns="0" rIns="0" bIns="0" rtlCol="0" anchor="t">
+            <a:normAutofit/>
+          </a:bodyPr>
+          <a:lstStyle/>
+          <a:p>
+            <a:pPr indent="0" marL="0">
+              <a:buNone/>
+            </a:pPr>
+            <a:r>
+              <a:rPr lang="en-US" sz="1250" dirty="0">
+                <a:solidFill>
+                  <a:srgbClr val="17364A"/>
+                </a:solidFill>
+                <a:latin typeface="Aptos" pitchFamily="34" charset="0"/>
+                <a:ea typeface="Aptos" pitchFamily="34" charset="-122"/>
+                <a:cs typeface="Aptos" pitchFamily="34" charset="-120"/>
+              </a:rPr>
+              <a:t>Review the core ideas, complete the practical exercise, check your understanding, and use the related plays and tools to apply the lesson.</a:t>
+            </a:r>
+            <a:endParaRPr lang="en-US" sz="1250" dirty="0"/>
           </a:p>
         </p:txBody>
       </p:sp>
@@ -5844,7 +9224,32 @@
       </p:sp>
       <p:sp>
         <p:nvSpPr>
-          <p:cNvPr id="3" name="Text 1"/>
+          <p:cNvPr id="3" name="Shape 1"/>
+          <p:cNvSpPr/>
+          <p:nvPr/>
+        </p:nvSpPr>
+        <p:spPr>
+          <a:xfrm>
+            <a:off x="0" y="164592"/>
+            <a:ext cx="146304" cy="6693408"/>
+          </a:xfrm>
+          <a:prstGeom prst="rect">
+            <a:avLst/>
+          </a:prstGeom>
+          <a:solidFill>
+            <a:srgbClr val="2F8A28"/>
+          </a:solidFill>
+          <a:ln w="12700">
+            <a:solidFill>
+              <a:srgbClr val="2F8A28"/>
+            </a:solidFill>
+            <a:prstDash val="solid"/>
+          </a:ln>
+        </p:spPr>
+      </p:sp>
+      <p:sp>
+        <p:nvSpPr>
+          <p:cNvPr id="4" name="Text 2"/>
           <p:cNvSpPr/>
           <p:nvPr/>
         </p:nvSpPr>
@@ -5883,7 +9288,7 @@
       </p:sp>
       <p:sp>
         <p:nvSpPr>
-          <p:cNvPr id="4" name="Text 2"/>
+          <p:cNvPr id="5" name="Text 3"/>
           <p:cNvSpPr/>
           <p:nvPr/>
         </p:nvSpPr>
@@ -5922,7 +9327,7 @@
       </p:sp>
       <p:sp>
         <p:nvSpPr>
-          <p:cNvPr id="5" name="Text 3"/>
+          <p:cNvPr id="6" name="Text 4"/>
           <p:cNvSpPr/>
           <p:nvPr/>
         </p:nvSpPr>
@@ -5961,13 +9366,77 @@
       </p:sp>
       <p:sp>
         <p:nvSpPr>
-          <p:cNvPr id="6" name="Text 4"/>
+          <p:cNvPr id="7" name="Shape 5"/>
           <p:cNvSpPr/>
           <p:nvPr/>
         </p:nvSpPr>
         <p:spPr>
           <a:xfrm>
             <a:off x="640080" y="658368"/>
+            <a:ext cx="420624" cy="420624"/>
+          </a:xfrm>
+          <a:prstGeom prst="ellipse">
+            <a:avLst/>
+          </a:prstGeom>
+          <a:solidFill>
+            <a:srgbClr val="0068B7"/>
+          </a:solidFill>
+          <a:ln w="12700">
+            <a:solidFill>
+              <a:srgbClr val="0068B7"/>
+            </a:solidFill>
+            <a:prstDash val="solid"/>
+          </a:ln>
+        </p:spPr>
+      </p:sp>
+      <p:sp>
+        <p:nvSpPr>
+          <p:cNvPr id="8" name="Text 6"/>
+          <p:cNvSpPr/>
+          <p:nvPr/>
+        </p:nvSpPr>
+        <p:spPr>
+          <a:xfrm>
+            <a:off x="640080" y="731520"/>
+            <a:ext cx="420624" cy="164592"/>
+          </a:xfrm>
+          <a:prstGeom prst="rect">
+            <a:avLst/>
+          </a:prstGeom>
+          <a:noFill/>
+          <a:ln/>
+        </p:spPr>
+        <p:txBody>
+          <a:bodyPr wrap="square" lIns="0" tIns="0" rIns="0" bIns="0" rtlCol="0" anchor="ctr"/>
+          <a:lstStyle/>
+          <a:p>
+            <a:pPr algn="ctr" indent="0" marL="0">
+              <a:buNone/>
+            </a:pPr>
+            <a:r>
+              <a:rPr lang="en-US" sz="1100" b="1" dirty="0">
+                <a:solidFill>
+                  <a:srgbClr val="FFFFFF"/>
+                </a:solidFill>
+                <a:latin typeface="Aptos" pitchFamily="34" charset="0"/>
+                <a:ea typeface="Aptos" pitchFamily="34" charset="-122"/>
+                <a:cs typeface="Aptos" pitchFamily="34" charset="-120"/>
+              </a:rPr>
+              <a:t>11</a:t>
+            </a:r>
+            <a:endParaRPr lang="en-US" sz="1100" dirty="0"/>
+          </a:p>
+        </p:txBody>
+      </p:sp>
+      <p:sp>
+        <p:nvSpPr>
+          <p:cNvPr id="9" name="Text 7"/>
+          <p:cNvSpPr/>
+          <p:nvPr/>
+        </p:nvSpPr>
+        <p:spPr>
+          <a:xfrm>
+            <a:off x="640080" y="621792"/>
             <a:ext cx="10881360" cy="566928"/>
           </a:xfrm>
           <a:prstGeom prst="rect">
@@ -5994,7 +9463,7 @@
                 <a:ea typeface="Aptos Display" pitchFamily="34" charset="-122"/>
                 <a:cs typeface="Aptos Display" pitchFamily="34" charset="-120"/>
               </a:rPr>
-              <a:t>References and Resources</a:t>
+              <a:t>Expected Assignment</a:t>
             </a:r>
             <a:endParaRPr lang="en-US" sz="2700" dirty="0"/>
           </a:p>
@@ -6002,14 +9471,14 @@
       </p:sp>
       <p:sp>
         <p:nvSpPr>
-          <p:cNvPr id="7" name="Text 5"/>
-          <p:cNvSpPr/>
-          <p:nvPr/>
-        </p:nvSpPr>
-        <p:spPr>
-          <a:xfrm>
-            <a:off x="822960" y="1325880"/>
-            <a:ext cx="10378440" cy="4800600"/>
+          <p:cNvPr id="10" name="Text 8"/>
+          <p:cNvSpPr/>
+          <p:nvPr/>
+        </p:nvSpPr>
+        <p:spPr>
+          <a:xfrm>
+            <a:off x="868680" y="1417320"/>
+            <a:ext cx="6675120" cy="4434840"/>
           </a:xfrm>
           <a:prstGeom prst="rect">
             <a:avLst/>
@@ -6024,7 +9493,7 @@
           <a:lstStyle/>
           <a:p>
             <a:r>
-              <a:rPr lang="en-US" sz="1450" dirty="0">
+              <a:rPr lang="en-US" sz="1700" dirty="0">
                 <a:solidFill>
                   <a:srgbClr val="17364A"/>
                 </a:solidFill>
@@ -6032,13 +9501,1209 @@
                 <a:ea typeface="Aptos" pitchFamily="34" charset="-122"/>
                 <a:cs typeface="Aptos" pitchFamily="34" charset="-120"/>
               </a:rPr>
+              <a:t>Geospatial AI readiness worksheet</a:t>
+            </a:r>
+            <a:endParaRPr lang="en-US" sz="1700" dirty="0"/>
+          </a:p>
+          <a:p>
+            <a:r>
+              <a:rPr lang="en-US" sz="1700" dirty="0">
+                <a:solidFill>
+                  <a:srgbClr val="17364A"/>
+                </a:solidFill>
+                <a:latin typeface="Aptos" pitchFamily="34" charset="0"/>
+                <a:ea typeface="Aptos" pitchFamily="34" charset="-122"/>
+                <a:cs typeface="Aptos" pitchFamily="34" charset="-120"/>
+              </a:rPr>
+              <a:t>Map interpretation and limitations memo</a:t>
+            </a:r>
+            <a:endParaRPr lang="en-US" sz="1700" dirty="0"/>
+          </a:p>
+          <a:p>
+            <a:r>
+              <a:rPr lang="en-US" sz="1700" dirty="0">
+                <a:solidFill>
+                  <a:srgbClr val="17364A"/>
+                </a:solidFill>
+                <a:latin typeface="Aptos" pitchFamily="34" charset="0"/>
+                <a:ea typeface="Aptos" pitchFamily="34" charset="-122"/>
+                <a:cs typeface="Aptos" pitchFamily="34" charset="-120"/>
+              </a:rPr>
+              <a:t>Privacy and suppression review notes</a:t>
+            </a:r>
+            <a:endParaRPr lang="en-US" sz="1700" dirty="0"/>
+          </a:p>
+          <a:p>
+            <a:r>
+              <a:rPr lang="en-US" sz="1700" dirty="0">
+                <a:solidFill>
+                  <a:srgbClr val="17364A"/>
+                </a:solidFill>
+                <a:latin typeface="Aptos" pitchFamily="34" charset="0"/>
+                <a:ea typeface="Aptos" pitchFamily="34" charset="-122"/>
+                <a:cs typeface="Aptos" pitchFamily="34" charset="-120"/>
+              </a:rPr>
+              <a:t>Community context and action plan</a:t>
+            </a:r>
+            <a:endParaRPr lang="en-US" sz="1700" dirty="0"/>
+          </a:p>
+        </p:txBody>
+      </p:sp>
+      <p:sp>
+        <p:nvSpPr>
+          <p:cNvPr id="11" name="Shape 9"/>
+          <p:cNvSpPr/>
+          <p:nvPr/>
+        </p:nvSpPr>
+        <p:spPr>
+          <a:xfrm>
+            <a:off x="7909560" y="1417320"/>
+            <a:ext cx="3154680" cy="1828800"/>
+          </a:xfrm>
+          <a:prstGeom prst="roundRect">
+            <a:avLst>
+              <a:gd name="adj" fmla="val 6000"/>
+            </a:avLst>
+          </a:prstGeom>
+          <a:solidFill>
+            <a:srgbClr val="EEF8ED"/>
+          </a:solidFill>
+          <a:ln w="12700">
+            <a:solidFill>
+              <a:srgbClr val="B9D7E6"/>
+            </a:solidFill>
+            <a:prstDash val="solid"/>
+          </a:ln>
+        </p:spPr>
+      </p:sp>
+      <p:sp>
+        <p:nvSpPr>
+          <p:cNvPr id="12" name="Text 10"/>
+          <p:cNvSpPr/>
+          <p:nvPr/>
+        </p:nvSpPr>
+        <p:spPr>
+          <a:xfrm>
+            <a:off x="8074152" y="1563624"/>
+            <a:ext cx="2825496" cy="201168"/>
+          </a:xfrm>
+          <a:prstGeom prst="rect">
+            <a:avLst/>
+          </a:prstGeom>
+          <a:noFill/>
+          <a:ln/>
+        </p:spPr>
+        <p:txBody>
+          <a:bodyPr wrap="square" lIns="0" tIns="0" rIns="0" bIns="0" rtlCol="0" anchor="ctr"/>
+          <a:lstStyle/>
+          <a:p>
+            <a:pPr indent="0" marL="0">
+              <a:buNone/>
+            </a:pPr>
+            <a:r>
+              <a:rPr lang="en-US" sz="950" b="1" dirty="0">
+                <a:solidFill>
+                  <a:srgbClr val="0068B7"/>
+                </a:solidFill>
+                <a:latin typeface="Aptos" pitchFamily="34" charset="0"/>
+                <a:ea typeface="Aptos" pitchFamily="34" charset="-122"/>
+                <a:cs typeface="Aptos" pitchFamily="34" charset="-120"/>
+              </a:rPr>
+              <a:t>Key idea</a:t>
+            </a:r>
+            <a:endParaRPr lang="en-US" sz="950" dirty="0"/>
+          </a:p>
+        </p:txBody>
+      </p:sp>
+      <p:sp>
+        <p:nvSpPr>
+          <p:cNvPr id="13" name="Text 11"/>
+          <p:cNvSpPr/>
+          <p:nvPr/>
+        </p:nvSpPr>
+        <p:spPr>
+          <a:xfrm>
+            <a:off x="8074152" y="1856232"/>
+            <a:ext cx="2825496" cy="1261872"/>
+          </a:xfrm>
+          <a:prstGeom prst="rect">
+            <a:avLst/>
+          </a:prstGeom>
+          <a:noFill/>
+          <a:ln/>
+        </p:spPr>
+        <p:txBody>
+          <a:bodyPr wrap="square" lIns="0" tIns="0" rIns="0" bIns="0" rtlCol="0" anchor="t">
+            <a:normAutofit/>
+          </a:bodyPr>
+          <a:lstStyle/>
+          <a:p>
+            <a:pPr indent="0" marL="0">
+              <a:buNone/>
+            </a:pPr>
+            <a:r>
+              <a:rPr lang="en-US" sz="1250" dirty="0">
+                <a:solidFill>
+                  <a:srgbClr val="17364A"/>
+                </a:solidFill>
+                <a:latin typeface="Aptos" pitchFamily="34" charset="0"/>
+                <a:ea typeface="Aptos" pitchFamily="34" charset="-122"/>
+                <a:cs typeface="Aptos" pitchFamily="34" charset="-120"/>
+              </a:rPr>
+              <a:t>Geospatial AI readiness worksheet</a:t>
+            </a:r>
+            <a:endParaRPr lang="en-US" sz="1250" dirty="0"/>
+          </a:p>
+        </p:txBody>
+      </p:sp>
+      <p:sp>
+        <p:nvSpPr>
+          <p:cNvPr id="14" name="Shape 12"/>
+          <p:cNvSpPr/>
+          <p:nvPr/>
+        </p:nvSpPr>
+        <p:spPr>
+          <a:xfrm>
+            <a:off x="7909560" y="3520440"/>
+            <a:ext cx="3154680" cy="1737360"/>
+          </a:xfrm>
+          <a:prstGeom prst="roundRect">
+            <a:avLst>
+              <a:gd name="adj" fmla="val 6316"/>
+            </a:avLst>
+          </a:prstGeom>
+          <a:solidFill>
+            <a:srgbClr val="EAF6F8"/>
+          </a:solidFill>
+          <a:ln w="12700">
+            <a:solidFill>
+              <a:srgbClr val="B9D7E6"/>
+            </a:solidFill>
+            <a:prstDash val="solid"/>
+          </a:ln>
+        </p:spPr>
+      </p:sp>
+      <p:sp>
+        <p:nvSpPr>
+          <p:cNvPr id="15" name="Text 13"/>
+          <p:cNvSpPr/>
+          <p:nvPr/>
+        </p:nvSpPr>
+        <p:spPr>
+          <a:xfrm>
+            <a:off x="8074152" y="3666744"/>
+            <a:ext cx="2825496" cy="201168"/>
+          </a:xfrm>
+          <a:prstGeom prst="rect">
+            <a:avLst/>
+          </a:prstGeom>
+          <a:noFill/>
+          <a:ln/>
+        </p:spPr>
+        <p:txBody>
+          <a:bodyPr wrap="square" lIns="0" tIns="0" rIns="0" bIns="0" rtlCol="0" anchor="ctr"/>
+          <a:lstStyle/>
+          <a:p>
+            <a:pPr indent="0" marL="0">
+              <a:buNone/>
+            </a:pPr>
+            <a:r>
+              <a:rPr lang="en-US" sz="950" b="1" dirty="0">
+                <a:solidFill>
+                  <a:srgbClr val="0068B7"/>
+                </a:solidFill>
+                <a:latin typeface="Aptos" pitchFamily="34" charset="0"/>
+                <a:ea typeface="Aptos" pitchFamily="34" charset="-122"/>
+                <a:cs typeface="Aptos" pitchFamily="34" charset="-120"/>
+              </a:rPr>
+              <a:t>Use this for</a:t>
+            </a:r>
+            <a:endParaRPr lang="en-US" sz="950" dirty="0"/>
+          </a:p>
+        </p:txBody>
+      </p:sp>
+      <p:sp>
+        <p:nvSpPr>
+          <p:cNvPr id="16" name="Text 14"/>
+          <p:cNvSpPr/>
+          <p:nvPr/>
+        </p:nvSpPr>
+        <p:spPr>
+          <a:xfrm>
+            <a:off x="8074152" y="3959352"/>
+            <a:ext cx="2825496" cy="1170432"/>
+          </a:xfrm>
+          <a:prstGeom prst="rect">
+            <a:avLst/>
+          </a:prstGeom>
+          <a:noFill/>
+          <a:ln/>
+        </p:spPr>
+        <p:txBody>
+          <a:bodyPr wrap="square" lIns="0" tIns="0" rIns="0" bIns="0" rtlCol="0" anchor="t">
+            <a:normAutofit/>
+          </a:bodyPr>
+          <a:lstStyle/>
+          <a:p>
+            <a:pPr indent="0" marL="0">
+              <a:buNone/>
+            </a:pPr>
+            <a:r>
+              <a:rPr lang="en-US" sz="1250" dirty="0">
+                <a:solidFill>
+                  <a:srgbClr val="17364A"/>
+                </a:solidFill>
+                <a:latin typeface="Aptos" pitchFamily="34" charset="0"/>
+                <a:ea typeface="Aptos" pitchFamily="34" charset="-122"/>
+                <a:cs typeface="Aptos" pitchFamily="34" charset="-120"/>
+              </a:rPr>
+              <a:t>Connect the concept to public health decisions, safeguards, documentation, or implementation work.</a:t>
+            </a:r>
+            <a:endParaRPr lang="en-US" sz="1250" dirty="0"/>
+          </a:p>
+        </p:txBody>
+      </p:sp>
+    </p:spTree>
+  </p:cSld>
+  <p:clrMapOvr>
+    <a:masterClrMapping/>
+  </p:clrMapOvr>
+</p:sld>
+</file>
+
+<file path=ppt/slides/slide21.xml><?xml version="1.0" encoding="utf-8"?>
+<p:sld xmlns:a="http://schemas.openxmlformats.org/drawingml/2006/main" xmlns:r="http://schemas.openxmlformats.org/officeDocument/2006/relationships" xmlns:p="http://schemas.openxmlformats.org/presentationml/2006/main">
+  <p:cSld name="Slide 21">
+    <p:bg>
+      <p:bgPr>
+        <a:solidFill>
+          <a:srgbClr val="F7FBFD"/>
+        </a:solidFill>
+      </p:bgPr>
+    </p:bg>
+    <p:spTree>
+      <p:nvGrpSpPr>
+        <p:cNvPr id="1" name=""/>
+        <p:cNvGrpSpPr/>
+        <p:nvPr/>
+      </p:nvGrpSpPr>
+      <p:grpSpPr>
+        <a:xfrm>
+          <a:off x="0" y="0"/>
+          <a:ext cx="0" cy="0"/>
+          <a:chOff x="0" y="0"/>
+          <a:chExt cx="0" cy="0"/>
+        </a:xfrm>
+      </p:grpSpPr>
+      <p:sp>
+        <p:nvSpPr>
+          <p:cNvPr id="2" name="Shape 0"/>
+          <p:cNvSpPr/>
+          <p:nvPr/>
+        </p:nvSpPr>
+        <p:spPr>
+          <a:xfrm>
+            <a:off x="0" y="0"/>
+            <a:ext cx="12191695" cy="164592"/>
+          </a:xfrm>
+          <a:prstGeom prst="rect">
+            <a:avLst/>
+          </a:prstGeom>
+          <a:solidFill>
+            <a:srgbClr val="0068B7"/>
+          </a:solidFill>
+          <a:ln w="12700">
+            <a:solidFill>
+              <a:srgbClr val="0068B7"/>
+            </a:solidFill>
+            <a:prstDash val="solid"/>
+          </a:ln>
+        </p:spPr>
+      </p:sp>
+      <p:sp>
+        <p:nvSpPr>
+          <p:cNvPr id="3" name="Shape 1"/>
+          <p:cNvSpPr/>
+          <p:nvPr/>
+        </p:nvSpPr>
+        <p:spPr>
+          <a:xfrm>
+            <a:off x="0" y="164592"/>
+            <a:ext cx="146304" cy="6693408"/>
+          </a:xfrm>
+          <a:prstGeom prst="rect">
+            <a:avLst/>
+          </a:prstGeom>
+          <a:solidFill>
+            <a:srgbClr val="2F8A28"/>
+          </a:solidFill>
+          <a:ln w="12700">
+            <a:solidFill>
+              <a:srgbClr val="2F8A28"/>
+            </a:solidFill>
+            <a:prstDash val="solid"/>
+          </a:ln>
+        </p:spPr>
+      </p:sp>
+      <p:sp>
+        <p:nvSpPr>
+          <p:cNvPr id="4" name="Text 2"/>
+          <p:cNvSpPr/>
+          <p:nvPr/>
+        </p:nvSpPr>
+        <p:spPr>
+          <a:xfrm>
+            <a:off x="502920" y="292608"/>
+            <a:ext cx="10149840" cy="256032"/>
+          </a:xfrm>
+          <a:prstGeom prst="rect">
+            <a:avLst/>
+          </a:prstGeom>
+          <a:noFill/>
+          <a:ln/>
+        </p:spPr>
+        <p:txBody>
+          <a:bodyPr wrap="square" lIns="0" tIns="0" rIns="0" bIns="0" rtlCol="0" anchor="ctr"/>
+          <a:lstStyle/>
+          <a:p>
+            <a:pPr indent="0" marL="0">
+              <a:buNone/>
+            </a:pPr>
+            <a:r>
+              <a:rPr lang="en-US" sz="900" b="1" dirty="0">
+                <a:solidFill>
+                  <a:srgbClr val="5F7181"/>
+                </a:solidFill>
+                <a:latin typeface="Aptos" pitchFamily="34" charset="0"/>
+                <a:ea typeface="Aptos" pitchFamily="34" charset="-122"/>
+                <a:cs typeface="Aptos" pitchFamily="34" charset="-120"/>
+              </a:rPr>
+              <a:t>Geospatial AI and Spatial Epidemiology</a:t>
+            </a:r>
+            <a:endParaRPr lang="en-US" sz="900" dirty="0"/>
+          </a:p>
+        </p:txBody>
+      </p:sp>
+      <p:sp>
+        <p:nvSpPr>
+          <p:cNvPr id="5" name="Text 3"/>
+          <p:cNvSpPr/>
+          <p:nvPr/>
+        </p:nvSpPr>
+        <p:spPr>
+          <a:xfrm>
+            <a:off x="502920" y="6537960"/>
+            <a:ext cx="7772400" cy="201168"/>
+          </a:xfrm>
+          <a:prstGeom prst="rect">
+            <a:avLst/>
+          </a:prstGeom>
+          <a:noFill/>
+          <a:ln/>
+        </p:spPr>
+        <p:txBody>
+          <a:bodyPr wrap="square" lIns="0" tIns="0" rIns="0" bIns="0" rtlCol="0" anchor="ctr"/>
+          <a:lstStyle/>
+          <a:p>
+            <a:pPr indent="0" marL="0">
+              <a:buNone/>
+            </a:pPr>
+            <a:r>
+              <a:rPr lang="en-US" sz="800" dirty="0">
+                <a:solidFill>
+                  <a:srgbClr val="5F7181"/>
+                </a:solidFill>
+                <a:latin typeface="Aptos" pitchFamily="34" charset="0"/>
+                <a:ea typeface="Aptos" pitchFamily="34" charset="-122"/>
+                <a:cs typeface="Aptos" pitchFamily="34" charset="-120"/>
+              </a:rPr>
+              <a:t>AI Playbook and Toolkit for Public Health Departments</a:t>
+            </a:r>
+            <a:endParaRPr lang="en-US" sz="800" dirty="0"/>
+          </a:p>
+        </p:txBody>
+      </p:sp>
+      <p:sp>
+        <p:nvSpPr>
+          <p:cNvPr id="6" name="Text 4"/>
+          <p:cNvSpPr/>
+          <p:nvPr/>
+        </p:nvSpPr>
+        <p:spPr>
+          <a:xfrm>
+            <a:off x="9966960" y="6537960"/>
+            <a:ext cx="1645920" cy="201168"/>
+          </a:xfrm>
+          <a:prstGeom prst="rect">
+            <a:avLst/>
+          </a:prstGeom>
+          <a:noFill/>
+          <a:ln/>
+        </p:spPr>
+        <p:txBody>
+          <a:bodyPr wrap="square" lIns="0" tIns="0" rIns="0" bIns="0" rtlCol="0" anchor="ctr"/>
+          <a:lstStyle/>
+          <a:p>
+            <a:pPr algn="r" indent="0" marL="0">
+              <a:buNone/>
+            </a:pPr>
+            <a:r>
+              <a:rPr lang="en-US" sz="800" dirty="0">
+                <a:solidFill>
+                  <a:srgbClr val="5F7181"/>
+                </a:solidFill>
+                <a:latin typeface="Aptos" pitchFamily="34" charset="0"/>
+                <a:ea typeface="Aptos" pitchFamily="34" charset="-122"/>
+                <a:cs typeface="Aptos" pitchFamily="34" charset="-120"/>
+              </a:rPr>
+              <a:t>© Paula Soper</a:t>
+            </a:r>
+            <a:endParaRPr lang="en-US" sz="800" dirty="0"/>
+          </a:p>
+        </p:txBody>
+      </p:sp>
+      <p:sp>
+        <p:nvSpPr>
+          <p:cNvPr id="7" name="Shape 5"/>
+          <p:cNvSpPr/>
+          <p:nvPr/>
+        </p:nvSpPr>
+        <p:spPr>
+          <a:xfrm>
+            <a:off x="640080" y="658368"/>
+            <a:ext cx="420624" cy="420624"/>
+          </a:xfrm>
+          <a:prstGeom prst="ellipse">
+            <a:avLst/>
+          </a:prstGeom>
+          <a:solidFill>
+            <a:srgbClr val="0068B7"/>
+          </a:solidFill>
+          <a:ln w="12700">
+            <a:solidFill>
+              <a:srgbClr val="0068B7"/>
+            </a:solidFill>
+            <a:prstDash val="solid"/>
+          </a:ln>
+        </p:spPr>
+      </p:sp>
+      <p:sp>
+        <p:nvSpPr>
+          <p:cNvPr id="8" name="Text 6"/>
+          <p:cNvSpPr/>
+          <p:nvPr/>
+        </p:nvSpPr>
+        <p:spPr>
+          <a:xfrm>
+            <a:off x="640080" y="731520"/>
+            <a:ext cx="420624" cy="164592"/>
+          </a:xfrm>
+          <a:prstGeom prst="rect">
+            <a:avLst/>
+          </a:prstGeom>
+          <a:noFill/>
+          <a:ln/>
+        </p:spPr>
+        <p:txBody>
+          <a:bodyPr wrap="square" lIns="0" tIns="0" rIns="0" bIns="0" rtlCol="0" anchor="ctr"/>
+          <a:lstStyle/>
+          <a:p>
+            <a:pPr algn="ctr" indent="0" marL="0">
+              <a:buNone/>
+            </a:pPr>
+            <a:r>
+              <a:rPr lang="en-US" sz="1100" b="1" dirty="0">
+                <a:solidFill>
+                  <a:srgbClr val="FFFFFF"/>
+                </a:solidFill>
+                <a:latin typeface="Aptos" pitchFamily="34" charset="0"/>
+                <a:ea typeface="Aptos" pitchFamily="34" charset="-122"/>
+                <a:cs typeface="Aptos" pitchFamily="34" charset="-120"/>
+              </a:rPr>
+              <a:t>12</a:t>
+            </a:r>
+            <a:endParaRPr lang="en-US" sz="1100" dirty="0"/>
+          </a:p>
+        </p:txBody>
+      </p:sp>
+      <p:sp>
+        <p:nvSpPr>
+          <p:cNvPr id="9" name="Text 7"/>
+          <p:cNvSpPr/>
+          <p:nvPr/>
+        </p:nvSpPr>
+        <p:spPr>
+          <a:xfrm>
+            <a:off x="640080" y="621792"/>
+            <a:ext cx="10881360" cy="566928"/>
+          </a:xfrm>
+          <a:prstGeom prst="rect">
+            <a:avLst/>
+          </a:prstGeom>
+          <a:noFill/>
+          <a:ln/>
+        </p:spPr>
+        <p:txBody>
+          <a:bodyPr wrap="square" lIns="0" tIns="0" rIns="0" bIns="0" rtlCol="0" anchor="ctr">
+            <a:normAutofit/>
+          </a:bodyPr>
+          <a:lstStyle/>
+          <a:p>
+            <a:pPr indent="0" marL="0">
+              <a:buNone/>
+            </a:pPr>
+            <a:r>
+              <a:rPr lang="en-US" sz="2700" b="1" dirty="0">
+                <a:solidFill>
+                  <a:srgbClr val="003A63"/>
+                </a:solidFill>
+                <a:latin typeface="Aptos Display" pitchFamily="34" charset="0"/>
+                <a:ea typeface="Aptos Display" pitchFamily="34" charset="-122"/>
+                <a:cs typeface="Aptos Display" pitchFamily="34" charset="-120"/>
+              </a:rPr>
+              <a:t>Knowledge Check</a:t>
+            </a:r>
+            <a:endParaRPr lang="en-US" sz="2700" dirty="0"/>
+          </a:p>
+        </p:txBody>
+      </p:sp>
+      <p:sp>
+        <p:nvSpPr>
+          <p:cNvPr id="10" name="Text 8"/>
+          <p:cNvSpPr/>
+          <p:nvPr/>
+        </p:nvSpPr>
+        <p:spPr>
+          <a:xfrm>
+            <a:off x="868680" y="1417320"/>
+            <a:ext cx="6675120" cy="4434840"/>
+          </a:xfrm>
+          <a:prstGeom prst="rect">
+            <a:avLst/>
+          </a:prstGeom>
+          <a:noFill/>
+          <a:ln/>
+        </p:spPr>
+        <p:txBody>
+          <a:bodyPr wrap="square" lIns="635" tIns="635" rIns="635" bIns="635" rtlCol="0" anchor="t">
+            <a:normAutofit/>
+          </a:bodyPr>
+          <a:lstStyle/>
+          <a:p>
+            <a:r>
+              <a:rPr lang="en-US" sz="1700" dirty="0">
+                <a:solidFill>
+                  <a:srgbClr val="17364A"/>
+                </a:solidFill>
+                <a:latin typeface="Aptos" pitchFamily="34" charset="0"/>
+                <a:ea typeface="Aptos" pitchFamily="34" charset="-122"/>
+                <a:cs typeface="Aptos" pitchFamily="34" charset="-120"/>
+              </a:rPr>
+              <a:t>1. What is geocoding?</a:t>
+            </a:r>
+            <a:endParaRPr lang="en-US" sz="1700" dirty="0"/>
+          </a:p>
+          <a:p>
+            <a:r>
+              <a:rPr lang="en-US" sz="1700" dirty="0">
+                <a:solidFill>
+                  <a:srgbClr val="17364A"/>
+                </a:solidFill>
+                <a:latin typeface="Aptos" pitchFamily="34" charset="0"/>
+                <a:ea typeface="Aptos" pitchFamily="34" charset="-122"/>
+                <a:cs typeface="Aptos" pitchFamily="34" charset="-120"/>
+              </a:rPr>
+              <a:t>2. Why can maps create misleading impressions?</a:t>
+            </a:r>
+            <a:endParaRPr lang="en-US" sz="1700" dirty="0"/>
+          </a:p>
+          <a:p>
+            <a:r>
+              <a:rPr lang="en-US" sz="1700" dirty="0">
+                <a:solidFill>
+                  <a:srgbClr val="17364A"/>
+                </a:solidFill>
+                <a:latin typeface="Aptos" pitchFamily="34" charset="0"/>
+                <a:ea typeface="Aptos" pitchFamily="34" charset="-122"/>
+                <a:cs typeface="Aptos" pitchFamily="34" charset="-120"/>
+              </a:rPr>
+              <a:t>3. What is the modifiable areal unit problem?</a:t>
+            </a:r>
+            <a:endParaRPr lang="en-US" sz="1700" dirty="0"/>
+          </a:p>
+          <a:p>
+            <a:r>
+              <a:rPr lang="en-US" sz="1700" dirty="0">
+                <a:solidFill>
+                  <a:srgbClr val="17364A"/>
+                </a:solidFill>
+                <a:latin typeface="Aptos" pitchFamily="34" charset="0"/>
+                <a:ea typeface="Aptos" pitchFamily="34" charset="-122"/>
+                <a:cs typeface="Aptos" pitchFamily="34" charset="-120"/>
+              </a:rPr>
+              <a:t>4. Which safeguard is appropriate before publishing a small-area health map?</a:t>
+            </a:r>
+            <a:endParaRPr lang="en-US" sz="1700" dirty="0"/>
+          </a:p>
+        </p:txBody>
+      </p:sp>
+      <p:sp>
+        <p:nvSpPr>
+          <p:cNvPr id="11" name="Shape 9"/>
+          <p:cNvSpPr/>
+          <p:nvPr/>
+        </p:nvSpPr>
+        <p:spPr>
+          <a:xfrm>
+            <a:off x="7909560" y="1417320"/>
+            <a:ext cx="3154680" cy="1828800"/>
+          </a:xfrm>
+          <a:prstGeom prst="roundRect">
+            <a:avLst>
+              <a:gd name="adj" fmla="val 6000"/>
+            </a:avLst>
+          </a:prstGeom>
+          <a:solidFill>
+            <a:srgbClr val="EEF8ED"/>
+          </a:solidFill>
+          <a:ln w="12700">
+            <a:solidFill>
+              <a:srgbClr val="B9D7E6"/>
+            </a:solidFill>
+            <a:prstDash val="solid"/>
+          </a:ln>
+        </p:spPr>
+      </p:sp>
+      <p:sp>
+        <p:nvSpPr>
+          <p:cNvPr id="12" name="Text 10"/>
+          <p:cNvSpPr/>
+          <p:nvPr/>
+        </p:nvSpPr>
+        <p:spPr>
+          <a:xfrm>
+            <a:off x="8074152" y="1563624"/>
+            <a:ext cx="2825496" cy="201168"/>
+          </a:xfrm>
+          <a:prstGeom prst="rect">
+            <a:avLst/>
+          </a:prstGeom>
+          <a:noFill/>
+          <a:ln/>
+        </p:spPr>
+        <p:txBody>
+          <a:bodyPr wrap="square" lIns="0" tIns="0" rIns="0" bIns="0" rtlCol="0" anchor="ctr"/>
+          <a:lstStyle/>
+          <a:p>
+            <a:pPr indent="0" marL="0">
+              <a:buNone/>
+            </a:pPr>
+            <a:r>
+              <a:rPr lang="en-US" sz="950" b="1" dirty="0">
+                <a:solidFill>
+                  <a:srgbClr val="0068B7"/>
+                </a:solidFill>
+                <a:latin typeface="Aptos" pitchFamily="34" charset="0"/>
+                <a:ea typeface="Aptos" pitchFamily="34" charset="-122"/>
+                <a:cs typeface="Aptos" pitchFamily="34" charset="-120"/>
+              </a:rPr>
+              <a:t>Key idea</a:t>
+            </a:r>
+            <a:endParaRPr lang="en-US" sz="950" dirty="0"/>
+          </a:p>
+        </p:txBody>
+      </p:sp>
+      <p:sp>
+        <p:nvSpPr>
+          <p:cNvPr id="13" name="Text 11"/>
+          <p:cNvSpPr/>
+          <p:nvPr/>
+        </p:nvSpPr>
+        <p:spPr>
+          <a:xfrm>
+            <a:off x="8074152" y="1856232"/>
+            <a:ext cx="2825496" cy="1261872"/>
+          </a:xfrm>
+          <a:prstGeom prst="rect">
+            <a:avLst/>
+          </a:prstGeom>
+          <a:noFill/>
+          <a:ln/>
+        </p:spPr>
+        <p:txBody>
+          <a:bodyPr wrap="square" lIns="0" tIns="0" rIns="0" bIns="0" rtlCol="0" anchor="t">
+            <a:normAutofit/>
+          </a:bodyPr>
+          <a:lstStyle/>
+          <a:p>
+            <a:pPr indent="0" marL="0">
+              <a:buNone/>
+            </a:pPr>
+            <a:r>
+              <a:rPr lang="en-US" sz="1250" dirty="0">
+                <a:solidFill>
+                  <a:srgbClr val="17364A"/>
+                </a:solidFill>
+                <a:latin typeface="Aptos" pitchFamily="34" charset="0"/>
+                <a:ea typeface="Aptos" pitchFamily="34" charset="-122"/>
+                <a:cs typeface="Aptos" pitchFamily="34" charset="-120"/>
+              </a:rPr>
+              <a:t>1. What is geocoding?</a:t>
+            </a:r>
+            <a:endParaRPr lang="en-US" sz="1250" dirty="0"/>
+          </a:p>
+        </p:txBody>
+      </p:sp>
+      <p:sp>
+        <p:nvSpPr>
+          <p:cNvPr id="14" name="Shape 12"/>
+          <p:cNvSpPr/>
+          <p:nvPr/>
+        </p:nvSpPr>
+        <p:spPr>
+          <a:xfrm>
+            <a:off x="7909560" y="3520440"/>
+            <a:ext cx="3154680" cy="1737360"/>
+          </a:xfrm>
+          <a:prstGeom prst="roundRect">
+            <a:avLst>
+              <a:gd name="adj" fmla="val 6316"/>
+            </a:avLst>
+          </a:prstGeom>
+          <a:solidFill>
+            <a:srgbClr val="EAF6F8"/>
+          </a:solidFill>
+          <a:ln w="12700">
+            <a:solidFill>
+              <a:srgbClr val="B9D7E6"/>
+            </a:solidFill>
+            <a:prstDash val="solid"/>
+          </a:ln>
+        </p:spPr>
+      </p:sp>
+      <p:sp>
+        <p:nvSpPr>
+          <p:cNvPr id="15" name="Text 13"/>
+          <p:cNvSpPr/>
+          <p:nvPr/>
+        </p:nvSpPr>
+        <p:spPr>
+          <a:xfrm>
+            <a:off x="8074152" y="3666744"/>
+            <a:ext cx="2825496" cy="201168"/>
+          </a:xfrm>
+          <a:prstGeom prst="rect">
+            <a:avLst/>
+          </a:prstGeom>
+          <a:noFill/>
+          <a:ln/>
+        </p:spPr>
+        <p:txBody>
+          <a:bodyPr wrap="square" lIns="0" tIns="0" rIns="0" bIns="0" rtlCol="0" anchor="ctr"/>
+          <a:lstStyle/>
+          <a:p>
+            <a:pPr indent="0" marL="0">
+              <a:buNone/>
+            </a:pPr>
+            <a:r>
+              <a:rPr lang="en-US" sz="950" b="1" dirty="0">
+                <a:solidFill>
+                  <a:srgbClr val="0068B7"/>
+                </a:solidFill>
+                <a:latin typeface="Aptos" pitchFamily="34" charset="0"/>
+                <a:ea typeface="Aptos" pitchFamily="34" charset="-122"/>
+                <a:cs typeface="Aptos" pitchFamily="34" charset="-120"/>
+              </a:rPr>
+              <a:t>Use this for</a:t>
+            </a:r>
+            <a:endParaRPr lang="en-US" sz="950" dirty="0"/>
+          </a:p>
+        </p:txBody>
+      </p:sp>
+      <p:sp>
+        <p:nvSpPr>
+          <p:cNvPr id="16" name="Text 14"/>
+          <p:cNvSpPr/>
+          <p:nvPr/>
+        </p:nvSpPr>
+        <p:spPr>
+          <a:xfrm>
+            <a:off x="8074152" y="3959352"/>
+            <a:ext cx="2825496" cy="1170432"/>
+          </a:xfrm>
+          <a:prstGeom prst="rect">
+            <a:avLst/>
+          </a:prstGeom>
+          <a:noFill/>
+          <a:ln/>
+        </p:spPr>
+        <p:txBody>
+          <a:bodyPr wrap="square" lIns="0" tIns="0" rIns="0" bIns="0" rtlCol="0" anchor="t">
+            <a:normAutofit/>
+          </a:bodyPr>
+          <a:lstStyle/>
+          <a:p>
+            <a:pPr indent="0" marL="0">
+              <a:buNone/>
+            </a:pPr>
+            <a:r>
+              <a:rPr lang="en-US" sz="1250" dirty="0">
+                <a:solidFill>
+                  <a:srgbClr val="17364A"/>
+                </a:solidFill>
+                <a:latin typeface="Aptos" pitchFamily="34" charset="0"/>
+                <a:ea typeface="Aptos" pitchFamily="34" charset="-122"/>
+                <a:cs typeface="Aptos" pitchFamily="34" charset="-120"/>
+              </a:rPr>
+              <a:t>Connect the concept to public health decisions, safeguards, documentation, or implementation work.</a:t>
+            </a:r>
+            <a:endParaRPr lang="en-US" sz="1250" dirty="0"/>
+          </a:p>
+        </p:txBody>
+      </p:sp>
+    </p:spTree>
+  </p:cSld>
+  <p:clrMapOvr>
+    <a:masterClrMapping/>
+  </p:clrMapOvr>
+</p:sld>
+</file>
+
+<file path=ppt/slides/slide22.xml><?xml version="1.0" encoding="utf-8"?>
+<p:sld xmlns:a="http://schemas.openxmlformats.org/drawingml/2006/main" xmlns:r="http://schemas.openxmlformats.org/officeDocument/2006/relationships" xmlns:p="http://schemas.openxmlformats.org/presentationml/2006/main">
+  <p:cSld name="Slide 22">
+    <p:bg>
+      <p:bgPr>
+        <a:solidFill>
+          <a:srgbClr val="F7FBFD"/>
+        </a:solidFill>
+      </p:bgPr>
+    </p:bg>
+    <p:spTree>
+      <p:nvGrpSpPr>
+        <p:cNvPr id="1" name=""/>
+        <p:cNvGrpSpPr/>
+        <p:nvPr/>
+      </p:nvGrpSpPr>
+      <p:grpSpPr>
+        <a:xfrm>
+          <a:off x="0" y="0"/>
+          <a:ext cx="0" cy="0"/>
+          <a:chOff x="0" y="0"/>
+          <a:chExt cx="0" cy="0"/>
+        </a:xfrm>
+      </p:grpSpPr>
+      <p:sp>
+        <p:nvSpPr>
+          <p:cNvPr id="2" name="Shape 0"/>
+          <p:cNvSpPr/>
+          <p:nvPr/>
+        </p:nvSpPr>
+        <p:spPr>
+          <a:xfrm>
+            <a:off x="0" y="0"/>
+            <a:ext cx="12191695" cy="164592"/>
+          </a:xfrm>
+          <a:prstGeom prst="rect">
+            <a:avLst/>
+          </a:prstGeom>
+          <a:solidFill>
+            <a:srgbClr val="0068B7"/>
+          </a:solidFill>
+          <a:ln w="12700">
+            <a:solidFill>
+              <a:srgbClr val="0068B7"/>
+            </a:solidFill>
+            <a:prstDash val="solid"/>
+          </a:ln>
+        </p:spPr>
+      </p:sp>
+      <p:sp>
+        <p:nvSpPr>
+          <p:cNvPr id="3" name="Shape 1"/>
+          <p:cNvSpPr/>
+          <p:nvPr/>
+        </p:nvSpPr>
+        <p:spPr>
+          <a:xfrm>
+            <a:off x="0" y="164592"/>
+            <a:ext cx="146304" cy="6693408"/>
+          </a:xfrm>
+          <a:prstGeom prst="rect">
+            <a:avLst/>
+          </a:prstGeom>
+          <a:solidFill>
+            <a:srgbClr val="2F8A28"/>
+          </a:solidFill>
+          <a:ln w="12700">
+            <a:solidFill>
+              <a:srgbClr val="2F8A28"/>
+            </a:solidFill>
+            <a:prstDash val="solid"/>
+          </a:ln>
+        </p:spPr>
+      </p:sp>
+      <p:sp>
+        <p:nvSpPr>
+          <p:cNvPr id="4" name="Text 2"/>
+          <p:cNvSpPr/>
+          <p:nvPr/>
+        </p:nvSpPr>
+        <p:spPr>
+          <a:xfrm>
+            <a:off x="502920" y="292608"/>
+            <a:ext cx="10149840" cy="256032"/>
+          </a:xfrm>
+          <a:prstGeom prst="rect">
+            <a:avLst/>
+          </a:prstGeom>
+          <a:noFill/>
+          <a:ln/>
+        </p:spPr>
+        <p:txBody>
+          <a:bodyPr wrap="square" lIns="0" tIns="0" rIns="0" bIns="0" rtlCol="0" anchor="ctr"/>
+          <a:lstStyle/>
+          <a:p>
+            <a:pPr indent="0" marL="0">
+              <a:buNone/>
+            </a:pPr>
+            <a:r>
+              <a:rPr lang="en-US" sz="900" b="1" dirty="0">
+                <a:solidFill>
+                  <a:srgbClr val="5F7181"/>
+                </a:solidFill>
+                <a:latin typeface="Aptos" pitchFamily="34" charset="0"/>
+                <a:ea typeface="Aptos" pitchFamily="34" charset="-122"/>
+                <a:cs typeface="Aptos" pitchFamily="34" charset="-120"/>
+              </a:rPr>
+              <a:t>Geospatial AI and Spatial Epidemiology</a:t>
+            </a:r>
+            <a:endParaRPr lang="en-US" sz="900" dirty="0"/>
+          </a:p>
+        </p:txBody>
+      </p:sp>
+      <p:sp>
+        <p:nvSpPr>
+          <p:cNvPr id="5" name="Text 3"/>
+          <p:cNvSpPr/>
+          <p:nvPr/>
+        </p:nvSpPr>
+        <p:spPr>
+          <a:xfrm>
+            <a:off x="502920" y="6537960"/>
+            <a:ext cx="7772400" cy="201168"/>
+          </a:xfrm>
+          <a:prstGeom prst="rect">
+            <a:avLst/>
+          </a:prstGeom>
+          <a:noFill/>
+          <a:ln/>
+        </p:spPr>
+        <p:txBody>
+          <a:bodyPr wrap="square" lIns="0" tIns="0" rIns="0" bIns="0" rtlCol="0" anchor="ctr"/>
+          <a:lstStyle/>
+          <a:p>
+            <a:pPr indent="0" marL="0">
+              <a:buNone/>
+            </a:pPr>
+            <a:r>
+              <a:rPr lang="en-US" sz="800" dirty="0">
+                <a:solidFill>
+                  <a:srgbClr val="5F7181"/>
+                </a:solidFill>
+                <a:latin typeface="Aptos" pitchFamily="34" charset="0"/>
+                <a:ea typeface="Aptos" pitchFamily="34" charset="-122"/>
+                <a:cs typeface="Aptos" pitchFamily="34" charset="-120"/>
+              </a:rPr>
+              <a:t>AI Playbook and Toolkit for Public Health Departments</a:t>
+            </a:r>
+            <a:endParaRPr lang="en-US" sz="800" dirty="0"/>
+          </a:p>
+        </p:txBody>
+      </p:sp>
+      <p:sp>
+        <p:nvSpPr>
+          <p:cNvPr id="6" name="Text 4"/>
+          <p:cNvSpPr/>
+          <p:nvPr/>
+        </p:nvSpPr>
+        <p:spPr>
+          <a:xfrm>
+            <a:off x="9966960" y="6537960"/>
+            <a:ext cx="1645920" cy="201168"/>
+          </a:xfrm>
+          <a:prstGeom prst="rect">
+            <a:avLst/>
+          </a:prstGeom>
+          <a:noFill/>
+          <a:ln/>
+        </p:spPr>
+        <p:txBody>
+          <a:bodyPr wrap="square" lIns="0" tIns="0" rIns="0" bIns="0" rtlCol="0" anchor="ctr"/>
+          <a:lstStyle/>
+          <a:p>
+            <a:pPr algn="r" indent="0" marL="0">
+              <a:buNone/>
+            </a:pPr>
+            <a:r>
+              <a:rPr lang="en-US" sz="800" dirty="0">
+                <a:solidFill>
+                  <a:srgbClr val="5F7181"/>
+                </a:solidFill>
+                <a:latin typeface="Aptos" pitchFamily="34" charset="0"/>
+                <a:ea typeface="Aptos" pitchFamily="34" charset="-122"/>
+                <a:cs typeface="Aptos" pitchFamily="34" charset="-120"/>
+              </a:rPr>
+              <a:t>© Paula Soper</a:t>
+            </a:r>
+            <a:endParaRPr lang="en-US" sz="800" dirty="0"/>
+          </a:p>
+        </p:txBody>
+      </p:sp>
+      <p:sp>
+        <p:nvSpPr>
+          <p:cNvPr id="7" name="Shape 5"/>
+          <p:cNvSpPr/>
+          <p:nvPr/>
+        </p:nvSpPr>
+        <p:spPr>
+          <a:xfrm>
+            <a:off x="640080" y="658368"/>
+            <a:ext cx="420624" cy="420624"/>
+          </a:xfrm>
+          <a:prstGeom prst="ellipse">
+            <a:avLst/>
+          </a:prstGeom>
+          <a:solidFill>
+            <a:srgbClr val="0068B7"/>
+          </a:solidFill>
+          <a:ln w="12700">
+            <a:solidFill>
+              <a:srgbClr val="0068B7"/>
+            </a:solidFill>
+            <a:prstDash val="solid"/>
+          </a:ln>
+        </p:spPr>
+      </p:sp>
+      <p:sp>
+        <p:nvSpPr>
+          <p:cNvPr id="8" name="Text 6"/>
+          <p:cNvSpPr/>
+          <p:nvPr/>
+        </p:nvSpPr>
+        <p:spPr>
+          <a:xfrm>
+            <a:off x="640080" y="731520"/>
+            <a:ext cx="420624" cy="164592"/>
+          </a:xfrm>
+          <a:prstGeom prst="rect">
+            <a:avLst/>
+          </a:prstGeom>
+          <a:noFill/>
+          <a:ln/>
+        </p:spPr>
+        <p:txBody>
+          <a:bodyPr wrap="square" lIns="0" tIns="0" rIns="0" bIns="0" rtlCol="0" anchor="ctr"/>
+          <a:lstStyle/>
+          <a:p>
+            <a:pPr algn="ctr" indent="0" marL="0">
+              <a:buNone/>
+            </a:pPr>
+            <a:r>
+              <a:rPr lang="en-US" sz="1100" b="1" dirty="0">
+                <a:solidFill>
+                  <a:srgbClr val="FFFFFF"/>
+                </a:solidFill>
+                <a:latin typeface="Aptos" pitchFamily="34" charset="0"/>
+                <a:ea typeface="Aptos" pitchFamily="34" charset="-122"/>
+                <a:cs typeface="Aptos" pitchFamily="34" charset="-120"/>
+              </a:rPr>
+              <a:t>13</a:t>
+            </a:r>
+            <a:endParaRPr lang="en-US" sz="1100" dirty="0"/>
+          </a:p>
+        </p:txBody>
+      </p:sp>
+      <p:sp>
+        <p:nvSpPr>
+          <p:cNvPr id="9" name="Text 7"/>
+          <p:cNvSpPr/>
+          <p:nvPr/>
+        </p:nvSpPr>
+        <p:spPr>
+          <a:xfrm>
+            <a:off x="640080" y="621792"/>
+            <a:ext cx="10881360" cy="566928"/>
+          </a:xfrm>
+          <a:prstGeom prst="rect">
+            <a:avLst/>
+          </a:prstGeom>
+          <a:noFill/>
+          <a:ln/>
+        </p:spPr>
+        <p:txBody>
+          <a:bodyPr wrap="square" lIns="0" tIns="0" rIns="0" bIns="0" rtlCol="0" anchor="ctr">
+            <a:normAutofit/>
+          </a:bodyPr>
+          <a:lstStyle/>
+          <a:p>
+            <a:pPr indent="0" marL="0">
+              <a:buNone/>
+            </a:pPr>
+            <a:r>
+              <a:rPr lang="en-US" sz="2700" b="1" dirty="0">
+                <a:solidFill>
+                  <a:srgbClr val="003A63"/>
+                </a:solidFill>
+                <a:latin typeface="Aptos Display" pitchFamily="34" charset="0"/>
+                <a:ea typeface="Aptos Display" pitchFamily="34" charset="-122"/>
+                <a:cs typeface="Aptos Display" pitchFamily="34" charset="-120"/>
+              </a:rPr>
+              <a:t>References and Resources</a:t>
+            </a:r>
+            <a:endParaRPr lang="en-US" sz="2700" dirty="0"/>
+          </a:p>
+        </p:txBody>
+      </p:sp>
+      <p:sp>
+        <p:nvSpPr>
+          <p:cNvPr id="10" name="Text 8"/>
+          <p:cNvSpPr/>
+          <p:nvPr/>
+        </p:nvSpPr>
+        <p:spPr>
+          <a:xfrm>
+            <a:off x="868680" y="1417320"/>
+            <a:ext cx="6675120" cy="4434840"/>
+          </a:xfrm>
+          <a:prstGeom prst="rect">
+            <a:avLst/>
+          </a:prstGeom>
+          <a:noFill/>
+          <a:ln/>
+        </p:spPr>
+        <p:txBody>
+          <a:bodyPr wrap="square" lIns="635" tIns="635" rIns="635" bIns="635" rtlCol="0" anchor="t">
+            <a:normAutofit/>
+          </a:bodyPr>
+          <a:lstStyle/>
+          <a:p>
+            <a:r>
+              <a:rPr lang="en-US" sz="1700" dirty="0">
+                <a:solidFill>
+                  <a:srgbClr val="17364A"/>
+                </a:solidFill>
+                <a:latin typeface="Aptos" pitchFamily="34" charset="0"/>
+                <a:ea typeface="Aptos" pitchFamily="34" charset="-122"/>
+                <a:cs typeface="Aptos" pitchFamily="34" charset="-120"/>
+              </a:rPr>
               <a:t>CDC GIS and Public Health Resources: https://www.cdc.gov/gis/</a:t>
             </a:r>
-            <a:endParaRPr lang="en-US" sz="1450" dirty="0"/>
-          </a:p>
-          <a:p>
-            <a:r>
-              <a:rPr lang="en-US" sz="1450" dirty="0">
+            <a:endParaRPr lang="en-US" sz="1700" dirty="0"/>
+          </a:p>
+          <a:p>
+            <a:r>
+              <a:rPr lang="en-US" sz="1700" dirty="0">
                 <a:solidFill>
                   <a:srgbClr val="17364A"/>
                 </a:solidFill>
@@ -6048,11 +10713,11 @@
               </a:rPr>
               <a:t>NIST Artificial Intelligence Risk Management Framework: https://www.nist.gov/itl/ai-risk-management-framework</a:t>
             </a:r>
-            <a:endParaRPr lang="en-US" sz="1450" dirty="0"/>
-          </a:p>
-          <a:p>
-            <a:r>
-              <a:rPr lang="en-US" sz="1450" dirty="0">
+            <a:endParaRPr lang="en-US" sz="1700" dirty="0"/>
+          </a:p>
+          <a:p>
+            <a:r>
+              <a:rPr lang="en-US" sz="1700" dirty="0">
                 <a:solidFill>
                   <a:srgbClr val="17364A"/>
                 </a:solidFill>
@@ -6062,11 +10727,11 @@
               </a:rPr>
               <a:t>NIST Privacy Framework: https://www.nist.gov/privacy-framework</a:t>
             </a:r>
-            <a:endParaRPr lang="en-US" sz="1450" dirty="0"/>
-          </a:p>
-          <a:p>
-            <a:r>
-              <a:rPr lang="en-US" sz="1450" dirty="0">
+            <a:endParaRPr lang="en-US" sz="1700" dirty="0"/>
+          </a:p>
+          <a:p>
+            <a:r>
+              <a:rPr lang="en-US" sz="1700" dirty="0">
                 <a:solidFill>
                   <a:srgbClr val="17364A"/>
                 </a:solidFill>
@@ -6076,7 +10741,221 @@
               </a:rPr>
               <a:t>CDC Public Health Data Strategy: https://www.cdc.gov/public-health-data-strategy/php/about/index.html</a:t>
             </a:r>
-            <a:endParaRPr lang="en-US" sz="1450" dirty="0"/>
+            <a:endParaRPr lang="en-US" sz="1700" dirty="0"/>
+          </a:p>
+        </p:txBody>
+      </p:sp>
+      <p:sp>
+        <p:nvSpPr>
+          <p:cNvPr id="11" name="Shape 9"/>
+          <p:cNvSpPr/>
+          <p:nvPr/>
+        </p:nvSpPr>
+        <p:spPr>
+          <a:xfrm>
+            <a:off x="7909560" y="1417320"/>
+            <a:ext cx="3154680" cy="1828800"/>
+          </a:xfrm>
+          <a:prstGeom prst="roundRect">
+            <a:avLst>
+              <a:gd name="adj" fmla="val 6000"/>
+            </a:avLst>
+          </a:prstGeom>
+          <a:solidFill>
+            <a:srgbClr val="EEF8ED"/>
+          </a:solidFill>
+          <a:ln w="12700">
+            <a:solidFill>
+              <a:srgbClr val="B9D7E6"/>
+            </a:solidFill>
+            <a:prstDash val="solid"/>
+          </a:ln>
+        </p:spPr>
+      </p:sp>
+      <p:sp>
+        <p:nvSpPr>
+          <p:cNvPr id="12" name="Text 10"/>
+          <p:cNvSpPr/>
+          <p:nvPr/>
+        </p:nvSpPr>
+        <p:spPr>
+          <a:xfrm>
+            <a:off x="8074152" y="1563624"/>
+            <a:ext cx="2825496" cy="201168"/>
+          </a:xfrm>
+          <a:prstGeom prst="rect">
+            <a:avLst/>
+          </a:prstGeom>
+          <a:noFill/>
+          <a:ln/>
+        </p:spPr>
+        <p:txBody>
+          <a:bodyPr wrap="square" lIns="0" tIns="0" rIns="0" bIns="0" rtlCol="0" anchor="ctr"/>
+          <a:lstStyle/>
+          <a:p>
+            <a:pPr indent="0" marL="0">
+              <a:buNone/>
+            </a:pPr>
+            <a:r>
+              <a:rPr lang="en-US" sz="950" b="1" dirty="0">
+                <a:solidFill>
+                  <a:srgbClr val="0068B7"/>
+                </a:solidFill>
+                <a:latin typeface="Aptos" pitchFamily="34" charset="0"/>
+                <a:ea typeface="Aptos" pitchFamily="34" charset="-122"/>
+                <a:cs typeface="Aptos" pitchFamily="34" charset="-120"/>
+              </a:rPr>
+              <a:t>Key idea</a:t>
+            </a:r>
+            <a:endParaRPr lang="en-US" sz="950" dirty="0"/>
+          </a:p>
+        </p:txBody>
+      </p:sp>
+      <p:sp>
+        <p:nvSpPr>
+          <p:cNvPr id="13" name="Text 11"/>
+          <p:cNvSpPr/>
+          <p:nvPr/>
+        </p:nvSpPr>
+        <p:spPr>
+          <a:xfrm>
+            <a:off x="8074152" y="1856232"/>
+            <a:ext cx="2825496" cy="1261872"/>
+          </a:xfrm>
+          <a:prstGeom prst="rect">
+            <a:avLst/>
+          </a:prstGeom>
+          <a:noFill/>
+          <a:ln/>
+        </p:spPr>
+        <p:txBody>
+          <a:bodyPr wrap="square" lIns="0" tIns="0" rIns="0" bIns="0" rtlCol="0" anchor="t">
+            <a:normAutofit/>
+          </a:bodyPr>
+          <a:lstStyle/>
+          <a:p>
+            <a:pPr indent="0" marL="0">
+              <a:buNone/>
+            </a:pPr>
+            <a:r>
+              <a:rPr lang="en-US" sz="1250" dirty="0">
+                <a:solidFill>
+                  <a:srgbClr val="17364A"/>
+                </a:solidFill>
+                <a:latin typeface="Aptos" pitchFamily="34" charset="0"/>
+                <a:ea typeface="Aptos" pitchFamily="34" charset="-122"/>
+                <a:cs typeface="Aptos" pitchFamily="34" charset="-120"/>
+              </a:rPr>
+              <a:t>CDC GIS and Public Health Resources: https://www.cdc.gov/gis/</a:t>
+            </a:r>
+            <a:endParaRPr lang="en-US" sz="1250" dirty="0"/>
+          </a:p>
+        </p:txBody>
+      </p:sp>
+      <p:sp>
+        <p:nvSpPr>
+          <p:cNvPr id="14" name="Shape 12"/>
+          <p:cNvSpPr/>
+          <p:nvPr/>
+        </p:nvSpPr>
+        <p:spPr>
+          <a:xfrm>
+            <a:off x="7909560" y="3520440"/>
+            <a:ext cx="3154680" cy="1737360"/>
+          </a:xfrm>
+          <a:prstGeom prst="roundRect">
+            <a:avLst>
+              <a:gd name="adj" fmla="val 6316"/>
+            </a:avLst>
+          </a:prstGeom>
+          <a:solidFill>
+            <a:srgbClr val="EAF6F8"/>
+          </a:solidFill>
+          <a:ln w="12700">
+            <a:solidFill>
+              <a:srgbClr val="B9D7E6"/>
+            </a:solidFill>
+            <a:prstDash val="solid"/>
+          </a:ln>
+        </p:spPr>
+      </p:sp>
+      <p:sp>
+        <p:nvSpPr>
+          <p:cNvPr id="15" name="Text 13"/>
+          <p:cNvSpPr/>
+          <p:nvPr/>
+        </p:nvSpPr>
+        <p:spPr>
+          <a:xfrm>
+            <a:off x="8074152" y="3666744"/>
+            <a:ext cx="2825496" cy="201168"/>
+          </a:xfrm>
+          <a:prstGeom prst="rect">
+            <a:avLst/>
+          </a:prstGeom>
+          <a:noFill/>
+          <a:ln/>
+        </p:spPr>
+        <p:txBody>
+          <a:bodyPr wrap="square" lIns="0" tIns="0" rIns="0" bIns="0" rtlCol="0" anchor="ctr"/>
+          <a:lstStyle/>
+          <a:p>
+            <a:pPr indent="0" marL="0">
+              <a:buNone/>
+            </a:pPr>
+            <a:r>
+              <a:rPr lang="en-US" sz="950" b="1" dirty="0">
+                <a:solidFill>
+                  <a:srgbClr val="0068B7"/>
+                </a:solidFill>
+                <a:latin typeface="Aptos" pitchFamily="34" charset="0"/>
+                <a:ea typeface="Aptos" pitchFamily="34" charset="-122"/>
+                <a:cs typeface="Aptos" pitchFamily="34" charset="-120"/>
+              </a:rPr>
+              <a:t>Use this for</a:t>
+            </a:r>
+            <a:endParaRPr lang="en-US" sz="950" dirty="0"/>
+          </a:p>
+        </p:txBody>
+      </p:sp>
+      <p:sp>
+        <p:nvSpPr>
+          <p:cNvPr id="16" name="Text 14"/>
+          <p:cNvSpPr/>
+          <p:nvPr/>
+        </p:nvSpPr>
+        <p:spPr>
+          <a:xfrm>
+            <a:off x="8074152" y="3959352"/>
+            <a:ext cx="2825496" cy="1170432"/>
+          </a:xfrm>
+          <a:prstGeom prst="rect">
+            <a:avLst/>
+          </a:prstGeom>
+          <a:noFill/>
+          <a:ln/>
+        </p:spPr>
+        <p:txBody>
+          <a:bodyPr wrap="square" lIns="0" tIns="0" rIns="0" bIns="0" rtlCol="0" anchor="t">
+            <a:normAutofit/>
+          </a:bodyPr>
+          <a:lstStyle/>
+          <a:p>
+            <a:pPr indent="0" marL="0">
+              <a:buNone/>
+            </a:pPr>
+            <a:r>
+              <a:rPr lang="en-US" sz="1250" dirty="0">
+                <a:solidFill>
+                  <a:srgbClr val="17364A"/>
+                </a:solidFill>
+                <a:latin typeface="Aptos" pitchFamily="34" charset="0"/>
+                <a:ea typeface="Aptos" pitchFamily="34" charset="-122"/>
+                <a:cs typeface="Aptos" pitchFamily="34" charset="-120"/>
+              </a:rPr>
+              <a:t>Connect the concept to public health decisions, safeguards, documentation, or implementation work.</a:t>
+            </a:r>
+            <a:endParaRPr lang="en-US" sz="1250" dirty="0"/>
           </a:p>
         </p:txBody>
       </p:sp>
@@ -6139,7 +11018,32 @@
       </p:sp>
       <p:sp>
         <p:nvSpPr>
-          <p:cNvPr id="3" name="Text 1"/>
+          <p:cNvPr id="3" name="Shape 1"/>
+          <p:cNvSpPr/>
+          <p:nvPr/>
+        </p:nvSpPr>
+        <p:spPr>
+          <a:xfrm>
+            <a:off x="0" y="164592"/>
+            <a:ext cx="146304" cy="6693408"/>
+          </a:xfrm>
+          <a:prstGeom prst="rect">
+            <a:avLst/>
+          </a:prstGeom>
+          <a:solidFill>
+            <a:srgbClr val="2F8A28"/>
+          </a:solidFill>
+          <a:ln w="12700">
+            <a:solidFill>
+              <a:srgbClr val="2F8A28"/>
+            </a:solidFill>
+            <a:prstDash val="solid"/>
+          </a:ln>
+        </p:spPr>
+      </p:sp>
+      <p:sp>
+        <p:nvSpPr>
+          <p:cNvPr id="4" name="Text 2"/>
           <p:cNvSpPr/>
           <p:nvPr/>
         </p:nvSpPr>
@@ -6178,7 +11082,7 @@
       </p:sp>
       <p:sp>
         <p:nvSpPr>
-          <p:cNvPr id="4" name="Text 2"/>
+          <p:cNvPr id="5" name="Text 3"/>
           <p:cNvSpPr/>
           <p:nvPr/>
         </p:nvSpPr>
@@ -6217,7 +11121,7 @@
       </p:sp>
       <p:sp>
         <p:nvSpPr>
-          <p:cNvPr id="5" name="Text 3"/>
+          <p:cNvPr id="6" name="Text 4"/>
           <p:cNvSpPr/>
           <p:nvPr/>
         </p:nvSpPr>
@@ -6256,7 +11160,7 @@
       </p:sp>
       <p:sp>
         <p:nvSpPr>
-          <p:cNvPr id="6" name="Text 4"/>
+          <p:cNvPr id="7" name="Text 5"/>
           <p:cNvSpPr/>
           <p:nvPr/>
         </p:nvSpPr>
@@ -6289,7 +11193,7 @@
                 <a:ea typeface="Aptos Display" pitchFamily="34" charset="-122"/>
                 <a:cs typeface="Aptos Display" pitchFamily="34" charset="-120"/>
               </a:rPr>
-              <a:t>Learning Objectives</a:t>
+              <a:t>How this module connects to the playbook</a:t>
             </a:r>
             <a:endParaRPr lang="en-US" sz="2700" dirty="0"/>
           </a:p>
@@ -6297,14 +11201,14 @@
       </p:sp>
       <p:sp>
         <p:nvSpPr>
-          <p:cNvPr id="7" name="Text 5"/>
-          <p:cNvSpPr/>
-          <p:nvPr/>
-        </p:nvSpPr>
-        <p:spPr>
-          <a:xfrm>
-            <a:off x="822960" y="1325880"/>
-            <a:ext cx="10378440" cy="4800600"/>
+          <p:cNvPr id="8" name="Text 6"/>
+          <p:cNvSpPr/>
+          <p:nvPr/>
+        </p:nvSpPr>
+        <p:spPr>
+          <a:xfrm>
+            <a:off x="868680" y="1417320"/>
+            <a:ext cx="6903720" cy="4480560"/>
           </a:xfrm>
           <a:prstGeom prst="rect">
             <a:avLst/>
@@ -6319,7 +11223,7 @@
           <a:lstStyle/>
           <a:p>
             <a:r>
-              <a:rPr lang="en-US" sz="1450" dirty="0">
+              <a:rPr lang="en-US" sz="1540" dirty="0">
                 <a:solidFill>
                   <a:srgbClr val="17364A"/>
                 </a:solidFill>
@@ -6327,13 +11231,13 @@
                 <a:ea typeface="Aptos" pitchFamily="34" charset="-122"/>
                 <a:cs typeface="Aptos" pitchFamily="34" charset="-120"/>
               </a:rPr>
-              <a:t>Define geospatial AI and spatial epidemiology in public health terms.</a:t>
-            </a:r>
-            <a:endParaRPr lang="en-US" sz="1450" dirty="0"/>
-          </a:p>
-          <a:p>
-            <a:r>
-              <a:rPr lang="en-US" sz="1450" dirty="0">
+              <a:t>Play 11: Build and Deploy AI Solutions - This lesson informs Play 11 by helping learners connect the lesson topic to build and deploy.</a:t>
+            </a:r>
+            <a:endParaRPr lang="en-US" sz="1540" dirty="0"/>
+          </a:p>
+          <a:p>
+            <a:r>
+              <a:rPr lang="en-US" sz="1540" dirty="0">
                 <a:solidFill>
                   <a:srgbClr val="17364A"/>
                 </a:solidFill>
@@ -6341,13 +11245,13 @@
                 <a:ea typeface="Aptos" pitchFamily="34" charset="-122"/>
                 <a:cs typeface="Aptos" pitchFamily="34" charset="-120"/>
               </a:rPr>
-              <a:t>Explain how geocoding, aggregation, spatial scale, and data quality affect AI-supported maps and analyses.</a:t>
-            </a:r>
-            <a:endParaRPr lang="en-US" sz="1450" dirty="0"/>
-          </a:p>
-          <a:p>
-            <a:r>
-              <a:rPr lang="en-US" sz="1450" dirty="0">
+              <a:t>Play 2: Readiness Assessment - This lesson informs Play 2 by helping learners connect the lesson topic to readiness assessment work.</a:t>
+            </a:r>
+            <a:endParaRPr lang="en-US" sz="1540" dirty="0"/>
+          </a:p>
+          <a:p>
+            <a:r>
+              <a:rPr lang="en-US" sz="1540" dirty="0">
                 <a:solidFill>
                   <a:srgbClr val="17364A"/>
                 </a:solidFill>
@@ -6355,13 +11259,13 @@
                 <a:ea typeface="Aptos" pitchFamily="34" charset="-122"/>
                 <a:cs typeface="Aptos" pitchFamily="34" charset="-120"/>
               </a:rPr>
-              <a:t>Identify privacy and re-identification risks related to location data.</a:t>
-            </a:r>
-            <a:endParaRPr lang="en-US" sz="1450" dirty="0"/>
-          </a:p>
-          <a:p>
-            <a:r>
-              <a:rPr lang="en-US" sz="1450" dirty="0">
+              <a:t>Play 1: Vision &amp; Guardrails - This lesson informs Play 1 by helping learners connect the lesson topic to vision &amp; guardrails work in.</a:t>
+            </a:r>
+            <a:endParaRPr lang="en-US" sz="1540" dirty="0"/>
+          </a:p>
+          <a:p>
+            <a:r>
+              <a:rPr lang="en-US" sz="1540" dirty="0">
                 <a:solidFill>
                   <a:srgbClr val="17364A"/>
                 </a:solidFill>
@@ -6369,13 +11273,106 @@
                 <a:ea typeface="Aptos" pitchFamily="34" charset="-122"/>
                 <a:cs typeface="Aptos" pitchFamily="34" charset="-120"/>
               </a:rPr>
-              <a:t>Recognize spatial bias, modifiable areal unit problems, and ecological interpretation risks.</a:t>
-            </a:r>
-            <a:endParaRPr lang="en-US" sz="1450" dirty="0"/>
-          </a:p>
-          <a:p>
-            <a:r>
-              <a:rPr lang="en-US" sz="1450" dirty="0">
+              <a:t>Play 7: Prioritize Use Cases - This lesson informs Play 7 by helping learners connect the lesson topic to prioritize use cases work.</a:t>
+            </a:r>
+            <a:endParaRPr lang="en-US" sz="1540" dirty="0"/>
+          </a:p>
+        </p:txBody>
+      </p:sp>
+      <p:sp>
+        <p:nvSpPr>
+          <p:cNvPr id="9" name="Shape 7"/>
+          <p:cNvSpPr/>
+          <p:nvPr/>
+        </p:nvSpPr>
+        <p:spPr>
+          <a:xfrm>
+            <a:off x="8046720" y="1417320"/>
+            <a:ext cx="3063240" cy="2103120"/>
+          </a:xfrm>
+          <a:prstGeom prst="roundRect">
+            <a:avLst>
+              <a:gd name="adj" fmla="val 5217"/>
+            </a:avLst>
+          </a:prstGeom>
+          <a:solidFill>
+            <a:srgbClr val="EEF8ED"/>
+          </a:solidFill>
+          <a:ln w="12700">
+            <a:solidFill>
+              <a:srgbClr val="B9D7E6"/>
+            </a:solidFill>
+            <a:prstDash val="solid"/>
+          </a:ln>
+        </p:spPr>
+      </p:sp>
+      <p:sp>
+        <p:nvSpPr>
+          <p:cNvPr id="10" name="Text 8"/>
+          <p:cNvSpPr/>
+          <p:nvPr/>
+        </p:nvSpPr>
+        <p:spPr>
+          <a:xfrm>
+            <a:off x="8211312" y="1563624"/>
+            <a:ext cx="2734056" cy="201168"/>
+          </a:xfrm>
+          <a:prstGeom prst="rect">
+            <a:avLst/>
+          </a:prstGeom>
+          <a:noFill/>
+          <a:ln/>
+        </p:spPr>
+        <p:txBody>
+          <a:bodyPr wrap="square" lIns="0" tIns="0" rIns="0" bIns="0" rtlCol="0" anchor="ctr"/>
+          <a:lstStyle/>
+          <a:p>
+            <a:pPr indent="0" marL="0">
+              <a:buNone/>
+            </a:pPr>
+            <a:r>
+              <a:rPr lang="en-US" sz="950" b="1" dirty="0">
+                <a:solidFill>
+                  <a:srgbClr val="0068B7"/>
+                </a:solidFill>
+                <a:latin typeface="Aptos" pitchFamily="34" charset="0"/>
+                <a:ea typeface="Aptos" pitchFamily="34" charset="-122"/>
+                <a:cs typeface="Aptos" pitchFamily="34" charset="-120"/>
+              </a:rPr>
+              <a:t>Apply the lesson</a:t>
+            </a:r>
+            <a:endParaRPr lang="en-US" sz="950" dirty="0"/>
+          </a:p>
+        </p:txBody>
+      </p:sp>
+      <p:sp>
+        <p:nvSpPr>
+          <p:cNvPr id="11" name="Text 9"/>
+          <p:cNvSpPr/>
+          <p:nvPr/>
+        </p:nvSpPr>
+        <p:spPr>
+          <a:xfrm>
+            <a:off x="8211312" y="1856232"/>
+            <a:ext cx="2734056" cy="1536192"/>
+          </a:xfrm>
+          <a:prstGeom prst="rect">
+            <a:avLst/>
+          </a:prstGeom>
+          <a:noFill/>
+          <a:ln/>
+        </p:spPr>
+        <p:txBody>
+          <a:bodyPr wrap="square" lIns="0" tIns="0" rIns="0" bIns="0" rtlCol="0" anchor="t">
+            <a:normAutofit/>
+          </a:bodyPr>
+          <a:lstStyle/>
+          <a:p>
+            <a:pPr indent="0" marL="0">
+              <a:buNone/>
+            </a:pPr>
+            <a:r>
+              <a:rPr lang="en-US" sz="1250" dirty="0">
                 <a:solidFill>
                   <a:srgbClr val="17364A"/>
                 </a:solidFill>
@@ -6383,9 +11380,116 @@
                 <a:ea typeface="Aptos" pitchFamily="34" charset="-122"/>
                 <a:cs typeface="Aptos" pitchFamily="34" charset="-120"/>
               </a:rPr>
-              <a:t>Design guardrails for AI-supported spatial analysis, hotspot detection, service planning, or emergency response.</a:t>
-            </a:r>
-            <a:endParaRPr lang="en-US" sz="1450" dirty="0"/>
+              <a:t>Use the related plays to identify decisions, participants, timing, approvals, and documentation needed for responsible implementation.</a:t>
+            </a:r>
+            <a:endParaRPr lang="en-US" sz="1250" dirty="0"/>
+          </a:p>
+        </p:txBody>
+      </p:sp>
+      <p:sp>
+        <p:nvSpPr>
+          <p:cNvPr id="12" name="Shape 10"/>
+          <p:cNvSpPr/>
+          <p:nvPr/>
+        </p:nvSpPr>
+        <p:spPr>
+          <a:xfrm>
+            <a:off x="8046720" y="3794760"/>
+            <a:ext cx="3063240" cy="1508760"/>
+          </a:xfrm>
+          <a:prstGeom prst="roundRect">
+            <a:avLst>
+              <a:gd name="adj" fmla="val 7273"/>
+            </a:avLst>
+          </a:prstGeom>
+          <a:solidFill>
+            <a:srgbClr val="FFF4D9"/>
+          </a:solidFill>
+          <a:ln w="12700">
+            <a:solidFill>
+              <a:srgbClr val="B9D7E6"/>
+            </a:solidFill>
+            <a:prstDash val="solid"/>
+          </a:ln>
+        </p:spPr>
+      </p:sp>
+      <p:sp>
+        <p:nvSpPr>
+          <p:cNvPr id="13" name="Text 11"/>
+          <p:cNvSpPr/>
+          <p:nvPr/>
+        </p:nvSpPr>
+        <p:spPr>
+          <a:xfrm>
+            <a:off x="8211312" y="3941064"/>
+            <a:ext cx="2734056" cy="201168"/>
+          </a:xfrm>
+          <a:prstGeom prst="rect">
+            <a:avLst/>
+          </a:prstGeom>
+          <a:noFill/>
+          <a:ln/>
+        </p:spPr>
+        <p:txBody>
+          <a:bodyPr wrap="square" lIns="0" tIns="0" rIns="0" bIns="0" rtlCol="0" anchor="ctr"/>
+          <a:lstStyle/>
+          <a:p>
+            <a:pPr indent="0" marL="0">
+              <a:buNone/>
+            </a:pPr>
+            <a:r>
+              <a:rPr lang="en-US" sz="950" b="1" dirty="0">
+                <a:solidFill>
+                  <a:srgbClr val="0068B7"/>
+                </a:solidFill>
+                <a:latin typeface="Aptos" pitchFamily="34" charset="0"/>
+                <a:ea typeface="Aptos" pitchFamily="34" charset="-122"/>
+                <a:cs typeface="Aptos" pitchFamily="34" charset="-120"/>
+              </a:rPr>
+              <a:t>Keep in mind</a:t>
+            </a:r>
+            <a:endParaRPr lang="en-US" sz="950" dirty="0"/>
+          </a:p>
+        </p:txBody>
+      </p:sp>
+      <p:sp>
+        <p:nvSpPr>
+          <p:cNvPr id="14" name="Text 12"/>
+          <p:cNvSpPr/>
+          <p:nvPr/>
+        </p:nvSpPr>
+        <p:spPr>
+          <a:xfrm>
+            <a:off x="8211312" y="4233672"/>
+            <a:ext cx="2734056" cy="941832"/>
+          </a:xfrm>
+          <a:prstGeom prst="rect">
+            <a:avLst/>
+          </a:prstGeom>
+          <a:noFill/>
+          <a:ln/>
+        </p:spPr>
+        <p:txBody>
+          <a:bodyPr wrap="square" lIns="0" tIns="0" rIns="0" bIns="0" rtlCol="0" anchor="t">
+            <a:normAutofit/>
+          </a:bodyPr>
+          <a:lstStyle/>
+          <a:p>
+            <a:pPr indent="0" marL="0">
+              <a:buNone/>
+            </a:pPr>
+            <a:r>
+              <a:rPr lang="en-US" sz="1250" dirty="0">
+                <a:solidFill>
+                  <a:srgbClr val="17364A"/>
+                </a:solidFill>
+                <a:latin typeface="Aptos" pitchFamily="34" charset="0"/>
+                <a:ea typeface="Aptos" pitchFamily="34" charset="-122"/>
+                <a:cs typeface="Aptos" pitchFamily="34" charset="-120"/>
+              </a:rPr>
+              <a:t>The playbook connection helps turn training into agency work, not just individual knowledge.</a:t>
+            </a:r>
+            <a:endParaRPr lang="en-US" sz="1250" dirty="0"/>
           </a:p>
         </p:txBody>
       </p:sp>
@@ -6448,7 +11552,32 @@
       </p:sp>
       <p:sp>
         <p:nvSpPr>
-          <p:cNvPr id="3" name="Text 1"/>
+          <p:cNvPr id="3" name="Shape 1"/>
+          <p:cNvSpPr/>
+          <p:nvPr/>
+        </p:nvSpPr>
+        <p:spPr>
+          <a:xfrm>
+            <a:off x="0" y="164592"/>
+            <a:ext cx="146304" cy="6693408"/>
+          </a:xfrm>
+          <a:prstGeom prst="rect">
+            <a:avLst/>
+          </a:prstGeom>
+          <a:solidFill>
+            <a:srgbClr val="2F8A28"/>
+          </a:solidFill>
+          <a:ln w="12700">
+            <a:solidFill>
+              <a:srgbClr val="2F8A28"/>
+            </a:solidFill>
+            <a:prstDash val="solid"/>
+          </a:ln>
+        </p:spPr>
+      </p:sp>
+      <p:sp>
+        <p:nvSpPr>
+          <p:cNvPr id="4" name="Text 2"/>
           <p:cNvSpPr/>
           <p:nvPr/>
         </p:nvSpPr>
@@ -6487,7 +11616,7 @@
       </p:sp>
       <p:sp>
         <p:nvSpPr>
-          <p:cNvPr id="4" name="Text 2"/>
+          <p:cNvPr id="5" name="Text 3"/>
           <p:cNvSpPr/>
           <p:nvPr/>
         </p:nvSpPr>
@@ -6526,7 +11655,7 @@
       </p:sp>
       <p:sp>
         <p:nvSpPr>
-          <p:cNvPr id="5" name="Text 3"/>
+          <p:cNvPr id="6" name="Text 4"/>
           <p:cNvSpPr/>
           <p:nvPr/>
         </p:nvSpPr>
@@ -6565,7 +11694,7 @@
       </p:sp>
       <p:sp>
         <p:nvSpPr>
-          <p:cNvPr id="6" name="Text 4"/>
+          <p:cNvPr id="7" name="Text 5"/>
           <p:cNvSpPr/>
           <p:nvPr/>
         </p:nvSpPr>
@@ -6598,7 +11727,7 @@
                 <a:ea typeface="Aptos Display" pitchFamily="34" charset="-122"/>
                 <a:cs typeface="Aptos Display" pitchFamily="34" charset="-120"/>
               </a:rPr>
-              <a:t>Learning Objectives Continued</a:t>
+              <a:t>Related toolkit resources</a:t>
             </a:r>
             <a:endParaRPr lang="en-US" sz="2700" dirty="0"/>
           </a:p>
@@ -6606,14 +11735,14 @@
       </p:sp>
       <p:sp>
         <p:nvSpPr>
-          <p:cNvPr id="7" name="Text 5"/>
-          <p:cNvSpPr/>
-          <p:nvPr/>
-        </p:nvSpPr>
-        <p:spPr>
-          <a:xfrm>
-            <a:off x="822960" y="1325880"/>
-            <a:ext cx="10378440" cy="4800600"/>
+          <p:cNvPr id="8" name="Text 6"/>
+          <p:cNvSpPr/>
+          <p:nvPr/>
+        </p:nvSpPr>
+        <p:spPr>
+          <a:xfrm>
+            <a:off x="868680" y="1417320"/>
+            <a:ext cx="6903720" cy="4480560"/>
           </a:xfrm>
           <a:prstGeom prst="rect">
             <a:avLst/>
@@ -6628,7 +11757,7 @@
           <a:lstStyle/>
           <a:p>
             <a:r>
-              <a:rPr lang="en-US" sz="1450" dirty="0">
+              <a:rPr lang="en-US" sz="1460" dirty="0">
                 <a:solidFill>
                   <a:srgbClr val="17364A"/>
                 </a:solidFill>
@@ -6636,9 +11765,279 @@
                 <a:ea typeface="Aptos" pitchFamily="34" charset="-122"/>
                 <a:cs typeface="Aptos" pitchFamily="34" charset="-120"/>
               </a:rPr>
-              <a:t>Produce a geospatial AI readiness worksheet for a public health workflow.</a:t>
-            </a:r>
-            <a:endParaRPr lang="en-US" sz="1450" dirty="0"/>
+              <a:t>Tool 3: Equity Impact Assessment Checklist (Checklist) - Use this tool to complete or strengthen the practical exercise for the.</a:t>
+            </a:r>
+            <a:endParaRPr lang="en-US" sz="1460" dirty="0"/>
+          </a:p>
+          <a:p>
+            <a:r>
+              <a:rPr lang="en-US" sz="1460" dirty="0">
+                <a:solidFill>
+                  <a:srgbClr val="17364A"/>
+                </a:solidFill>
+                <a:latin typeface="Aptos" pitchFamily="34" charset="0"/>
+                <a:ea typeface="Aptos" pitchFamily="34" charset="-122"/>
+                <a:cs typeface="Aptos" pitchFamily="34" charset="-120"/>
+              </a:rPr>
+              <a:t>Tool 4: AI Policy Landscape Scan (Worksheet) - Use AI Policy Landscape Scan to translate this lesson into a documented public health.</a:t>
+            </a:r>
+            <a:endParaRPr lang="en-US" sz="1460" dirty="0"/>
+          </a:p>
+          <a:p>
+            <a:r>
+              <a:rPr lang="en-US" sz="1460" dirty="0">
+                <a:solidFill>
+                  <a:srgbClr val="17364A"/>
+                </a:solidFill>
+                <a:latin typeface="Aptos" pitchFamily="34" charset="0"/>
+                <a:ea typeface="Aptos" pitchFamily="34" charset="-122"/>
+                <a:cs typeface="Aptos" pitchFamily="34" charset="-120"/>
+              </a:rPr>
+              <a:t>Tool 5: AI Environmental and Resource Impact Review (Checklist) - Use AI Environmental and Resource Impact Review to translate this.</a:t>
+            </a:r>
+            <a:endParaRPr lang="en-US" sz="1460" dirty="0"/>
+          </a:p>
+          <a:p>
+            <a:r>
+              <a:rPr lang="en-US" sz="1460" dirty="0">
+                <a:solidFill>
+                  <a:srgbClr val="17364A"/>
+                </a:solidFill>
+                <a:latin typeface="Aptos" pitchFamily="34" charset="0"/>
+                <a:ea typeface="Aptos" pitchFamily="34" charset="-122"/>
+                <a:cs typeface="Aptos" pitchFamily="34" charset="-120"/>
+              </a:rPr>
+              <a:t>Tool 6: Human-Centered AI Decision Rule Checklist (Checklist) - Use Human-Centered AI Decision Rule Checklist to translate this.</a:t>
+            </a:r>
+            <a:endParaRPr lang="en-US" sz="1460" dirty="0"/>
+          </a:p>
+          <a:p>
+            <a:r>
+              <a:rPr lang="en-US" sz="1460" dirty="0">
+                <a:solidFill>
+                  <a:srgbClr val="17364A"/>
+                </a:solidFill>
+                <a:latin typeface="Aptos" pitchFamily="34" charset="0"/>
+                <a:ea typeface="Aptos" pitchFamily="34" charset="-122"/>
+                <a:cs typeface="Aptos" pitchFamily="34" charset="-120"/>
+              </a:rPr>
+              <a:t>Tool 8: AI Project Charter (Planning) - Use AI Project Charter to translate this lesson into a documented public health AI planning,.</a:t>
+            </a:r>
+            <a:endParaRPr lang="en-US" sz="1460" dirty="0"/>
+          </a:p>
+        </p:txBody>
+      </p:sp>
+      <p:sp>
+        <p:nvSpPr>
+          <p:cNvPr id="9" name="Shape 7"/>
+          <p:cNvSpPr/>
+          <p:nvPr/>
+        </p:nvSpPr>
+        <p:spPr>
+          <a:xfrm>
+            <a:off x="8046720" y="1417320"/>
+            <a:ext cx="3063240" cy="2103120"/>
+          </a:xfrm>
+          <a:prstGeom prst="roundRect">
+            <a:avLst>
+              <a:gd name="adj" fmla="val 5217"/>
+            </a:avLst>
+          </a:prstGeom>
+          <a:solidFill>
+            <a:srgbClr val="EAF6F8"/>
+          </a:solidFill>
+          <a:ln w="12700">
+            <a:solidFill>
+              <a:srgbClr val="B9D7E6"/>
+            </a:solidFill>
+            <a:prstDash val="solid"/>
+          </a:ln>
+        </p:spPr>
+      </p:sp>
+      <p:sp>
+        <p:nvSpPr>
+          <p:cNvPr id="10" name="Text 8"/>
+          <p:cNvSpPr/>
+          <p:nvPr/>
+        </p:nvSpPr>
+        <p:spPr>
+          <a:xfrm>
+            <a:off x="8211312" y="1563624"/>
+            <a:ext cx="2734056" cy="201168"/>
+          </a:xfrm>
+          <a:prstGeom prst="rect">
+            <a:avLst/>
+          </a:prstGeom>
+          <a:noFill/>
+          <a:ln/>
+        </p:spPr>
+        <p:txBody>
+          <a:bodyPr wrap="square" lIns="0" tIns="0" rIns="0" bIns="0" rtlCol="0" anchor="ctr"/>
+          <a:lstStyle/>
+          <a:p>
+            <a:pPr indent="0" marL="0">
+              <a:buNone/>
+            </a:pPr>
+            <a:r>
+              <a:rPr lang="en-US" sz="950" b="1" dirty="0">
+                <a:solidFill>
+                  <a:srgbClr val="0068B7"/>
+                </a:solidFill>
+                <a:latin typeface="Aptos" pitchFamily="34" charset="0"/>
+                <a:ea typeface="Aptos" pitchFamily="34" charset="-122"/>
+                <a:cs typeface="Aptos" pitchFamily="34" charset="-120"/>
+              </a:rPr>
+              <a:t>Use the tools</a:t>
+            </a:r>
+            <a:endParaRPr lang="en-US" sz="950" dirty="0"/>
+          </a:p>
+        </p:txBody>
+      </p:sp>
+      <p:sp>
+        <p:nvSpPr>
+          <p:cNvPr id="11" name="Text 9"/>
+          <p:cNvSpPr/>
+          <p:nvPr/>
+        </p:nvSpPr>
+        <p:spPr>
+          <a:xfrm>
+            <a:off x="8211312" y="1856232"/>
+            <a:ext cx="2734056" cy="1536192"/>
+          </a:xfrm>
+          <a:prstGeom prst="rect">
+            <a:avLst/>
+          </a:prstGeom>
+          <a:noFill/>
+          <a:ln/>
+        </p:spPr>
+        <p:txBody>
+          <a:bodyPr wrap="square" lIns="0" tIns="0" rIns="0" bIns="0" rtlCol="0" anchor="t">
+            <a:normAutofit/>
+          </a:bodyPr>
+          <a:lstStyle/>
+          <a:p>
+            <a:pPr indent="0" marL="0">
+              <a:buNone/>
+            </a:pPr>
+            <a:r>
+              <a:rPr lang="en-US" sz="1250" dirty="0">
+                <a:solidFill>
+                  <a:srgbClr val="17364A"/>
+                </a:solidFill>
+                <a:latin typeface="Aptos" pitchFamily="34" charset="0"/>
+                <a:ea typeface="Aptos" pitchFamily="34" charset="-122"/>
+                <a:cs typeface="Aptos" pitchFamily="34" charset="-120"/>
+              </a:rPr>
+              <a:t>Use linked tools when your department needs a structured worksheet, template, checklist, review process, or documentation artifact.</a:t>
+            </a:r>
+            <a:endParaRPr lang="en-US" sz="1250" dirty="0"/>
+          </a:p>
+        </p:txBody>
+      </p:sp>
+      <p:sp>
+        <p:nvSpPr>
+          <p:cNvPr id="12" name="Shape 10"/>
+          <p:cNvSpPr/>
+          <p:nvPr/>
+        </p:nvSpPr>
+        <p:spPr>
+          <a:xfrm>
+            <a:off x="8046720" y="3794760"/>
+            <a:ext cx="3063240" cy="1508760"/>
+          </a:xfrm>
+          <a:prstGeom prst="roundRect">
+            <a:avLst>
+              <a:gd name="adj" fmla="val 7273"/>
+            </a:avLst>
+          </a:prstGeom>
+          <a:solidFill>
+            <a:srgbClr val="EEF8ED"/>
+          </a:solidFill>
+          <a:ln w="12700">
+            <a:solidFill>
+              <a:srgbClr val="B9D7E6"/>
+            </a:solidFill>
+            <a:prstDash val="solid"/>
+          </a:ln>
+        </p:spPr>
+      </p:sp>
+      <p:sp>
+        <p:nvSpPr>
+          <p:cNvPr id="13" name="Text 11"/>
+          <p:cNvSpPr/>
+          <p:nvPr/>
+        </p:nvSpPr>
+        <p:spPr>
+          <a:xfrm>
+            <a:off x="8211312" y="3941064"/>
+            <a:ext cx="2734056" cy="201168"/>
+          </a:xfrm>
+          <a:prstGeom prst="rect">
+            <a:avLst/>
+          </a:prstGeom>
+          <a:noFill/>
+          <a:ln/>
+        </p:spPr>
+        <p:txBody>
+          <a:bodyPr wrap="square" lIns="0" tIns="0" rIns="0" bIns="0" rtlCol="0" anchor="ctr"/>
+          <a:lstStyle/>
+          <a:p>
+            <a:pPr indent="0" marL="0">
+              <a:buNone/>
+            </a:pPr>
+            <a:r>
+              <a:rPr lang="en-US" sz="950" b="1" dirty="0">
+                <a:solidFill>
+                  <a:srgbClr val="0068B7"/>
+                </a:solidFill>
+                <a:latin typeface="Aptos" pitchFamily="34" charset="0"/>
+                <a:ea typeface="Aptos" pitchFamily="34" charset="-122"/>
+                <a:cs typeface="Aptos" pitchFamily="34" charset="-120"/>
+              </a:rPr>
+              <a:t>Avoid duplication</a:t>
+            </a:r>
+            <a:endParaRPr lang="en-US" sz="950" dirty="0"/>
+          </a:p>
+        </p:txBody>
+      </p:sp>
+      <p:sp>
+        <p:nvSpPr>
+          <p:cNvPr id="14" name="Text 12"/>
+          <p:cNvSpPr/>
+          <p:nvPr/>
+        </p:nvSpPr>
+        <p:spPr>
+          <a:xfrm>
+            <a:off x="8211312" y="4233672"/>
+            <a:ext cx="2734056" cy="941832"/>
+          </a:xfrm>
+          <a:prstGeom prst="rect">
+            <a:avLst/>
+          </a:prstGeom>
+          <a:noFill/>
+          <a:ln/>
+        </p:spPr>
+        <p:txBody>
+          <a:bodyPr wrap="square" lIns="0" tIns="0" rIns="0" bIns="0" rtlCol="0" anchor="t">
+            <a:normAutofit/>
+          </a:bodyPr>
+          <a:lstStyle/>
+          <a:p>
+            <a:pPr indent="0" marL="0">
+              <a:buNone/>
+            </a:pPr>
+            <a:r>
+              <a:rPr lang="en-US" sz="1250" dirty="0">
+                <a:solidFill>
+                  <a:srgbClr val="17364A"/>
+                </a:solidFill>
+                <a:latin typeface="Aptos" pitchFamily="34" charset="0"/>
+                <a:ea typeface="Aptos" pitchFamily="34" charset="-122"/>
+                <a:cs typeface="Aptos" pitchFamily="34" charset="-120"/>
+              </a:rPr>
+              <a:t>If your department already has a strong equivalent tool, adapt or use the existing process instead of recreating it.</a:t>
+            </a:r>
+            <a:endParaRPr lang="en-US" sz="1250" dirty="0"/>
           </a:p>
         </p:txBody>
       </p:sp>
@@ -6701,7 +12100,32 @@
       </p:sp>
       <p:sp>
         <p:nvSpPr>
-          <p:cNvPr id="3" name="Text 1"/>
+          <p:cNvPr id="3" name="Shape 1"/>
+          <p:cNvSpPr/>
+          <p:nvPr/>
+        </p:nvSpPr>
+        <p:spPr>
+          <a:xfrm>
+            <a:off x="0" y="164592"/>
+            <a:ext cx="146304" cy="6693408"/>
+          </a:xfrm>
+          <a:prstGeom prst="rect">
+            <a:avLst/>
+          </a:prstGeom>
+          <a:solidFill>
+            <a:srgbClr val="2F8A28"/>
+          </a:solidFill>
+          <a:ln w="12700">
+            <a:solidFill>
+              <a:srgbClr val="2F8A28"/>
+            </a:solidFill>
+            <a:prstDash val="solid"/>
+          </a:ln>
+        </p:spPr>
+      </p:sp>
+      <p:sp>
+        <p:nvSpPr>
+          <p:cNvPr id="4" name="Text 2"/>
           <p:cNvSpPr/>
           <p:nvPr/>
         </p:nvSpPr>
@@ -6740,7 +12164,7 @@
       </p:sp>
       <p:sp>
         <p:nvSpPr>
-          <p:cNvPr id="4" name="Text 2"/>
+          <p:cNvPr id="5" name="Text 3"/>
           <p:cNvSpPr/>
           <p:nvPr/>
         </p:nvSpPr>
@@ -6779,7 +12203,7 @@
       </p:sp>
       <p:sp>
         <p:nvSpPr>
-          <p:cNvPr id="5" name="Text 3"/>
+          <p:cNvPr id="6" name="Text 4"/>
           <p:cNvSpPr/>
           <p:nvPr/>
         </p:nvSpPr>
@@ -6818,13 +12242,77 @@
       </p:sp>
       <p:sp>
         <p:nvSpPr>
-          <p:cNvPr id="6" name="Text 4"/>
+          <p:cNvPr id="7" name="Shape 5"/>
           <p:cNvSpPr/>
           <p:nvPr/>
         </p:nvSpPr>
         <p:spPr>
           <a:xfrm>
             <a:off x="640080" y="658368"/>
+            <a:ext cx="420624" cy="420624"/>
+          </a:xfrm>
+          <a:prstGeom prst="ellipse">
+            <a:avLst/>
+          </a:prstGeom>
+          <a:solidFill>
+            <a:srgbClr val="0068B7"/>
+          </a:solidFill>
+          <a:ln w="12700">
+            <a:solidFill>
+              <a:srgbClr val="0068B7"/>
+            </a:solidFill>
+            <a:prstDash val="solid"/>
+          </a:ln>
+        </p:spPr>
+      </p:sp>
+      <p:sp>
+        <p:nvSpPr>
+          <p:cNvPr id="8" name="Text 6"/>
+          <p:cNvSpPr/>
+          <p:nvPr/>
+        </p:nvSpPr>
+        <p:spPr>
+          <a:xfrm>
+            <a:off x="640080" y="731520"/>
+            <a:ext cx="420624" cy="164592"/>
+          </a:xfrm>
+          <a:prstGeom prst="rect">
+            <a:avLst/>
+          </a:prstGeom>
+          <a:noFill/>
+          <a:ln/>
+        </p:spPr>
+        <p:txBody>
+          <a:bodyPr wrap="square" lIns="0" tIns="0" rIns="0" bIns="0" rtlCol="0" anchor="ctr"/>
+          <a:lstStyle/>
+          <a:p>
+            <a:pPr algn="ctr" indent="0" marL="0">
+              <a:buNone/>
+            </a:pPr>
+            <a:r>
+              <a:rPr lang="en-US" sz="1100" b="1" dirty="0">
+                <a:solidFill>
+                  <a:srgbClr val="FFFFFF"/>
+                </a:solidFill>
+                <a:latin typeface="Aptos" pitchFamily="34" charset="0"/>
+                <a:ea typeface="Aptos" pitchFamily="34" charset="-122"/>
+                <a:cs typeface="Aptos" pitchFamily="34" charset="-120"/>
+              </a:rPr>
+              <a:t>1</a:t>
+            </a:r>
+            <a:endParaRPr lang="en-US" sz="1100" dirty="0"/>
+          </a:p>
+        </p:txBody>
+      </p:sp>
+      <p:sp>
+        <p:nvSpPr>
+          <p:cNvPr id="9" name="Text 7"/>
+          <p:cNvSpPr/>
+          <p:nvPr/>
+        </p:nvSpPr>
+        <p:spPr>
+          <a:xfrm>
+            <a:off x="640080" y="621792"/>
             <a:ext cx="10881360" cy="566928"/>
           </a:xfrm>
           <a:prstGeom prst="rect">
@@ -6851,7 +12339,7 @@
                 <a:ea typeface="Aptos Display" pitchFamily="34" charset="-122"/>
                 <a:cs typeface="Aptos Display" pitchFamily="34" charset="-120"/>
               </a:rPr>
-              <a:t>Module Overview</a:t>
+              <a:t>Learning Objectives</a:t>
             </a:r>
             <a:endParaRPr lang="en-US" sz="2700" dirty="0"/>
           </a:p>
@@ -6859,32 +12347,178 @@
       </p:sp>
       <p:sp>
         <p:nvSpPr>
-          <p:cNvPr id="7" name="Text 5"/>
-          <p:cNvSpPr/>
-          <p:nvPr/>
-        </p:nvSpPr>
-        <p:spPr>
-          <a:xfrm>
-            <a:off x="822960" y="1325880"/>
-            <a:ext cx="10378440" cy="4800600"/>
-          </a:xfrm>
-          <a:prstGeom prst="rect">
-            <a:avLst/>
-          </a:prstGeom>
-          <a:noFill/>
-          <a:ln/>
-        </p:spPr>
-        <p:txBody>
-          <a:bodyPr wrap="square" lIns="1016" tIns="1016" rIns="1016" bIns="1016" rtlCol="0" anchor="t">
+          <p:cNvPr id="10" name="Text 8"/>
+          <p:cNvSpPr/>
+          <p:nvPr/>
+        </p:nvSpPr>
+        <p:spPr>
+          <a:xfrm>
+            <a:off x="868680" y="1417320"/>
+            <a:ext cx="6675120" cy="4434840"/>
+          </a:xfrm>
+          <a:prstGeom prst="rect">
+            <a:avLst/>
+          </a:prstGeom>
+          <a:noFill/>
+          <a:ln/>
+        </p:spPr>
+        <p:txBody>
+          <a:bodyPr wrap="square" lIns="635" tIns="635" rIns="635" bIns="635" rtlCol="0" anchor="t">
             <a:normAutofit/>
           </a:bodyPr>
           <a:lstStyle/>
           <a:p>
+            <a:r>
+              <a:rPr lang="en-US" sz="1700" dirty="0">
+                <a:solidFill>
+                  <a:srgbClr val="17364A"/>
+                </a:solidFill>
+                <a:latin typeface="Aptos" pitchFamily="34" charset="0"/>
+                <a:ea typeface="Aptos" pitchFamily="34" charset="-122"/>
+                <a:cs typeface="Aptos" pitchFamily="34" charset="-120"/>
+              </a:rPr>
+              <a:t>Define geospatial AI and spatial epidemiology in public health terms.</a:t>
+            </a:r>
+            <a:endParaRPr lang="en-US" sz="1700" dirty="0"/>
+          </a:p>
+          <a:p>
+            <a:r>
+              <a:rPr lang="en-US" sz="1700" dirty="0">
+                <a:solidFill>
+                  <a:srgbClr val="17364A"/>
+                </a:solidFill>
+                <a:latin typeface="Aptos" pitchFamily="34" charset="0"/>
+                <a:ea typeface="Aptos" pitchFamily="34" charset="-122"/>
+                <a:cs typeface="Aptos" pitchFamily="34" charset="-120"/>
+              </a:rPr>
+              <a:t>Explain how geocoding, aggregation, spatial scale, and data quality affect AI-supported maps and analyses.</a:t>
+            </a:r>
+            <a:endParaRPr lang="en-US" sz="1700" dirty="0"/>
+          </a:p>
+          <a:p>
+            <a:r>
+              <a:rPr lang="en-US" sz="1700" dirty="0">
+                <a:solidFill>
+                  <a:srgbClr val="17364A"/>
+                </a:solidFill>
+                <a:latin typeface="Aptos" pitchFamily="34" charset="0"/>
+                <a:ea typeface="Aptos" pitchFamily="34" charset="-122"/>
+                <a:cs typeface="Aptos" pitchFamily="34" charset="-120"/>
+              </a:rPr>
+              <a:t>Identify privacy and re-identification risks related to location data.</a:t>
+            </a:r>
+            <a:endParaRPr lang="en-US" sz="1700" dirty="0"/>
+          </a:p>
+          <a:p>
+            <a:r>
+              <a:rPr lang="en-US" sz="1700" dirty="0">
+                <a:solidFill>
+                  <a:srgbClr val="17364A"/>
+                </a:solidFill>
+                <a:latin typeface="Aptos" pitchFamily="34" charset="0"/>
+                <a:ea typeface="Aptos" pitchFamily="34" charset="-122"/>
+                <a:cs typeface="Aptos" pitchFamily="34" charset="-120"/>
+              </a:rPr>
+              <a:t>Recognize spatial bias, modifiable areal unit problems, and ecological interpretation risks.</a:t>
+            </a:r>
+            <a:endParaRPr lang="en-US" sz="1700" dirty="0"/>
+          </a:p>
+        </p:txBody>
+      </p:sp>
+      <p:sp>
+        <p:nvSpPr>
+          <p:cNvPr id="11" name="Shape 9"/>
+          <p:cNvSpPr/>
+          <p:nvPr/>
+        </p:nvSpPr>
+        <p:spPr>
+          <a:xfrm>
+            <a:off x="7909560" y="1417320"/>
+            <a:ext cx="3154680" cy="1828800"/>
+          </a:xfrm>
+          <a:prstGeom prst="roundRect">
+            <a:avLst>
+              <a:gd name="adj" fmla="val 6000"/>
+            </a:avLst>
+          </a:prstGeom>
+          <a:solidFill>
+            <a:srgbClr val="EEF8ED"/>
+          </a:solidFill>
+          <a:ln w="12700">
+            <a:solidFill>
+              <a:srgbClr val="B9D7E6"/>
+            </a:solidFill>
+            <a:prstDash val="solid"/>
+          </a:ln>
+        </p:spPr>
+      </p:sp>
+      <p:sp>
+        <p:nvSpPr>
+          <p:cNvPr id="12" name="Text 10"/>
+          <p:cNvSpPr/>
+          <p:nvPr/>
+        </p:nvSpPr>
+        <p:spPr>
+          <a:xfrm>
+            <a:off x="8074152" y="1563624"/>
+            <a:ext cx="2825496" cy="201168"/>
+          </a:xfrm>
+          <a:prstGeom prst="rect">
+            <a:avLst/>
+          </a:prstGeom>
+          <a:noFill/>
+          <a:ln/>
+        </p:spPr>
+        <p:txBody>
+          <a:bodyPr wrap="square" lIns="0" tIns="0" rIns="0" bIns="0" rtlCol="0" anchor="ctr"/>
+          <a:lstStyle/>
+          <a:p>
             <a:pPr indent="0" marL="0">
               <a:buNone/>
             </a:pPr>
             <a:r>
-              <a:rPr lang="en-US" sz="1420" dirty="0">
+              <a:rPr lang="en-US" sz="950" b="1" dirty="0">
+                <a:solidFill>
+                  <a:srgbClr val="0068B7"/>
+                </a:solidFill>
+                <a:latin typeface="Aptos" pitchFamily="34" charset="0"/>
+                <a:ea typeface="Aptos" pitchFamily="34" charset="-122"/>
+                <a:cs typeface="Aptos" pitchFamily="34" charset="-120"/>
+              </a:rPr>
+              <a:t>Key idea</a:t>
+            </a:r>
+            <a:endParaRPr lang="en-US" sz="950" dirty="0"/>
+          </a:p>
+        </p:txBody>
+      </p:sp>
+      <p:sp>
+        <p:nvSpPr>
+          <p:cNvPr id="13" name="Text 11"/>
+          <p:cNvSpPr/>
+          <p:nvPr/>
+        </p:nvSpPr>
+        <p:spPr>
+          <a:xfrm>
+            <a:off x="8074152" y="1856232"/>
+            <a:ext cx="2825496" cy="1261872"/>
+          </a:xfrm>
+          <a:prstGeom prst="rect">
+            <a:avLst/>
+          </a:prstGeom>
+          <a:noFill/>
+          <a:ln/>
+        </p:spPr>
+        <p:txBody>
+          <a:bodyPr wrap="square" lIns="0" tIns="0" rIns="0" bIns="0" rtlCol="0" anchor="t">
+            <a:normAutofit/>
+          </a:bodyPr>
+          <a:lstStyle/>
+          <a:p>
+            <a:pPr indent="0" marL="0">
+              <a:buNone/>
+            </a:pPr>
+            <a:r>
+              <a:rPr lang="en-US" sz="1250" dirty="0">
                 <a:solidFill>
                   <a:srgbClr val="17364A"/>
                 </a:solidFill>
@@ -6892,9 +12526,116 @@
                 <a:ea typeface="Aptos" pitchFamily="34" charset="-122"/>
                 <a:cs typeface="Aptos" pitchFamily="34" charset="-120"/>
               </a:rPr>
-              <a:t>Geospatial AI combines spatial data, geographic analysis, and AI methods to identify patterns across place. In public health, spatial analysis is already central to outbreak response, environmental health, emergency preparedness, community health assessment, service planning, and health equity work. AI can strengthen these activities when it helps detect clusters, estimate access barriers, classify imagery, prioritize field work, or synthesize spatial information for decision-makers. This module introduces the technical and governance issues that arise when AI uses location. Location data can be powerful, but it can also be sensitive. Even when names are removed, detailed geography can reveal identity, community characteristics, or sensitive health patterns. Public health staff must understand geocoding quality, aggregation, spatial bias, privacy, and the limits of maps. Learners will examine how geospatial AI can support public health while avoiding common mistakes, such as treating maps as neutral, ignoring missing addresses, overinterpreting small-area patterns, or using spatial proxies that reproduce inequity.</a:t>
-            </a:r>
-            <a:endParaRPr lang="en-US" sz="1420" dirty="0"/>
+              <a:t>Define geospatial AI and spatial epidemiology in public health terms.</a:t>
+            </a:r>
+            <a:endParaRPr lang="en-US" sz="1250" dirty="0"/>
+          </a:p>
+        </p:txBody>
+      </p:sp>
+      <p:sp>
+        <p:nvSpPr>
+          <p:cNvPr id="14" name="Shape 12"/>
+          <p:cNvSpPr/>
+          <p:nvPr/>
+        </p:nvSpPr>
+        <p:spPr>
+          <a:xfrm>
+            <a:off x="7909560" y="3520440"/>
+            <a:ext cx="3154680" cy="1737360"/>
+          </a:xfrm>
+          <a:prstGeom prst="roundRect">
+            <a:avLst>
+              <a:gd name="adj" fmla="val 6316"/>
+            </a:avLst>
+          </a:prstGeom>
+          <a:solidFill>
+            <a:srgbClr val="EAF6F8"/>
+          </a:solidFill>
+          <a:ln w="12700">
+            <a:solidFill>
+              <a:srgbClr val="B9D7E6"/>
+            </a:solidFill>
+            <a:prstDash val="solid"/>
+          </a:ln>
+        </p:spPr>
+      </p:sp>
+      <p:sp>
+        <p:nvSpPr>
+          <p:cNvPr id="15" name="Text 13"/>
+          <p:cNvSpPr/>
+          <p:nvPr/>
+        </p:nvSpPr>
+        <p:spPr>
+          <a:xfrm>
+            <a:off x="8074152" y="3666744"/>
+            <a:ext cx="2825496" cy="201168"/>
+          </a:xfrm>
+          <a:prstGeom prst="rect">
+            <a:avLst/>
+          </a:prstGeom>
+          <a:noFill/>
+          <a:ln/>
+        </p:spPr>
+        <p:txBody>
+          <a:bodyPr wrap="square" lIns="0" tIns="0" rIns="0" bIns="0" rtlCol="0" anchor="ctr"/>
+          <a:lstStyle/>
+          <a:p>
+            <a:pPr indent="0" marL="0">
+              <a:buNone/>
+            </a:pPr>
+            <a:r>
+              <a:rPr lang="en-US" sz="950" b="1" dirty="0">
+                <a:solidFill>
+                  <a:srgbClr val="0068B7"/>
+                </a:solidFill>
+                <a:latin typeface="Aptos" pitchFamily="34" charset="0"/>
+                <a:ea typeface="Aptos" pitchFamily="34" charset="-122"/>
+                <a:cs typeface="Aptos" pitchFamily="34" charset="-120"/>
+              </a:rPr>
+              <a:t>Use this for</a:t>
+            </a:r>
+            <a:endParaRPr lang="en-US" sz="950" dirty="0"/>
+          </a:p>
+        </p:txBody>
+      </p:sp>
+      <p:sp>
+        <p:nvSpPr>
+          <p:cNvPr id="16" name="Text 14"/>
+          <p:cNvSpPr/>
+          <p:nvPr/>
+        </p:nvSpPr>
+        <p:spPr>
+          <a:xfrm>
+            <a:off x="8074152" y="3959352"/>
+            <a:ext cx="2825496" cy="1170432"/>
+          </a:xfrm>
+          <a:prstGeom prst="rect">
+            <a:avLst/>
+          </a:prstGeom>
+          <a:noFill/>
+          <a:ln/>
+        </p:spPr>
+        <p:txBody>
+          <a:bodyPr wrap="square" lIns="0" tIns="0" rIns="0" bIns="0" rtlCol="0" anchor="t">
+            <a:normAutofit/>
+          </a:bodyPr>
+          <a:lstStyle/>
+          <a:p>
+            <a:pPr indent="0" marL="0">
+              <a:buNone/>
+            </a:pPr>
+            <a:r>
+              <a:rPr lang="en-US" sz="1250" dirty="0">
+                <a:solidFill>
+                  <a:srgbClr val="17364A"/>
+                </a:solidFill>
+                <a:latin typeface="Aptos" pitchFamily="34" charset="0"/>
+                <a:ea typeface="Aptos" pitchFamily="34" charset="-122"/>
+                <a:cs typeface="Aptos" pitchFamily="34" charset="-120"/>
+              </a:rPr>
+              <a:t>Connect the concept to public health decisions, safeguards, documentation, or implementation work.</a:t>
+            </a:r>
+            <a:endParaRPr lang="en-US" sz="1250" dirty="0"/>
           </a:p>
         </p:txBody>
       </p:sp>
@@ -6957,7 +12698,32 @@
       </p:sp>
       <p:sp>
         <p:nvSpPr>
-          <p:cNvPr id="3" name="Text 1"/>
+          <p:cNvPr id="3" name="Shape 1"/>
+          <p:cNvSpPr/>
+          <p:nvPr/>
+        </p:nvSpPr>
+        <p:spPr>
+          <a:xfrm>
+            <a:off x="0" y="164592"/>
+            <a:ext cx="146304" cy="6693408"/>
+          </a:xfrm>
+          <a:prstGeom prst="rect">
+            <a:avLst/>
+          </a:prstGeom>
+          <a:solidFill>
+            <a:srgbClr val="2F8A28"/>
+          </a:solidFill>
+          <a:ln w="12700">
+            <a:solidFill>
+              <a:srgbClr val="2F8A28"/>
+            </a:solidFill>
+            <a:prstDash val="solid"/>
+          </a:ln>
+        </p:spPr>
+      </p:sp>
+      <p:sp>
+        <p:nvSpPr>
+          <p:cNvPr id="4" name="Text 2"/>
           <p:cNvSpPr/>
           <p:nvPr/>
         </p:nvSpPr>
@@ -6996,7 +12762,7 @@
       </p:sp>
       <p:sp>
         <p:nvSpPr>
-          <p:cNvPr id="4" name="Text 2"/>
+          <p:cNvPr id="5" name="Text 3"/>
           <p:cNvSpPr/>
           <p:nvPr/>
         </p:nvSpPr>
@@ -7035,7 +12801,7 @@
       </p:sp>
       <p:sp>
         <p:nvSpPr>
-          <p:cNvPr id="5" name="Text 3"/>
+          <p:cNvPr id="6" name="Text 4"/>
           <p:cNvSpPr/>
           <p:nvPr/>
         </p:nvSpPr>
@@ -7074,7 +12840,7 @@
       </p:sp>
       <p:sp>
         <p:nvSpPr>
-          <p:cNvPr id="6" name="Text 4"/>
+          <p:cNvPr id="7" name="Text 5"/>
           <p:cNvSpPr/>
           <p:nvPr/>
         </p:nvSpPr>
@@ -7107,7 +12873,7 @@
                 <a:ea typeface="Aptos Display" pitchFamily="34" charset="-122"/>
                 <a:cs typeface="Aptos Display" pitchFamily="34" charset="-120"/>
               </a:rPr>
-              <a:t>Why This Topic Matters for Public Health AI</a:t>
+              <a:t>Learning Objectives Continued</a:t>
             </a:r>
             <a:endParaRPr lang="en-US" sz="2700" dirty="0"/>
           </a:p>
@@ -7115,32 +12881,136 @@
       </p:sp>
       <p:sp>
         <p:nvSpPr>
-          <p:cNvPr id="7" name="Text 5"/>
-          <p:cNvSpPr/>
-          <p:nvPr/>
-        </p:nvSpPr>
-        <p:spPr>
-          <a:xfrm>
-            <a:off x="822960" y="1325880"/>
-            <a:ext cx="10378440" cy="4800600"/>
-          </a:xfrm>
-          <a:prstGeom prst="rect">
-            <a:avLst/>
-          </a:prstGeom>
-          <a:noFill/>
-          <a:ln/>
-        </p:spPr>
-        <p:txBody>
-          <a:bodyPr wrap="square" lIns="1016" tIns="1016" rIns="1016" bIns="1016" rtlCol="0" anchor="t">
+          <p:cNvPr id="8" name="Text 6"/>
+          <p:cNvSpPr/>
+          <p:nvPr/>
+        </p:nvSpPr>
+        <p:spPr>
+          <a:xfrm>
+            <a:off x="868680" y="1417320"/>
+            <a:ext cx="6675120" cy="4434840"/>
+          </a:xfrm>
+          <a:prstGeom prst="rect">
+            <a:avLst/>
+          </a:prstGeom>
+          <a:noFill/>
+          <a:ln/>
+        </p:spPr>
+        <p:txBody>
+          <a:bodyPr wrap="square" lIns="635" tIns="635" rIns="635" bIns="635" rtlCol="0" anchor="t">
             <a:normAutofit/>
           </a:bodyPr>
           <a:lstStyle/>
           <a:p>
+            <a:r>
+              <a:rPr lang="en-US" sz="1700" dirty="0">
+                <a:solidFill>
+                  <a:srgbClr val="17364A"/>
+                </a:solidFill>
+                <a:latin typeface="Aptos" pitchFamily="34" charset="0"/>
+                <a:ea typeface="Aptos" pitchFamily="34" charset="-122"/>
+                <a:cs typeface="Aptos" pitchFamily="34" charset="-120"/>
+              </a:rPr>
+              <a:t>Produce a geospatial AI readiness worksheet for a public health workflow.</a:t>
+            </a:r>
+            <a:endParaRPr lang="en-US" sz="1700" dirty="0"/>
+          </a:p>
+        </p:txBody>
+      </p:sp>
+      <p:sp>
+        <p:nvSpPr>
+          <p:cNvPr id="9" name="Shape 7"/>
+          <p:cNvSpPr/>
+          <p:nvPr/>
+        </p:nvSpPr>
+        <p:spPr>
+          <a:xfrm>
+            <a:off x="7909560" y="1417320"/>
+            <a:ext cx="3154680" cy="1828800"/>
+          </a:xfrm>
+          <a:prstGeom prst="roundRect">
+            <a:avLst>
+              <a:gd name="adj" fmla="val 6000"/>
+            </a:avLst>
+          </a:prstGeom>
+          <a:solidFill>
+            <a:srgbClr val="EEF8ED"/>
+          </a:solidFill>
+          <a:ln w="12700">
+            <a:solidFill>
+              <a:srgbClr val="B9D7E6"/>
+            </a:solidFill>
+            <a:prstDash val="solid"/>
+          </a:ln>
+        </p:spPr>
+      </p:sp>
+      <p:sp>
+        <p:nvSpPr>
+          <p:cNvPr id="10" name="Text 8"/>
+          <p:cNvSpPr/>
+          <p:nvPr/>
+        </p:nvSpPr>
+        <p:spPr>
+          <a:xfrm>
+            <a:off x="8074152" y="1563624"/>
+            <a:ext cx="2825496" cy="201168"/>
+          </a:xfrm>
+          <a:prstGeom prst="rect">
+            <a:avLst/>
+          </a:prstGeom>
+          <a:noFill/>
+          <a:ln/>
+        </p:spPr>
+        <p:txBody>
+          <a:bodyPr wrap="square" lIns="0" tIns="0" rIns="0" bIns="0" rtlCol="0" anchor="ctr"/>
+          <a:lstStyle/>
+          <a:p>
             <a:pPr indent="0" marL="0">
               <a:buNone/>
             </a:pPr>
             <a:r>
-              <a:rPr lang="en-US" sz="1420" dirty="0">
+              <a:rPr lang="en-US" sz="950" b="1" dirty="0">
+                <a:solidFill>
+                  <a:srgbClr val="0068B7"/>
+                </a:solidFill>
+                <a:latin typeface="Aptos" pitchFamily="34" charset="0"/>
+                <a:ea typeface="Aptos" pitchFamily="34" charset="-122"/>
+                <a:cs typeface="Aptos" pitchFamily="34" charset="-120"/>
+              </a:rPr>
+              <a:t>Key idea</a:t>
+            </a:r>
+            <a:endParaRPr lang="en-US" sz="950" dirty="0"/>
+          </a:p>
+        </p:txBody>
+      </p:sp>
+      <p:sp>
+        <p:nvSpPr>
+          <p:cNvPr id="11" name="Text 9"/>
+          <p:cNvSpPr/>
+          <p:nvPr/>
+        </p:nvSpPr>
+        <p:spPr>
+          <a:xfrm>
+            <a:off x="8074152" y="1856232"/>
+            <a:ext cx="2825496" cy="1261872"/>
+          </a:xfrm>
+          <a:prstGeom prst="rect">
+            <a:avLst/>
+          </a:prstGeom>
+          <a:noFill/>
+          <a:ln/>
+        </p:spPr>
+        <p:txBody>
+          <a:bodyPr wrap="square" lIns="0" tIns="0" rIns="0" bIns="0" rtlCol="0" anchor="t">
+            <a:normAutofit/>
+          </a:bodyPr>
+          <a:lstStyle/>
+          <a:p>
+            <a:pPr indent="0" marL="0">
+              <a:buNone/>
+            </a:pPr>
+            <a:r>
+              <a:rPr lang="en-US" sz="1250" dirty="0">
                 <a:solidFill>
                   <a:srgbClr val="17364A"/>
                 </a:solidFill>
@@ -7148,9 +13018,116 @@
                 <a:ea typeface="Aptos" pitchFamily="34" charset="-122"/>
                 <a:cs typeface="Aptos" pitchFamily="34" charset="-120"/>
               </a:rPr>
-              <a:t>Geospatial AI matters because public health decisions are often place-based. Agencies decide where to conduct outreach, deploy mobile services, inspect facilities, respond to environmental hazards, monitor outbreaks, and communicate risks. AI-supported spatial tools can help analyze large volumes of geographic information and identify patterns that may not be visible in simple tables. However, maps can create a false sense of objectivity. A hotspot may reflect where data are collected, who has access to testing, which providers report electronically, or which addresses are easier to geocode. Areas with missing or poor-quality data may appear low risk when they are actually under-observed. Spatial AI therefore requires careful review of data completeness, spatial scale, and community context. Location data also raises privacy and trust concerns. Public health agencies have authority to collect and use sensitive information, but that authority should be matched with safeguards. When AI tools combine health data, address data, demographic data, mobility data, environmental data, or social vulnerability indicators, agencies must consider re-identification, stigmatization, public communication, and community impact.</a:t>
-            </a:r>
-            <a:endParaRPr lang="en-US" sz="1420" dirty="0"/>
+              <a:t>Produce a geospatial AI readiness worksheet for a public health workflow.</a:t>
+            </a:r>
+            <a:endParaRPr lang="en-US" sz="1250" dirty="0"/>
+          </a:p>
+        </p:txBody>
+      </p:sp>
+      <p:sp>
+        <p:nvSpPr>
+          <p:cNvPr id="12" name="Shape 10"/>
+          <p:cNvSpPr/>
+          <p:nvPr/>
+        </p:nvSpPr>
+        <p:spPr>
+          <a:xfrm>
+            <a:off x="7909560" y="3520440"/>
+            <a:ext cx="3154680" cy="1737360"/>
+          </a:xfrm>
+          <a:prstGeom prst="roundRect">
+            <a:avLst>
+              <a:gd name="adj" fmla="val 6316"/>
+            </a:avLst>
+          </a:prstGeom>
+          <a:solidFill>
+            <a:srgbClr val="EAF6F8"/>
+          </a:solidFill>
+          <a:ln w="12700">
+            <a:solidFill>
+              <a:srgbClr val="B9D7E6"/>
+            </a:solidFill>
+            <a:prstDash val="solid"/>
+          </a:ln>
+        </p:spPr>
+      </p:sp>
+      <p:sp>
+        <p:nvSpPr>
+          <p:cNvPr id="13" name="Text 11"/>
+          <p:cNvSpPr/>
+          <p:nvPr/>
+        </p:nvSpPr>
+        <p:spPr>
+          <a:xfrm>
+            <a:off x="8074152" y="3666744"/>
+            <a:ext cx="2825496" cy="201168"/>
+          </a:xfrm>
+          <a:prstGeom prst="rect">
+            <a:avLst/>
+          </a:prstGeom>
+          <a:noFill/>
+          <a:ln/>
+        </p:spPr>
+        <p:txBody>
+          <a:bodyPr wrap="square" lIns="0" tIns="0" rIns="0" bIns="0" rtlCol="0" anchor="ctr"/>
+          <a:lstStyle/>
+          <a:p>
+            <a:pPr indent="0" marL="0">
+              <a:buNone/>
+            </a:pPr>
+            <a:r>
+              <a:rPr lang="en-US" sz="950" b="1" dirty="0">
+                <a:solidFill>
+                  <a:srgbClr val="0068B7"/>
+                </a:solidFill>
+                <a:latin typeface="Aptos" pitchFamily="34" charset="0"/>
+                <a:ea typeface="Aptos" pitchFamily="34" charset="-122"/>
+                <a:cs typeface="Aptos" pitchFamily="34" charset="-120"/>
+              </a:rPr>
+              <a:t>Use this for</a:t>
+            </a:r>
+            <a:endParaRPr lang="en-US" sz="950" dirty="0"/>
+          </a:p>
+        </p:txBody>
+      </p:sp>
+      <p:sp>
+        <p:nvSpPr>
+          <p:cNvPr id="14" name="Text 12"/>
+          <p:cNvSpPr/>
+          <p:nvPr/>
+        </p:nvSpPr>
+        <p:spPr>
+          <a:xfrm>
+            <a:off x="8074152" y="3959352"/>
+            <a:ext cx="2825496" cy="1170432"/>
+          </a:xfrm>
+          <a:prstGeom prst="rect">
+            <a:avLst/>
+          </a:prstGeom>
+          <a:noFill/>
+          <a:ln/>
+        </p:spPr>
+        <p:txBody>
+          <a:bodyPr wrap="square" lIns="0" tIns="0" rIns="0" bIns="0" rtlCol="0" anchor="t">
+            <a:normAutofit/>
+          </a:bodyPr>
+          <a:lstStyle/>
+          <a:p>
+            <a:pPr indent="0" marL="0">
+              <a:buNone/>
+            </a:pPr>
+            <a:r>
+              <a:rPr lang="en-US" sz="1250" dirty="0">
+                <a:solidFill>
+                  <a:srgbClr val="17364A"/>
+                </a:solidFill>
+                <a:latin typeface="Aptos" pitchFamily="34" charset="0"/>
+                <a:ea typeface="Aptos" pitchFamily="34" charset="-122"/>
+                <a:cs typeface="Aptos" pitchFamily="34" charset="-120"/>
+              </a:rPr>
+              <a:t>Connect the concept to public health decisions, safeguards, documentation, or implementation work.</a:t>
+            </a:r>
+            <a:endParaRPr lang="en-US" sz="1250" dirty="0"/>
           </a:p>
         </p:txBody>
       </p:sp>
@@ -7213,7 +13190,32 @@
       </p:sp>
       <p:sp>
         <p:nvSpPr>
-          <p:cNvPr id="3" name="Text 1"/>
+          <p:cNvPr id="3" name="Shape 1"/>
+          <p:cNvSpPr/>
+          <p:nvPr/>
+        </p:nvSpPr>
+        <p:spPr>
+          <a:xfrm>
+            <a:off x="0" y="164592"/>
+            <a:ext cx="146304" cy="6693408"/>
+          </a:xfrm>
+          <a:prstGeom prst="rect">
+            <a:avLst/>
+          </a:prstGeom>
+          <a:solidFill>
+            <a:srgbClr val="2F8A28"/>
+          </a:solidFill>
+          <a:ln w="12700">
+            <a:solidFill>
+              <a:srgbClr val="2F8A28"/>
+            </a:solidFill>
+            <a:prstDash val="solid"/>
+          </a:ln>
+        </p:spPr>
+      </p:sp>
+      <p:sp>
+        <p:nvSpPr>
+          <p:cNvPr id="4" name="Text 2"/>
           <p:cNvSpPr/>
           <p:nvPr/>
         </p:nvSpPr>
@@ -7252,7 +13254,7 @@
       </p:sp>
       <p:sp>
         <p:nvSpPr>
-          <p:cNvPr id="4" name="Text 2"/>
+          <p:cNvPr id="5" name="Text 3"/>
           <p:cNvSpPr/>
           <p:nvPr/>
         </p:nvSpPr>
@@ -7291,7 +13293,7 @@
       </p:sp>
       <p:sp>
         <p:nvSpPr>
-          <p:cNvPr id="5" name="Text 3"/>
+          <p:cNvPr id="6" name="Text 4"/>
           <p:cNvSpPr/>
           <p:nvPr/>
         </p:nvSpPr>
@@ -7330,13 +13332,77 @@
       </p:sp>
       <p:sp>
         <p:nvSpPr>
-          <p:cNvPr id="6" name="Text 4"/>
+          <p:cNvPr id="7" name="Shape 5"/>
           <p:cNvSpPr/>
           <p:nvPr/>
         </p:nvSpPr>
         <p:spPr>
           <a:xfrm>
             <a:off x="640080" y="658368"/>
+            <a:ext cx="420624" cy="420624"/>
+          </a:xfrm>
+          <a:prstGeom prst="ellipse">
+            <a:avLst/>
+          </a:prstGeom>
+          <a:solidFill>
+            <a:srgbClr val="0068B7"/>
+          </a:solidFill>
+          <a:ln w="12700">
+            <a:solidFill>
+              <a:srgbClr val="0068B7"/>
+            </a:solidFill>
+            <a:prstDash val="solid"/>
+          </a:ln>
+        </p:spPr>
+      </p:sp>
+      <p:sp>
+        <p:nvSpPr>
+          <p:cNvPr id="8" name="Text 6"/>
+          <p:cNvSpPr/>
+          <p:nvPr/>
+        </p:nvSpPr>
+        <p:spPr>
+          <a:xfrm>
+            <a:off x="640080" y="731520"/>
+            <a:ext cx="420624" cy="164592"/>
+          </a:xfrm>
+          <a:prstGeom prst="rect">
+            <a:avLst/>
+          </a:prstGeom>
+          <a:noFill/>
+          <a:ln/>
+        </p:spPr>
+        <p:txBody>
+          <a:bodyPr wrap="square" lIns="0" tIns="0" rIns="0" bIns="0" rtlCol="0" anchor="ctr"/>
+          <a:lstStyle/>
+          <a:p>
+            <a:pPr algn="ctr" indent="0" marL="0">
+              <a:buNone/>
+            </a:pPr>
+            <a:r>
+              <a:rPr lang="en-US" sz="1100" b="1" dirty="0">
+                <a:solidFill>
+                  <a:srgbClr val="FFFFFF"/>
+                </a:solidFill>
+                <a:latin typeface="Aptos" pitchFamily="34" charset="0"/>
+                <a:ea typeface="Aptos" pitchFamily="34" charset="-122"/>
+                <a:cs typeface="Aptos" pitchFamily="34" charset="-120"/>
+              </a:rPr>
+              <a:t>2</a:t>
+            </a:r>
+            <a:endParaRPr lang="en-US" sz="1100" dirty="0"/>
+          </a:p>
+        </p:txBody>
+      </p:sp>
+      <p:sp>
+        <p:nvSpPr>
+          <p:cNvPr id="9" name="Text 7"/>
+          <p:cNvSpPr/>
+          <p:nvPr/>
+        </p:nvSpPr>
+        <p:spPr>
+          <a:xfrm>
+            <a:off x="640080" y="621792"/>
             <a:ext cx="10881360" cy="566928"/>
           </a:xfrm>
           <a:prstGeom prst="rect">
@@ -7363,7 +13429,7 @@
                 <a:ea typeface="Aptos Display" pitchFamily="34" charset="-122"/>
                 <a:cs typeface="Aptos Display" pitchFamily="34" charset="-120"/>
               </a:rPr>
-              <a:t>Public Health Example</a:t>
+              <a:t>Module Overview</a:t>
             </a:r>
             <a:endParaRPr lang="en-US" sz="2700" dirty="0"/>
           </a:p>
@@ -7371,32 +13437,178 @@
       </p:sp>
       <p:sp>
         <p:nvSpPr>
-          <p:cNvPr id="7" name="Text 5"/>
-          <p:cNvSpPr/>
-          <p:nvPr/>
-        </p:nvSpPr>
-        <p:spPr>
-          <a:xfrm>
-            <a:off x="822960" y="1325880"/>
-            <a:ext cx="10378440" cy="4800600"/>
-          </a:xfrm>
-          <a:prstGeom prst="rect">
-            <a:avLst/>
-          </a:prstGeom>
-          <a:noFill/>
-          <a:ln/>
-        </p:spPr>
-        <p:txBody>
-          <a:bodyPr wrap="square" lIns="1016" tIns="1016" rIns="1016" bIns="1016" rtlCol="0" anchor="t">
+          <p:cNvPr id="10" name="Text 8"/>
+          <p:cNvSpPr/>
+          <p:nvPr/>
+        </p:nvSpPr>
+        <p:spPr>
+          <a:xfrm>
+            <a:off x="868680" y="1417320"/>
+            <a:ext cx="6675120" cy="4434840"/>
+          </a:xfrm>
+          <a:prstGeom prst="rect">
+            <a:avLst/>
+          </a:prstGeom>
+          <a:noFill/>
+          <a:ln/>
+        </p:spPr>
+        <p:txBody>
+          <a:bodyPr wrap="square" lIns="635" tIns="635" rIns="635" bIns="635" rtlCol="0" anchor="t">
             <a:normAutofit/>
           </a:bodyPr>
           <a:lstStyle/>
           <a:p>
+            <a:r>
+              <a:rPr lang="en-US" sz="1700" dirty="0">
+                <a:solidFill>
+                  <a:srgbClr val="17364A"/>
+                </a:solidFill>
+                <a:latin typeface="Aptos" pitchFamily="34" charset="0"/>
+                <a:ea typeface="Aptos" pitchFamily="34" charset="-122"/>
+                <a:cs typeface="Aptos" pitchFamily="34" charset="-120"/>
+              </a:rPr>
+              <a:t>Geospatial AI combines spatial data, geographic analysis, and AI methods to identify patterns across place.</a:t>
+            </a:r>
+            <a:endParaRPr lang="en-US" sz="1700" dirty="0"/>
+          </a:p>
+          <a:p>
+            <a:r>
+              <a:rPr lang="en-US" sz="1700" dirty="0">
+                <a:solidFill>
+                  <a:srgbClr val="17364A"/>
+                </a:solidFill>
+                <a:latin typeface="Aptos" pitchFamily="34" charset="0"/>
+                <a:ea typeface="Aptos" pitchFamily="34" charset="-122"/>
+                <a:cs typeface="Aptos" pitchFamily="34" charset="-120"/>
+              </a:rPr>
+              <a:t>In public health, spatial analysis is already central to outbreak response, environmental health, emergency preparedness,.</a:t>
+            </a:r>
+            <a:endParaRPr lang="en-US" sz="1700" dirty="0"/>
+          </a:p>
+          <a:p>
+            <a:r>
+              <a:rPr lang="en-US" sz="1700" dirty="0">
+                <a:solidFill>
+                  <a:srgbClr val="17364A"/>
+                </a:solidFill>
+                <a:latin typeface="Aptos" pitchFamily="34" charset="0"/>
+                <a:ea typeface="Aptos" pitchFamily="34" charset="-122"/>
+                <a:cs typeface="Aptos" pitchFamily="34" charset="-120"/>
+              </a:rPr>
+              <a:t>AI can strengthen these activities when it helps detect clusters, estimate access barriers, classify imagery, prioritize.</a:t>
+            </a:r>
+            <a:endParaRPr lang="en-US" sz="1700" dirty="0"/>
+          </a:p>
+          <a:p>
+            <a:r>
+              <a:rPr lang="en-US" sz="1700" dirty="0">
+                <a:solidFill>
+                  <a:srgbClr val="17364A"/>
+                </a:solidFill>
+                <a:latin typeface="Aptos" pitchFamily="34" charset="0"/>
+                <a:ea typeface="Aptos" pitchFamily="34" charset="-122"/>
+                <a:cs typeface="Aptos" pitchFamily="34" charset="-120"/>
+              </a:rPr>
+              <a:t>This module introduces the technical and governance issues that arise when AI uses location.</a:t>
+            </a:r>
+            <a:endParaRPr lang="en-US" sz="1700" dirty="0"/>
+          </a:p>
+        </p:txBody>
+      </p:sp>
+      <p:sp>
+        <p:nvSpPr>
+          <p:cNvPr id="11" name="Shape 9"/>
+          <p:cNvSpPr/>
+          <p:nvPr/>
+        </p:nvSpPr>
+        <p:spPr>
+          <a:xfrm>
+            <a:off x="7909560" y="1417320"/>
+            <a:ext cx="3154680" cy="1828800"/>
+          </a:xfrm>
+          <a:prstGeom prst="roundRect">
+            <a:avLst>
+              <a:gd name="adj" fmla="val 6000"/>
+            </a:avLst>
+          </a:prstGeom>
+          <a:solidFill>
+            <a:srgbClr val="EEF8ED"/>
+          </a:solidFill>
+          <a:ln w="12700">
+            <a:solidFill>
+              <a:srgbClr val="B9D7E6"/>
+            </a:solidFill>
+            <a:prstDash val="solid"/>
+          </a:ln>
+        </p:spPr>
+      </p:sp>
+      <p:sp>
+        <p:nvSpPr>
+          <p:cNvPr id="12" name="Text 10"/>
+          <p:cNvSpPr/>
+          <p:nvPr/>
+        </p:nvSpPr>
+        <p:spPr>
+          <a:xfrm>
+            <a:off x="8074152" y="1563624"/>
+            <a:ext cx="2825496" cy="201168"/>
+          </a:xfrm>
+          <a:prstGeom prst="rect">
+            <a:avLst/>
+          </a:prstGeom>
+          <a:noFill/>
+          <a:ln/>
+        </p:spPr>
+        <p:txBody>
+          <a:bodyPr wrap="square" lIns="0" tIns="0" rIns="0" bIns="0" rtlCol="0" anchor="ctr"/>
+          <a:lstStyle/>
+          <a:p>
             <a:pPr indent="0" marL="0">
               <a:buNone/>
             </a:pPr>
             <a:r>
-              <a:rPr lang="en-US" sz="1420" dirty="0">
+              <a:rPr lang="en-US" sz="950" b="1" dirty="0">
+                <a:solidFill>
+                  <a:srgbClr val="0068B7"/>
+                </a:solidFill>
+                <a:latin typeface="Aptos" pitchFamily="34" charset="0"/>
+                <a:ea typeface="Aptos" pitchFamily="34" charset="-122"/>
+                <a:cs typeface="Aptos" pitchFamily="34" charset="-120"/>
+              </a:rPr>
+              <a:t>Key idea</a:t>
+            </a:r>
+            <a:endParaRPr lang="en-US" sz="950" dirty="0"/>
+          </a:p>
+        </p:txBody>
+      </p:sp>
+      <p:sp>
+        <p:nvSpPr>
+          <p:cNvPr id="13" name="Text 11"/>
+          <p:cNvSpPr/>
+          <p:nvPr/>
+        </p:nvSpPr>
+        <p:spPr>
+          <a:xfrm>
+            <a:off x="8074152" y="1856232"/>
+            <a:ext cx="2825496" cy="1261872"/>
+          </a:xfrm>
+          <a:prstGeom prst="rect">
+            <a:avLst/>
+          </a:prstGeom>
+          <a:noFill/>
+          <a:ln/>
+        </p:spPr>
+        <p:txBody>
+          <a:bodyPr wrap="square" lIns="0" tIns="0" rIns="0" bIns="0" rtlCol="0" anchor="t">
+            <a:normAutofit/>
+          </a:bodyPr>
+          <a:lstStyle/>
+          <a:p>
+            <a:pPr indent="0" marL="0">
+              <a:buNone/>
+            </a:pPr>
+            <a:r>
+              <a:rPr lang="en-US" sz="1250" dirty="0">
                 <a:solidFill>
                   <a:srgbClr val="17364A"/>
                 </a:solidFill>
@@ -7404,9 +13616,116 @@
                 <a:ea typeface="Aptos" pitchFamily="34" charset="-122"/>
                 <a:cs typeface="Aptos" pitchFamily="34" charset="-120"/>
               </a:rPr>
-              <a:t>A health department may use AI-supported geospatial analysis to identify areas where mobile vaccination clinics could improve access. The tool may combine immunization coverage, school locations, transportation routes, census variables, provider locations, and appointment availability. The output may recommend priority areas for outreach and clinic placement. This workflow can advance equity if it identifies access barriers and supports community partnership. It can cause harm if it labels neighborhoods as low-performing without context, uses outdated population denominators, ignores language access, or fails to engage local organizations. The geospatial analysis should be paired with community review, accessibility planning, and transparent explanation of limitations.</a:t>
-            </a:r>
-            <a:endParaRPr lang="en-US" sz="1420" dirty="0"/>
+              <a:t>Geospatial AI combines spatial data, geographic analysis, and AI methods to identify patterns across place.</a:t>
+            </a:r>
+            <a:endParaRPr lang="en-US" sz="1250" dirty="0"/>
+          </a:p>
+        </p:txBody>
+      </p:sp>
+      <p:sp>
+        <p:nvSpPr>
+          <p:cNvPr id="14" name="Shape 12"/>
+          <p:cNvSpPr/>
+          <p:nvPr/>
+        </p:nvSpPr>
+        <p:spPr>
+          <a:xfrm>
+            <a:off x="7909560" y="3520440"/>
+            <a:ext cx="3154680" cy="1737360"/>
+          </a:xfrm>
+          <a:prstGeom prst="roundRect">
+            <a:avLst>
+              <a:gd name="adj" fmla="val 6316"/>
+            </a:avLst>
+          </a:prstGeom>
+          <a:solidFill>
+            <a:srgbClr val="EAF6F8"/>
+          </a:solidFill>
+          <a:ln w="12700">
+            <a:solidFill>
+              <a:srgbClr val="B9D7E6"/>
+            </a:solidFill>
+            <a:prstDash val="solid"/>
+          </a:ln>
+        </p:spPr>
+      </p:sp>
+      <p:sp>
+        <p:nvSpPr>
+          <p:cNvPr id="15" name="Text 13"/>
+          <p:cNvSpPr/>
+          <p:nvPr/>
+        </p:nvSpPr>
+        <p:spPr>
+          <a:xfrm>
+            <a:off x="8074152" y="3666744"/>
+            <a:ext cx="2825496" cy="201168"/>
+          </a:xfrm>
+          <a:prstGeom prst="rect">
+            <a:avLst/>
+          </a:prstGeom>
+          <a:noFill/>
+          <a:ln/>
+        </p:spPr>
+        <p:txBody>
+          <a:bodyPr wrap="square" lIns="0" tIns="0" rIns="0" bIns="0" rtlCol="0" anchor="ctr"/>
+          <a:lstStyle/>
+          <a:p>
+            <a:pPr indent="0" marL="0">
+              <a:buNone/>
+            </a:pPr>
+            <a:r>
+              <a:rPr lang="en-US" sz="950" b="1" dirty="0">
+                <a:solidFill>
+                  <a:srgbClr val="0068B7"/>
+                </a:solidFill>
+                <a:latin typeface="Aptos" pitchFamily="34" charset="0"/>
+                <a:ea typeface="Aptos" pitchFamily="34" charset="-122"/>
+                <a:cs typeface="Aptos" pitchFamily="34" charset="-120"/>
+              </a:rPr>
+              <a:t>Use this for</a:t>
+            </a:r>
+            <a:endParaRPr lang="en-US" sz="950" dirty="0"/>
+          </a:p>
+        </p:txBody>
+      </p:sp>
+      <p:sp>
+        <p:nvSpPr>
+          <p:cNvPr id="16" name="Text 14"/>
+          <p:cNvSpPr/>
+          <p:nvPr/>
+        </p:nvSpPr>
+        <p:spPr>
+          <a:xfrm>
+            <a:off x="8074152" y="3959352"/>
+            <a:ext cx="2825496" cy="1170432"/>
+          </a:xfrm>
+          <a:prstGeom prst="rect">
+            <a:avLst/>
+          </a:prstGeom>
+          <a:noFill/>
+          <a:ln/>
+        </p:spPr>
+        <p:txBody>
+          <a:bodyPr wrap="square" lIns="0" tIns="0" rIns="0" bIns="0" rtlCol="0" anchor="t">
+            <a:normAutofit/>
+          </a:bodyPr>
+          <a:lstStyle/>
+          <a:p>
+            <a:pPr indent="0" marL="0">
+              <a:buNone/>
+            </a:pPr>
+            <a:r>
+              <a:rPr lang="en-US" sz="1250" dirty="0">
+                <a:solidFill>
+                  <a:srgbClr val="17364A"/>
+                </a:solidFill>
+                <a:latin typeface="Aptos" pitchFamily="34" charset="0"/>
+                <a:ea typeface="Aptos" pitchFamily="34" charset="-122"/>
+                <a:cs typeface="Aptos" pitchFamily="34" charset="-120"/>
+              </a:rPr>
+              <a:t>Connect the concept to public health decisions, safeguards, documentation, or implementation work.</a:t>
+            </a:r>
+            <a:endParaRPr lang="en-US" sz="1250" dirty="0"/>
           </a:p>
         </p:txBody>
       </p:sp>
@@ -7469,7 +13788,32 @@
       </p:sp>
       <p:sp>
         <p:nvSpPr>
-          <p:cNvPr id="3" name="Text 1"/>
+          <p:cNvPr id="3" name="Shape 1"/>
+          <p:cNvSpPr/>
+          <p:nvPr/>
+        </p:nvSpPr>
+        <p:spPr>
+          <a:xfrm>
+            <a:off x="0" y="164592"/>
+            <a:ext cx="146304" cy="6693408"/>
+          </a:xfrm>
+          <a:prstGeom prst="rect">
+            <a:avLst/>
+          </a:prstGeom>
+          <a:solidFill>
+            <a:srgbClr val="2F8A28"/>
+          </a:solidFill>
+          <a:ln w="12700">
+            <a:solidFill>
+              <a:srgbClr val="2F8A28"/>
+            </a:solidFill>
+            <a:prstDash val="solid"/>
+          </a:ln>
+        </p:spPr>
+      </p:sp>
+      <p:sp>
+        <p:nvSpPr>
+          <p:cNvPr id="4" name="Text 2"/>
           <p:cNvSpPr/>
           <p:nvPr/>
         </p:nvSpPr>
@@ -7508,7 +13852,7 @@
       </p:sp>
       <p:sp>
         <p:nvSpPr>
-          <p:cNvPr id="4" name="Text 2"/>
+          <p:cNvPr id="5" name="Text 3"/>
           <p:cNvSpPr/>
           <p:nvPr/>
         </p:nvSpPr>
@@ -7547,7 +13891,7 @@
       </p:sp>
       <p:sp>
         <p:nvSpPr>
-          <p:cNvPr id="5" name="Text 3"/>
+          <p:cNvPr id="6" name="Text 4"/>
           <p:cNvSpPr/>
           <p:nvPr/>
         </p:nvSpPr>
@@ -7586,13 +13930,77 @@
       </p:sp>
       <p:sp>
         <p:nvSpPr>
-          <p:cNvPr id="6" name="Text 4"/>
+          <p:cNvPr id="7" name="Shape 5"/>
           <p:cNvSpPr/>
           <p:nvPr/>
         </p:nvSpPr>
         <p:spPr>
           <a:xfrm>
             <a:off x="640080" y="658368"/>
+            <a:ext cx="420624" cy="420624"/>
+          </a:xfrm>
+          <a:prstGeom prst="ellipse">
+            <a:avLst/>
+          </a:prstGeom>
+          <a:solidFill>
+            <a:srgbClr val="0068B7"/>
+          </a:solidFill>
+          <a:ln w="12700">
+            <a:solidFill>
+              <a:srgbClr val="0068B7"/>
+            </a:solidFill>
+            <a:prstDash val="solid"/>
+          </a:ln>
+        </p:spPr>
+      </p:sp>
+      <p:sp>
+        <p:nvSpPr>
+          <p:cNvPr id="8" name="Text 6"/>
+          <p:cNvSpPr/>
+          <p:nvPr/>
+        </p:nvSpPr>
+        <p:spPr>
+          <a:xfrm>
+            <a:off x="640080" y="731520"/>
+            <a:ext cx="420624" cy="164592"/>
+          </a:xfrm>
+          <a:prstGeom prst="rect">
+            <a:avLst/>
+          </a:prstGeom>
+          <a:noFill/>
+          <a:ln/>
+        </p:spPr>
+        <p:txBody>
+          <a:bodyPr wrap="square" lIns="0" tIns="0" rIns="0" bIns="0" rtlCol="0" anchor="ctr"/>
+          <a:lstStyle/>
+          <a:p>
+            <a:pPr algn="ctr" indent="0" marL="0">
+              <a:buNone/>
+            </a:pPr>
+            <a:r>
+              <a:rPr lang="en-US" sz="1100" b="1" dirty="0">
+                <a:solidFill>
+                  <a:srgbClr val="FFFFFF"/>
+                </a:solidFill>
+                <a:latin typeface="Aptos" pitchFamily="34" charset="0"/>
+                <a:ea typeface="Aptos" pitchFamily="34" charset="-122"/>
+                <a:cs typeface="Aptos" pitchFamily="34" charset="-120"/>
+              </a:rPr>
+              <a:t>3</a:t>
+            </a:r>
+            <a:endParaRPr lang="en-US" sz="1100" dirty="0"/>
+          </a:p>
+        </p:txBody>
+      </p:sp>
+      <p:sp>
+        <p:nvSpPr>
+          <p:cNvPr id="9" name="Text 7"/>
+          <p:cNvSpPr/>
+          <p:nvPr/>
+        </p:nvSpPr>
+        <p:spPr>
+          <a:xfrm>
+            <a:off x="640080" y="621792"/>
             <a:ext cx="10881360" cy="566928"/>
           </a:xfrm>
           <a:prstGeom prst="rect">
@@ -7619,7 +14027,7 @@
                 <a:ea typeface="Aptos Display" pitchFamily="34" charset="-122"/>
                 <a:cs typeface="Aptos Display" pitchFamily="34" charset="-120"/>
               </a:rPr>
-              <a:t>Technical Deep Dive</a:t>
+              <a:t>Why This Topic Matters for Public Health AI</a:t>
             </a:r>
             <a:endParaRPr lang="en-US" sz="2700" dirty="0"/>
           </a:p>
@@ -7627,32 +14035,178 @@
       </p:sp>
       <p:sp>
         <p:nvSpPr>
-          <p:cNvPr id="7" name="Text 5"/>
-          <p:cNvSpPr/>
-          <p:nvPr/>
-        </p:nvSpPr>
-        <p:spPr>
-          <a:xfrm>
-            <a:off x="822960" y="1325880"/>
-            <a:ext cx="10378440" cy="4800600"/>
-          </a:xfrm>
-          <a:prstGeom prst="rect">
-            <a:avLst/>
-          </a:prstGeom>
-          <a:noFill/>
-          <a:ln/>
-        </p:spPr>
-        <p:txBody>
-          <a:bodyPr wrap="square" lIns="1016" tIns="1016" rIns="1016" bIns="1016" rtlCol="0" anchor="t">
+          <p:cNvPr id="10" name="Text 8"/>
+          <p:cNvSpPr/>
+          <p:nvPr/>
+        </p:nvSpPr>
+        <p:spPr>
+          <a:xfrm>
+            <a:off x="868680" y="1417320"/>
+            <a:ext cx="6675120" cy="4434840"/>
+          </a:xfrm>
+          <a:prstGeom prst="rect">
+            <a:avLst/>
+          </a:prstGeom>
+          <a:noFill/>
+          <a:ln/>
+        </p:spPr>
+        <p:txBody>
+          <a:bodyPr wrap="square" lIns="635" tIns="635" rIns="635" bIns="635" rtlCol="0" anchor="t">
             <a:normAutofit/>
           </a:bodyPr>
           <a:lstStyle/>
           <a:p>
+            <a:r>
+              <a:rPr lang="en-US" sz="1700" dirty="0">
+                <a:solidFill>
+                  <a:srgbClr val="17364A"/>
+                </a:solidFill>
+                <a:latin typeface="Aptos" pitchFamily="34" charset="0"/>
+                <a:ea typeface="Aptos" pitchFamily="34" charset="-122"/>
+                <a:cs typeface="Aptos" pitchFamily="34" charset="-120"/>
+              </a:rPr>
+              <a:t>Geospatial AI matters because public health decisions are often place-based.</a:t>
+            </a:r>
+            <a:endParaRPr lang="en-US" sz="1700" dirty="0"/>
+          </a:p>
+          <a:p>
+            <a:r>
+              <a:rPr lang="en-US" sz="1700" dirty="0">
+                <a:solidFill>
+                  <a:srgbClr val="17364A"/>
+                </a:solidFill>
+                <a:latin typeface="Aptos" pitchFamily="34" charset="0"/>
+                <a:ea typeface="Aptos" pitchFamily="34" charset="-122"/>
+                <a:cs typeface="Aptos" pitchFamily="34" charset="-120"/>
+              </a:rPr>
+              <a:t>Agencies decide where to conduct outreach, deploy mobile services, inspect facilities, respond to environmental hazards,.</a:t>
+            </a:r>
+            <a:endParaRPr lang="en-US" sz="1700" dirty="0"/>
+          </a:p>
+          <a:p>
+            <a:r>
+              <a:rPr lang="en-US" sz="1700" dirty="0">
+                <a:solidFill>
+                  <a:srgbClr val="17364A"/>
+                </a:solidFill>
+                <a:latin typeface="Aptos" pitchFamily="34" charset="0"/>
+                <a:ea typeface="Aptos" pitchFamily="34" charset="-122"/>
+                <a:cs typeface="Aptos" pitchFamily="34" charset="-120"/>
+              </a:rPr>
+              <a:t>AI-supported spatial tools can help analyze large volumes of geographic information and identify patterns that may not be.</a:t>
+            </a:r>
+            <a:endParaRPr lang="en-US" sz="1700" dirty="0"/>
+          </a:p>
+          <a:p>
+            <a:r>
+              <a:rPr lang="en-US" sz="1700" dirty="0">
+                <a:solidFill>
+                  <a:srgbClr val="17364A"/>
+                </a:solidFill>
+                <a:latin typeface="Aptos" pitchFamily="34" charset="0"/>
+                <a:ea typeface="Aptos" pitchFamily="34" charset="-122"/>
+                <a:cs typeface="Aptos" pitchFamily="34" charset="-120"/>
+              </a:rPr>
+              <a:t>However, maps can create a false sense of objectivity.</a:t>
+            </a:r>
+            <a:endParaRPr lang="en-US" sz="1700" dirty="0"/>
+          </a:p>
+        </p:txBody>
+      </p:sp>
+      <p:sp>
+        <p:nvSpPr>
+          <p:cNvPr id="11" name="Shape 9"/>
+          <p:cNvSpPr/>
+          <p:nvPr/>
+        </p:nvSpPr>
+        <p:spPr>
+          <a:xfrm>
+            <a:off x="7909560" y="1417320"/>
+            <a:ext cx="3154680" cy="1828800"/>
+          </a:xfrm>
+          <a:prstGeom prst="roundRect">
+            <a:avLst>
+              <a:gd name="adj" fmla="val 6000"/>
+            </a:avLst>
+          </a:prstGeom>
+          <a:solidFill>
+            <a:srgbClr val="EEF8ED"/>
+          </a:solidFill>
+          <a:ln w="12700">
+            <a:solidFill>
+              <a:srgbClr val="B9D7E6"/>
+            </a:solidFill>
+            <a:prstDash val="solid"/>
+          </a:ln>
+        </p:spPr>
+      </p:sp>
+      <p:sp>
+        <p:nvSpPr>
+          <p:cNvPr id="12" name="Text 10"/>
+          <p:cNvSpPr/>
+          <p:nvPr/>
+        </p:nvSpPr>
+        <p:spPr>
+          <a:xfrm>
+            <a:off x="8074152" y="1563624"/>
+            <a:ext cx="2825496" cy="201168"/>
+          </a:xfrm>
+          <a:prstGeom prst="rect">
+            <a:avLst/>
+          </a:prstGeom>
+          <a:noFill/>
+          <a:ln/>
+        </p:spPr>
+        <p:txBody>
+          <a:bodyPr wrap="square" lIns="0" tIns="0" rIns="0" bIns="0" rtlCol="0" anchor="ctr"/>
+          <a:lstStyle/>
+          <a:p>
             <a:pPr indent="0" marL="0">
               <a:buNone/>
             </a:pPr>
             <a:r>
-              <a:rPr lang="en-US" sz="1420" dirty="0">
+              <a:rPr lang="en-US" sz="950" b="1" dirty="0">
+                <a:solidFill>
+                  <a:srgbClr val="0068B7"/>
+                </a:solidFill>
+                <a:latin typeface="Aptos" pitchFamily="34" charset="0"/>
+                <a:ea typeface="Aptos" pitchFamily="34" charset="-122"/>
+                <a:cs typeface="Aptos" pitchFamily="34" charset="-120"/>
+              </a:rPr>
+              <a:t>Key idea</a:t>
+            </a:r>
+            <a:endParaRPr lang="en-US" sz="950" dirty="0"/>
+          </a:p>
+        </p:txBody>
+      </p:sp>
+      <p:sp>
+        <p:nvSpPr>
+          <p:cNvPr id="13" name="Text 11"/>
+          <p:cNvSpPr/>
+          <p:nvPr/>
+        </p:nvSpPr>
+        <p:spPr>
+          <a:xfrm>
+            <a:off x="8074152" y="1856232"/>
+            <a:ext cx="2825496" cy="1261872"/>
+          </a:xfrm>
+          <a:prstGeom prst="rect">
+            <a:avLst/>
+          </a:prstGeom>
+          <a:noFill/>
+          <a:ln/>
+        </p:spPr>
+        <p:txBody>
+          <a:bodyPr wrap="square" lIns="0" tIns="0" rIns="0" bIns="0" rtlCol="0" anchor="t">
+            <a:normAutofit/>
+          </a:bodyPr>
+          <a:lstStyle/>
+          <a:p>
+            <a:pPr indent="0" marL="0">
+              <a:buNone/>
+            </a:pPr>
+            <a:r>
+              <a:rPr lang="en-US" sz="1250" dirty="0">
                 <a:solidFill>
                   <a:srgbClr val="17364A"/>
                 </a:solidFill>
@@ -7660,9 +14214,116 @@
                 <a:ea typeface="Aptos" pitchFamily="34" charset="-122"/>
                 <a:cs typeface="Aptos" pitchFamily="34" charset="-120"/>
               </a:rPr>
-              <a:t>Geospatial AI begins with location data, and location data are rarely perfect. Addresses may be missing, misspelled, outdated, rural route-based, temporary, or unstable. People experiencing homelessness, migration, displacement, incarceration, or housing instability may be poorly represented by address-based analysis. Geocoding errors can shift records across boundaries and distort rates for small areas. Spatial scale shapes interpretation. County-level maps may hide neighborhood-level inequities. Census tract maps may reveal meaningful local variation but increase privacy risks. ZIP codes are convenient but were created for mail delivery, not public health analysis. Staff should choose geographic units based on the question, data quality, privacy requirements, and actionability. AI-supported hotspot detection requires baseline context. An apparent cluster may reflect higher testing volume, better reporting, a facility-specific outbreak, or a true increase in incidence. Algorithms can detect unusual patterns, but epidemiologists must assess plausibility, data quality, denominator stability, and reporting artifacts. Automated hotspot alerts should be treated as signals for review, not conclusions.</a:t>
-            </a:r>
-            <a:endParaRPr lang="en-US" sz="1420" dirty="0"/>
+              <a:t>Geospatial AI matters because public health decisions are often place-based.</a:t>
+            </a:r>
+            <a:endParaRPr lang="en-US" sz="1250" dirty="0"/>
+          </a:p>
+        </p:txBody>
+      </p:sp>
+      <p:sp>
+        <p:nvSpPr>
+          <p:cNvPr id="14" name="Shape 12"/>
+          <p:cNvSpPr/>
+          <p:nvPr/>
+        </p:nvSpPr>
+        <p:spPr>
+          <a:xfrm>
+            <a:off x="7909560" y="3520440"/>
+            <a:ext cx="3154680" cy="1737360"/>
+          </a:xfrm>
+          <a:prstGeom prst="roundRect">
+            <a:avLst>
+              <a:gd name="adj" fmla="val 6316"/>
+            </a:avLst>
+          </a:prstGeom>
+          <a:solidFill>
+            <a:srgbClr val="EAF6F8"/>
+          </a:solidFill>
+          <a:ln w="12700">
+            <a:solidFill>
+              <a:srgbClr val="B9D7E6"/>
+            </a:solidFill>
+            <a:prstDash val="solid"/>
+          </a:ln>
+        </p:spPr>
+      </p:sp>
+      <p:sp>
+        <p:nvSpPr>
+          <p:cNvPr id="15" name="Text 13"/>
+          <p:cNvSpPr/>
+          <p:nvPr/>
+        </p:nvSpPr>
+        <p:spPr>
+          <a:xfrm>
+            <a:off x="8074152" y="3666744"/>
+            <a:ext cx="2825496" cy="201168"/>
+          </a:xfrm>
+          <a:prstGeom prst="rect">
+            <a:avLst/>
+          </a:prstGeom>
+          <a:noFill/>
+          <a:ln/>
+        </p:spPr>
+        <p:txBody>
+          <a:bodyPr wrap="square" lIns="0" tIns="0" rIns="0" bIns="0" rtlCol="0" anchor="ctr"/>
+          <a:lstStyle/>
+          <a:p>
+            <a:pPr indent="0" marL="0">
+              <a:buNone/>
+            </a:pPr>
+            <a:r>
+              <a:rPr lang="en-US" sz="950" b="1" dirty="0">
+                <a:solidFill>
+                  <a:srgbClr val="0068B7"/>
+                </a:solidFill>
+                <a:latin typeface="Aptos" pitchFamily="34" charset="0"/>
+                <a:ea typeface="Aptos" pitchFamily="34" charset="-122"/>
+                <a:cs typeface="Aptos" pitchFamily="34" charset="-120"/>
+              </a:rPr>
+              <a:t>Use this for</a:t>
+            </a:r>
+            <a:endParaRPr lang="en-US" sz="950" dirty="0"/>
+          </a:p>
+        </p:txBody>
+      </p:sp>
+      <p:sp>
+        <p:nvSpPr>
+          <p:cNvPr id="16" name="Text 14"/>
+          <p:cNvSpPr/>
+          <p:nvPr/>
+        </p:nvSpPr>
+        <p:spPr>
+          <a:xfrm>
+            <a:off x="8074152" y="3959352"/>
+            <a:ext cx="2825496" cy="1170432"/>
+          </a:xfrm>
+          <a:prstGeom prst="rect">
+            <a:avLst/>
+          </a:prstGeom>
+          <a:noFill/>
+          <a:ln/>
+        </p:spPr>
+        <p:txBody>
+          <a:bodyPr wrap="square" lIns="0" tIns="0" rIns="0" bIns="0" rtlCol="0" anchor="t">
+            <a:normAutofit/>
+          </a:bodyPr>
+          <a:lstStyle/>
+          <a:p>
+            <a:pPr indent="0" marL="0">
+              <a:buNone/>
+            </a:pPr>
+            <a:r>
+              <a:rPr lang="en-US" sz="1250" dirty="0">
+                <a:solidFill>
+                  <a:srgbClr val="17364A"/>
+                </a:solidFill>
+                <a:latin typeface="Aptos" pitchFamily="34" charset="0"/>
+                <a:ea typeface="Aptos" pitchFamily="34" charset="-122"/>
+                <a:cs typeface="Aptos" pitchFamily="34" charset="-120"/>
+              </a:rPr>
+              <a:t>Connect the concept to public health decisions, safeguards, documentation, or implementation work.</a:t>
+            </a:r>
+            <a:endParaRPr lang="en-US" sz="1250" dirty="0"/>
           </a:p>
         </p:txBody>
       </p:sp>
@@ -7725,7 +14386,32 @@
       </p:sp>
       <p:sp>
         <p:nvSpPr>
-          <p:cNvPr id="3" name="Text 1"/>
+          <p:cNvPr id="3" name="Shape 1"/>
+          <p:cNvSpPr/>
+          <p:nvPr/>
+        </p:nvSpPr>
+        <p:spPr>
+          <a:xfrm>
+            <a:off x="0" y="164592"/>
+            <a:ext cx="146304" cy="6693408"/>
+          </a:xfrm>
+          <a:prstGeom prst="rect">
+            <a:avLst/>
+          </a:prstGeom>
+          <a:solidFill>
+            <a:srgbClr val="2F8A28"/>
+          </a:solidFill>
+          <a:ln w="12700">
+            <a:solidFill>
+              <a:srgbClr val="2F8A28"/>
+            </a:solidFill>
+            <a:prstDash val="solid"/>
+          </a:ln>
+        </p:spPr>
+      </p:sp>
+      <p:sp>
+        <p:nvSpPr>
+          <p:cNvPr id="4" name="Text 2"/>
           <p:cNvSpPr/>
           <p:nvPr/>
         </p:nvSpPr>
@@ -7764,7 +14450,7 @@
       </p:sp>
       <p:sp>
         <p:nvSpPr>
-          <p:cNvPr id="4" name="Text 2"/>
+          <p:cNvPr id="5" name="Text 3"/>
           <p:cNvSpPr/>
           <p:nvPr/>
         </p:nvSpPr>
@@ -7803,7 +14489,7 @@
       </p:sp>
       <p:sp>
         <p:nvSpPr>
-          <p:cNvPr id="5" name="Text 3"/>
+          <p:cNvPr id="6" name="Text 4"/>
           <p:cNvSpPr/>
           <p:nvPr/>
         </p:nvSpPr>
@@ -7842,13 +14528,77 @@
       </p:sp>
       <p:sp>
         <p:nvSpPr>
-          <p:cNvPr id="6" name="Text 4"/>
+          <p:cNvPr id="7" name="Shape 5"/>
           <p:cNvSpPr/>
           <p:nvPr/>
         </p:nvSpPr>
         <p:spPr>
           <a:xfrm>
             <a:off x="640080" y="658368"/>
+            <a:ext cx="420624" cy="420624"/>
+          </a:xfrm>
+          <a:prstGeom prst="ellipse">
+            <a:avLst/>
+          </a:prstGeom>
+          <a:solidFill>
+            <a:srgbClr val="0068B7"/>
+          </a:solidFill>
+          <a:ln w="12700">
+            <a:solidFill>
+              <a:srgbClr val="0068B7"/>
+            </a:solidFill>
+            <a:prstDash val="solid"/>
+          </a:ln>
+        </p:spPr>
+      </p:sp>
+      <p:sp>
+        <p:nvSpPr>
+          <p:cNvPr id="8" name="Text 6"/>
+          <p:cNvSpPr/>
+          <p:nvPr/>
+        </p:nvSpPr>
+        <p:spPr>
+          <a:xfrm>
+            <a:off x="640080" y="731520"/>
+            <a:ext cx="420624" cy="164592"/>
+          </a:xfrm>
+          <a:prstGeom prst="rect">
+            <a:avLst/>
+          </a:prstGeom>
+          <a:noFill/>
+          <a:ln/>
+        </p:spPr>
+        <p:txBody>
+          <a:bodyPr wrap="square" lIns="0" tIns="0" rIns="0" bIns="0" rtlCol="0" anchor="ctr"/>
+          <a:lstStyle/>
+          <a:p>
+            <a:pPr algn="ctr" indent="0" marL="0">
+              <a:buNone/>
+            </a:pPr>
+            <a:r>
+              <a:rPr lang="en-US" sz="1100" b="1" dirty="0">
+                <a:solidFill>
+                  <a:srgbClr val="FFFFFF"/>
+                </a:solidFill>
+                <a:latin typeface="Aptos" pitchFamily="34" charset="0"/>
+                <a:ea typeface="Aptos" pitchFamily="34" charset="-122"/>
+                <a:cs typeface="Aptos" pitchFamily="34" charset="-120"/>
+              </a:rPr>
+              <a:t>4</a:t>
+            </a:r>
+            <a:endParaRPr lang="en-US" sz="1100" dirty="0"/>
+          </a:p>
+        </p:txBody>
+      </p:sp>
+      <p:sp>
+        <p:nvSpPr>
+          <p:cNvPr id="9" name="Text 7"/>
+          <p:cNvSpPr/>
+          <p:nvPr/>
+        </p:nvSpPr>
+        <p:spPr>
+          <a:xfrm>
+            <a:off x="640080" y="621792"/>
             <a:ext cx="10881360" cy="566928"/>
           </a:xfrm>
           <a:prstGeom prst="rect">
@@ -7875,7 +14625,7 @@
                 <a:ea typeface="Aptos Display" pitchFamily="34" charset="-122"/>
                 <a:cs typeface="Aptos Display" pitchFamily="34" charset="-120"/>
               </a:rPr>
-              <a:t>Technical Deep Dive Continued</a:t>
+              <a:t>Public Health Example</a:t>
             </a:r>
             <a:endParaRPr lang="en-US" sz="2700" dirty="0"/>
           </a:p>
@@ -7883,32 +14633,178 @@
       </p:sp>
       <p:sp>
         <p:nvSpPr>
-          <p:cNvPr id="7" name="Text 5"/>
-          <p:cNvSpPr/>
-          <p:nvPr/>
-        </p:nvSpPr>
-        <p:spPr>
-          <a:xfrm>
-            <a:off x="822960" y="1325880"/>
-            <a:ext cx="10378440" cy="4800600"/>
-          </a:xfrm>
-          <a:prstGeom prst="rect">
-            <a:avLst/>
-          </a:prstGeom>
-          <a:noFill/>
-          <a:ln/>
-        </p:spPr>
-        <p:txBody>
-          <a:bodyPr wrap="square" lIns="1016" tIns="1016" rIns="1016" bIns="1016" rtlCol="0" anchor="t">
+          <p:cNvPr id="10" name="Text 8"/>
+          <p:cNvSpPr/>
+          <p:nvPr/>
+        </p:nvSpPr>
+        <p:spPr>
+          <a:xfrm>
+            <a:off x="868680" y="1417320"/>
+            <a:ext cx="6675120" cy="4434840"/>
+          </a:xfrm>
+          <a:prstGeom prst="rect">
+            <a:avLst/>
+          </a:prstGeom>
+          <a:noFill/>
+          <a:ln/>
+        </p:spPr>
+        <p:txBody>
+          <a:bodyPr wrap="square" lIns="635" tIns="635" rIns="635" bIns="635" rtlCol="0" anchor="t">
             <a:normAutofit/>
           </a:bodyPr>
           <a:lstStyle/>
           <a:p>
+            <a:r>
+              <a:rPr lang="en-US" sz="1700" dirty="0">
+                <a:solidFill>
+                  <a:srgbClr val="17364A"/>
+                </a:solidFill>
+                <a:latin typeface="Aptos" pitchFamily="34" charset="0"/>
+                <a:ea typeface="Aptos" pitchFamily="34" charset="-122"/>
+                <a:cs typeface="Aptos" pitchFamily="34" charset="-120"/>
+              </a:rPr>
+              <a:t>A health department may use AI-supported geospatial analysis to identify areas where mobile vaccination clinics could.</a:t>
+            </a:r>
+            <a:endParaRPr lang="en-US" sz="1700" dirty="0"/>
+          </a:p>
+          <a:p>
+            <a:r>
+              <a:rPr lang="en-US" sz="1700" dirty="0">
+                <a:solidFill>
+                  <a:srgbClr val="17364A"/>
+                </a:solidFill>
+                <a:latin typeface="Aptos" pitchFamily="34" charset="0"/>
+                <a:ea typeface="Aptos" pitchFamily="34" charset="-122"/>
+                <a:cs typeface="Aptos" pitchFamily="34" charset="-120"/>
+              </a:rPr>
+              <a:t>The tool may combine immunization coverage, school locations, transportation routes, census variables, provider locations,.</a:t>
+            </a:r>
+            <a:endParaRPr lang="en-US" sz="1700" dirty="0"/>
+          </a:p>
+          <a:p>
+            <a:r>
+              <a:rPr lang="en-US" sz="1700" dirty="0">
+                <a:solidFill>
+                  <a:srgbClr val="17364A"/>
+                </a:solidFill>
+                <a:latin typeface="Aptos" pitchFamily="34" charset="0"/>
+                <a:ea typeface="Aptos" pitchFamily="34" charset="-122"/>
+                <a:cs typeface="Aptos" pitchFamily="34" charset="-120"/>
+              </a:rPr>
+              <a:t>The output may recommend priority areas for outreach and clinic placement.</a:t>
+            </a:r>
+            <a:endParaRPr lang="en-US" sz="1700" dirty="0"/>
+          </a:p>
+          <a:p>
+            <a:r>
+              <a:rPr lang="en-US" sz="1700" dirty="0">
+                <a:solidFill>
+                  <a:srgbClr val="17364A"/>
+                </a:solidFill>
+                <a:latin typeface="Aptos" pitchFamily="34" charset="0"/>
+                <a:ea typeface="Aptos" pitchFamily="34" charset="-122"/>
+                <a:cs typeface="Aptos" pitchFamily="34" charset="-120"/>
+              </a:rPr>
+              <a:t>This workflow can advance equity if it identifies access barriers and supports community partnership.</a:t>
+            </a:r>
+            <a:endParaRPr lang="en-US" sz="1700" dirty="0"/>
+          </a:p>
+        </p:txBody>
+      </p:sp>
+      <p:sp>
+        <p:nvSpPr>
+          <p:cNvPr id="11" name="Shape 9"/>
+          <p:cNvSpPr/>
+          <p:nvPr/>
+        </p:nvSpPr>
+        <p:spPr>
+          <a:xfrm>
+            <a:off x="7909560" y="1417320"/>
+            <a:ext cx="3154680" cy="1828800"/>
+          </a:xfrm>
+          <a:prstGeom prst="roundRect">
+            <a:avLst>
+              <a:gd name="adj" fmla="val 6000"/>
+            </a:avLst>
+          </a:prstGeom>
+          <a:solidFill>
+            <a:srgbClr val="EEF8ED"/>
+          </a:solidFill>
+          <a:ln w="12700">
+            <a:solidFill>
+              <a:srgbClr val="B9D7E6"/>
+            </a:solidFill>
+            <a:prstDash val="solid"/>
+          </a:ln>
+        </p:spPr>
+      </p:sp>
+      <p:sp>
+        <p:nvSpPr>
+          <p:cNvPr id="12" name="Text 10"/>
+          <p:cNvSpPr/>
+          <p:nvPr/>
+        </p:nvSpPr>
+        <p:spPr>
+          <a:xfrm>
+            <a:off x="8074152" y="1563624"/>
+            <a:ext cx="2825496" cy="201168"/>
+          </a:xfrm>
+          <a:prstGeom prst="rect">
+            <a:avLst/>
+          </a:prstGeom>
+          <a:noFill/>
+          <a:ln/>
+        </p:spPr>
+        <p:txBody>
+          <a:bodyPr wrap="square" lIns="0" tIns="0" rIns="0" bIns="0" rtlCol="0" anchor="ctr"/>
+          <a:lstStyle/>
+          <a:p>
             <a:pPr indent="0" marL="0">
               <a:buNone/>
             </a:pPr>
             <a:r>
-              <a:rPr lang="en-US" sz="1420" dirty="0">
+              <a:rPr lang="en-US" sz="950" b="1" dirty="0">
+                <a:solidFill>
+                  <a:srgbClr val="0068B7"/>
+                </a:solidFill>
+                <a:latin typeface="Aptos" pitchFamily="34" charset="0"/>
+                <a:ea typeface="Aptos" pitchFamily="34" charset="-122"/>
+                <a:cs typeface="Aptos" pitchFamily="34" charset="-120"/>
+              </a:rPr>
+              <a:t>Key idea</a:t>
+            </a:r>
+            <a:endParaRPr lang="en-US" sz="950" dirty="0"/>
+          </a:p>
+        </p:txBody>
+      </p:sp>
+      <p:sp>
+        <p:nvSpPr>
+          <p:cNvPr id="13" name="Text 11"/>
+          <p:cNvSpPr/>
+          <p:nvPr/>
+        </p:nvSpPr>
+        <p:spPr>
+          <a:xfrm>
+            <a:off x="8074152" y="1856232"/>
+            <a:ext cx="2825496" cy="1261872"/>
+          </a:xfrm>
+          <a:prstGeom prst="rect">
+            <a:avLst/>
+          </a:prstGeom>
+          <a:noFill/>
+          <a:ln/>
+        </p:spPr>
+        <p:txBody>
+          <a:bodyPr wrap="square" lIns="0" tIns="0" rIns="0" bIns="0" rtlCol="0" anchor="t">
+            <a:normAutofit/>
+          </a:bodyPr>
+          <a:lstStyle/>
+          <a:p>
+            <a:pPr indent="0" marL="0">
+              <a:buNone/>
+            </a:pPr>
+            <a:r>
+              <a:rPr lang="en-US" sz="1250" dirty="0">
                 <a:solidFill>
                   <a:srgbClr val="17364A"/>
                 </a:solidFill>
@@ -7916,9 +14812,116 @@
                 <a:ea typeface="Aptos" pitchFamily="34" charset="-122"/>
                 <a:cs typeface="Aptos" pitchFamily="34" charset="-120"/>
               </a:rPr>
-              <a:t>Geospatial models may use spatial proxies for social conditions. Social vulnerability, deprivation, rurality, housing burden, transportation access, and environmental exposure indicators can improve public health planning. They can also be misused if they stigmatize communities or support restrictive decisions. Agencies should use these indicators to guide supportive action and resource allocation, not blame. Privacy protection should be planned before analysis. Techniques include aggregation, suppression, geomasking, minimum cell-size rules, role-based access, public/private map separation, and review of small-area outputs before publication. For internal AI tools, access controls and audit logs should apply to spatial data just as they do to clinical or case data.</a:t>
-            </a:r>
-            <a:endParaRPr lang="en-US" sz="1420" dirty="0"/>
+              <a:t>A health department may use AI-supported geospatial analysis to identify areas where mobile vaccination clinics could.</a:t>
+            </a:r>
+            <a:endParaRPr lang="en-US" sz="1250" dirty="0"/>
+          </a:p>
+        </p:txBody>
+      </p:sp>
+      <p:sp>
+        <p:nvSpPr>
+          <p:cNvPr id="14" name="Shape 12"/>
+          <p:cNvSpPr/>
+          <p:nvPr/>
+        </p:nvSpPr>
+        <p:spPr>
+          <a:xfrm>
+            <a:off x="7909560" y="3520440"/>
+            <a:ext cx="3154680" cy="1737360"/>
+          </a:xfrm>
+          <a:prstGeom prst="roundRect">
+            <a:avLst>
+              <a:gd name="adj" fmla="val 6316"/>
+            </a:avLst>
+          </a:prstGeom>
+          <a:solidFill>
+            <a:srgbClr val="EAF6F8"/>
+          </a:solidFill>
+          <a:ln w="12700">
+            <a:solidFill>
+              <a:srgbClr val="B9D7E6"/>
+            </a:solidFill>
+            <a:prstDash val="solid"/>
+          </a:ln>
+        </p:spPr>
+      </p:sp>
+      <p:sp>
+        <p:nvSpPr>
+          <p:cNvPr id="15" name="Text 13"/>
+          <p:cNvSpPr/>
+          <p:nvPr/>
+        </p:nvSpPr>
+        <p:spPr>
+          <a:xfrm>
+            <a:off x="8074152" y="3666744"/>
+            <a:ext cx="2825496" cy="201168"/>
+          </a:xfrm>
+          <a:prstGeom prst="rect">
+            <a:avLst/>
+          </a:prstGeom>
+          <a:noFill/>
+          <a:ln/>
+        </p:spPr>
+        <p:txBody>
+          <a:bodyPr wrap="square" lIns="0" tIns="0" rIns="0" bIns="0" rtlCol="0" anchor="ctr"/>
+          <a:lstStyle/>
+          <a:p>
+            <a:pPr indent="0" marL="0">
+              <a:buNone/>
+            </a:pPr>
+            <a:r>
+              <a:rPr lang="en-US" sz="950" b="1" dirty="0">
+                <a:solidFill>
+                  <a:srgbClr val="0068B7"/>
+                </a:solidFill>
+                <a:latin typeface="Aptos" pitchFamily="34" charset="0"/>
+                <a:ea typeface="Aptos" pitchFamily="34" charset="-122"/>
+                <a:cs typeface="Aptos" pitchFamily="34" charset="-120"/>
+              </a:rPr>
+              <a:t>Use this for</a:t>
+            </a:r>
+            <a:endParaRPr lang="en-US" sz="950" dirty="0"/>
+          </a:p>
+        </p:txBody>
+      </p:sp>
+      <p:sp>
+        <p:nvSpPr>
+          <p:cNvPr id="16" name="Text 14"/>
+          <p:cNvSpPr/>
+          <p:nvPr/>
+        </p:nvSpPr>
+        <p:spPr>
+          <a:xfrm>
+            <a:off x="8074152" y="3959352"/>
+            <a:ext cx="2825496" cy="1170432"/>
+          </a:xfrm>
+          <a:prstGeom prst="rect">
+            <a:avLst/>
+          </a:prstGeom>
+          <a:noFill/>
+          <a:ln/>
+        </p:spPr>
+        <p:txBody>
+          <a:bodyPr wrap="square" lIns="0" tIns="0" rIns="0" bIns="0" rtlCol="0" anchor="t">
+            <a:normAutofit/>
+          </a:bodyPr>
+          <a:lstStyle/>
+          <a:p>
+            <a:pPr indent="0" marL="0">
+              <a:buNone/>
+            </a:pPr>
+            <a:r>
+              <a:rPr lang="en-US" sz="1250" dirty="0">
+                <a:solidFill>
+                  <a:srgbClr val="17364A"/>
+                </a:solidFill>
+                <a:latin typeface="Aptos" pitchFamily="34" charset="0"/>
+                <a:ea typeface="Aptos" pitchFamily="34" charset="-122"/>
+                <a:cs typeface="Aptos" pitchFamily="34" charset="-120"/>
+              </a:rPr>
+              <a:t>Connect the concept to public health decisions, safeguards, documentation, or implementation work.</a:t>
+            </a:r>
+            <a:endParaRPr lang="en-US" sz="1250" dirty="0"/>
           </a:p>
         </p:txBody>
       </p:sp>

--- a/downloads/presentations/modules/lesson-05-geospatial-ai-and-spatial-epidemiology.pptx
+++ b/downloads/presentations/modules/lesson-05-geospatial-ai-and-spatial-epidemiology.pptx
@@ -2999,6 +2999,45 @@
           </a:p>
         </p:txBody>
       </p:sp>
+      <p:sp>
+        <p:nvSpPr>
+          <p:cNvPr id="8" name="Text 5"/>
+          <p:cNvSpPr/>
+          <p:nvPr/>
+        </p:nvSpPr>
+        <p:spPr>
+          <a:xfrm>
+            <a:off x="11137392" y="6510528"/>
+            <a:ext cx="411480" cy="201168"/>
+          </a:xfrm>
+          <a:prstGeom prst="rect">
+            <a:avLst/>
+          </a:prstGeom>
+          <a:noFill/>
+          <a:ln/>
+        </p:spPr>
+        <p:txBody>
+          <a:bodyPr wrap="square" lIns="0" tIns="0" rIns="0" bIns="0" rtlCol="0" anchor="ctr"/>
+          <a:lstStyle/>
+          <a:p>
+            <a:pPr algn="r" indent="0" marL="0">
+              <a:buNone/>
+            </a:pPr>
+            <a:r>
+              <a:rPr lang="en-US" sz="900" dirty="0">
+                <a:solidFill>
+                  <a:srgbClr val="5F7181"/>
+                </a:solidFill>
+                <a:latin typeface="Aptos" pitchFamily="34" charset="0"/>
+                <a:ea typeface="Aptos" pitchFamily="34" charset="-122"/>
+                <a:cs typeface="Aptos" pitchFamily="34" charset="-120"/>
+              </a:rPr>
+              <a:t>1</a:t>
+            </a:r>
+            <a:endParaRPr lang="en-US" sz="900" dirty="0"/>
+          </a:p>
+        </p:txBody>
+      </p:sp>
     </p:spTree>
   </p:cSld>
   <p:clrMapOvr>
@@ -3192,7 +3231,7 @@
                 <a:ea typeface="Aptos" pitchFamily="34" charset="-122"/>
                 <a:cs typeface="Aptos" pitchFamily="34" charset="-120"/>
               </a:rPr>
-              <a:t>© Paula Soper</a:t>
+              <a:t>Â© Paula Soper</a:t>
             </a:r>
             <a:endParaRPr lang="en-US" sz="800" dirty="0"/>
           </a:p>
@@ -3200,7 +3239,46 @@
       </p:sp>
       <p:sp>
         <p:nvSpPr>
-          <p:cNvPr id="7" name="Shape 5"/>
+          <p:cNvPr id="7" name="Text 5"/>
+          <p:cNvSpPr/>
+          <p:nvPr/>
+        </p:nvSpPr>
+        <p:spPr>
+          <a:xfrm>
+            <a:off x="11137392" y="6510528"/>
+            <a:ext cx="411480" cy="201168"/>
+          </a:xfrm>
+          <a:prstGeom prst="rect">
+            <a:avLst/>
+          </a:prstGeom>
+          <a:noFill/>
+          <a:ln/>
+        </p:spPr>
+        <p:txBody>
+          <a:bodyPr wrap="square" lIns="0" tIns="0" rIns="0" bIns="0" rtlCol="0" anchor="ctr"/>
+          <a:lstStyle/>
+          <a:p>
+            <a:pPr algn="r" indent="0" marL="0">
+              <a:buNone/>
+            </a:pPr>
+            <a:r>
+              <a:rPr lang="en-US" sz="900" dirty="0">
+                <a:solidFill>
+                  <a:srgbClr val="5F7181"/>
+                </a:solidFill>
+                <a:latin typeface="Aptos" pitchFamily="34" charset="0"/>
+                <a:ea typeface="Aptos" pitchFamily="34" charset="-122"/>
+                <a:cs typeface="Aptos" pitchFamily="34" charset="-120"/>
+              </a:rPr>
+              <a:t>10</a:t>
+            </a:r>
+            <a:endParaRPr lang="en-US" sz="900" dirty="0"/>
+          </a:p>
+        </p:txBody>
+      </p:sp>
+      <p:sp>
+        <p:nvSpPr>
+          <p:cNvPr id="8" name="Shape 6"/>
           <p:cNvSpPr/>
           <p:nvPr/>
         </p:nvSpPr>
@@ -3225,7 +3303,7 @@
       </p:sp>
       <p:sp>
         <p:nvSpPr>
-          <p:cNvPr id="8" name="Text 6"/>
+          <p:cNvPr id="9" name="Text 7"/>
           <p:cNvSpPr/>
           <p:nvPr/>
         </p:nvSpPr>
@@ -3264,14 +3342,14 @@
       </p:sp>
       <p:sp>
         <p:nvSpPr>
-          <p:cNvPr id="9" name="Text 7"/>
+          <p:cNvPr id="10" name="Text 8"/>
           <p:cNvSpPr/>
           <p:nvPr/>
         </p:nvSpPr>
         <p:spPr>
           <a:xfrm>
             <a:off x="640080" y="621792"/>
-            <a:ext cx="10881360" cy="566928"/>
+            <a:ext cx="10881360" cy="713232"/>
           </a:xfrm>
           <a:prstGeom prst="rect">
             <a:avLst/>
@@ -3289,7 +3367,7 @@
               <a:buNone/>
             </a:pPr>
             <a:r>
-              <a:rPr lang="en-US" sz="2700" b="1" dirty="0">
+              <a:rPr lang="en-US" sz="3400" b="1" dirty="0">
                 <a:solidFill>
                   <a:srgbClr val="003A63"/>
                 </a:solidFill>
@@ -3299,20 +3377,20 @@
               </a:rPr>
               <a:t>Technical Deep Dive</a:t>
             </a:r>
-            <a:endParaRPr lang="en-US" sz="2700" dirty="0"/>
-          </a:p>
-        </p:txBody>
-      </p:sp>
-      <p:sp>
-        <p:nvSpPr>
-          <p:cNvPr id="10" name="Text 8"/>
-          <p:cNvSpPr/>
-          <p:nvPr/>
-        </p:nvSpPr>
-        <p:spPr>
-          <a:xfrm>
-            <a:off x="868680" y="1417320"/>
-            <a:ext cx="6675120" cy="4434840"/>
+            <a:endParaRPr lang="en-US" sz="3400" dirty="0"/>
+          </a:p>
+        </p:txBody>
+      </p:sp>
+      <p:sp>
+        <p:nvSpPr>
+          <p:cNvPr id="11" name="Text 9"/>
+          <p:cNvSpPr/>
+          <p:nvPr/>
+        </p:nvSpPr>
+        <p:spPr>
+          <a:xfrm>
+            <a:off x="868680" y="1508760"/>
+            <a:ext cx="6537960" cy="4160520"/>
           </a:xfrm>
           <a:prstGeom prst="rect">
             <a:avLst/>
@@ -3327,7 +3405,7 @@
           <a:lstStyle/>
           <a:p>
             <a:r>
-              <a:rPr lang="en-US" sz="1700" dirty="0">
+              <a:rPr lang="en-US" sz="2100" dirty="0">
                 <a:solidFill>
                   <a:srgbClr val="17364A"/>
                 </a:solidFill>
@@ -3337,11 +3415,11 @@
               </a:rPr>
               <a:t>Geospatial AI begins with location data, and location data are rarely perfect.</a:t>
             </a:r>
-            <a:endParaRPr lang="en-US" sz="1700" dirty="0"/>
-          </a:p>
-          <a:p>
-            <a:r>
-              <a:rPr lang="en-US" sz="1700" dirty="0">
+            <a:endParaRPr lang="en-US" sz="2100" dirty="0"/>
+          </a:p>
+          <a:p>
+            <a:r>
+              <a:rPr lang="en-US" sz="2100" dirty="0">
                 <a:solidFill>
                   <a:srgbClr val="17364A"/>
                 </a:solidFill>
@@ -3351,11 +3429,11 @@
               </a:rPr>
               <a:t>Addresses may be missing, misspelled, outdated, rural route-based, temporary, or unstable.</a:t>
             </a:r>
-            <a:endParaRPr lang="en-US" sz="1700" dirty="0"/>
-          </a:p>
-          <a:p>
-            <a:r>
-              <a:rPr lang="en-US" sz="1700" dirty="0">
+            <a:endParaRPr lang="en-US" sz="2100" dirty="0"/>
+          </a:p>
+          <a:p>
+            <a:r>
+              <a:rPr lang="en-US" sz="2100" dirty="0">
                 <a:solidFill>
                   <a:srgbClr val="17364A"/>
                 </a:solidFill>
@@ -3363,29 +3441,15 @@
                 <a:ea typeface="Aptos" pitchFamily="34" charset="-122"/>
                 <a:cs typeface="Aptos" pitchFamily="34" charset="-120"/>
               </a:rPr>
-              <a:t>People experiencing homelessness, migration, displacement, incarceration, or housing instability may be poorly represented.</a:t>
-            </a:r>
-            <a:endParaRPr lang="en-US" sz="1700" dirty="0"/>
-          </a:p>
-          <a:p>
-            <a:r>
-              <a:rPr lang="en-US" sz="1700" dirty="0">
-                <a:solidFill>
-                  <a:srgbClr val="17364A"/>
-                </a:solidFill>
-                <a:latin typeface="Aptos" pitchFamily="34" charset="0"/>
-                <a:ea typeface="Aptos" pitchFamily="34" charset="-122"/>
-                <a:cs typeface="Aptos" pitchFamily="34" charset="-120"/>
-              </a:rPr>
-              <a:t>Geocoding errors can shift records across boundaries and distort rates for small areas.</a:t>
-            </a:r>
-            <a:endParaRPr lang="en-US" sz="1700" dirty="0"/>
-          </a:p>
-        </p:txBody>
-      </p:sp>
-      <p:sp>
-        <p:nvSpPr>
-          <p:cNvPr id="11" name="Shape 9"/>
+              <a:t>People experiencing homelessness, migration, displacement, incarceration, or housing instability may be.</a:t>
+            </a:r>
+            <a:endParaRPr lang="en-US" sz="2100" dirty="0"/>
+          </a:p>
+        </p:txBody>
+      </p:sp>
+      <p:sp>
+        <p:nvSpPr>
+          <p:cNvPr id="12" name="Shape 10"/>
           <p:cNvSpPr/>
           <p:nvPr/>
         </p:nvSpPr>
@@ -3412,14 +3476,14 @@
       </p:sp>
       <p:sp>
         <p:nvSpPr>
-          <p:cNvPr id="12" name="Text 10"/>
+          <p:cNvPr id="13" name="Text 11"/>
           <p:cNvSpPr/>
           <p:nvPr/>
         </p:nvSpPr>
         <p:spPr>
           <a:xfrm>
             <a:off x="8074152" y="1563624"/>
-            <a:ext cx="2825496" cy="201168"/>
+            <a:ext cx="2825496" cy="256032"/>
           </a:xfrm>
           <a:prstGeom prst="rect">
             <a:avLst/>
@@ -3435,7 +3499,7 @@
               <a:buNone/>
             </a:pPr>
             <a:r>
-              <a:rPr lang="en-US" sz="950" b="1" dirty="0">
+              <a:rPr lang="en-US" sz="1300" b="1" dirty="0">
                 <a:solidFill>
                   <a:srgbClr val="0068B7"/>
                 </a:solidFill>
@@ -3445,20 +3509,20 @@
               </a:rPr>
               <a:t>Key idea</a:t>
             </a:r>
-            <a:endParaRPr lang="en-US" sz="950" dirty="0"/>
-          </a:p>
-        </p:txBody>
-      </p:sp>
-      <p:sp>
-        <p:nvSpPr>
-          <p:cNvPr id="13" name="Text 11"/>
-          <p:cNvSpPr/>
-          <p:nvPr/>
-        </p:nvSpPr>
-        <p:spPr>
-          <a:xfrm>
-            <a:off x="8074152" y="1856232"/>
-            <a:ext cx="2825496" cy="1261872"/>
+            <a:endParaRPr lang="en-US" sz="1300" dirty="0"/>
+          </a:p>
+        </p:txBody>
+      </p:sp>
+      <p:sp>
+        <p:nvSpPr>
+          <p:cNvPr id="14" name="Text 12"/>
+          <p:cNvSpPr/>
+          <p:nvPr/>
+        </p:nvSpPr>
+        <p:spPr>
+          <a:xfrm>
+            <a:off x="8074152" y="1920240"/>
+            <a:ext cx="2825496" cy="1188720"/>
           </a:xfrm>
           <a:prstGeom prst="rect">
             <a:avLst/>
@@ -3476,7 +3540,7 @@
               <a:buNone/>
             </a:pPr>
             <a:r>
-              <a:rPr lang="en-US" sz="1250" dirty="0">
+              <a:rPr lang="en-US" sz="1550" dirty="0">
                 <a:solidFill>
                   <a:srgbClr val="17364A"/>
                 </a:solidFill>
@@ -3486,13 +3550,13 @@
               </a:rPr>
               <a:t>Geospatial AI begins with location data, and location data are rarely perfect.</a:t>
             </a:r>
-            <a:endParaRPr lang="en-US" sz="1250" dirty="0"/>
-          </a:p>
-        </p:txBody>
-      </p:sp>
-      <p:sp>
-        <p:nvSpPr>
-          <p:cNvPr id="14" name="Shape 12"/>
+            <a:endParaRPr lang="en-US" sz="1550" dirty="0"/>
+          </a:p>
+        </p:txBody>
+      </p:sp>
+      <p:sp>
+        <p:nvSpPr>
+          <p:cNvPr id="15" name="Shape 13"/>
           <p:cNvSpPr/>
           <p:nvPr/>
         </p:nvSpPr>
@@ -3519,14 +3583,14 @@
       </p:sp>
       <p:sp>
         <p:nvSpPr>
-          <p:cNvPr id="15" name="Text 13"/>
+          <p:cNvPr id="16" name="Text 14"/>
           <p:cNvSpPr/>
           <p:nvPr/>
         </p:nvSpPr>
         <p:spPr>
           <a:xfrm>
             <a:off x="8074152" y="3666744"/>
-            <a:ext cx="2825496" cy="201168"/>
+            <a:ext cx="2825496" cy="256032"/>
           </a:xfrm>
           <a:prstGeom prst="rect">
             <a:avLst/>
@@ -3542,7 +3606,7 @@
               <a:buNone/>
             </a:pPr>
             <a:r>
-              <a:rPr lang="en-US" sz="950" b="1" dirty="0">
+              <a:rPr lang="en-US" sz="1300" b="1" dirty="0">
                 <a:solidFill>
                   <a:srgbClr val="0068B7"/>
                 </a:solidFill>
@@ -3552,20 +3616,20 @@
               </a:rPr>
               <a:t>Use this for</a:t>
             </a:r>
-            <a:endParaRPr lang="en-US" sz="950" dirty="0"/>
-          </a:p>
-        </p:txBody>
-      </p:sp>
-      <p:sp>
-        <p:nvSpPr>
-          <p:cNvPr id="16" name="Text 14"/>
-          <p:cNvSpPr/>
-          <p:nvPr/>
-        </p:nvSpPr>
-        <p:spPr>
-          <a:xfrm>
-            <a:off x="8074152" y="3959352"/>
-            <a:ext cx="2825496" cy="1170432"/>
+            <a:endParaRPr lang="en-US" sz="1300" dirty="0"/>
+          </a:p>
+        </p:txBody>
+      </p:sp>
+      <p:sp>
+        <p:nvSpPr>
+          <p:cNvPr id="17" name="Text 15"/>
+          <p:cNvSpPr/>
+          <p:nvPr/>
+        </p:nvSpPr>
+        <p:spPr>
+          <a:xfrm>
+            <a:off x="8074152" y="4023360"/>
+            <a:ext cx="2825496" cy="1097280"/>
           </a:xfrm>
           <a:prstGeom prst="rect">
             <a:avLst/>
@@ -3583,7 +3647,7 @@
               <a:buNone/>
             </a:pPr>
             <a:r>
-              <a:rPr lang="en-US" sz="1250" dirty="0">
+              <a:rPr lang="en-US" sz="1550" dirty="0">
                 <a:solidFill>
                   <a:srgbClr val="17364A"/>
                 </a:solidFill>
@@ -3593,7 +3657,7 @@
               </a:rPr>
               <a:t>Connect the concept to public health decisions, safeguards, documentation, or implementation work.</a:t>
             </a:r>
-            <a:endParaRPr lang="en-US" sz="1250" dirty="0"/>
+            <a:endParaRPr lang="en-US" sz="1550" dirty="0"/>
           </a:p>
         </p:txBody>
       </p:sp>
@@ -3790,7 +3854,7 @@
                 <a:ea typeface="Aptos" pitchFamily="34" charset="-122"/>
                 <a:cs typeface="Aptos" pitchFamily="34" charset="-120"/>
               </a:rPr>
-              <a:t>© Paula Soper</a:t>
+              <a:t>Â© Paula Soper</a:t>
             </a:r>
             <a:endParaRPr lang="en-US" sz="800" dirty="0"/>
           </a:p>
@@ -3804,8 +3868,47 @@
         </p:nvSpPr>
         <p:spPr>
           <a:xfrm>
+            <a:off x="11137392" y="6510528"/>
+            <a:ext cx="411480" cy="201168"/>
+          </a:xfrm>
+          <a:prstGeom prst="rect">
+            <a:avLst/>
+          </a:prstGeom>
+          <a:noFill/>
+          <a:ln/>
+        </p:spPr>
+        <p:txBody>
+          <a:bodyPr wrap="square" lIns="0" tIns="0" rIns="0" bIns="0" rtlCol="0" anchor="ctr"/>
+          <a:lstStyle/>
+          <a:p>
+            <a:pPr algn="r" indent="0" marL="0">
+              <a:buNone/>
+            </a:pPr>
+            <a:r>
+              <a:rPr lang="en-US" sz="900" dirty="0">
+                <a:solidFill>
+                  <a:srgbClr val="5F7181"/>
+                </a:solidFill>
+                <a:latin typeface="Aptos" pitchFamily="34" charset="0"/>
+                <a:ea typeface="Aptos" pitchFamily="34" charset="-122"/>
+                <a:cs typeface="Aptos" pitchFamily="34" charset="-120"/>
+              </a:rPr>
+              <a:t>11</a:t>
+            </a:r>
+            <a:endParaRPr lang="en-US" sz="900" dirty="0"/>
+          </a:p>
+        </p:txBody>
+      </p:sp>
+      <p:sp>
+        <p:nvSpPr>
+          <p:cNvPr id="8" name="Text 6"/>
+          <p:cNvSpPr/>
+          <p:nvPr/>
+        </p:nvSpPr>
+        <p:spPr>
+          <a:xfrm>
             <a:off x="640080" y="658368"/>
-            <a:ext cx="10881360" cy="566928"/>
+            <a:ext cx="10881360" cy="713232"/>
           </a:xfrm>
           <a:prstGeom prst="rect">
             <a:avLst/>
@@ -3823,7 +3926,7 @@
               <a:buNone/>
             </a:pPr>
             <a:r>
-              <a:rPr lang="en-US" sz="2700" b="1" dirty="0">
+              <a:rPr lang="en-US" sz="3400" b="1" dirty="0">
                 <a:solidFill>
                   <a:srgbClr val="003A63"/>
                 </a:solidFill>
@@ -3833,20 +3936,20 @@
               </a:rPr>
               <a:t>Technical Deep Dive Continued</a:t>
             </a:r>
-            <a:endParaRPr lang="en-US" sz="2700" dirty="0"/>
-          </a:p>
-        </p:txBody>
-      </p:sp>
-      <p:sp>
-        <p:nvSpPr>
-          <p:cNvPr id="8" name="Text 6"/>
-          <p:cNvSpPr/>
-          <p:nvPr/>
-        </p:nvSpPr>
-        <p:spPr>
-          <a:xfrm>
-            <a:off x="868680" y="1417320"/>
-            <a:ext cx="6675120" cy="4434840"/>
+            <a:endParaRPr lang="en-US" sz="3400" dirty="0"/>
+          </a:p>
+        </p:txBody>
+      </p:sp>
+      <p:sp>
+        <p:nvSpPr>
+          <p:cNvPr id="9" name="Text 7"/>
+          <p:cNvSpPr/>
+          <p:nvPr/>
+        </p:nvSpPr>
+        <p:spPr>
+          <a:xfrm>
+            <a:off x="868680" y="1508760"/>
+            <a:ext cx="6537960" cy="4160520"/>
           </a:xfrm>
           <a:prstGeom prst="rect">
             <a:avLst/>
@@ -3861,7 +3964,7 @@
           <a:lstStyle/>
           <a:p>
             <a:r>
-              <a:rPr lang="en-US" sz="1700" dirty="0">
+              <a:rPr lang="en-US" sz="2100" dirty="0">
                 <a:solidFill>
                   <a:srgbClr val="17364A"/>
                 </a:solidFill>
@@ -3871,11 +3974,11 @@
               </a:rPr>
               <a:t>Geospatial models may use spatial proxies for social conditions.</a:t>
             </a:r>
-            <a:endParaRPr lang="en-US" sz="1700" dirty="0"/>
-          </a:p>
-          <a:p>
-            <a:r>
-              <a:rPr lang="en-US" sz="1700" dirty="0">
+            <a:endParaRPr lang="en-US" sz="2100" dirty="0"/>
+          </a:p>
+          <a:p>
+            <a:r>
+              <a:rPr lang="en-US" sz="2100" dirty="0">
                 <a:solidFill>
                   <a:srgbClr val="17364A"/>
                 </a:solidFill>
@@ -3883,13 +3986,13 @@
                 <a:ea typeface="Aptos" pitchFamily="34" charset="-122"/>
                 <a:cs typeface="Aptos" pitchFamily="34" charset="-120"/>
               </a:rPr>
-              <a:t>Social vulnerability, deprivation, rurality, housing burden, transportation access, and environmental exposure indicators.</a:t>
-            </a:r>
-            <a:endParaRPr lang="en-US" sz="1700" dirty="0"/>
-          </a:p>
-          <a:p>
-            <a:r>
-              <a:rPr lang="en-US" sz="1700" dirty="0">
+              <a:t>Social vulnerability, deprivation, rurality, housing burden, transportation access, and environmental.</a:t>
+            </a:r>
+            <a:endParaRPr lang="en-US" sz="2100" dirty="0"/>
+          </a:p>
+          <a:p>
+            <a:r>
+              <a:rPr lang="en-US" sz="2100" dirty="0">
                 <a:solidFill>
                   <a:srgbClr val="17364A"/>
                 </a:solidFill>
@@ -3899,27 +4002,13 @@
               </a:rPr>
               <a:t>They can also be misused if they stigmatize communities or support restrictive decisions.</a:t>
             </a:r>
-            <a:endParaRPr lang="en-US" sz="1700" dirty="0"/>
-          </a:p>
-          <a:p>
-            <a:r>
-              <a:rPr lang="en-US" sz="1700" dirty="0">
-                <a:solidFill>
-                  <a:srgbClr val="17364A"/>
-                </a:solidFill>
-                <a:latin typeface="Aptos" pitchFamily="34" charset="0"/>
-                <a:ea typeface="Aptos" pitchFamily="34" charset="-122"/>
-                <a:cs typeface="Aptos" pitchFamily="34" charset="-120"/>
-              </a:rPr>
-              <a:t>Agencies should use these indicators to guide supportive action and resource allocation, not blame.</a:t>
-            </a:r>
-            <a:endParaRPr lang="en-US" sz="1700" dirty="0"/>
-          </a:p>
-        </p:txBody>
-      </p:sp>
-      <p:sp>
-        <p:nvSpPr>
-          <p:cNvPr id="9" name="Shape 7"/>
+            <a:endParaRPr lang="en-US" sz="2100" dirty="0"/>
+          </a:p>
+        </p:txBody>
+      </p:sp>
+      <p:sp>
+        <p:nvSpPr>
+          <p:cNvPr id="10" name="Shape 8"/>
           <p:cNvSpPr/>
           <p:nvPr/>
         </p:nvSpPr>
@@ -3946,14 +4035,14 @@
       </p:sp>
       <p:sp>
         <p:nvSpPr>
-          <p:cNvPr id="10" name="Text 8"/>
+          <p:cNvPr id="11" name="Text 9"/>
           <p:cNvSpPr/>
           <p:nvPr/>
         </p:nvSpPr>
         <p:spPr>
           <a:xfrm>
             <a:off x="8074152" y="1563624"/>
-            <a:ext cx="2825496" cy="201168"/>
+            <a:ext cx="2825496" cy="256032"/>
           </a:xfrm>
           <a:prstGeom prst="rect">
             <a:avLst/>
@@ -3969,7 +4058,7 @@
               <a:buNone/>
             </a:pPr>
             <a:r>
-              <a:rPr lang="en-US" sz="950" b="1" dirty="0">
+              <a:rPr lang="en-US" sz="1300" b="1" dirty="0">
                 <a:solidFill>
                   <a:srgbClr val="0068B7"/>
                 </a:solidFill>
@@ -3979,20 +4068,20 @@
               </a:rPr>
               <a:t>Key idea</a:t>
             </a:r>
-            <a:endParaRPr lang="en-US" sz="950" dirty="0"/>
-          </a:p>
-        </p:txBody>
-      </p:sp>
-      <p:sp>
-        <p:nvSpPr>
-          <p:cNvPr id="11" name="Text 9"/>
-          <p:cNvSpPr/>
-          <p:nvPr/>
-        </p:nvSpPr>
-        <p:spPr>
-          <a:xfrm>
-            <a:off x="8074152" y="1856232"/>
-            <a:ext cx="2825496" cy="1261872"/>
+            <a:endParaRPr lang="en-US" sz="1300" dirty="0"/>
+          </a:p>
+        </p:txBody>
+      </p:sp>
+      <p:sp>
+        <p:nvSpPr>
+          <p:cNvPr id="12" name="Text 10"/>
+          <p:cNvSpPr/>
+          <p:nvPr/>
+        </p:nvSpPr>
+        <p:spPr>
+          <a:xfrm>
+            <a:off x="8074152" y="1920240"/>
+            <a:ext cx="2825496" cy="1188720"/>
           </a:xfrm>
           <a:prstGeom prst="rect">
             <a:avLst/>
@@ -4010,7 +4099,7 @@
               <a:buNone/>
             </a:pPr>
             <a:r>
-              <a:rPr lang="en-US" sz="1250" dirty="0">
+              <a:rPr lang="en-US" sz="1550" dirty="0">
                 <a:solidFill>
                   <a:srgbClr val="17364A"/>
                 </a:solidFill>
@@ -4020,13 +4109,13 @@
               </a:rPr>
               <a:t>Geospatial models may use spatial proxies for social conditions.</a:t>
             </a:r>
-            <a:endParaRPr lang="en-US" sz="1250" dirty="0"/>
-          </a:p>
-        </p:txBody>
-      </p:sp>
-      <p:sp>
-        <p:nvSpPr>
-          <p:cNvPr id="12" name="Shape 10"/>
+            <a:endParaRPr lang="en-US" sz="1550" dirty="0"/>
+          </a:p>
+        </p:txBody>
+      </p:sp>
+      <p:sp>
+        <p:nvSpPr>
+          <p:cNvPr id="13" name="Shape 11"/>
           <p:cNvSpPr/>
           <p:nvPr/>
         </p:nvSpPr>
@@ -4053,14 +4142,14 @@
       </p:sp>
       <p:sp>
         <p:nvSpPr>
-          <p:cNvPr id="13" name="Text 11"/>
+          <p:cNvPr id="14" name="Text 12"/>
           <p:cNvSpPr/>
           <p:nvPr/>
         </p:nvSpPr>
         <p:spPr>
           <a:xfrm>
             <a:off x="8074152" y="3666744"/>
-            <a:ext cx="2825496" cy="201168"/>
+            <a:ext cx="2825496" cy="256032"/>
           </a:xfrm>
           <a:prstGeom prst="rect">
             <a:avLst/>
@@ -4076,7 +4165,7 @@
               <a:buNone/>
             </a:pPr>
             <a:r>
-              <a:rPr lang="en-US" sz="950" b="1" dirty="0">
+              <a:rPr lang="en-US" sz="1300" b="1" dirty="0">
                 <a:solidFill>
                   <a:srgbClr val="0068B7"/>
                 </a:solidFill>
@@ -4086,20 +4175,20 @@
               </a:rPr>
               <a:t>Use this for</a:t>
             </a:r>
-            <a:endParaRPr lang="en-US" sz="950" dirty="0"/>
-          </a:p>
-        </p:txBody>
-      </p:sp>
-      <p:sp>
-        <p:nvSpPr>
-          <p:cNvPr id="14" name="Text 12"/>
-          <p:cNvSpPr/>
-          <p:nvPr/>
-        </p:nvSpPr>
-        <p:spPr>
-          <a:xfrm>
-            <a:off x="8074152" y="3959352"/>
-            <a:ext cx="2825496" cy="1170432"/>
+            <a:endParaRPr lang="en-US" sz="1300" dirty="0"/>
+          </a:p>
+        </p:txBody>
+      </p:sp>
+      <p:sp>
+        <p:nvSpPr>
+          <p:cNvPr id="15" name="Text 13"/>
+          <p:cNvSpPr/>
+          <p:nvPr/>
+        </p:nvSpPr>
+        <p:spPr>
+          <a:xfrm>
+            <a:off x="8074152" y="4023360"/>
+            <a:ext cx="2825496" cy="1097280"/>
           </a:xfrm>
           <a:prstGeom prst="rect">
             <a:avLst/>
@@ -4117,7 +4206,7 @@
               <a:buNone/>
             </a:pPr>
             <a:r>
-              <a:rPr lang="en-US" sz="1250" dirty="0">
+              <a:rPr lang="en-US" sz="1550" dirty="0">
                 <a:solidFill>
                   <a:srgbClr val="17364A"/>
                 </a:solidFill>
@@ -4127,7 +4216,7 @@
               </a:rPr>
               <a:t>Connect the concept to public health decisions, safeguards, documentation, or implementation work.</a:t>
             </a:r>
-            <a:endParaRPr lang="en-US" sz="1250" dirty="0"/>
+            <a:endParaRPr lang="en-US" sz="1550" dirty="0"/>
           </a:p>
         </p:txBody>
       </p:sp>
@@ -4324,7 +4413,7 @@
                 <a:ea typeface="Aptos" pitchFamily="34" charset="-122"/>
                 <a:cs typeface="Aptos" pitchFamily="34" charset="-120"/>
               </a:rPr>
-              <a:t>© Paula Soper</a:t>
+              <a:t>Â© Paula Soper</a:t>
             </a:r>
             <a:endParaRPr lang="en-US" sz="800" dirty="0"/>
           </a:p>
@@ -4332,7 +4421,46 @@
       </p:sp>
       <p:sp>
         <p:nvSpPr>
-          <p:cNvPr id="7" name="Shape 5"/>
+          <p:cNvPr id="7" name="Text 5"/>
+          <p:cNvSpPr/>
+          <p:nvPr/>
+        </p:nvSpPr>
+        <p:spPr>
+          <a:xfrm>
+            <a:off x="11137392" y="6510528"/>
+            <a:ext cx="411480" cy="201168"/>
+          </a:xfrm>
+          <a:prstGeom prst="rect">
+            <a:avLst/>
+          </a:prstGeom>
+          <a:noFill/>
+          <a:ln/>
+        </p:spPr>
+        <p:txBody>
+          <a:bodyPr wrap="square" lIns="0" tIns="0" rIns="0" bIns="0" rtlCol="0" anchor="ctr"/>
+          <a:lstStyle/>
+          <a:p>
+            <a:pPr algn="r" indent="0" marL="0">
+              <a:buNone/>
+            </a:pPr>
+            <a:r>
+              <a:rPr lang="en-US" sz="900" dirty="0">
+                <a:solidFill>
+                  <a:srgbClr val="5F7181"/>
+                </a:solidFill>
+                <a:latin typeface="Aptos" pitchFamily="34" charset="0"/>
+                <a:ea typeface="Aptos" pitchFamily="34" charset="-122"/>
+                <a:cs typeface="Aptos" pitchFamily="34" charset="-120"/>
+              </a:rPr>
+              <a:t>12</a:t>
+            </a:r>
+            <a:endParaRPr lang="en-US" sz="900" dirty="0"/>
+          </a:p>
+        </p:txBody>
+      </p:sp>
+      <p:sp>
+        <p:nvSpPr>
+          <p:cNvPr id="8" name="Shape 6"/>
           <p:cNvSpPr/>
           <p:nvPr/>
         </p:nvSpPr>
@@ -4357,7 +4485,7 @@
       </p:sp>
       <p:sp>
         <p:nvSpPr>
-          <p:cNvPr id="8" name="Text 6"/>
+          <p:cNvPr id="9" name="Text 7"/>
           <p:cNvSpPr/>
           <p:nvPr/>
         </p:nvSpPr>
@@ -4396,14 +4524,14 @@
       </p:sp>
       <p:sp>
         <p:nvSpPr>
-          <p:cNvPr id="9" name="Text 7"/>
+          <p:cNvPr id="10" name="Text 8"/>
           <p:cNvSpPr/>
           <p:nvPr/>
         </p:nvSpPr>
         <p:spPr>
           <a:xfrm>
             <a:off x="640080" y="621792"/>
-            <a:ext cx="10881360" cy="566928"/>
+            <a:ext cx="10881360" cy="713232"/>
           </a:xfrm>
           <a:prstGeom prst="rect">
             <a:avLst/>
@@ -4421,7 +4549,7 @@
               <a:buNone/>
             </a:pPr>
             <a:r>
-              <a:rPr lang="en-US" sz="2700" b="1" dirty="0">
+              <a:rPr lang="en-US" sz="3400" b="1" dirty="0">
                 <a:solidFill>
                   <a:srgbClr val="003A63"/>
                 </a:solidFill>
@@ -4431,20 +4559,20 @@
               </a:rPr>
               <a:t>Risks, Failure Modes, and Guardrails</a:t>
             </a:r>
-            <a:endParaRPr lang="en-US" sz="2700" dirty="0"/>
-          </a:p>
-        </p:txBody>
-      </p:sp>
-      <p:sp>
-        <p:nvSpPr>
-          <p:cNvPr id="10" name="Text 8"/>
-          <p:cNvSpPr/>
-          <p:nvPr/>
-        </p:nvSpPr>
-        <p:spPr>
-          <a:xfrm>
-            <a:off x="868680" y="1417320"/>
-            <a:ext cx="6675120" cy="4434840"/>
+            <a:endParaRPr lang="en-US" sz="3400" dirty="0"/>
+          </a:p>
+        </p:txBody>
+      </p:sp>
+      <p:sp>
+        <p:nvSpPr>
+          <p:cNvPr id="11" name="Text 9"/>
+          <p:cNvSpPr/>
+          <p:nvPr/>
+        </p:nvSpPr>
+        <p:spPr>
+          <a:xfrm>
+            <a:off x="868680" y="1508760"/>
+            <a:ext cx="6537960" cy="4160520"/>
           </a:xfrm>
           <a:prstGeom prst="rect">
             <a:avLst/>
@@ -4459,7 +4587,7 @@
           <a:lstStyle/>
           <a:p>
             <a:r>
-              <a:rPr lang="en-US" sz="1700" dirty="0">
+              <a:rPr lang="en-US" sz="2100" dirty="0">
                 <a:solidFill>
                   <a:srgbClr val="17364A"/>
                 </a:solidFill>
@@ -4469,11 +4597,11 @@
               </a:rPr>
               <a:t>Geocoding bias.</a:t>
             </a:r>
-            <a:endParaRPr lang="en-US" sz="1700" dirty="0"/>
-          </a:p>
-          <a:p>
-            <a:r>
-              <a:rPr lang="en-US" sz="1700" dirty="0">
+            <a:endParaRPr lang="en-US" sz="2100" dirty="0"/>
+          </a:p>
+          <a:p>
+            <a:r>
+              <a:rPr lang="en-US" sz="2100" dirty="0">
                 <a:solidFill>
                   <a:srgbClr val="17364A"/>
                 </a:solidFill>
@@ -4483,11 +4611,11 @@
               </a:rPr>
               <a:t>Some populations and locations are harder to geocode accurately.</a:t>
             </a:r>
-            <a:endParaRPr lang="en-US" sz="1700" dirty="0"/>
-          </a:p>
-          <a:p>
-            <a:r>
-              <a:rPr lang="en-US" sz="1700" dirty="0">
+            <a:endParaRPr lang="en-US" sz="2100" dirty="0"/>
+          </a:p>
+          <a:p>
+            <a:r>
+              <a:rPr lang="en-US" sz="2100" dirty="0">
                 <a:solidFill>
                   <a:srgbClr val="17364A"/>
                 </a:solidFill>
@@ -4495,29 +4623,15 @@
                 <a:ea typeface="Aptos" pitchFamily="34" charset="-122"/>
                 <a:cs typeface="Aptos" pitchFamily="34" charset="-120"/>
               </a:rPr>
-              <a:t>Guardrails include geocoding quality checks, manual review for unmatched records, and documentation of missingness.</a:t>
-            </a:r>
-            <a:endParaRPr lang="en-US" sz="1700" dirty="0"/>
-          </a:p>
-          <a:p>
-            <a:r>
-              <a:rPr lang="en-US" sz="1700" dirty="0">
-                <a:solidFill>
-                  <a:srgbClr val="17364A"/>
-                </a:solidFill>
-                <a:latin typeface="Aptos" pitchFamily="34" charset="0"/>
-                <a:ea typeface="Aptos" pitchFamily="34" charset="-122"/>
-                <a:cs typeface="Aptos" pitchFamily="34" charset="-120"/>
-              </a:rPr>
-              <a:t>Small-area privacy risk.</a:t>
-            </a:r>
-            <a:endParaRPr lang="en-US" sz="1700" dirty="0"/>
-          </a:p>
-        </p:txBody>
-      </p:sp>
-      <p:sp>
-        <p:nvSpPr>
-          <p:cNvPr id="11" name="Shape 9"/>
+              <a:t>Guardrails include geocoding quality checks, manual review for unmatched records, and documentation of.</a:t>
+            </a:r>
+            <a:endParaRPr lang="en-US" sz="2100" dirty="0"/>
+          </a:p>
+        </p:txBody>
+      </p:sp>
+      <p:sp>
+        <p:nvSpPr>
+          <p:cNvPr id="12" name="Shape 10"/>
           <p:cNvSpPr/>
           <p:nvPr/>
         </p:nvSpPr>
@@ -4544,14 +4658,14 @@
       </p:sp>
       <p:sp>
         <p:nvSpPr>
-          <p:cNvPr id="12" name="Text 10"/>
+          <p:cNvPr id="13" name="Text 11"/>
           <p:cNvSpPr/>
           <p:nvPr/>
         </p:nvSpPr>
         <p:spPr>
           <a:xfrm>
             <a:off x="8074152" y="1563624"/>
-            <a:ext cx="2825496" cy="201168"/>
+            <a:ext cx="2825496" cy="256032"/>
           </a:xfrm>
           <a:prstGeom prst="rect">
             <a:avLst/>
@@ -4567,7 +4681,7 @@
               <a:buNone/>
             </a:pPr>
             <a:r>
-              <a:rPr lang="en-US" sz="950" b="1" dirty="0">
+              <a:rPr lang="en-US" sz="1300" b="1" dirty="0">
                 <a:solidFill>
                   <a:srgbClr val="0068B7"/>
                 </a:solidFill>
@@ -4577,20 +4691,20 @@
               </a:rPr>
               <a:t>Key idea</a:t>
             </a:r>
-            <a:endParaRPr lang="en-US" sz="950" dirty="0"/>
-          </a:p>
-        </p:txBody>
-      </p:sp>
-      <p:sp>
-        <p:nvSpPr>
-          <p:cNvPr id="13" name="Text 11"/>
-          <p:cNvSpPr/>
-          <p:nvPr/>
-        </p:nvSpPr>
-        <p:spPr>
-          <a:xfrm>
-            <a:off x="8074152" y="1856232"/>
-            <a:ext cx="2825496" cy="1261872"/>
+            <a:endParaRPr lang="en-US" sz="1300" dirty="0"/>
+          </a:p>
+        </p:txBody>
+      </p:sp>
+      <p:sp>
+        <p:nvSpPr>
+          <p:cNvPr id="14" name="Text 12"/>
+          <p:cNvSpPr/>
+          <p:nvPr/>
+        </p:nvSpPr>
+        <p:spPr>
+          <a:xfrm>
+            <a:off x="8074152" y="1920240"/>
+            <a:ext cx="2825496" cy="1188720"/>
           </a:xfrm>
           <a:prstGeom prst="rect">
             <a:avLst/>
@@ -4608,7 +4722,7 @@
               <a:buNone/>
             </a:pPr>
             <a:r>
-              <a:rPr lang="en-US" sz="1250" dirty="0">
+              <a:rPr lang="en-US" sz="1550" dirty="0">
                 <a:solidFill>
                   <a:srgbClr val="17364A"/>
                 </a:solidFill>
@@ -4618,13 +4732,13 @@
               </a:rPr>
               <a:t>Geocoding bias.</a:t>
             </a:r>
-            <a:endParaRPr lang="en-US" sz="1250" dirty="0"/>
-          </a:p>
-        </p:txBody>
-      </p:sp>
-      <p:sp>
-        <p:nvSpPr>
-          <p:cNvPr id="14" name="Shape 12"/>
+            <a:endParaRPr lang="en-US" sz="1550" dirty="0"/>
+          </a:p>
+        </p:txBody>
+      </p:sp>
+      <p:sp>
+        <p:nvSpPr>
+          <p:cNvPr id="15" name="Shape 13"/>
           <p:cNvSpPr/>
           <p:nvPr/>
         </p:nvSpPr>
@@ -4651,14 +4765,14 @@
       </p:sp>
       <p:sp>
         <p:nvSpPr>
-          <p:cNvPr id="15" name="Text 13"/>
+          <p:cNvPr id="16" name="Text 14"/>
           <p:cNvSpPr/>
           <p:nvPr/>
         </p:nvSpPr>
         <p:spPr>
           <a:xfrm>
             <a:off x="8074152" y="3666744"/>
-            <a:ext cx="2825496" cy="201168"/>
+            <a:ext cx="2825496" cy="256032"/>
           </a:xfrm>
           <a:prstGeom prst="rect">
             <a:avLst/>
@@ -4674,7 +4788,7 @@
               <a:buNone/>
             </a:pPr>
             <a:r>
-              <a:rPr lang="en-US" sz="950" b="1" dirty="0">
+              <a:rPr lang="en-US" sz="1300" b="1" dirty="0">
                 <a:solidFill>
                   <a:srgbClr val="0068B7"/>
                 </a:solidFill>
@@ -4684,20 +4798,20 @@
               </a:rPr>
               <a:t>Use this for</a:t>
             </a:r>
-            <a:endParaRPr lang="en-US" sz="950" dirty="0"/>
-          </a:p>
-        </p:txBody>
-      </p:sp>
-      <p:sp>
-        <p:nvSpPr>
-          <p:cNvPr id="16" name="Text 14"/>
-          <p:cNvSpPr/>
-          <p:nvPr/>
-        </p:nvSpPr>
-        <p:spPr>
-          <a:xfrm>
-            <a:off x="8074152" y="3959352"/>
-            <a:ext cx="2825496" cy="1170432"/>
+            <a:endParaRPr lang="en-US" sz="1300" dirty="0"/>
+          </a:p>
+        </p:txBody>
+      </p:sp>
+      <p:sp>
+        <p:nvSpPr>
+          <p:cNvPr id="17" name="Text 15"/>
+          <p:cNvSpPr/>
+          <p:nvPr/>
+        </p:nvSpPr>
+        <p:spPr>
+          <a:xfrm>
+            <a:off x="8074152" y="4023360"/>
+            <a:ext cx="2825496" cy="1097280"/>
           </a:xfrm>
           <a:prstGeom prst="rect">
             <a:avLst/>
@@ -4715,7 +4829,7 @@
               <a:buNone/>
             </a:pPr>
             <a:r>
-              <a:rPr lang="en-US" sz="1250" dirty="0">
+              <a:rPr lang="en-US" sz="1550" dirty="0">
                 <a:solidFill>
                   <a:srgbClr val="17364A"/>
                 </a:solidFill>
@@ -4725,7 +4839,7 @@
               </a:rPr>
               <a:t>Connect the concept to public health decisions, safeguards, documentation, or implementation work.</a:t>
             </a:r>
-            <a:endParaRPr lang="en-US" sz="1250" dirty="0"/>
+            <a:endParaRPr lang="en-US" sz="1550" dirty="0"/>
           </a:p>
         </p:txBody>
       </p:sp>
@@ -4922,7 +5036,7 @@
                 <a:ea typeface="Aptos" pitchFamily="34" charset="-122"/>
                 <a:cs typeface="Aptos" pitchFamily="34" charset="-120"/>
               </a:rPr>
-              <a:t>© Paula Soper</a:t>
+              <a:t>Â© Paula Soper</a:t>
             </a:r>
             <a:endParaRPr lang="en-US" sz="800" dirty="0"/>
           </a:p>
@@ -4936,8 +5050,47 @@
         </p:nvSpPr>
         <p:spPr>
           <a:xfrm>
+            <a:off x="11137392" y="6510528"/>
+            <a:ext cx="411480" cy="201168"/>
+          </a:xfrm>
+          <a:prstGeom prst="rect">
+            <a:avLst/>
+          </a:prstGeom>
+          <a:noFill/>
+          <a:ln/>
+        </p:spPr>
+        <p:txBody>
+          <a:bodyPr wrap="square" lIns="0" tIns="0" rIns="0" bIns="0" rtlCol="0" anchor="ctr"/>
+          <a:lstStyle/>
+          <a:p>
+            <a:pPr algn="r" indent="0" marL="0">
+              <a:buNone/>
+            </a:pPr>
+            <a:r>
+              <a:rPr lang="en-US" sz="900" dirty="0">
+                <a:solidFill>
+                  <a:srgbClr val="5F7181"/>
+                </a:solidFill>
+                <a:latin typeface="Aptos" pitchFamily="34" charset="0"/>
+                <a:ea typeface="Aptos" pitchFamily="34" charset="-122"/>
+                <a:cs typeface="Aptos" pitchFamily="34" charset="-120"/>
+              </a:rPr>
+              <a:t>13</a:t>
+            </a:r>
+            <a:endParaRPr lang="en-US" sz="900" dirty="0"/>
+          </a:p>
+        </p:txBody>
+      </p:sp>
+      <p:sp>
+        <p:nvSpPr>
+          <p:cNvPr id="8" name="Text 6"/>
+          <p:cNvSpPr/>
+          <p:nvPr/>
+        </p:nvSpPr>
+        <p:spPr>
+          <a:xfrm>
             <a:off x="640080" y="658368"/>
-            <a:ext cx="10881360" cy="566928"/>
+            <a:ext cx="10881360" cy="713232"/>
           </a:xfrm>
           <a:prstGeom prst="rect">
             <a:avLst/>
@@ -4955,7 +5108,7 @@
               <a:buNone/>
             </a:pPr>
             <a:r>
-              <a:rPr lang="en-US" sz="2700" b="1" dirty="0">
+              <a:rPr lang="en-US" sz="3400" b="1" dirty="0">
                 <a:solidFill>
                   <a:srgbClr val="003A63"/>
                 </a:solidFill>
@@ -4965,20 +5118,20 @@
               </a:rPr>
               <a:t>Risks, Failure Modes, and Guardrails Continued</a:t>
             </a:r>
-            <a:endParaRPr lang="en-US" sz="2700" dirty="0"/>
-          </a:p>
-        </p:txBody>
-      </p:sp>
-      <p:sp>
-        <p:nvSpPr>
-          <p:cNvPr id="8" name="Text 6"/>
-          <p:cNvSpPr/>
-          <p:nvPr/>
-        </p:nvSpPr>
-        <p:spPr>
-          <a:xfrm>
-            <a:off x="868680" y="1417320"/>
-            <a:ext cx="6675120" cy="4434840"/>
+            <a:endParaRPr lang="en-US" sz="3400" dirty="0"/>
+          </a:p>
+        </p:txBody>
+      </p:sp>
+      <p:sp>
+        <p:nvSpPr>
+          <p:cNvPr id="9" name="Text 7"/>
+          <p:cNvSpPr/>
+          <p:nvPr/>
+        </p:nvSpPr>
+        <p:spPr>
+          <a:xfrm>
+            <a:off x="868680" y="1508760"/>
+            <a:ext cx="6537960" cy="4160520"/>
           </a:xfrm>
           <a:prstGeom prst="rect">
             <a:avLst/>
@@ -4993,7 +5146,7 @@
           <a:lstStyle/>
           <a:p>
             <a:r>
-              <a:rPr lang="en-US" sz="1700" dirty="0">
+              <a:rPr lang="en-US" sz="2100" dirty="0">
                 <a:solidFill>
                   <a:srgbClr val="17364A"/>
                 </a:solidFill>
@@ -5003,11 +5156,11 @@
               </a:rPr>
               <a:t>Stigmatizing communities.</a:t>
             </a:r>
-            <a:endParaRPr lang="en-US" sz="1700" dirty="0"/>
-          </a:p>
-          <a:p>
-            <a:r>
-              <a:rPr lang="en-US" sz="1700" dirty="0">
+            <a:endParaRPr lang="en-US" sz="2100" dirty="0"/>
+          </a:p>
+          <a:p>
+            <a:r>
+              <a:rPr lang="en-US" sz="2100" dirty="0">
                 <a:solidFill>
                   <a:srgbClr val="17364A"/>
                 </a:solidFill>
@@ -5017,11 +5170,11 @@
               </a:rPr>
               <a:t>Maps can unintentionally label communities as problems.</a:t>
             </a:r>
-            <a:endParaRPr lang="en-US" sz="1700" dirty="0"/>
-          </a:p>
-          <a:p>
-            <a:r>
-              <a:rPr lang="en-US" sz="1700" dirty="0">
+            <a:endParaRPr lang="en-US" sz="2100" dirty="0"/>
+          </a:p>
+          <a:p>
+            <a:r>
+              <a:rPr lang="en-US" sz="2100" dirty="0">
                 <a:solidFill>
                   <a:srgbClr val="17364A"/>
                 </a:solidFill>
@@ -5029,15 +5182,15 @@
                 <a:ea typeface="Aptos" pitchFamily="34" charset="-122"/>
                 <a:cs typeface="Aptos" pitchFamily="34" charset="-120"/>
               </a:rPr>
-              <a:t>Guardrails include equity framing, community engagement, careful language, and focus on structural supports.</a:t>
-            </a:r>
-            <a:endParaRPr lang="en-US" sz="1700" dirty="0"/>
-          </a:p>
-        </p:txBody>
-      </p:sp>
-      <p:sp>
-        <p:nvSpPr>
-          <p:cNvPr id="9" name="Shape 7"/>
+              <a:t>Guardrails include equity framing, community engagement, careful language, and focus on structural.</a:t>
+            </a:r>
+            <a:endParaRPr lang="en-US" sz="2100" dirty="0"/>
+          </a:p>
+        </p:txBody>
+      </p:sp>
+      <p:sp>
+        <p:nvSpPr>
+          <p:cNvPr id="10" name="Shape 8"/>
           <p:cNvSpPr/>
           <p:nvPr/>
         </p:nvSpPr>
@@ -5064,14 +5217,14 @@
       </p:sp>
       <p:sp>
         <p:nvSpPr>
-          <p:cNvPr id="10" name="Text 8"/>
+          <p:cNvPr id="11" name="Text 9"/>
           <p:cNvSpPr/>
           <p:nvPr/>
         </p:nvSpPr>
         <p:spPr>
           <a:xfrm>
             <a:off x="8074152" y="1563624"/>
-            <a:ext cx="2825496" cy="201168"/>
+            <a:ext cx="2825496" cy="256032"/>
           </a:xfrm>
           <a:prstGeom prst="rect">
             <a:avLst/>
@@ -5087,7 +5240,7 @@
               <a:buNone/>
             </a:pPr>
             <a:r>
-              <a:rPr lang="en-US" sz="950" b="1" dirty="0">
+              <a:rPr lang="en-US" sz="1300" b="1" dirty="0">
                 <a:solidFill>
                   <a:srgbClr val="0068B7"/>
                 </a:solidFill>
@@ -5097,20 +5250,20 @@
               </a:rPr>
               <a:t>Key idea</a:t>
             </a:r>
-            <a:endParaRPr lang="en-US" sz="950" dirty="0"/>
-          </a:p>
-        </p:txBody>
-      </p:sp>
-      <p:sp>
-        <p:nvSpPr>
-          <p:cNvPr id="11" name="Text 9"/>
-          <p:cNvSpPr/>
-          <p:nvPr/>
-        </p:nvSpPr>
-        <p:spPr>
-          <a:xfrm>
-            <a:off x="8074152" y="1856232"/>
-            <a:ext cx="2825496" cy="1261872"/>
+            <a:endParaRPr lang="en-US" sz="1300" dirty="0"/>
+          </a:p>
+        </p:txBody>
+      </p:sp>
+      <p:sp>
+        <p:nvSpPr>
+          <p:cNvPr id="12" name="Text 10"/>
+          <p:cNvSpPr/>
+          <p:nvPr/>
+        </p:nvSpPr>
+        <p:spPr>
+          <a:xfrm>
+            <a:off x="8074152" y="1920240"/>
+            <a:ext cx="2825496" cy="1188720"/>
           </a:xfrm>
           <a:prstGeom prst="rect">
             <a:avLst/>
@@ -5128,7 +5281,7 @@
               <a:buNone/>
             </a:pPr>
             <a:r>
-              <a:rPr lang="en-US" sz="1250" dirty="0">
+              <a:rPr lang="en-US" sz="1550" dirty="0">
                 <a:solidFill>
                   <a:srgbClr val="17364A"/>
                 </a:solidFill>
@@ -5138,13 +5291,13 @@
               </a:rPr>
               <a:t>Stigmatizing communities.</a:t>
             </a:r>
-            <a:endParaRPr lang="en-US" sz="1250" dirty="0"/>
-          </a:p>
-        </p:txBody>
-      </p:sp>
-      <p:sp>
-        <p:nvSpPr>
-          <p:cNvPr id="12" name="Shape 10"/>
+            <a:endParaRPr lang="en-US" sz="1550" dirty="0"/>
+          </a:p>
+        </p:txBody>
+      </p:sp>
+      <p:sp>
+        <p:nvSpPr>
+          <p:cNvPr id="13" name="Shape 11"/>
           <p:cNvSpPr/>
           <p:nvPr/>
         </p:nvSpPr>
@@ -5171,14 +5324,14 @@
       </p:sp>
       <p:sp>
         <p:nvSpPr>
-          <p:cNvPr id="13" name="Text 11"/>
+          <p:cNvPr id="14" name="Text 12"/>
           <p:cNvSpPr/>
           <p:nvPr/>
         </p:nvSpPr>
         <p:spPr>
           <a:xfrm>
             <a:off x="8074152" y="3666744"/>
-            <a:ext cx="2825496" cy="201168"/>
+            <a:ext cx="2825496" cy="256032"/>
           </a:xfrm>
           <a:prstGeom prst="rect">
             <a:avLst/>
@@ -5194,7 +5347,7 @@
               <a:buNone/>
             </a:pPr>
             <a:r>
-              <a:rPr lang="en-US" sz="950" b="1" dirty="0">
+              <a:rPr lang="en-US" sz="1300" b="1" dirty="0">
                 <a:solidFill>
                   <a:srgbClr val="0068B7"/>
                 </a:solidFill>
@@ -5204,20 +5357,20 @@
               </a:rPr>
               <a:t>Use this for</a:t>
             </a:r>
-            <a:endParaRPr lang="en-US" sz="950" dirty="0"/>
-          </a:p>
-        </p:txBody>
-      </p:sp>
-      <p:sp>
-        <p:nvSpPr>
-          <p:cNvPr id="14" name="Text 12"/>
-          <p:cNvSpPr/>
-          <p:nvPr/>
-        </p:nvSpPr>
-        <p:spPr>
-          <a:xfrm>
-            <a:off x="8074152" y="3959352"/>
-            <a:ext cx="2825496" cy="1170432"/>
+            <a:endParaRPr lang="en-US" sz="1300" dirty="0"/>
+          </a:p>
+        </p:txBody>
+      </p:sp>
+      <p:sp>
+        <p:nvSpPr>
+          <p:cNvPr id="15" name="Text 13"/>
+          <p:cNvSpPr/>
+          <p:nvPr/>
+        </p:nvSpPr>
+        <p:spPr>
+          <a:xfrm>
+            <a:off x="8074152" y="4023360"/>
+            <a:ext cx="2825496" cy="1097280"/>
           </a:xfrm>
           <a:prstGeom prst="rect">
             <a:avLst/>
@@ -5235,7 +5388,7 @@
               <a:buNone/>
             </a:pPr>
             <a:r>
-              <a:rPr lang="en-US" sz="1250" dirty="0">
+              <a:rPr lang="en-US" sz="1550" dirty="0">
                 <a:solidFill>
                   <a:srgbClr val="17364A"/>
                 </a:solidFill>
@@ -5245,7 +5398,7 @@
               </a:rPr>
               <a:t>Connect the concept to public health decisions, safeguards, documentation, or implementation work.</a:t>
             </a:r>
-            <a:endParaRPr lang="en-US" sz="1250" dirty="0"/>
+            <a:endParaRPr lang="en-US" sz="1550" dirty="0"/>
           </a:p>
         </p:txBody>
       </p:sp>
@@ -5442,7 +5595,7 @@
                 <a:ea typeface="Aptos" pitchFamily="34" charset="-122"/>
                 <a:cs typeface="Aptos" pitchFamily="34" charset="-120"/>
               </a:rPr>
-              <a:t>© Paula Soper</a:t>
+              <a:t>Â© Paula Soper</a:t>
             </a:r>
             <a:endParaRPr lang="en-US" sz="800" dirty="0"/>
           </a:p>
@@ -5450,7 +5603,46 @@
       </p:sp>
       <p:sp>
         <p:nvSpPr>
-          <p:cNvPr id="7" name="Shape 5"/>
+          <p:cNvPr id="7" name="Text 5"/>
+          <p:cNvSpPr/>
+          <p:nvPr/>
+        </p:nvSpPr>
+        <p:spPr>
+          <a:xfrm>
+            <a:off x="11137392" y="6510528"/>
+            <a:ext cx="411480" cy="201168"/>
+          </a:xfrm>
+          <a:prstGeom prst="rect">
+            <a:avLst/>
+          </a:prstGeom>
+          <a:noFill/>
+          <a:ln/>
+        </p:spPr>
+        <p:txBody>
+          <a:bodyPr wrap="square" lIns="0" tIns="0" rIns="0" bIns="0" rtlCol="0" anchor="ctr"/>
+          <a:lstStyle/>
+          <a:p>
+            <a:pPr algn="r" indent="0" marL="0">
+              <a:buNone/>
+            </a:pPr>
+            <a:r>
+              <a:rPr lang="en-US" sz="900" dirty="0">
+                <a:solidFill>
+                  <a:srgbClr val="5F7181"/>
+                </a:solidFill>
+                <a:latin typeface="Aptos" pitchFamily="34" charset="0"/>
+                <a:ea typeface="Aptos" pitchFamily="34" charset="-122"/>
+                <a:cs typeface="Aptos" pitchFamily="34" charset="-120"/>
+              </a:rPr>
+              <a:t>14</a:t>
+            </a:r>
+            <a:endParaRPr lang="en-US" sz="900" dirty="0"/>
+          </a:p>
+        </p:txBody>
+      </p:sp>
+      <p:sp>
+        <p:nvSpPr>
+          <p:cNvPr id="8" name="Shape 6"/>
           <p:cNvSpPr/>
           <p:nvPr/>
         </p:nvSpPr>
@@ -5475,7 +5667,7 @@
       </p:sp>
       <p:sp>
         <p:nvSpPr>
-          <p:cNvPr id="8" name="Text 6"/>
+          <p:cNvPr id="9" name="Text 7"/>
           <p:cNvSpPr/>
           <p:nvPr/>
         </p:nvSpPr>
@@ -5514,14 +5706,14 @@
       </p:sp>
       <p:sp>
         <p:nvSpPr>
-          <p:cNvPr id="9" name="Text 7"/>
+          <p:cNvPr id="10" name="Text 8"/>
           <p:cNvSpPr/>
           <p:nvPr/>
         </p:nvSpPr>
         <p:spPr>
           <a:xfrm>
             <a:off x="640080" y="621792"/>
-            <a:ext cx="10881360" cy="566928"/>
+            <a:ext cx="10881360" cy="713232"/>
           </a:xfrm>
           <a:prstGeom prst="rect">
             <a:avLst/>
@@ -5539,7 +5731,7 @@
               <a:buNone/>
             </a:pPr>
             <a:r>
-              <a:rPr lang="en-US" sz="2700" b="1" dirty="0">
+              <a:rPr lang="en-US" sz="3400" b="1" dirty="0">
                 <a:solidFill>
                   <a:srgbClr val="003A63"/>
                 </a:solidFill>
@@ -5549,20 +5741,20 @@
               </a:rPr>
               <a:t>Application to AI-Supported Workflows</a:t>
             </a:r>
-            <a:endParaRPr lang="en-US" sz="2700" dirty="0"/>
-          </a:p>
-        </p:txBody>
-      </p:sp>
-      <p:sp>
-        <p:nvSpPr>
-          <p:cNvPr id="10" name="Text 8"/>
-          <p:cNvSpPr/>
-          <p:nvPr/>
-        </p:nvSpPr>
-        <p:spPr>
-          <a:xfrm>
-            <a:off x="868680" y="1417320"/>
-            <a:ext cx="6675120" cy="4434840"/>
+            <a:endParaRPr lang="en-US" sz="3400" dirty="0"/>
+          </a:p>
+        </p:txBody>
+      </p:sp>
+      <p:sp>
+        <p:nvSpPr>
+          <p:cNvPr id="11" name="Text 9"/>
+          <p:cNvSpPr/>
+          <p:nvPr/>
+        </p:nvSpPr>
+        <p:spPr>
+          <a:xfrm>
+            <a:off x="868680" y="1508760"/>
+            <a:ext cx="6537960" cy="4160520"/>
           </a:xfrm>
           <a:prstGeom prst="rect">
             <a:avLst/>
@@ -5577,7 +5769,7 @@
           <a:lstStyle/>
           <a:p>
             <a:r>
-              <a:rPr lang="en-US" sz="1700" dirty="0">
+              <a:rPr lang="en-US" sz="2100" dirty="0">
                 <a:solidFill>
                   <a:srgbClr val="17364A"/>
                 </a:solidFill>
@@ -5585,13 +5777,13 @@
                 <a:ea typeface="Aptos" pitchFamily="34" charset="-122"/>
                 <a:cs typeface="Aptos" pitchFamily="34" charset="-120"/>
               </a:rPr>
-              <a:t>Geospatial AI may support predictive analytics, emergency response, inspection prioritization, environmental monitoring,.</a:t>
-            </a:r>
-            <a:endParaRPr lang="en-US" sz="1700" dirty="0"/>
-          </a:p>
-          <a:p>
-            <a:r>
-              <a:rPr lang="en-US" sz="1700" dirty="0">
+              <a:t>Geospatial AI may support predictive analytics, emergency response, inspection prioritization,.</a:t>
+            </a:r>
+            <a:endParaRPr lang="en-US" sz="2100" dirty="0"/>
+          </a:p>
+          <a:p>
+            <a:r>
+              <a:rPr lang="en-US" sz="2100" dirty="0">
                 <a:solidFill>
                   <a:srgbClr val="17364A"/>
                 </a:solidFill>
@@ -5599,13 +5791,13 @@
                 <a:ea typeface="Aptos" pitchFamily="34" charset="-122"/>
                 <a:cs typeface="Aptos" pitchFamily="34" charset="-120"/>
               </a:rPr>
-              <a:t>Generative AI may summarize spatial patterns for leaders, but it must not overstate certainty or ignore limitations.</a:t>
-            </a:r>
-            <a:endParaRPr lang="en-US" sz="1700" dirty="0"/>
-          </a:p>
-          <a:p>
-            <a:r>
-              <a:rPr lang="en-US" sz="1700" dirty="0">
+              <a:t>Generative AI may summarize spatial patterns for leaders, but it must not overstate certainty or ignore.</a:t>
+            </a:r>
+            <a:endParaRPr lang="en-US" sz="2100" dirty="0"/>
+          </a:p>
+          <a:p>
+            <a:r>
+              <a:rPr lang="en-US" sz="2100" dirty="0">
                 <a:solidFill>
                   <a:srgbClr val="17364A"/>
                 </a:solidFill>
@@ -5613,29 +5805,15 @@
                 <a:ea typeface="Aptos" pitchFamily="34" charset="-122"/>
                 <a:cs typeface="Aptos" pitchFamily="34" charset="-120"/>
               </a:rPr>
-              <a:t>RAG tools may retrieve local plans, maps, and protocols, while agentic workflows may propose outreach routes or inspection.</a:t>
-            </a:r>
-            <a:endParaRPr lang="en-US" sz="1700" dirty="0"/>
-          </a:p>
-          <a:p>
-            <a:r>
-              <a:rPr lang="en-US" sz="1700" dirty="0">
-                <a:solidFill>
-                  <a:srgbClr val="17364A"/>
-                </a:solidFill>
-                <a:latin typeface="Aptos" pitchFamily="34" charset="0"/>
-                <a:ea typeface="Aptos" pitchFamily="34" charset="-122"/>
-                <a:cs typeface="Aptos" pitchFamily="34" charset="-120"/>
-              </a:rPr>
-              <a:t>The responsible application of geospatial AI requires explicit attention to privacy, geography, and equity.</a:t>
-            </a:r>
-            <a:endParaRPr lang="en-US" sz="1700" dirty="0"/>
-          </a:p>
-        </p:txBody>
-      </p:sp>
-      <p:sp>
-        <p:nvSpPr>
-          <p:cNvPr id="11" name="Shape 9"/>
+              <a:t>RAG tools may retrieve local plans, maps, and protocols, while agentic workflows may propose outreach.</a:t>
+            </a:r>
+            <a:endParaRPr lang="en-US" sz="2100" dirty="0"/>
+          </a:p>
+        </p:txBody>
+      </p:sp>
+      <p:sp>
+        <p:nvSpPr>
+          <p:cNvPr id="12" name="Shape 10"/>
           <p:cNvSpPr/>
           <p:nvPr/>
         </p:nvSpPr>
@@ -5662,14 +5840,14 @@
       </p:sp>
       <p:sp>
         <p:nvSpPr>
-          <p:cNvPr id="12" name="Text 10"/>
+          <p:cNvPr id="13" name="Text 11"/>
           <p:cNvSpPr/>
           <p:nvPr/>
         </p:nvSpPr>
         <p:spPr>
           <a:xfrm>
             <a:off x="8074152" y="1563624"/>
-            <a:ext cx="2825496" cy="201168"/>
+            <a:ext cx="2825496" cy="256032"/>
           </a:xfrm>
           <a:prstGeom prst="rect">
             <a:avLst/>
@@ -5685,7 +5863,7 @@
               <a:buNone/>
             </a:pPr>
             <a:r>
-              <a:rPr lang="en-US" sz="950" b="1" dirty="0">
+              <a:rPr lang="en-US" sz="1300" b="1" dirty="0">
                 <a:solidFill>
                   <a:srgbClr val="0068B7"/>
                 </a:solidFill>
@@ -5695,20 +5873,20 @@
               </a:rPr>
               <a:t>Key idea</a:t>
             </a:r>
-            <a:endParaRPr lang="en-US" sz="950" dirty="0"/>
-          </a:p>
-        </p:txBody>
-      </p:sp>
-      <p:sp>
-        <p:nvSpPr>
-          <p:cNvPr id="13" name="Text 11"/>
-          <p:cNvSpPr/>
-          <p:nvPr/>
-        </p:nvSpPr>
-        <p:spPr>
-          <a:xfrm>
-            <a:off x="8074152" y="1856232"/>
-            <a:ext cx="2825496" cy="1261872"/>
+            <a:endParaRPr lang="en-US" sz="1300" dirty="0"/>
+          </a:p>
+        </p:txBody>
+      </p:sp>
+      <p:sp>
+        <p:nvSpPr>
+          <p:cNvPr id="14" name="Text 12"/>
+          <p:cNvSpPr/>
+          <p:nvPr/>
+        </p:nvSpPr>
+        <p:spPr>
+          <a:xfrm>
+            <a:off x="8074152" y="1920240"/>
+            <a:ext cx="2825496" cy="1188720"/>
           </a:xfrm>
           <a:prstGeom prst="rect">
             <a:avLst/>
@@ -5726,7 +5904,7 @@
               <a:buNone/>
             </a:pPr>
             <a:r>
-              <a:rPr lang="en-US" sz="1250" dirty="0">
+              <a:rPr lang="en-US" sz="1550" dirty="0">
                 <a:solidFill>
                   <a:srgbClr val="17364A"/>
                 </a:solidFill>
@@ -5734,15 +5912,15 @@
                 <a:ea typeface="Aptos" pitchFamily="34" charset="-122"/>
                 <a:cs typeface="Aptos" pitchFamily="34" charset="-120"/>
               </a:rPr>
-              <a:t>Geospatial AI may support predictive analytics, emergency response, inspection prioritization, environmental monitoring,.</a:t>
-            </a:r>
-            <a:endParaRPr lang="en-US" sz="1250" dirty="0"/>
-          </a:p>
-        </p:txBody>
-      </p:sp>
-      <p:sp>
-        <p:nvSpPr>
-          <p:cNvPr id="14" name="Shape 12"/>
+              <a:t>Geospatial AI may support predictive analytics, emergency response, inspection prioritization,.</a:t>
+            </a:r>
+            <a:endParaRPr lang="en-US" sz="1550" dirty="0"/>
+          </a:p>
+        </p:txBody>
+      </p:sp>
+      <p:sp>
+        <p:nvSpPr>
+          <p:cNvPr id="15" name="Shape 13"/>
           <p:cNvSpPr/>
           <p:nvPr/>
         </p:nvSpPr>
@@ -5769,14 +5947,14 @@
       </p:sp>
       <p:sp>
         <p:nvSpPr>
-          <p:cNvPr id="15" name="Text 13"/>
+          <p:cNvPr id="16" name="Text 14"/>
           <p:cNvSpPr/>
           <p:nvPr/>
         </p:nvSpPr>
         <p:spPr>
           <a:xfrm>
             <a:off x="8074152" y="3666744"/>
-            <a:ext cx="2825496" cy="201168"/>
+            <a:ext cx="2825496" cy="256032"/>
           </a:xfrm>
           <a:prstGeom prst="rect">
             <a:avLst/>
@@ -5792,7 +5970,7 @@
               <a:buNone/>
             </a:pPr>
             <a:r>
-              <a:rPr lang="en-US" sz="950" b="1" dirty="0">
+              <a:rPr lang="en-US" sz="1300" b="1" dirty="0">
                 <a:solidFill>
                   <a:srgbClr val="0068B7"/>
                 </a:solidFill>
@@ -5802,20 +5980,20 @@
               </a:rPr>
               <a:t>Use this for</a:t>
             </a:r>
-            <a:endParaRPr lang="en-US" sz="950" dirty="0"/>
-          </a:p>
-        </p:txBody>
-      </p:sp>
-      <p:sp>
-        <p:nvSpPr>
-          <p:cNvPr id="16" name="Text 14"/>
-          <p:cNvSpPr/>
-          <p:nvPr/>
-        </p:nvSpPr>
-        <p:spPr>
-          <a:xfrm>
-            <a:off x="8074152" y="3959352"/>
-            <a:ext cx="2825496" cy="1170432"/>
+            <a:endParaRPr lang="en-US" sz="1300" dirty="0"/>
+          </a:p>
+        </p:txBody>
+      </p:sp>
+      <p:sp>
+        <p:nvSpPr>
+          <p:cNvPr id="17" name="Text 15"/>
+          <p:cNvSpPr/>
+          <p:nvPr/>
+        </p:nvSpPr>
+        <p:spPr>
+          <a:xfrm>
+            <a:off x="8074152" y="4023360"/>
+            <a:ext cx="2825496" cy="1097280"/>
           </a:xfrm>
           <a:prstGeom prst="rect">
             <a:avLst/>
@@ -5833,7 +6011,7 @@
               <a:buNone/>
             </a:pPr>
             <a:r>
-              <a:rPr lang="en-US" sz="1250" dirty="0">
+              <a:rPr lang="en-US" sz="1550" dirty="0">
                 <a:solidFill>
                   <a:srgbClr val="17364A"/>
                 </a:solidFill>
@@ -5843,7 +6021,7 @@
               </a:rPr>
               <a:t>Connect the concept to public health decisions, safeguards, documentation, or implementation work.</a:t>
             </a:r>
-            <a:endParaRPr lang="en-US" sz="1250" dirty="0"/>
+            <a:endParaRPr lang="en-US" sz="1550" dirty="0"/>
           </a:p>
         </p:txBody>
       </p:sp>
@@ -6040,7 +6218,7 @@
                 <a:ea typeface="Aptos" pitchFamily="34" charset="-122"/>
                 <a:cs typeface="Aptos" pitchFamily="34" charset="-120"/>
               </a:rPr>
-              <a:t>© Paula Soper</a:t>
+              <a:t>Â© Paula Soper</a:t>
             </a:r>
             <a:endParaRPr lang="en-US" sz="800" dirty="0"/>
           </a:p>
@@ -6048,7 +6226,46 @@
       </p:sp>
       <p:sp>
         <p:nvSpPr>
-          <p:cNvPr id="7" name="Shape 5"/>
+          <p:cNvPr id="7" name="Text 5"/>
+          <p:cNvSpPr/>
+          <p:nvPr/>
+        </p:nvSpPr>
+        <p:spPr>
+          <a:xfrm>
+            <a:off x="11137392" y="6510528"/>
+            <a:ext cx="411480" cy="201168"/>
+          </a:xfrm>
+          <a:prstGeom prst="rect">
+            <a:avLst/>
+          </a:prstGeom>
+          <a:noFill/>
+          <a:ln/>
+        </p:spPr>
+        <p:txBody>
+          <a:bodyPr wrap="square" lIns="0" tIns="0" rIns="0" bIns="0" rtlCol="0" anchor="ctr"/>
+          <a:lstStyle/>
+          <a:p>
+            <a:pPr algn="r" indent="0" marL="0">
+              <a:buNone/>
+            </a:pPr>
+            <a:r>
+              <a:rPr lang="en-US" sz="900" dirty="0">
+                <a:solidFill>
+                  <a:srgbClr val="5F7181"/>
+                </a:solidFill>
+                <a:latin typeface="Aptos" pitchFamily="34" charset="0"/>
+                <a:ea typeface="Aptos" pitchFamily="34" charset="-122"/>
+                <a:cs typeface="Aptos" pitchFamily="34" charset="-120"/>
+              </a:rPr>
+              <a:t>15</a:t>
+            </a:r>
+            <a:endParaRPr lang="en-US" sz="900" dirty="0"/>
+          </a:p>
+        </p:txBody>
+      </p:sp>
+      <p:sp>
+        <p:nvSpPr>
+          <p:cNvPr id="8" name="Shape 6"/>
           <p:cNvSpPr/>
           <p:nvPr/>
         </p:nvSpPr>
@@ -6073,7 +6290,7 @@
       </p:sp>
       <p:sp>
         <p:nvSpPr>
-          <p:cNvPr id="8" name="Text 6"/>
+          <p:cNvPr id="9" name="Text 7"/>
           <p:cNvSpPr/>
           <p:nvPr/>
         </p:nvSpPr>
@@ -6112,14 +6329,14 @@
       </p:sp>
       <p:sp>
         <p:nvSpPr>
-          <p:cNvPr id="9" name="Text 7"/>
+          <p:cNvPr id="10" name="Text 8"/>
           <p:cNvSpPr/>
           <p:nvPr/>
         </p:nvSpPr>
         <p:spPr>
           <a:xfrm>
             <a:off x="640080" y="621792"/>
-            <a:ext cx="10881360" cy="566928"/>
+            <a:ext cx="10881360" cy="713232"/>
           </a:xfrm>
           <a:prstGeom prst="rect">
             <a:avLst/>
@@ -6137,7 +6354,7 @@
               <a:buNone/>
             </a:pPr>
             <a:r>
-              <a:rPr lang="en-US" sz="2700" b="1" dirty="0">
+              <a:rPr lang="en-US" sz="3400" b="1" dirty="0">
                 <a:solidFill>
                   <a:srgbClr val="003A63"/>
                 </a:solidFill>
@@ -6147,20 +6364,20 @@
               </a:rPr>
               <a:t>Reflection Questions</a:t>
             </a:r>
-            <a:endParaRPr lang="en-US" sz="2700" dirty="0"/>
-          </a:p>
-        </p:txBody>
-      </p:sp>
-      <p:sp>
-        <p:nvSpPr>
-          <p:cNvPr id="10" name="Text 8"/>
-          <p:cNvSpPr/>
-          <p:nvPr/>
-        </p:nvSpPr>
-        <p:spPr>
-          <a:xfrm>
-            <a:off x="868680" y="1417320"/>
-            <a:ext cx="6675120" cy="4434840"/>
+            <a:endParaRPr lang="en-US" sz="3400" dirty="0"/>
+          </a:p>
+        </p:txBody>
+      </p:sp>
+      <p:sp>
+        <p:nvSpPr>
+          <p:cNvPr id="11" name="Text 9"/>
+          <p:cNvSpPr/>
+          <p:nvPr/>
+        </p:nvSpPr>
+        <p:spPr>
+          <a:xfrm>
+            <a:off x="868680" y="1508760"/>
+            <a:ext cx="6537960" cy="4160520"/>
           </a:xfrm>
           <a:prstGeom prst="rect">
             <a:avLst/>
@@ -6175,7 +6392,7 @@
           <a:lstStyle/>
           <a:p>
             <a:r>
-              <a:rPr lang="en-US" sz="1700" dirty="0">
+              <a:rPr lang="en-US" sz="2100" dirty="0">
                 <a:solidFill>
                   <a:srgbClr val="17364A"/>
                 </a:solidFill>
@@ -6185,11 +6402,11 @@
               </a:rPr>
               <a:t>What location data are used, and how complete and accurate are they?</a:t>
             </a:r>
-            <a:endParaRPr lang="en-US" sz="1700" dirty="0"/>
-          </a:p>
-          <a:p>
-            <a:r>
-              <a:rPr lang="en-US" sz="1700" dirty="0">
+            <a:endParaRPr lang="en-US" sz="2100" dirty="0"/>
+          </a:p>
+          <a:p>
+            <a:r>
+              <a:rPr lang="en-US" sz="2100" dirty="0">
                 <a:solidFill>
                   <a:srgbClr val="17364A"/>
                 </a:solidFill>
@@ -6199,11 +6416,11 @@
               </a:rPr>
               <a:t>Which geographic unit best matches the public health action?</a:t>
             </a:r>
-            <a:endParaRPr lang="en-US" sz="1700" dirty="0"/>
-          </a:p>
-          <a:p>
-            <a:r>
-              <a:rPr lang="en-US" sz="1700" dirty="0">
+            <a:endParaRPr lang="en-US" sz="2100" dirty="0"/>
+          </a:p>
+          <a:p>
+            <a:r>
+              <a:rPr lang="en-US" sz="2100" dirty="0">
                 <a:solidFill>
                   <a:srgbClr val="17364A"/>
                 </a:solidFill>
@@ -6213,13 +6430,13 @@
               </a:rPr>
               <a:t>Could missing or poor-quality location data affect certain populations more than others?</a:t>
             </a:r>
-            <a:endParaRPr lang="en-US" sz="1700" dirty="0"/>
-          </a:p>
-        </p:txBody>
-      </p:sp>
-      <p:sp>
-        <p:nvSpPr>
-          <p:cNvPr id="11" name="Shape 9"/>
+            <a:endParaRPr lang="en-US" sz="2100" dirty="0"/>
+          </a:p>
+        </p:txBody>
+      </p:sp>
+      <p:sp>
+        <p:nvSpPr>
+          <p:cNvPr id="12" name="Shape 10"/>
           <p:cNvSpPr/>
           <p:nvPr/>
         </p:nvSpPr>
@@ -6246,14 +6463,14 @@
       </p:sp>
       <p:sp>
         <p:nvSpPr>
-          <p:cNvPr id="12" name="Text 10"/>
+          <p:cNvPr id="13" name="Text 11"/>
           <p:cNvSpPr/>
           <p:nvPr/>
         </p:nvSpPr>
         <p:spPr>
           <a:xfrm>
             <a:off x="8074152" y="1563624"/>
-            <a:ext cx="2825496" cy="201168"/>
+            <a:ext cx="2825496" cy="256032"/>
           </a:xfrm>
           <a:prstGeom prst="rect">
             <a:avLst/>
@@ -6269,7 +6486,7 @@
               <a:buNone/>
             </a:pPr>
             <a:r>
-              <a:rPr lang="en-US" sz="950" b="1" dirty="0">
+              <a:rPr lang="en-US" sz="1300" b="1" dirty="0">
                 <a:solidFill>
                   <a:srgbClr val="0068B7"/>
                 </a:solidFill>
@@ -6279,20 +6496,20 @@
               </a:rPr>
               <a:t>Key idea</a:t>
             </a:r>
-            <a:endParaRPr lang="en-US" sz="950" dirty="0"/>
-          </a:p>
-        </p:txBody>
-      </p:sp>
-      <p:sp>
-        <p:nvSpPr>
-          <p:cNvPr id="13" name="Text 11"/>
-          <p:cNvSpPr/>
-          <p:nvPr/>
-        </p:nvSpPr>
-        <p:spPr>
-          <a:xfrm>
-            <a:off x="8074152" y="1856232"/>
-            <a:ext cx="2825496" cy="1261872"/>
+            <a:endParaRPr lang="en-US" sz="1300" dirty="0"/>
+          </a:p>
+        </p:txBody>
+      </p:sp>
+      <p:sp>
+        <p:nvSpPr>
+          <p:cNvPr id="14" name="Text 12"/>
+          <p:cNvSpPr/>
+          <p:nvPr/>
+        </p:nvSpPr>
+        <p:spPr>
+          <a:xfrm>
+            <a:off x="8074152" y="1920240"/>
+            <a:ext cx="2825496" cy="1188720"/>
           </a:xfrm>
           <a:prstGeom prst="rect">
             <a:avLst/>
@@ -6310,7 +6527,7 @@
               <a:buNone/>
             </a:pPr>
             <a:r>
-              <a:rPr lang="en-US" sz="1250" dirty="0">
+              <a:rPr lang="en-US" sz="1550" dirty="0">
                 <a:solidFill>
                   <a:srgbClr val="17364A"/>
                 </a:solidFill>
@@ -6320,13 +6537,13 @@
               </a:rPr>
               <a:t>What location data are used, and how complete and accurate are they?</a:t>
             </a:r>
-            <a:endParaRPr lang="en-US" sz="1250" dirty="0"/>
-          </a:p>
-        </p:txBody>
-      </p:sp>
-      <p:sp>
-        <p:nvSpPr>
-          <p:cNvPr id="14" name="Shape 12"/>
+            <a:endParaRPr lang="en-US" sz="1550" dirty="0"/>
+          </a:p>
+        </p:txBody>
+      </p:sp>
+      <p:sp>
+        <p:nvSpPr>
+          <p:cNvPr id="15" name="Shape 13"/>
           <p:cNvSpPr/>
           <p:nvPr/>
         </p:nvSpPr>
@@ -6353,14 +6570,14 @@
       </p:sp>
       <p:sp>
         <p:nvSpPr>
-          <p:cNvPr id="15" name="Text 13"/>
+          <p:cNvPr id="16" name="Text 14"/>
           <p:cNvSpPr/>
           <p:nvPr/>
         </p:nvSpPr>
         <p:spPr>
           <a:xfrm>
             <a:off x="8074152" y="3666744"/>
-            <a:ext cx="2825496" cy="201168"/>
+            <a:ext cx="2825496" cy="256032"/>
           </a:xfrm>
           <a:prstGeom prst="rect">
             <a:avLst/>
@@ -6376,7 +6593,7 @@
               <a:buNone/>
             </a:pPr>
             <a:r>
-              <a:rPr lang="en-US" sz="950" b="1" dirty="0">
+              <a:rPr lang="en-US" sz="1300" b="1" dirty="0">
                 <a:solidFill>
                   <a:srgbClr val="0068B7"/>
                 </a:solidFill>
@@ -6386,20 +6603,20 @@
               </a:rPr>
               <a:t>Use this for</a:t>
             </a:r>
-            <a:endParaRPr lang="en-US" sz="950" dirty="0"/>
-          </a:p>
-        </p:txBody>
-      </p:sp>
-      <p:sp>
-        <p:nvSpPr>
-          <p:cNvPr id="16" name="Text 14"/>
-          <p:cNvSpPr/>
-          <p:nvPr/>
-        </p:nvSpPr>
-        <p:spPr>
-          <a:xfrm>
-            <a:off x="8074152" y="3959352"/>
-            <a:ext cx="2825496" cy="1170432"/>
+            <a:endParaRPr lang="en-US" sz="1300" dirty="0"/>
+          </a:p>
+        </p:txBody>
+      </p:sp>
+      <p:sp>
+        <p:nvSpPr>
+          <p:cNvPr id="17" name="Text 15"/>
+          <p:cNvSpPr/>
+          <p:nvPr/>
+        </p:nvSpPr>
+        <p:spPr>
+          <a:xfrm>
+            <a:off x="8074152" y="4023360"/>
+            <a:ext cx="2825496" cy="1097280"/>
           </a:xfrm>
           <a:prstGeom prst="rect">
             <a:avLst/>
@@ -6417,7 +6634,7 @@
               <a:buNone/>
             </a:pPr>
             <a:r>
-              <a:rPr lang="en-US" sz="1250" dirty="0">
+              <a:rPr lang="en-US" sz="1550" dirty="0">
                 <a:solidFill>
                   <a:srgbClr val="17364A"/>
                 </a:solidFill>
@@ -6427,7 +6644,7 @@
               </a:rPr>
               <a:t>Connect the concept to public health decisions, safeguards, documentation, or implementation work.</a:t>
             </a:r>
-            <a:endParaRPr lang="en-US" sz="1250" dirty="0"/>
+            <a:endParaRPr lang="en-US" sz="1550" dirty="0"/>
           </a:p>
         </p:txBody>
       </p:sp>
@@ -6624,7 +6841,7 @@
                 <a:ea typeface="Aptos" pitchFamily="34" charset="-122"/>
                 <a:cs typeface="Aptos" pitchFamily="34" charset="-120"/>
               </a:rPr>
-              <a:t>© Paula Soper</a:t>
+              <a:t>Â© Paula Soper</a:t>
             </a:r>
             <a:endParaRPr lang="en-US" sz="800" dirty="0"/>
           </a:p>
@@ -6638,8 +6855,47 @@
         </p:nvSpPr>
         <p:spPr>
           <a:xfrm>
+            <a:off x="11137392" y="6510528"/>
+            <a:ext cx="411480" cy="201168"/>
+          </a:xfrm>
+          <a:prstGeom prst="rect">
+            <a:avLst/>
+          </a:prstGeom>
+          <a:noFill/>
+          <a:ln/>
+        </p:spPr>
+        <p:txBody>
+          <a:bodyPr wrap="square" lIns="0" tIns="0" rIns="0" bIns="0" rtlCol="0" anchor="ctr"/>
+          <a:lstStyle/>
+          <a:p>
+            <a:pPr algn="r" indent="0" marL="0">
+              <a:buNone/>
+            </a:pPr>
+            <a:r>
+              <a:rPr lang="en-US" sz="900" dirty="0">
+                <a:solidFill>
+                  <a:srgbClr val="5F7181"/>
+                </a:solidFill>
+                <a:latin typeface="Aptos" pitchFamily="34" charset="0"/>
+                <a:ea typeface="Aptos" pitchFamily="34" charset="-122"/>
+                <a:cs typeface="Aptos" pitchFamily="34" charset="-120"/>
+              </a:rPr>
+              <a:t>16</a:t>
+            </a:r>
+            <a:endParaRPr lang="en-US" sz="900" dirty="0"/>
+          </a:p>
+        </p:txBody>
+      </p:sp>
+      <p:sp>
+        <p:nvSpPr>
+          <p:cNvPr id="8" name="Text 6"/>
+          <p:cNvSpPr/>
+          <p:nvPr/>
+        </p:nvSpPr>
+        <p:spPr>
+          <a:xfrm>
             <a:off x="640080" y="658368"/>
-            <a:ext cx="10881360" cy="566928"/>
+            <a:ext cx="10881360" cy="713232"/>
           </a:xfrm>
           <a:prstGeom prst="rect">
             <a:avLst/>
@@ -6657,7 +6913,7 @@
               <a:buNone/>
             </a:pPr>
             <a:r>
-              <a:rPr lang="en-US" sz="2700" b="1" dirty="0">
+              <a:rPr lang="en-US" sz="3400" b="1" dirty="0">
                 <a:solidFill>
                   <a:srgbClr val="003A63"/>
                 </a:solidFill>
@@ -6667,20 +6923,20 @@
               </a:rPr>
               <a:t>Reflection Questions Continued</a:t>
             </a:r>
-            <a:endParaRPr lang="en-US" sz="2700" dirty="0"/>
-          </a:p>
-        </p:txBody>
-      </p:sp>
-      <p:sp>
-        <p:nvSpPr>
-          <p:cNvPr id="8" name="Text 6"/>
-          <p:cNvSpPr/>
-          <p:nvPr/>
-        </p:nvSpPr>
-        <p:spPr>
-          <a:xfrm>
-            <a:off x="868680" y="1417320"/>
-            <a:ext cx="6675120" cy="4434840"/>
+            <a:endParaRPr lang="en-US" sz="3400" dirty="0"/>
+          </a:p>
+        </p:txBody>
+      </p:sp>
+      <p:sp>
+        <p:nvSpPr>
+          <p:cNvPr id="9" name="Text 7"/>
+          <p:cNvSpPr/>
+          <p:nvPr/>
+        </p:nvSpPr>
+        <p:spPr>
+          <a:xfrm>
+            <a:off x="868680" y="1508760"/>
+            <a:ext cx="6537960" cy="4160520"/>
           </a:xfrm>
           <a:prstGeom prst="rect">
             <a:avLst/>
@@ -6695,7 +6951,7 @@
           <a:lstStyle/>
           <a:p>
             <a:r>
-              <a:rPr lang="en-US" sz="1700" dirty="0">
+              <a:rPr lang="en-US" sz="2100" dirty="0">
                 <a:solidFill>
                   <a:srgbClr val="17364A"/>
                 </a:solidFill>
@@ -6705,11 +6961,11 @@
               </a:rPr>
               <a:t>What privacy safeguards are needed for internal and public maps?</a:t>
             </a:r>
-            <a:endParaRPr lang="en-US" sz="1700" dirty="0"/>
-          </a:p>
-          <a:p>
-            <a:r>
-              <a:rPr lang="en-US" sz="1700" dirty="0">
+            <a:endParaRPr lang="en-US" sz="2100" dirty="0"/>
+          </a:p>
+          <a:p>
+            <a:r>
+              <a:rPr lang="en-US" sz="2100" dirty="0">
                 <a:solidFill>
                   <a:srgbClr val="17364A"/>
                 </a:solidFill>
@@ -6719,13 +6975,13 @@
               </a:rPr>
               <a:t>How will community context be included before action is taken?</a:t>
             </a:r>
-            <a:endParaRPr lang="en-US" sz="1700" dirty="0"/>
-          </a:p>
-        </p:txBody>
-      </p:sp>
-      <p:sp>
-        <p:nvSpPr>
-          <p:cNvPr id="9" name="Shape 7"/>
+            <a:endParaRPr lang="en-US" sz="2100" dirty="0"/>
+          </a:p>
+        </p:txBody>
+      </p:sp>
+      <p:sp>
+        <p:nvSpPr>
+          <p:cNvPr id="10" name="Shape 8"/>
           <p:cNvSpPr/>
           <p:nvPr/>
         </p:nvSpPr>
@@ -6752,14 +7008,14 @@
       </p:sp>
       <p:sp>
         <p:nvSpPr>
-          <p:cNvPr id="10" name="Text 8"/>
+          <p:cNvPr id="11" name="Text 9"/>
           <p:cNvSpPr/>
           <p:nvPr/>
         </p:nvSpPr>
         <p:spPr>
           <a:xfrm>
             <a:off x="8074152" y="1563624"/>
-            <a:ext cx="2825496" cy="201168"/>
+            <a:ext cx="2825496" cy="256032"/>
           </a:xfrm>
           <a:prstGeom prst="rect">
             <a:avLst/>
@@ -6775,7 +7031,7 @@
               <a:buNone/>
             </a:pPr>
             <a:r>
-              <a:rPr lang="en-US" sz="950" b="1" dirty="0">
+              <a:rPr lang="en-US" sz="1300" b="1" dirty="0">
                 <a:solidFill>
                   <a:srgbClr val="0068B7"/>
                 </a:solidFill>
@@ -6785,20 +7041,20 @@
               </a:rPr>
               <a:t>Key idea</a:t>
             </a:r>
-            <a:endParaRPr lang="en-US" sz="950" dirty="0"/>
-          </a:p>
-        </p:txBody>
-      </p:sp>
-      <p:sp>
-        <p:nvSpPr>
-          <p:cNvPr id="11" name="Text 9"/>
-          <p:cNvSpPr/>
-          <p:nvPr/>
-        </p:nvSpPr>
-        <p:spPr>
-          <a:xfrm>
-            <a:off x="8074152" y="1856232"/>
-            <a:ext cx="2825496" cy="1261872"/>
+            <a:endParaRPr lang="en-US" sz="1300" dirty="0"/>
+          </a:p>
+        </p:txBody>
+      </p:sp>
+      <p:sp>
+        <p:nvSpPr>
+          <p:cNvPr id="12" name="Text 10"/>
+          <p:cNvSpPr/>
+          <p:nvPr/>
+        </p:nvSpPr>
+        <p:spPr>
+          <a:xfrm>
+            <a:off x="8074152" y="1920240"/>
+            <a:ext cx="2825496" cy="1188720"/>
           </a:xfrm>
           <a:prstGeom prst="rect">
             <a:avLst/>
@@ -6816,7 +7072,7 @@
               <a:buNone/>
             </a:pPr>
             <a:r>
-              <a:rPr lang="en-US" sz="1250" dirty="0">
+              <a:rPr lang="en-US" sz="1550" dirty="0">
                 <a:solidFill>
                   <a:srgbClr val="17364A"/>
                 </a:solidFill>
@@ -6826,13 +7082,13 @@
               </a:rPr>
               <a:t>What privacy safeguards are needed for internal and public maps?</a:t>
             </a:r>
-            <a:endParaRPr lang="en-US" sz="1250" dirty="0"/>
-          </a:p>
-        </p:txBody>
-      </p:sp>
-      <p:sp>
-        <p:nvSpPr>
-          <p:cNvPr id="12" name="Shape 10"/>
+            <a:endParaRPr lang="en-US" sz="1550" dirty="0"/>
+          </a:p>
+        </p:txBody>
+      </p:sp>
+      <p:sp>
+        <p:nvSpPr>
+          <p:cNvPr id="13" name="Shape 11"/>
           <p:cNvSpPr/>
           <p:nvPr/>
         </p:nvSpPr>
@@ -6859,14 +7115,14 @@
       </p:sp>
       <p:sp>
         <p:nvSpPr>
-          <p:cNvPr id="13" name="Text 11"/>
+          <p:cNvPr id="14" name="Text 12"/>
           <p:cNvSpPr/>
           <p:nvPr/>
         </p:nvSpPr>
         <p:spPr>
           <a:xfrm>
             <a:off x="8074152" y="3666744"/>
-            <a:ext cx="2825496" cy="201168"/>
+            <a:ext cx="2825496" cy="256032"/>
           </a:xfrm>
           <a:prstGeom prst="rect">
             <a:avLst/>
@@ -6882,7 +7138,7 @@
               <a:buNone/>
             </a:pPr>
             <a:r>
-              <a:rPr lang="en-US" sz="950" b="1" dirty="0">
+              <a:rPr lang="en-US" sz="1300" b="1" dirty="0">
                 <a:solidFill>
                   <a:srgbClr val="0068B7"/>
                 </a:solidFill>
@@ -6892,20 +7148,20 @@
               </a:rPr>
               <a:t>Use this for</a:t>
             </a:r>
-            <a:endParaRPr lang="en-US" sz="950" dirty="0"/>
-          </a:p>
-        </p:txBody>
-      </p:sp>
-      <p:sp>
-        <p:nvSpPr>
-          <p:cNvPr id="14" name="Text 12"/>
-          <p:cNvSpPr/>
-          <p:nvPr/>
-        </p:nvSpPr>
-        <p:spPr>
-          <a:xfrm>
-            <a:off x="8074152" y="3959352"/>
-            <a:ext cx="2825496" cy="1170432"/>
+            <a:endParaRPr lang="en-US" sz="1300" dirty="0"/>
+          </a:p>
+        </p:txBody>
+      </p:sp>
+      <p:sp>
+        <p:nvSpPr>
+          <p:cNvPr id="15" name="Text 13"/>
+          <p:cNvSpPr/>
+          <p:nvPr/>
+        </p:nvSpPr>
+        <p:spPr>
+          <a:xfrm>
+            <a:off x="8074152" y="4023360"/>
+            <a:ext cx="2825496" cy="1097280"/>
           </a:xfrm>
           <a:prstGeom prst="rect">
             <a:avLst/>
@@ -6923,7 +7179,7 @@
               <a:buNone/>
             </a:pPr>
             <a:r>
-              <a:rPr lang="en-US" sz="1250" dirty="0">
+              <a:rPr lang="en-US" sz="1550" dirty="0">
                 <a:solidFill>
                   <a:srgbClr val="17364A"/>
                 </a:solidFill>
@@ -6933,7 +7189,7 @@
               </a:rPr>
               <a:t>Connect the concept to public health decisions, safeguards, documentation, or implementation work.</a:t>
             </a:r>
-            <a:endParaRPr lang="en-US" sz="1250" dirty="0"/>
+            <a:endParaRPr lang="en-US" sz="1550" dirty="0"/>
           </a:p>
         </p:txBody>
       </p:sp>
@@ -7130,7 +7386,7 @@
                 <a:ea typeface="Aptos" pitchFamily="34" charset="-122"/>
                 <a:cs typeface="Aptos" pitchFamily="34" charset="-120"/>
               </a:rPr>
-              <a:t>© Paula Soper</a:t>
+              <a:t>Â© Paula Soper</a:t>
             </a:r>
             <a:endParaRPr lang="en-US" sz="800" dirty="0"/>
           </a:p>
@@ -7138,7 +7394,46 @@
       </p:sp>
       <p:sp>
         <p:nvSpPr>
-          <p:cNvPr id="7" name="Shape 5"/>
+          <p:cNvPr id="7" name="Text 5"/>
+          <p:cNvSpPr/>
+          <p:nvPr/>
+        </p:nvSpPr>
+        <p:spPr>
+          <a:xfrm>
+            <a:off x="11137392" y="6510528"/>
+            <a:ext cx="411480" cy="201168"/>
+          </a:xfrm>
+          <a:prstGeom prst="rect">
+            <a:avLst/>
+          </a:prstGeom>
+          <a:noFill/>
+          <a:ln/>
+        </p:spPr>
+        <p:txBody>
+          <a:bodyPr wrap="square" lIns="0" tIns="0" rIns="0" bIns="0" rtlCol="0" anchor="ctr"/>
+          <a:lstStyle/>
+          <a:p>
+            <a:pPr algn="r" indent="0" marL="0">
+              <a:buNone/>
+            </a:pPr>
+            <a:r>
+              <a:rPr lang="en-US" sz="900" dirty="0">
+                <a:solidFill>
+                  <a:srgbClr val="5F7181"/>
+                </a:solidFill>
+                <a:latin typeface="Aptos" pitchFamily="34" charset="0"/>
+                <a:ea typeface="Aptos" pitchFamily="34" charset="-122"/>
+                <a:cs typeface="Aptos" pitchFamily="34" charset="-120"/>
+              </a:rPr>
+              <a:t>17</a:t>
+            </a:r>
+            <a:endParaRPr lang="en-US" sz="900" dirty="0"/>
+          </a:p>
+        </p:txBody>
+      </p:sp>
+      <p:sp>
+        <p:nvSpPr>
+          <p:cNvPr id="8" name="Shape 6"/>
           <p:cNvSpPr/>
           <p:nvPr/>
         </p:nvSpPr>
@@ -7163,7 +7458,7 @@
       </p:sp>
       <p:sp>
         <p:nvSpPr>
-          <p:cNvPr id="8" name="Text 6"/>
+          <p:cNvPr id="9" name="Text 7"/>
           <p:cNvSpPr/>
           <p:nvPr/>
         </p:nvSpPr>
@@ -7202,14 +7497,14 @@
       </p:sp>
       <p:sp>
         <p:nvSpPr>
-          <p:cNvPr id="9" name="Text 7"/>
+          <p:cNvPr id="10" name="Text 8"/>
           <p:cNvSpPr/>
           <p:nvPr/>
         </p:nvSpPr>
         <p:spPr>
           <a:xfrm>
             <a:off x="640080" y="621792"/>
-            <a:ext cx="10881360" cy="566928"/>
+            <a:ext cx="10881360" cy="713232"/>
           </a:xfrm>
           <a:prstGeom prst="rect">
             <a:avLst/>
@@ -7227,7 +7522,7 @@
               <a:buNone/>
             </a:pPr>
             <a:r>
-              <a:rPr lang="en-US" sz="2700" b="1" dirty="0">
+              <a:rPr lang="en-US" sz="3400" b="1" dirty="0">
                 <a:solidFill>
                   <a:srgbClr val="003A63"/>
                 </a:solidFill>
@@ -7237,20 +7532,20 @@
               </a:rPr>
               <a:t>Practical Exercise</a:t>
             </a:r>
-            <a:endParaRPr lang="en-US" sz="2700" dirty="0"/>
-          </a:p>
-        </p:txBody>
-      </p:sp>
-      <p:sp>
-        <p:nvSpPr>
-          <p:cNvPr id="10" name="Text 8"/>
-          <p:cNvSpPr/>
-          <p:nvPr/>
-        </p:nvSpPr>
-        <p:spPr>
-          <a:xfrm>
-            <a:off x="868680" y="1417320"/>
-            <a:ext cx="6675120" cy="4434840"/>
+            <a:endParaRPr lang="en-US" sz="3400" dirty="0"/>
+          </a:p>
+        </p:txBody>
+      </p:sp>
+      <p:sp>
+        <p:nvSpPr>
+          <p:cNvPr id="11" name="Text 9"/>
+          <p:cNvSpPr/>
+          <p:nvPr/>
+        </p:nvSpPr>
+        <p:spPr>
+          <a:xfrm>
+            <a:off x="868680" y="1508760"/>
+            <a:ext cx="6537960" cy="4160520"/>
           </a:xfrm>
           <a:prstGeom prst="rect">
             <a:avLst/>
@@ -7265,7 +7560,7 @@
           <a:lstStyle/>
           <a:p>
             <a:r>
-              <a:rPr lang="en-US" sz="1700" dirty="0">
+              <a:rPr lang="en-US" sz="2100" dirty="0">
                 <a:solidFill>
                   <a:srgbClr val="17364A"/>
                 </a:solidFill>
@@ -7275,11 +7570,11 @@
               </a:rPr>
               <a:t>Create a geospatial AI readiness worksheet for one public health workflow.</a:t>
             </a:r>
-            <a:endParaRPr lang="en-US" sz="1700" dirty="0"/>
-          </a:p>
-          <a:p>
-            <a:r>
-              <a:rPr lang="en-US" sz="1700" dirty="0">
+            <a:endParaRPr lang="en-US" sz="2100" dirty="0"/>
+          </a:p>
+          <a:p>
+            <a:r>
+              <a:rPr lang="en-US" sz="2100" dirty="0">
                 <a:solidFill>
                   <a:srgbClr val="17364A"/>
                 </a:solidFill>
@@ -7287,13 +7582,13 @@
                 <a:ea typeface="Aptos" pitchFamily="34" charset="-122"/>
                 <a:cs typeface="Aptos" pitchFamily="34" charset="-120"/>
               </a:rPr>
-              <a:t>Include the public health question, location data sources, geocoding method, geographic unit, denominator, privacy.</a:t>
-            </a:r>
-            <a:endParaRPr lang="en-US" sz="1700" dirty="0"/>
-          </a:p>
-          <a:p>
-            <a:r>
-              <a:rPr lang="en-US" sz="1700" dirty="0">
+              <a:t>Include the public health question, location data sources, geocoding method, geographic unit,.</a:t>
+            </a:r>
+            <a:endParaRPr lang="en-US" sz="2100" dirty="0"/>
+          </a:p>
+          <a:p>
+            <a:r>
+              <a:rPr lang="en-US" sz="2100" dirty="0">
                 <a:solidFill>
                   <a:srgbClr val="17364A"/>
                 </a:solidFill>
@@ -7301,15 +7596,15 @@
                 <a:ea typeface="Aptos" pitchFamily="34" charset="-122"/>
                 <a:cs typeface="Aptos" pitchFamily="34" charset="-120"/>
               </a:rPr>
-              <a:t>The worksheet should identify at least one way the map could be misinterpreted and one safeguard that would reduce the risk.</a:t>
-            </a:r>
-            <a:endParaRPr lang="en-US" sz="1700" dirty="0"/>
-          </a:p>
-        </p:txBody>
-      </p:sp>
-      <p:sp>
-        <p:nvSpPr>
-          <p:cNvPr id="11" name="Shape 9"/>
+              <a:t>The worksheet should identify at least one way the map could be misinterpreted and one safeguard that.</a:t>
+            </a:r>
+            <a:endParaRPr lang="en-US" sz="2100" dirty="0"/>
+          </a:p>
+        </p:txBody>
+      </p:sp>
+      <p:sp>
+        <p:nvSpPr>
+          <p:cNvPr id="12" name="Shape 10"/>
           <p:cNvSpPr/>
           <p:nvPr/>
         </p:nvSpPr>
@@ -7336,14 +7631,14 @@
       </p:sp>
       <p:sp>
         <p:nvSpPr>
-          <p:cNvPr id="12" name="Text 10"/>
+          <p:cNvPr id="13" name="Text 11"/>
           <p:cNvSpPr/>
           <p:nvPr/>
         </p:nvSpPr>
         <p:spPr>
           <a:xfrm>
             <a:off x="8074152" y="1563624"/>
-            <a:ext cx="2825496" cy="201168"/>
+            <a:ext cx="2825496" cy="256032"/>
           </a:xfrm>
           <a:prstGeom prst="rect">
             <a:avLst/>
@@ -7359,7 +7654,7 @@
               <a:buNone/>
             </a:pPr>
             <a:r>
-              <a:rPr lang="en-US" sz="950" b="1" dirty="0">
+              <a:rPr lang="en-US" sz="1300" b="1" dirty="0">
                 <a:solidFill>
                   <a:srgbClr val="0068B7"/>
                 </a:solidFill>
@@ -7369,20 +7664,20 @@
               </a:rPr>
               <a:t>Key idea</a:t>
             </a:r>
-            <a:endParaRPr lang="en-US" sz="950" dirty="0"/>
-          </a:p>
-        </p:txBody>
-      </p:sp>
-      <p:sp>
-        <p:nvSpPr>
-          <p:cNvPr id="13" name="Text 11"/>
-          <p:cNvSpPr/>
-          <p:nvPr/>
-        </p:nvSpPr>
-        <p:spPr>
-          <a:xfrm>
-            <a:off x="8074152" y="1856232"/>
-            <a:ext cx="2825496" cy="1261872"/>
+            <a:endParaRPr lang="en-US" sz="1300" dirty="0"/>
+          </a:p>
+        </p:txBody>
+      </p:sp>
+      <p:sp>
+        <p:nvSpPr>
+          <p:cNvPr id="14" name="Text 12"/>
+          <p:cNvSpPr/>
+          <p:nvPr/>
+        </p:nvSpPr>
+        <p:spPr>
+          <a:xfrm>
+            <a:off x="8074152" y="1920240"/>
+            <a:ext cx="2825496" cy="1188720"/>
           </a:xfrm>
           <a:prstGeom prst="rect">
             <a:avLst/>
@@ -7400,7 +7695,7 @@
               <a:buNone/>
             </a:pPr>
             <a:r>
-              <a:rPr lang="en-US" sz="1250" dirty="0">
+              <a:rPr lang="en-US" sz="1550" dirty="0">
                 <a:solidFill>
                   <a:srgbClr val="17364A"/>
                 </a:solidFill>
@@ -7410,13 +7705,13 @@
               </a:rPr>
               <a:t>Create a geospatial AI readiness worksheet for one public health workflow.</a:t>
             </a:r>
-            <a:endParaRPr lang="en-US" sz="1250" dirty="0"/>
-          </a:p>
-        </p:txBody>
-      </p:sp>
-      <p:sp>
-        <p:nvSpPr>
-          <p:cNvPr id="14" name="Shape 12"/>
+            <a:endParaRPr lang="en-US" sz="1550" dirty="0"/>
+          </a:p>
+        </p:txBody>
+      </p:sp>
+      <p:sp>
+        <p:nvSpPr>
+          <p:cNvPr id="15" name="Shape 13"/>
           <p:cNvSpPr/>
           <p:nvPr/>
         </p:nvSpPr>
@@ -7443,14 +7738,14 @@
       </p:sp>
       <p:sp>
         <p:nvSpPr>
-          <p:cNvPr id="15" name="Text 13"/>
+          <p:cNvPr id="16" name="Text 14"/>
           <p:cNvSpPr/>
           <p:nvPr/>
         </p:nvSpPr>
         <p:spPr>
           <a:xfrm>
             <a:off x="8074152" y="3666744"/>
-            <a:ext cx="2825496" cy="201168"/>
+            <a:ext cx="2825496" cy="256032"/>
           </a:xfrm>
           <a:prstGeom prst="rect">
             <a:avLst/>
@@ -7466,7 +7761,7 @@
               <a:buNone/>
             </a:pPr>
             <a:r>
-              <a:rPr lang="en-US" sz="950" b="1" dirty="0">
+              <a:rPr lang="en-US" sz="1300" b="1" dirty="0">
                 <a:solidFill>
                   <a:srgbClr val="0068B7"/>
                 </a:solidFill>
@@ -7476,20 +7771,20 @@
               </a:rPr>
               <a:t>Use this for</a:t>
             </a:r>
-            <a:endParaRPr lang="en-US" sz="950" dirty="0"/>
-          </a:p>
-        </p:txBody>
-      </p:sp>
-      <p:sp>
-        <p:nvSpPr>
-          <p:cNvPr id="16" name="Text 14"/>
-          <p:cNvSpPr/>
-          <p:nvPr/>
-        </p:nvSpPr>
-        <p:spPr>
-          <a:xfrm>
-            <a:off x="8074152" y="3959352"/>
-            <a:ext cx="2825496" cy="1170432"/>
+            <a:endParaRPr lang="en-US" sz="1300" dirty="0"/>
+          </a:p>
+        </p:txBody>
+      </p:sp>
+      <p:sp>
+        <p:nvSpPr>
+          <p:cNvPr id="17" name="Text 15"/>
+          <p:cNvSpPr/>
+          <p:nvPr/>
+        </p:nvSpPr>
+        <p:spPr>
+          <a:xfrm>
+            <a:off x="8074152" y="4023360"/>
+            <a:ext cx="2825496" cy="1097280"/>
           </a:xfrm>
           <a:prstGeom prst="rect">
             <a:avLst/>
@@ -7507,7 +7802,7 @@
               <a:buNone/>
             </a:pPr>
             <a:r>
-              <a:rPr lang="en-US" sz="1250" dirty="0">
+              <a:rPr lang="en-US" sz="1550" dirty="0">
                 <a:solidFill>
                   <a:srgbClr val="17364A"/>
                 </a:solidFill>
@@ -7517,7 +7812,7 @@
               </a:rPr>
               <a:t>Connect the concept to public health decisions, safeguards, documentation, or implementation work.</a:t>
             </a:r>
-            <a:endParaRPr lang="en-US" sz="1250" dirty="0"/>
+            <a:endParaRPr lang="en-US" sz="1550" dirty="0"/>
           </a:p>
         </p:txBody>
       </p:sp>
@@ -7714,7 +8009,7 @@
                 <a:ea typeface="Aptos" pitchFamily="34" charset="-122"/>
                 <a:cs typeface="Aptos" pitchFamily="34" charset="-120"/>
               </a:rPr>
-              <a:t>© Paula Soper</a:t>
+              <a:t>Â© Paula Soper</a:t>
             </a:r>
             <a:endParaRPr lang="en-US" sz="800" dirty="0"/>
           </a:p>
@@ -7722,7 +8017,46 @@
       </p:sp>
       <p:sp>
         <p:nvSpPr>
-          <p:cNvPr id="7" name="Shape 5"/>
+          <p:cNvPr id="7" name="Text 5"/>
+          <p:cNvSpPr/>
+          <p:nvPr/>
+        </p:nvSpPr>
+        <p:spPr>
+          <a:xfrm>
+            <a:off x="11137392" y="6510528"/>
+            <a:ext cx="411480" cy="201168"/>
+          </a:xfrm>
+          <a:prstGeom prst="rect">
+            <a:avLst/>
+          </a:prstGeom>
+          <a:noFill/>
+          <a:ln/>
+        </p:spPr>
+        <p:txBody>
+          <a:bodyPr wrap="square" lIns="0" tIns="0" rIns="0" bIns="0" rtlCol="0" anchor="ctr"/>
+          <a:lstStyle/>
+          <a:p>
+            <a:pPr algn="r" indent="0" marL="0">
+              <a:buNone/>
+            </a:pPr>
+            <a:r>
+              <a:rPr lang="en-US" sz="900" dirty="0">
+                <a:solidFill>
+                  <a:srgbClr val="5F7181"/>
+                </a:solidFill>
+                <a:latin typeface="Aptos" pitchFamily="34" charset="0"/>
+                <a:ea typeface="Aptos" pitchFamily="34" charset="-122"/>
+                <a:cs typeface="Aptos" pitchFamily="34" charset="-120"/>
+              </a:rPr>
+              <a:t>18</a:t>
+            </a:r>
+            <a:endParaRPr lang="en-US" sz="900" dirty="0"/>
+          </a:p>
+        </p:txBody>
+      </p:sp>
+      <p:sp>
+        <p:nvSpPr>
+          <p:cNvPr id="8" name="Shape 6"/>
           <p:cNvSpPr/>
           <p:nvPr/>
         </p:nvSpPr>
@@ -7747,7 +8081,7 @@
       </p:sp>
       <p:sp>
         <p:nvSpPr>
-          <p:cNvPr id="8" name="Text 6"/>
+          <p:cNvPr id="9" name="Text 7"/>
           <p:cNvSpPr/>
           <p:nvPr/>
         </p:nvSpPr>
@@ -7786,14 +8120,14 @@
       </p:sp>
       <p:sp>
         <p:nvSpPr>
-          <p:cNvPr id="9" name="Text 7"/>
+          <p:cNvPr id="10" name="Text 8"/>
           <p:cNvSpPr/>
           <p:nvPr/>
         </p:nvSpPr>
         <p:spPr>
           <a:xfrm>
             <a:off x="640080" y="621792"/>
-            <a:ext cx="10881360" cy="566928"/>
+            <a:ext cx="10881360" cy="713232"/>
           </a:xfrm>
           <a:prstGeom prst="rect">
             <a:avLst/>
@@ -7811,7 +8145,7 @@
               <a:buNone/>
             </a:pPr>
             <a:r>
-              <a:rPr lang="en-US" sz="2700" b="1" dirty="0">
+              <a:rPr lang="en-US" sz="3400" b="1" dirty="0">
                 <a:solidFill>
                   <a:srgbClr val="003A63"/>
                 </a:solidFill>
@@ -7821,20 +8155,20 @@
               </a:rPr>
               <a:t>Expected Artifact or Evidence</a:t>
             </a:r>
-            <a:endParaRPr lang="en-US" sz="2700" dirty="0"/>
-          </a:p>
-        </p:txBody>
-      </p:sp>
-      <p:sp>
-        <p:nvSpPr>
-          <p:cNvPr id="10" name="Text 8"/>
-          <p:cNvSpPr/>
-          <p:nvPr/>
-        </p:nvSpPr>
-        <p:spPr>
-          <a:xfrm>
-            <a:off x="868680" y="1417320"/>
-            <a:ext cx="6675120" cy="4434840"/>
+            <a:endParaRPr lang="en-US" sz="3400" dirty="0"/>
+          </a:p>
+        </p:txBody>
+      </p:sp>
+      <p:sp>
+        <p:nvSpPr>
+          <p:cNvPr id="11" name="Text 9"/>
+          <p:cNvSpPr/>
+          <p:nvPr/>
+        </p:nvSpPr>
+        <p:spPr>
+          <a:xfrm>
+            <a:off x="868680" y="1508760"/>
+            <a:ext cx="6537960" cy="4160520"/>
           </a:xfrm>
           <a:prstGeom prst="rect">
             <a:avLst/>
@@ -7849,7 +8183,7 @@
           <a:lstStyle/>
           <a:p>
             <a:r>
-              <a:rPr lang="en-US" sz="1700" dirty="0">
+              <a:rPr lang="en-US" sz="2100" dirty="0">
                 <a:solidFill>
                   <a:srgbClr val="17364A"/>
                 </a:solidFill>
@@ -7859,11 +8193,11 @@
               </a:rPr>
               <a:t>Geospatial AI readiness worksheet</a:t>
             </a:r>
-            <a:endParaRPr lang="en-US" sz="1700" dirty="0"/>
-          </a:p>
-          <a:p>
-            <a:r>
-              <a:rPr lang="en-US" sz="1700" dirty="0">
+            <a:endParaRPr lang="en-US" sz="2100" dirty="0"/>
+          </a:p>
+          <a:p>
+            <a:r>
+              <a:rPr lang="en-US" sz="2100" dirty="0">
                 <a:solidFill>
                   <a:srgbClr val="17364A"/>
                 </a:solidFill>
@@ -7873,11 +8207,11 @@
               </a:rPr>
               <a:t>Map interpretation and limitations memo</a:t>
             </a:r>
-            <a:endParaRPr lang="en-US" sz="1700" dirty="0"/>
-          </a:p>
-          <a:p>
-            <a:r>
-              <a:rPr lang="en-US" sz="1700" dirty="0">
+            <a:endParaRPr lang="en-US" sz="2100" dirty="0"/>
+          </a:p>
+          <a:p>
+            <a:r>
+              <a:rPr lang="en-US" sz="2100" dirty="0">
                 <a:solidFill>
                   <a:srgbClr val="17364A"/>
                 </a:solidFill>
@@ -7887,13 +8221,13 @@
               </a:rPr>
               <a:t>Privacy and suppression review notes</a:t>
             </a:r>
-            <a:endParaRPr lang="en-US" sz="1700" dirty="0"/>
-          </a:p>
-        </p:txBody>
-      </p:sp>
-      <p:sp>
-        <p:nvSpPr>
-          <p:cNvPr id="11" name="Shape 9"/>
+            <a:endParaRPr lang="en-US" sz="2100" dirty="0"/>
+          </a:p>
+        </p:txBody>
+      </p:sp>
+      <p:sp>
+        <p:nvSpPr>
+          <p:cNvPr id="12" name="Shape 10"/>
           <p:cNvSpPr/>
           <p:nvPr/>
         </p:nvSpPr>
@@ -7920,14 +8254,14 @@
       </p:sp>
       <p:sp>
         <p:nvSpPr>
-          <p:cNvPr id="12" name="Text 10"/>
+          <p:cNvPr id="13" name="Text 11"/>
           <p:cNvSpPr/>
           <p:nvPr/>
         </p:nvSpPr>
         <p:spPr>
           <a:xfrm>
             <a:off x="8074152" y="1563624"/>
-            <a:ext cx="2825496" cy="201168"/>
+            <a:ext cx="2825496" cy="256032"/>
           </a:xfrm>
           <a:prstGeom prst="rect">
             <a:avLst/>
@@ -7943,7 +8277,7 @@
               <a:buNone/>
             </a:pPr>
             <a:r>
-              <a:rPr lang="en-US" sz="950" b="1" dirty="0">
+              <a:rPr lang="en-US" sz="1300" b="1" dirty="0">
                 <a:solidFill>
                   <a:srgbClr val="0068B7"/>
                 </a:solidFill>
@@ -7953,20 +8287,20 @@
               </a:rPr>
               <a:t>Key idea</a:t>
             </a:r>
-            <a:endParaRPr lang="en-US" sz="950" dirty="0"/>
-          </a:p>
-        </p:txBody>
-      </p:sp>
-      <p:sp>
-        <p:nvSpPr>
-          <p:cNvPr id="13" name="Text 11"/>
-          <p:cNvSpPr/>
-          <p:nvPr/>
-        </p:nvSpPr>
-        <p:spPr>
-          <a:xfrm>
-            <a:off x="8074152" y="1856232"/>
-            <a:ext cx="2825496" cy="1261872"/>
+            <a:endParaRPr lang="en-US" sz="1300" dirty="0"/>
+          </a:p>
+        </p:txBody>
+      </p:sp>
+      <p:sp>
+        <p:nvSpPr>
+          <p:cNvPr id="14" name="Text 12"/>
+          <p:cNvSpPr/>
+          <p:nvPr/>
+        </p:nvSpPr>
+        <p:spPr>
+          <a:xfrm>
+            <a:off x="8074152" y="1920240"/>
+            <a:ext cx="2825496" cy="1188720"/>
           </a:xfrm>
           <a:prstGeom prst="rect">
             <a:avLst/>
@@ -7984,7 +8318,7 @@
               <a:buNone/>
             </a:pPr>
             <a:r>
-              <a:rPr lang="en-US" sz="1250" dirty="0">
+              <a:rPr lang="en-US" sz="1550" dirty="0">
                 <a:solidFill>
                   <a:srgbClr val="17364A"/>
                 </a:solidFill>
@@ -7994,13 +8328,13 @@
               </a:rPr>
               <a:t>Geospatial AI readiness worksheet</a:t>
             </a:r>
-            <a:endParaRPr lang="en-US" sz="1250" dirty="0"/>
-          </a:p>
-        </p:txBody>
-      </p:sp>
-      <p:sp>
-        <p:nvSpPr>
-          <p:cNvPr id="14" name="Shape 12"/>
+            <a:endParaRPr lang="en-US" sz="1550" dirty="0"/>
+          </a:p>
+        </p:txBody>
+      </p:sp>
+      <p:sp>
+        <p:nvSpPr>
+          <p:cNvPr id="15" name="Shape 13"/>
           <p:cNvSpPr/>
           <p:nvPr/>
         </p:nvSpPr>
@@ -8027,14 +8361,14 @@
       </p:sp>
       <p:sp>
         <p:nvSpPr>
-          <p:cNvPr id="15" name="Text 13"/>
+          <p:cNvPr id="16" name="Text 14"/>
           <p:cNvSpPr/>
           <p:nvPr/>
         </p:nvSpPr>
         <p:spPr>
           <a:xfrm>
             <a:off x="8074152" y="3666744"/>
-            <a:ext cx="2825496" cy="201168"/>
+            <a:ext cx="2825496" cy="256032"/>
           </a:xfrm>
           <a:prstGeom prst="rect">
             <a:avLst/>
@@ -8050,7 +8384,7 @@
               <a:buNone/>
             </a:pPr>
             <a:r>
-              <a:rPr lang="en-US" sz="950" b="1" dirty="0">
+              <a:rPr lang="en-US" sz="1300" b="1" dirty="0">
                 <a:solidFill>
                   <a:srgbClr val="0068B7"/>
                 </a:solidFill>
@@ -8060,20 +8394,20 @@
               </a:rPr>
               <a:t>Use this for</a:t>
             </a:r>
-            <a:endParaRPr lang="en-US" sz="950" dirty="0"/>
-          </a:p>
-        </p:txBody>
-      </p:sp>
-      <p:sp>
-        <p:nvSpPr>
-          <p:cNvPr id="16" name="Text 14"/>
-          <p:cNvSpPr/>
-          <p:nvPr/>
-        </p:nvSpPr>
-        <p:spPr>
-          <a:xfrm>
-            <a:off x="8074152" y="3959352"/>
-            <a:ext cx="2825496" cy="1170432"/>
+            <a:endParaRPr lang="en-US" sz="1300" dirty="0"/>
+          </a:p>
+        </p:txBody>
+      </p:sp>
+      <p:sp>
+        <p:nvSpPr>
+          <p:cNvPr id="17" name="Text 15"/>
+          <p:cNvSpPr/>
+          <p:nvPr/>
+        </p:nvSpPr>
+        <p:spPr>
+          <a:xfrm>
+            <a:off x="8074152" y="4023360"/>
+            <a:ext cx="2825496" cy="1097280"/>
           </a:xfrm>
           <a:prstGeom prst="rect">
             <a:avLst/>
@@ -8091,7 +8425,7 @@
               <a:buNone/>
             </a:pPr>
             <a:r>
-              <a:rPr lang="en-US" sz="1250" dirty="0">
+              <a:rPr lang="en-US" sz="1550" dirty="0">
                 <a:solidFill>
                   <a:srgbClr val="17364A"/>
                 </a:solidFill>
@@ -8101,7 +8435,7 @@
               </a:rPr>
               <a:t>Connect the concept to public health decisions, safeguards, documentation, or implementation work.</a:t>
             </a:r>
-            <a:endParaRPr lang="en-US" sz="1250" dirty="0"/>
+            <a:endParaRPr lang="en-US" sz="1550" dirty="0"/>
           </a:p>
         </p:txBody>
       </p:sp>
@@ -8298,7 +8632,7 @@
                 <a:ea typeface="Aptos" pitchFamily="34" charset="-122"/>
                 <a:cs typeface="Aptos" pitchFamily="34" charset="-120"/>
               </a:rPr>
-              <a:t>© Paula Soper</a:t>
+              <a:t>Â© Paula Soper</a:t>
             </a:r>
             <a:endParaRPr lang="en-US" sz="800" dirty="0"/>
           </a:p>
@@ -8312,8 +8646,47 @@
         </p:nvSpPr>
         <p:spPr>
           <a:xfrm>
+            <a:off x="11137392" y="6510528"/>
+            <a:ext cx="411480" cy="201168"/>
+          </a:xfrm>
+          <a:prstGeom prst="rect">
+            <a:avLst/>
+          </a:prstGeom>
+          <a:noFill/>
+          <a:ln/>
+        </p:spPr>
+        <p:txBody>
+          <a:bodyPr wrap="square" lIns="0" tIns="0" rIns="0" bIns="0" rtlCol="0" anchor="ctr"/>
+          <a:lstStyle/>
+          <a:p>
+            <a:pPr algn="r" indent="0" marL="0">
+              <a:buNone/>
+            </a:pPr>
+            <a:r>
+              <a:rPr lang="en-US" sz="900" dirty="0">
+                <a:solidFill>
+                  <a:srgbClr val="5F7181"/>
+                </a:solidFill>
+                <a:latin typeface="Aptos" pitchFamily="34" charset="0"/>
+                <a:ea typeface="Aptos" pitchFamily="34" charset="-122"/>
+                <a:cs typeface="Aptos" pitchFamily="34" charset="-120"/>
+              </a:rPr>
+              <a:t>19</a:t>
+            </a:r>
+            <a:endParaRPr lang="en-US" sz="900" dirty="0"/>
+          </a:p>
+        </p:txBody>
+      </p:sp>
+      <p:sp>
+        <p:nvSpPr>
+          <p:cNvPr id="8" name="Text 6"/>
+          <p:cNvSpPr/>
+          <p:nvPr/>
+        </p:nvSpPr>
+        <p:spPr>
+          <a:xfrm>
             <a:off x="640080" y="658368"/>
-            <a:ext cx="10881360" cy="566928"/>
+            <a:ext cx="10881360" cy="713232"/>
           </a:xfrm>
           <a:prstGeom prst="rect">
             <a:avLst/>
@@ -8331,7 +8704,7 @@
               <a:buNone/>
             </a:pPr>
             <a:r>
-              <a:rPr lang="en-US" sz="2700" b="1" dirty="0">
+              <a:rPr lang="en-US" sz="3400" b="1" dirty="0">
                 <a:solidFill>
                   <a:srgbClr val="003A63"/>
                 </a:solidFill>
@@ -8341,20 +8714,20 @@
               </a:rPr>
               <a:t>Expected Artifact or Evidence Continued</a:t>
             </a:r>
-            <a:endParaRPr lang="en-US" sz="2700" dirty="0"/>
-          </a:p>
-        </p:txBody>
-      </p:sp>
-      <p:sp>
-        <p:nvSpPr>
-          <p:cNvPr id="8" name="Text 6"/>
-          <p:cNvSpPr/>
-          <p:nvPr/>
-        </p:nvSpPr>
-        <p:spPr>
-          <a:xfrm>
-            <a:off x="868680" y="1417320"/>
-            <a:ext cx="6675120" cy="4434840"/>
+            <a:endParaRPr lang="en-US" sz="3400" dirty="0"/>
+          </a:p>
+        </p:txBody>
+      </p:sp>
+      <p:sp>
+        <p:nvSpPr>
+          <p:cNvPr id="9" name="Text 7"/>
+          <p:cNvSpPr/>
+          <p:nvPr/>
+        </p:nvSpPr>
+        <p:spPr>
+          <a:xfrm>
+            <a:off x="868680" y="1508760"/>
+            <a:ext cx="6537960" cy="4160520"/>
           </a:xfrm>
           <a:prstGeom prst="rect">
             <a:avLst/>
@@ -8369,7 +8742,7 @@
           <a:lstStyle/>
           <a:p>
             <a:r>
-              <a:rPr lang="en-US" sz="1700" dirty="0">
+              <a:rPr lang="en-US" sz="2100" dirty="0">
                 <a:solidFill>
                   <a:srgbClr val="17364A"/>
                 </a:solidFill>
@@ -8379,13 +8752,13 @@
               </a:rPr>
               <a:t>Community context and action plan</a:t>
             </a:r>
-            <a:endParaRPr lang="en-US" sz="1700" dirty="0"/>
-          </a:p>
-        </p:txBody>
-      </p:sp>
-      <p:sp>
-        <p:nvSpPr>
-          <p:cNvPr id="9" name="Shape 7"/>
+            <a:endParaRPr lang="en-US" sz="2100" dirty="0"/>
+          </a:p>
+        </p:txBody>
+      </p:sp>
+      <p:sp>
+        <p:nvSpPr>
+          <p:cNvPr id="10" name="Shape 8"/>
           <p:cNvSpPr/>
           <p:nvPr/>
         </p:nvSpPr>
@@ -8412,14 +8785,14 @@
       </p:sp>
       <p:sp>
         <p:nvSpPr>
-          <p:cNvPr id="10" name="Text 8"/>
+          <p:cNvPr id="11" name="Text 9"/>
           <p:cNvSpPr/>
           <p:nvPr/>
         </p:nvSpPr>
         <p:spPr>
           <a:xfrm>
             <a:off x="8074152" y="1563624"/>
-            <a:ext cx="2825496" cy="201168"/>
+            <a:ext cx="2825496" cy="256032"/>
           </a:xfrm>
           <a:prstGeom prst="rect">
             <a:avLst/>
@@ -8435,7 +8808,7 @@
               <a:buNone/>
             </a:pPr>
             <a:r>
-              <a:rPr lang="en-US" sz="950" b="1" dirty="0">
+              <a:rPr lang="en-US" sz="1300" b="1" dirty="0">
                 <a:solidFill>
                   <a:srgbClr val="0068B7"/>
                 </a:solidFill>
@@ -8445,20 +8818,20 @@
               </a:rPr>
               <a:t>Key idea</a:t>
             </a:r>
-            <a:endParaRPr lang="en-US" sz="950" dirty="0"/>
-          </a:p>
-        </p:txBody>
-      </p:sp>
-      <p:sp>
-        <p:nvSpPr>
-          <p:cNvPr id="11" name="Text 9"/>
-          <p:cNvSpPr/>
-          <p:nvPr/>
-        </p:nvSpPr>
-        <p:spPr>
-          <a:xfrm>
-            <a:off x="8074152" y="1856232"/>
-            <a:ext cx="2825496" cy="1261872"/>
+            <a:endParaRPr lang="en-US" sz="1300" dirty="0"/>
+          </a:p>
+        </p:txBody>
+      </p:sp>
+      <p:sp>
+        <p:nvSpPr>
+          <p:cNvPr id="12" name="Text 10"/>
+          <p:cNvSpPr/>
+          <p:nvPr/>
+        </p:nvSpPr>
+        <p:spPr>
+          <a:xfrm>
+            <a:off x="8074152" y="1920240"/>
+            <a:ext cx="2825496" cy="1188720"/>
           </a:xfrm>
           <a:prstGeom prst="rect">
             <a:avLst/>
@@ -8476,7 +8849,7 @@
               <a:buNone/>
             </a:pPr>
             <a:r>
-              <a:rPr lang="en-US" sz="1250" dirty="0">
+              <a:rPr lang="en-US" sz="1550" dirty="0">
                 <a:solidFill>
                   <a:srgbClr val="17364A"/>
                 </a:solidFill>
@@ -8486,13 +8859,13 @@
               </a:rPr>
               <a:t>Community context and action plan</a:t>
             </a:r>
-            <a:endParaRPr lang="en-US" sz="1250" dirty="0"/>
-          </a:p>
-        </p:txBody>
-      </p:sp>
-      <p:sp>
-        <p:nvSpPr>
-          <p:cNvPr id="12" name="Shape 10"/>
+            <a:endParaRPr lang="en-US" sz="1550" dirty="0"/>
+          </a:p>
+        </p:txBody>
+      </p:sp>
+      <p:sp>
+        <p:nvSpPr>
+          <p:cNvPr id="13" name="Shape 11"/>
           <p:cNvSpPr/>
           <p:nvPr/>
         </p:nvSpPr>
@@ -8519,14 +8892,14 @@
       </p:sp>
       <p:sp>
         <p:nvSpPr>
-          <p:cNvPr id="13" name="Text 11"/>
+          <p:cNvPr id="14" name="Text 12"/>
           <p:cNvSpPr/>
           <p:nvPr/>
         </p:nvSpPr>
         <p:spPr>
           <a:xfrm>
             <a:off x="8074152" y="3666744"/>
-            <a:ext cx="2825496" cy="201168"/>
+            <a:ext cx="2825496" cy="256032"/>
           </a:xfrm>
           <a:prstGeom prst="rect">
             <a:avLst/>
@@ -8542,7 +8915,7 @@
               <a:buNone/>
             </a:pPr>
             <a:r>
-              <a:rPr lang="en-US" sz="950" b="1" dirty="0">
+              <a:rPr lang="en-US" sz="1300" b="1" dirty="0">
                 <a:solidFill>
                   <a:srgbClr val="0068B7"/>
                 </a:solidFill>
@@ -8552,20 +8925,20 @@
               </a:rPr>
               <a:t>Use this for</a:t>
             </a:r>
-            <a:endParaRPr lang="en-US" sz="950" dirty="0"/>
-          </a:p>
-        </p:txBody>
-      </p:sp>
-      <p:sp>
-        <p:nvSpPr>
-          <p:cNvPr id="14" name="Text 12"/>
-          <p:cNvSpPr/>
-          <p:nvPr/>
-        </p:nvSpPr>
-        <p:spPr>
-          <a:xfrm>
-            <a:off x="8074152" y="3959352"/>
-            <a:ext cx="2825496" cy="1170432"/>
+            <a:endParaRPr lang="en-US" sz="1300" dirty="0"/>
+          </a:p>
+        </p:txBody>
+      </p:sp>
+      <p:sp>
+        <p:nvSpPr>
+          <p:cNvPr id="15" name="Text 13"/>
+          <p:cNvSpPr/>
+          <p:nvPr/>
+        </p:nvSpPr>
+        <p:spPr>
+          <a:xfrm>
+            <a:off x="8074152" y="4023360"/>
+            <a:ext cx="2825496" cy="1097280"/>
           </a:xfrm>
           <a:prstGeom prst="rect">
             <a:avLst/>
@@ -8583,7 +8956,7 @@
               <a:buNone/>
             </a:pPr>
             <a:r>
-              <a:rPr lang="en-US" sz="1250" dirty="0">
+              <a:rPr lang="en-US" sz="1550" dirty="0">
                 <a:solidFill>
                   <a:srgbClr val="17364A"/>
                 </a:solidFill>
@@ -8593,7 +8966,7 @@
               </a:rPr>
               <a:t>Connect the concept to public health decisions, safeguards, documentation, or implementation work.</a:t>
             </a:r>
-            <a:endParaRPr lang="en-US" sz="1250" dirty="0"/>
+            <a:endParaRPr lang="en-US" sz="1550" dirty="0"/>
           </a:p>
         </p:txBody>
       </p:sp>
@@ -8790,7 +9163,7 @@
                 <a:ea typeface="Aptos" pitchFamily="34" charset="-122"/>
                 <a:cs typeface="Aptos" pitchFamily="34" charset="-120"/>
               </a:rPr>
-              <a:t>© Paula Soper</a:t>
+              <a:t>Â© Paula Soper</a:t>
             </a:r>
             <a:endParaRPr lang="en-US" sz="800" dirty="0"/>
           </a:p>
@@ -8804,8 +9177,47 @@
         </p:nvSpPr>
         <p:spPr>
           <a:xfrm>
+            <a:off x="11137392" y="6510528"/>
+            <a:ext cx="411480" cy="201168"/>
+          </a:xfrm>
+          <a:prstGeom prst="rect">
+            <a:avLst/>
+          </a:prstGeom>
+          <a:noFill/>
+          <a:ln/>
+        </p:spPr>
+        <p:txBody>
+          <a:bodyPr wrap="square" lIns="0" tIns="0" rIns="0" bIns="0" rtlCol="0" anchor="ctr"/>
+          <a:lstStyle/>
+          <a:p>
+            <a:pPr algn="r" indent="0" marL="0">
+              <a:buNone/>
+            </a:pPr>
+            <a:r>
+              <a:rPr lang="en-US" sz="900" dirty="0">
+                <a:solidFill>
+                  <a:srgbClr val="5F7181"/>
+                </a:solidFill>
+                <a:latin typeface="Aptos" pitchFamily="34" charset="0"/>
+                <a:ea typeface="Aptos" pitchFamily="34" charset="-122"/>
+                <a:cs typeface="Aptos" pitchFamily="34" charset="-120"/>
+              </a:rPr>
+              <a:t>2</a:t>
+            </a:r>
+            <a:endParaRPr lang="en-US" sz="900" dirty="0"/>
+          </a:p>
+        </p:txBody>
+      </p:sp>
+      <p:sp>
+        <p:nvSpPr>
+          <p:cNvPr id="8" name="Text 6"/>
+          <p:cNvSpPr/>
+          <p:nvPr/>
+        </p:nvSpPr>
+        <p:spPr>
+          <a:xfrm>
             <a:off x="640080" y="658368"/>
-            <a:ext cx="10881360" cy="566928"/>
+            <a:ext cx="10881360" cy="713232"/>
           </a:xfrm>
           <a:prstGeom prst="rect">
             <a:avLst/>
@@ -8823,7 +9235,7 @@
               <a:buNone/>
             </a:pPr>
             <a:r>
-              <a:rPr lang="en-US" sz="2700" b="1" dirty="0">
+              <a:rPr lang="en-US" sz="3400" b="1" dirty="0">
                 <a:solidFill>
                   <a:srgbClr val="003A63"/>
                 </a:solidFill>
@@ -8833,20 +9245,20 @@
               </a:rPr>
               <a:t>What this module helps you do</a:t>
             </a:r>
-            <a:endParaRPr lang="en-US" sz="2700" dirty="0"/>
-          </a:p>
-        </p:txBody>
-      </p:sp>
-      <p:sp>
-        <p:nvSpPr>
-          <p:cNvPr id="8" name="Text 6"/>
-          <p:cNvSpPr/>
-          <p:nvPr/>
-        </p:nvSpPr>
-        <p:spPr>
-          <a:xfrm>
-            <a:off x="868680" y="1417320"/>
-            <a:ext cx="6675120" cy="3291840"/>
+            <a:endParaRPr lang="en-US" sz="3400" dirty="0"/>
+          </a:p>
+        </p:txBody>
+      </p:sp>
+      <p:sp>
+        <p:nvSpPr>
+          <p:cNvPr id="9" name="Text 7"/>
+          <p:cNvSpPr/>
+          <p:nvPr/>
+        </p:nvSpPr>
+        <p:spPr>
+          <a:xfrm>
+            <a:off x="868680" y="1508760"/>
+            <a:ext cx="6446520" cy="2926080"/>
           </a:xfrm>
           <a:prstGeom prst="rect">
             <a:avLst/>
@@ -8861,7 +9273,7 @@
           <a:lstStyle/>
           <a:p>
             <a:r>
-              <a:rPr lang="en-US" sz="1700" dirty="0">
+              <a:rPr lang="en-US" sz="2100" dirty="0">
                 <a:solidFill>
                   <a:srgbClr val="17364A"/>
                 </a:solidFill>
@@ -8871,11 +9283,11 @@
               </a:rPr>
               <a:t>Geospatial AI combines spatial data, geographic analysis, and AI methods to identify patterns across place.</a:t>
             </a:r>
-            <a:endParaRPr lang="en-US" sz="1700" dirty="0"/>
-          </a:p>
-          <a:p>
-            <a:r>
-              <a:rPr lang="en-US" sz="1700" dirty="0">
+            <a:endParaRPr lang="en-US" sz="2100" dirty="0"/>
+          </a:p>
+          <a:p>
+            <a:r>
+              <a:rPr lang="en-US" sz="2100" dirty="0">
                 <a:solidFill>
                   <a:srgbClr val="17364A"/>
                 </a:solidFill>
@@ -8883,13 +9295,13 @@
                 <a:ea typeface="Aptos" pitchFamily="34" charset="-122"/>
                 <a:cs typeface="Aptos" pitchFamily="34" charset="-120"/>
               </a:rPr>
-              <a:t>In public health, spatial analysis is already central to outbreak response, environmental health, emergency preparedness, community health.</a:t>
-            </a:r>
-            <a:endParaRPr lang="en-US" sz="1700" dirty="0"/>
-          </a:p>
-          <a:p>
-            <a:r>
-              <a:rPr lang="en-US" sz="1700" dirty="0">
+              <a:t>In public health, spatial analysis is already central to outbreak response, environmental health, emergency.</a:t>
+            </a:r>
+            <a:endParaRPr lang="en-US" sz="2100" dirty="0"/>
+          </a:p>
+          <a:p>
+            <a:r>
+              <a:rPr lang="en-US" sz="2100" dirty="0">
                 <a:solidFill>
                   <a:srgbClr val="17364A"/>
                 </a:solidFill>
@@ -8897,29 +9309,15 @@
                 <a:ea typeface="Aptos" pitchFamily="34" charset="-122"/>
                 <a:cs typeface="Aptos" pitchFamily="34" charset="-120"/>
               </a:rPr>
-              <a:t>AI can strengthen these activities when it helps detect clusters, estimate access barriers, classify imagery, prioritize field work, or synthesize.</a:t>
-            </a:r>
-            <a:endParaRPr lang="en-US" sz="1700" dirty="0"/>
-          </a:p>
-          <a:p>
-            <a:r>
-              <a:rPr lang="en-US" sz="1700" dirty="0">
-                <a:solidFill>
-                  <a:srgbClr val="17364A"/>
-                </a:solidFill>
-                <a:latin typeface="Aptos" pitchFamily="34" charset="0"/>
-                <a:ea typeface="Aptos" pitchFamily="34" charset="-122"/>
-                <a:cs typeface="Aptos" pitchFamily="34" charset="-120"/>
-              </a:rPr>
-              <a:t>This module introduces the technical and governance issues that arise when AI uses location.</a:t>
-            </a:r>
-            <a:endParaRPr lang="en-US" sz="1700" dirty="0"/>
-          </a:p>
-        </p:txBody>
-      </p:sp>
-      <p:sp>
-        <p:nvSpPr>
-          <p:cNvPr id="9" name="Shape 7"/>
+              <a:t>AI can strengthen these activities when it helps detect clusters, estimate access barriers, classify imagery,.</a:t>
+            </a:r>
+            <a:endParaRPr lang="en-US" sz="2100" dirty="0"/>
+          </a:p>
+        </p:txBody>
+      </p:sp>
+      <p:sp>
+        <p:nvSpPr>
+          <p:cNvPr id="10" name="Shape 8"/>
           <p:cNvSpPr/>
           <p:nvPr/>
         </p:nvSpPr>
@@ -8946,14 +9344,14 @@
       </p:sp>
       <p:sp>
         <p:nvSpPr>
-          <p:cNvPr id="10" name="Text 8"/>
+          <p:cNvPr id="11" name="Text 9"/>
           <p:cNvSpPr/>
           <p:nvPr/>
         </p:nvSpPr>
         <p:spPr>
           <a:xfrm>
             <a:off x="8074152" y="1563624"/>
-            <a:ext cx="2825496" cy="201168"/>
+            <a:ext cx="2825496" cy="256032"/>
           </a:xfrm>
           <a:prstGeom prst="rect">
             <a:avLst/>
@@ -8969,7 +9367,7 @@
               <a:buNone/>
             </a:pPr>
             <a:r>
-              <a:rPr lang="en-US" sz="950" b="1" dirty="0">
+              <a:rPr lang="en-US" sz="1300" b="1" dirty="0">
                 <a:solidFill>
                   <a:srgbClr val="0068B7"/>
                 </a:solidFill>
@@ -8979,20 +9377,20 @@
               </a:rPr>
               <a:t>Module details</a:t>
             </a:r>
-            <a:endParaRPr lang="en-US" sz="950" dirty="0"/>
-          </a:p>
-        </p:txBody>
-      </p:sp>
-      <p:sp>
-        <p:nvSpPr>
-          <p:cNvPr id="11" name="Text 9"/>
-          <p:cNvSpPr/>
-          <p:nvPr/>
-        </p:nvSpPr>
-        <p:spPr>
-          <a:xfrm>
-            <a:off x="8074152" y="1856232"/>
-            <a:ext cx="2825496" cy="1353312"/>
+            <a:endParaRPr lang="en-US" sz="1300" dirty="0"/>
+          </a:p>
+        </p:txBody>
+      </p:sp>
+      <p:sp>
+        <p:nvSpPr>
+          <p:cNvPr id="12" name="Text 10"/>
+          <p:cNvSpPr/>
+          <p:nvPr/>
+        </p:nvSpPr>
+        <p:spPr>
+          <a:xfrm>
+            <a:off x="8074152" y="1920240"/>
+            <a:ext cx="2825496" cy="1280160"/>
           </a:xfrm>
           <a:prstGeom prst="rect">
             <a:avLst/>
@@ -9010,7 +9408,7 @@
               <a:buNone/>
             </a:pPr>
             <a:r>
-              <a:rPr lang="en-US" sz="1250" dirty="0">
+              <a:rPr lang="en-US" sz="1550" dirty="0">
                 <a:solidFill>
                   <a:srgbClr val="17364A"/>
                 </a:solidFill>
@@ -9020,14 +9418,14 @@
               </a:rPr>
               <a:t>Level: applied/foundational</a:t>
             </a:r>
-            <a:endParaRPr lang="en-US" sz="1250" dirty="0"/>
+            <a:endParaRPr lang="en-US" sz="1550" dirty="0"/>
           </a:p>
           <a:p>
             <a:pPr indent="0" marL="0">
               <a:buNone/>
             </a:pPr>
             <a:r>
-              <a:rPr lang="en-US" sz="1250" dirty="0">
+              <a:rPr lang="en-US" sz="1550" dirty="0">
                 <a:solidFill>
                   <a:srgbClr val="17364A"/>
                 </a:solidFill>
@@ -9037,14 +9435,14 @@
               </a:rPr>
               <a:t>Primary track: Analytics and Modeling Track</a:t>
             </a:r>
-            <a:endParaRPr lang="en-US" sz="1250" dirty="0"/>
+            <a:endParaRPr lang="en-US" sz="1550" dirty="0"/>
           </a:p>
           <a:p>
             <a:pPr indent="0" marL="0">
               <a:buNone/>
             </a:pPr>
             <a:r>
-              <a:rPr lang="en-US" sz="1250" dirty="0">
+              <a:rPr lang="en-US" sz="1550" dirty="0">
                 <a:solidFill>
                   <a:srgbClr val="17364A"/>
                 </a:solidFill>
@@ -9054,32 +9452,32 @@
               </a:rPr>
               <a:t>Appears in tracks: analytics-modeling</a:t>
             </a:r>
-            <a:endParaRPr lang="en-US" sz="1250" dirty="0"/>
-          </a:p>
-        </p:txBody>
-      </p:sp>
-      <p:sp>
-        <p:nvSpPr>
-          <p:cNvPr id="12" name="Shape 10"/>
-          <p:cNvSpPr/>
-          <p:nvPr/>
-        </p:nvSpPr>
-        <p:spPr>
-          <a:xfrm>
-            <a:off x="7909560" y="3611880"/>
-            <a:ext cx="3154680" cy="1783080"/>
+            <a:endParaRPr lang="en-US" sz="1550" dirty="0"/>
+          </a:p>
+        </p:txBody>
+      </p:sp>
+      <p:sp>
+        <p:nvSpPr>
+          <p:cNvPr id="13" name="Shape 11"/>
+          <p:cNvSpPr/>
+          <p:nvPr/>
+        </p:nvSpPr>
+        <p:spPr>
+          <a:xfrm>
+            <a:off x="7635240" y="3730752"/>
+            <a:ext cx="1033272" cy="749808"/>
           </a:xfrm>
           <a:prstGeom prst="roundRect">
             <a:avLst>
-              <a:gd name="adj" fmla="val 6154"/>
+              <a:gd name="adj" fmla="val 14634"/>
             </a:avLst>
           </a:prstGeom>
           <a:solidFill>
-            <a:srgbClr val="EEF8ED"/>
+            <a:srgbClr val="0068B7"/>
           </a:solidFill>
           <a:ln w="12700">
             <a:solidFill>
-              <a:srgbClr val="B9D7E6"/>
+              <a:srgbClr val="0068B7"/>
             </a:solidFill>
             <a:prstDash val="solid"/>
           </a:ln>
@@ -9087,81 +9485,256 @@
       </p:sp>
       <p:sp>
         <p:nvSpPr>
-          <p:cNvPr id="13" name="Text 11"/>
-          <p:cNvSpPr/>
-          <p:nvPr/>
-        </p:nvSpPr>
-        <p:spPr>
-          <a:xfrm>
-            <a:off x="8074152" y="3758184"/>
-            <a:ext cx="2825496" cy="201168"/>
-          </a:xfrm>
-          <a:prstGeom prst="rect">
-            <a:avLst/>
-          </a:prstGeom>
-          <a:noFill/>
-          <a:ln/>
-        </p:spPr>
-        <p:txBody>
-          <a:bodyPr wrap="square" lIns="0" tIns="0" rIns="0" bIns="0" rtlCol="0" anchor="ctr"/>
-          <a:lstStyle/>
-          <a:p>
-            <a:pPr indent="0" marL="0">
-              <a:buNone/>
-            </a:pPr>
-            <a:r>
-              <a:rPr lang="en-US" sz="950" b="1" dirty="0">
-                <a:solidFill>
-                  <a:srgbClr val="0068B7"/>
-                </a:solidFill>
-                <a:latin typeface="Aptos" pitchFamily="34" charset="0"/>
-                <a:ea typeface="Aptos" pitchFamily="34" charset="-122"/>
-                <a:cs typeface="Aptos" pitchFamily="34" charset="-120"/>
-              </a:rPr>
-              <a:t>Learning approach</a:t>
-            </a:r>
-            <a:endParaRPr lang="en-US" sz="950" dirty="0"/>
-          </a:p>
-        </p:txBody>
-      </p:sp>
-      <p:sp>
-        <p:nvSpPr>
           <p:cNvPr id="14" name="Text 12"/>
           <p:cNvSpPr/>
           <p:nvPr/>
         </p:nvSpPr>
         <p:spPr>
           <a:xfrm>
-            <a:off x="8074152" y="4050792"/>
-            <a:ext cx="2825496" cy="1216152"/>
-          </a:xfrm>
-          <a:prstGeom prst="rect">
-            <a:avLst/>
-          </a:prstGeom>
-          <a:noFill/>
-          <a:ln/>
-        </p:spPr>
-        <p:txBody>
-          <a:bodyPr wrap="square" lIns="0" tIns="0" rIns="0" bIns="0" rtlCol="0" anchor="t">
+            <a:off x="7708392" y="3922776"/>
+            <a:ext cx="886968" cy="310896"/>
+          </a:xfrm>
+          <a:prstGeom prst="rect">
+            <a:avLst/>
+          </a:prstGeom>
+          <a:noFill/>
+          <a:ln/>
+        </p:spPr>
+        <p:txBody>
+          <a:bodyPr wrap="square" lIns="0" tIns="0" rIns="0" bIns="0" rtlCol="0" anchor="ctr">
             <a:normAutofit/>
           </a:bodyPr>
           <a:lstStyle/>
           <a:p>
-            <a:pPr indent="0" marL="0">
-              <a:buNone/>
-            </a:pPr>
-            <a:r>
-              <a:rPr lang="en-US" sz="1250" dirty="0">
-                <a:solidFill>
-                  <a:srgbClr val="17364A"/>
-                </a:solidFill>
-                <a:latin typeface="Aptos" pitchFamily="34" charset="0"/>
-                <a:ea typeface="Aptos" pitchFamily="34" charset="-122"/>
-                <a:cs typeface="Aptos" pitchFamily="34" charset="-120"/>
-              </a:rPr>
-              <a:t>Review the core ideas, complete the practical exercise, check your understanding, and use the related plays and tools to apply the lesson.</a:t>
-            </a:r>
-            <a:endParaRPr lang="en-US" sz="1250" dirty="0"/>
+            <a:pPr algn="ctr" indent="0" marL="0">
+              <a:buNone/>
+            </a:pPr>
+            <a:r>
+              <a:rPr lang="en-US" sz="1500" b="1" dirty="0">
+                <a:solidFill>
+                  <a:srgbClr val="FFFFFF"/>
+                </a:solidFill>
+                <a:latin typeface="Aptos" pitchFamily="34" charset="0"/>
+                <a:ea typeface="Aptos" pitchFamily="34" charset="-122"/>
+                <a:cs typeface="Aptos" pitchFamily="34" charset="-120"/>
+              </a:rPr>
+              <a:t>Learn</a:t>
+            </a:r>
+            <a:endParaRPr lang="en-US" sz="1500" dirty="0"/>
+          </a:p>
+        </p:txBody>
+      </p:sp>
+      <p:sp>
+        <p:nvSpPr>
+          <p:cNvPr id="15" name="Text 13"/>
+          <p:cNvSpPr/>
+          <p:nvPr/>
+        </p:nvSpPr>
+        <p:spPr>
+          <a:xfrm>
+            <a:off x="8695944" y="3941064"/>
+            <a:ext cx="201168" cy="256032"/>
+          </a:xfrm>
+          <a:prstGeom prst="rect">
+            <a:avLst/>
+          </a:prstGeom>
+          <a:noFill/>
+          <a:ln/>
+        </p:spPr>
+        <p:txBody>
+          <a:bodyPr wrap="square" lIns="0" tIns="0" rIns="0" bIns="0" rtlCol="0" anchor="ctr"/>
+          <a:lstStyle/>
+          <a:p>
+            <a:pPr algn="ctr" indent="0" marL="0">
+              <a:buNone/>
+            </a:pPr>
+            <a:r>
+              <a:rPr lang="en-US" sz="1800" b="1" dirty="0">
+                <a:solidFill>
+                  <a:srgbClr val="0068B7"/>
+                </a:solidFill>
+                <a:latin typeface="Aptos" pitchFamily="34" charset="0"/>
+                <a:ea typeface="Aptos" pitchFamily="34" charset="-122"/>
+                <a:cs typeface="Aptos" pitchFamily="34" charset="-120"/>
+              </a:rPr>
+              <a:t>â†’</a:t>
+            </a:r>
+            <a:endParaRPr lang="en-US" sz="1800" dirty="0"/>
+          </a:p>
+        </p:txBody>
+      </p:sp>
+      <p:sp>
+        <p:nvSpPr>
+          <p:cNvPr id="16" name="Shape 14"/>
+          <p:cNvSpPr/>
+          <p:nvPr/>
+        </p:nvSpPr>
+        <p:spPr>
+          <a:xfrm>
+            <a:off x="8924544" y="3730752"/>
+            <a:ext cx="1033272" cy="749808"/>
+          </a:xfrm>
+          <a:prstGeom prst="roundRect">
+            <a:avLst>
+              <a:gd name="adj" fmla="val 14634"/>
+            </a:avLst>
+          </a:prstGeom>
+          <a:solidFill>
+            <a:srgbClr val="2F8A28"/>
+          </a:solidFill>
+          <a:ln w="12700">
+            <a:solidFill>
+              <a:srgbClr val="2F8A28"/>
+            </a:solidFill>
+            <a:prstDash val="solid"/>
+          </a:ln>
+        </p:spPr>
+      </p:sp>
+      <p:sp>
+        <p:nvSpPr>
+          <p:cNvPr id="17" name="Text 15"/>
+          <p:cNvSpPr/>
+          <p:nvPr/>
+        </p:nvSpPr>
+        <p:spPr>
+          <a:xfrm>
+            <a:off x="8997696" y="3922776"/>
+            <a:ext cx="886968" cy="310896"/>
+          </a:xfrm>
+          <a:prstGeom prst="rect">
+            <a:avLst/>
+          </a:prstGeom>
+          <a:noFill/>
+          <a:ln/>
+        </p:spPr>
+        <p:txBody>
+          <a:bodyPr wrap="square" lIns="0" tIns="0" rIns="0" bIns="0" rtlCol="0" anchor="ctr">
+            <a:normAutofit/>
+          </a:bodyPr>
+          <a:lstStyle/>
+          <a:p>
+            <a:pPr algn="ctr" indent="0" marL="0">
+              <a:buNone/>
+            </a:pPr>
+            <a:r>
+              <a:rPr lang="en-US" sz="1500" b="1" dirty="0">
+                <a:solidFill>
+                  <a:srgbClr val="FFFFFF"/>
+                </a:solidFill>
+                <a:latin typeface="Aptos" pitchFamily="34" charset="0"/>
+                <a:ea typeface="Aptos" pitchFamily="34" charset="-122"/>
+                <a:cs typeface="Aptos" pitchFamily="34" charset="-120"/>
+              </a:rPr>
+              <a:t>Apply</a:t>
+            </a:r>
+            <a:endParaRPr lang="en-US" sz="1500" dirty="0"/>
+          </a:p>
+        </p:txBody>
+      </p:sp>
+      <p:sp>
+        <p:nvSpPr>
+          <p:cNvPr id="18" name="Text 16"/>
+          <p:cNvSpPr/>
+          <p:nvPr/>
+        </p:nvSpPr>
+        <p:spPr>
+          <a:xfrm>
+            <a:off x="9985248" y="3941064"/>
+            <a:ext cx="201168" cy="256032"/>
+          </a:xfrm>
+          <a:prstGeom prst="rect">
+            <a:avLst/>
+          </a:prstGeom>
+          <a:noFill/>
+          <a:ln/>
+        </p:spPr>
+        <p:txBody>
+          <a:bodyPr wrap="square" lIns="0" tIns="0" rIns="0" bIns="0" rtlCol="0" anchor="ctr"/>
+          <a:lstStyle/>
+          <a:p>
+            <a:pPr algn="ctr" indent="0" marL="0">
+              <a:buNone/>
+            </a:pPr>
+            <a:r>
+              <a:rPr lang="en-US" sz="1800" b="1" dirty="0">
+                <a:solidFill>
+                  <a:srgbClr val="0068B7"/>
+                </a:solidFill>
+                <a:latin typeface="Aptos" pitchFamily="34" charset="0"/>
+                <a:ea typeface="Aptos" pitchFamily="34" charset="-122"/>
+                <a:cs typeface="Aptos" pitchFamily="34" charset="-120"/>
+              </a:rPr>
+              <a:t>â†’</a:t>
+            </a:r>
+            <a:endParaRPr lang="en-US" sz="1800" dirty="0"/>
+          </a:p>
+        </p:txBody>
+      </p:sp>
+      <p:sp>
+        <p:nvSpPr>
+          <p:cNvPr id="19" name="Shape 17"/>
+          <p:cNvSpPr/>
+          <p:nvPr/>
+        </p:nvSpPr>
+        <p:spPr>
+          <a:xfrm>
+            <a:off x="10213848" y="3730752"/>
+            <a:ext cx="1033272" cy="749808"/>
+          </a:xfrm>
+          <a:prstGeom prst="roundRect">
+            <a:avLst>
+              <a:gd name="adj" fmla="val 14634"/>
+            </a:avLst>
+          </a:prstGeom>
+          <a:solidFill>
+            <a:srgbClr val="6A4CA3"/>
+          </a:solidFill>
+          <a:ln w="12700">
+            <a:solidFill>
+              <a:srgbClr val="6A4CA3"/>
+            </a:solidFill>
+            <a:prstDash val="solid"/>
+          </a:ln>
+        </p:spPr>
+      </p:sp>
+      <p:sp>
+        <p:nvSpPr>
+          <p:cNvPr id="20" name="Text 18"/>
+          <p:cNvSpPr/>
+          <p:nvPr/>
+        </p:nvSpPr>
+        <p:spPr>
+          <a:xfrm>
+            <a:off x="10287000" y="3922776"/>
+            <a:ext cx="886968" cy="310896"/>
+          </a:xfrm>
+          <a:prstGeom prst="rect">
+            <a:avLst/>
+          </a:prstGeom>
+          <a:noFill/>
+          <a:ln/>
+        </p:spPr>
+        <p:txBody>
+          <a:bodyPr wrap="square" lIns="0" tIns="0" rIns="0" bIns="0" rtlCol="0" anchor="ctr">
+            <a:normAutofit/>
+          </a:bodyPr>
+          <a:lstStyle/>
+          <a:p>
+            <a:pPr algn="ctr" indent="0" marL="0">
+              <a:buNone/>
+            </a:pPr>
+            <a:r>
+              <a:rPr lang="en-US" sz="1500" b="1" dirty="0">
+                <a:solidFill>
+                  <a:srgbClr val="FFFFFF"/>
+                </a:solidFill>
+                <a:latin typeface="Aptos" pitchFamily="34" charset="0"/>
+                <a:ea typeface="Aptos" pitchFamily="34" charset="-122"/>
+                <a:cs typeface="Aptos" pitchFamily="34" charset="-120"/>
+              </a:rPr>
+              <a:t>Document</a:t>
+            </a:r>
+            <a:endParaRPr lang="en-US" sz="1500" dirty="0"/>
           </a:p>
         </p:txBody>
       </p:sp>
@@ -9358,7 +9931,7 @@
                 <a:ea typeface="Aptos" pitchFamily="34" charset="-122"/>
                 <a:cs typeface="Aptos" pitchFamily="34" charset="-120"/>
               </a:rPr>
-              <a:t>© Paula Soper</a:t>
+              <a:t>Â© Paula Soper</a:t>
             </a:r>
             <a:endParaRPr lang="en-US" sz="800" dirty="0"/>
           </a:p>
@@ -9366,7 +9939,46 @@
       </p:sp>
       <p:sp>
         <p:nvSpPr>
-          <p:cNvPr id="7" name="Shape 5"/>
+          <p:cNvPr id="7" name="Text 5"/>
+          <p:cNvSpPr/>
+          <p:nvPr/>
+        </p:nvSpPr>
+        <p:spPr>
+          <a:xfrm>
+            <a:off x="11137392" y="6510528"/>
+            <a:ext cx="411480" cy="201168"/>
+          </a:xfrm>
+          <a:prstGeom prst="rect">
+            <a:avLst/>
+          </a:prstGeom>
+          <a:noFill/>
+          <a:ln/>
+        </p:spPr>
+        <p:txBody>
+          <a:bodyPr wrap="square" lIns="0" tIns="0" rIns="0" bIns="0" rtlCol="0" anchor="ctr"/>
+          <a:lstStyle/>
+          <a:p>
+            <a:pPr algn="r" indent="0" marL="0">
+              <a:buNone/>
+            </a:pPr>
+            <a:r>
+              <a:rPr lang="en-US" sz="900" dirty="0">
+                <a:solidFill>
+                  <a:srgbClr val="5F7181"/>
+                </a:solidFill>
+                <a:latin typeface="Aptos" pitchFamily="34" charset="0"/>
+                <a:ea typeface="Aptos" pitchFamily="34" charset="-122"/>
+                <a:cs typeface="Aptos" pitchFamily="34" charset="-120"/>
+              </a:rPr>
+              <a:t>20</a:t>
+            </a:r>
+            <a:endParaRPr lang="en-US" sz="900" dirty="0"/>
+          </a:p>
+        </p:txBody>
+      </p:sp>
+      <p:sp>
+        <p:nvSpPr>
+          <p:cNvPr id="8" name="Shape 6"/>
           <p:cNvSpPr/>
           <p:nvPr/>
         </p:nvSpPr>
@@ -9391,7 +10003,7 @@
       </p:sp>
       <p:sp>
         <p:nvSpPr>
-          <p:cNvPr id="8" name="Text 6"/>
+          <p:cNvPr id="9" name="Text 7"/>
           <p:cNvSpPr/>
           <p:nvPr/>
         </p:nvSpPr>
@@ -9430,14 +10042,14 @@
       </p:sp>
       <p:sp>
         <p:nvSpPr>
-          <p:cNvPr id="9" name="Text 7"/>
+          <p:cNvPr id="10" name="Text 8"/>
           <p:cNvSpPr/>
           <p:nvPr/>
         </p:nvSpPr>
         <p:spPr>
           <a:xfrm>
             <a:off x="640080" y="621792"/>
-            <a:ext cx="10881360" cy="566928"/>
+            <a:ext cx="10881360" cy="713232"/>
           </a:xfrm>
           <a:prstGeom prst="rect">
             <a:avLst/>
@@ -9455,7 +10067,7 @@
               <a:buNone/>
             </a:pPr>
             <a:r>
-              <a:rPr lang="en-US" sz="2700" b="1" dirty="0">
+              <a:rPr lang="en-US" sz="3400" b="1" dirty="0">
                 <a:solidFill>
                   <a:srgbClr val="003A63"/>
                 </a:solidFill>
@@ -9465,20 +10077,20 @@
               </a:rPr>
               <a:t>Expected Assignment</a:t>
             </a:r>
-            <a:endParaRPr lang="en-US" sz="2700" dirty="0"/>
-          </a:p>
-        </p:txBody>
-      </p:sp>
-      <p:sp>
-        <p:nvSpPr>
-          <p:cNvPr id="10" name="Text 8"/>
-          <p:cNvSpPr/>
-          <p:nvPr/>
-        </p:nvSpPr>
-        <p:spPr>
-          <a:xfrm>
-            <a:off x="868680" y="1417320"/>
-            <a:ext cx="6675120" cy="4434840"/>
+            <a:endParaRPr lang="en-US" sz="3400" dirty="0"/>
+          </a:p>
+        </p:txBody>
+      </p:sp>
+      <p:sp>
+        <p:nvSpPr>
+          <p:cNvPr id="11" name="Text 9"/>
+          <p:cNvSpPr/>
+          <p:nvPr/>
+        </p:nvSpPr>
+        <p:spPr>
+          <a:xfrm>
+            <a:off x="868680" y="1508760"/>
+            <a:ext cx="6537960" cy="4160520"/>
           </a:xfrm>
           <a:prstGeom prst="rect">
             <a:avLst/>
@@ -9493,7 +10105,7 @@
           <a:lstStyle/>
           <a:p>
             <a:r>
-              <a:rPr lang="en-US" sz="1700" dirty="0">
+              <a:rPr lang="en-US" sz="2100" dirty="0">
                 <a:solidFill>
                   <a:srgbClr val="17364A"/>
                 </a:solidFill>
@@ -9503,11 +10115,11 @@
               </a:rPr>
               <a:t>Geospatial AI readiness worksheet</a:t>
             </a:r>
-            <a:endParaRPr lang="en-US" sz="1700" dirty="0"/>
-          </a:p>
-          <a:p>
-            <a:r>
-              <a:rPr lang="en-US" sz="1700" dirty="0">
+            <a:endParaRPr lang="en-US" sz="2100" dirty="0"/>
+          </a:p>
+          <a:p>
+            <a:r>
+              <a:rPr lang="en-US" sz="2100" dirty="0">
                 <a:solidFill>
                   <a:srgbClr val="17364A"/>
                 </a:solidFill>
@@ -9517,11 +10129,11 @@
               </a:rPr>
               <a:t>Map interpretation and limitations memo</a:t>
             </a:r>
-            <a:endParaRPr lang="en-US" sz="1700" dirty="0"/>
-          </a:p>
-          <a:p>
-            <a:r>
-              <a:rPr lang="en-US" sz="1700" dirty="0">
+            <a:endParaRPr lang="en-US" sz="2100" dirty="0"/>
+          </a:p>
+          <a:p>
+            <a:r>
+              <a:rPr lang="en-US" sz="2100" dirty="0">
                 <a:solidFill>
                   <a:srgbClr val="17364A"/>
                 </a:solidFill>
@@ -9531,27 +10143,13 @@
               </a:rPr>
               <a:t>Privacy and suppression review notes</a:t>
             </a:r>
-            <a:endParaRPr lang="en-US" sz="1700" dirty="0"/>
-          </a:p>
-          <a:p>
-            <a:r>
-              <a:rPr lang="en-US" sz="1700" dirty="0">
-                <a:solidFill>
-                  <a:srgbClr val="17364A"/>
-                </a:solidFill>
-                <a:latin typeface="Aptos" pitchFamily="34" charset="0"/>
-                <a:ea typeface="Aptos" pitchFamily="34" charset="-122"/>
-                <a:cs typeface="Aptos" pitchFamily="34" charset="-120"/>
-              </a:rPr>
-              <a:t>Community context and action plan</a:t>
-            </a:r>
-            <a:endParaRPr lang="en-US" sz="1700" dirty="0"/>
-          </a:p>
-        </p:txBody>
-      </p:sp>
-      <p:sp>
-        <p:nvSpPr>
-          <p:cNvPr id="11" name="Shape 9"/>
+            <a:endParaRPr lang="en-US" sz="2100" dirty="0"/>
+          </a:p>
+        </p:txBody>
+      </p:sp>
+      <p:sp>
+        <p:nvSpPr>
+          <p:cNvPr id="12" name="Shape 10"/>
           <p:cNvSpPr/>
           <p:nvPr/>
         </p:nvSpPr>
@@ -9578,14 +10176,14 @@
       </p:sp>
       <p:sp>
         <p:nvSpPr>
-          <p:cNvPr id="12" name="Text 10"/>
+          <p:cNvPr id="13" name="Text 11"/>
           <p:cNvSpPr/>
           <p:nvPr/>
         </p:nvSpPr>
         <p:spPr>
           <a:xfrm>
             <a:off x="8074152" y="1563624"/>
-            <a:ext cx="2825496" cy="201168"/>
+            <a:ext cx="2825496" cy="256032"/>
           </a:xfrm>
           <a:prstGeom prst="rect">
             <a:avLst/>
@@ -9601,7 +10199,7 @@
               <a:buNone/>
             </a:pPr>
             <a:r>
-              <a:rPr lang="en-US" sz="950" b="1" dirty="0">
+              <a:rPr lang="en-US" sz="1300" b="1" dirty="0">
                 <a:solidFill>
                   <a:srgbClr val="0068B7"/>
                 </a:solidFill>
@@ -9611,20 +10209,20 @@
               </a:rPr>
               <a:t>Key idea</a:t>
             </a:r>
-            <a:endParaRPr lang="en-US" sz="950" dirty="0"/>
-          </a:p>
-        </p:txBody>
-      </p:sp>
-      <p:sp>
-        <p:nvSpPr>
-          <p:cNvPr id="13" name="Text 11"/>
-          <p:cNvSpPr/>
-          <p:nvPr/>
-        </p:nvSpPr>
-        <p:spPr>
-          <a:xfrm>
-            <a:off x="8074152" y="1856232"/>
-            <a:ext cx="2825496" cy="1261872"/>
+            <a:endParaRPr lang="en-US" sz="1300" dirty="0"/>
+          </a:p>
+        </p:txBody>
+      </p:sp>
+      <p:sp>
+        <p:nvSpPr>
+          <p:cNvPr id="14" name="Text 12"/>
+          <p:cNvSpPr/>
+          <p:nvPr/>
+        </p:nvSpPr>
+        <p:spPr>
+          <a:xfrm>
+            <a:off x="8074152" y="1920240"/>
+            <a:ext cx="2825496" cy="1188720"/>
           </a:xfrm>
           <a:prstGeom prst="rect">
             <a:avLst/>
@@ -9642,7 +10240,7 @@
               <a:buNone/>
             </a:pPr>
             <a:r>
-              <a:rPr lang="en-US" sz="1250" dirty="0">
+              <a:rPr lang="en-US" sz="1550" dirty="0">
                 <a:solidFill>
                   <a:srgbClr val="17364A"/>
                 </a:solidFill>
@@ -9652,13 +10250,13 @@
               </a:rPr>
               <a:t>Geospatial AI readiness worksheet</a:t>
             </a:r>
-            <a:endParaRPr lang="en-US" sz="1250" dirty="0"/>
-          </a:p>
-        </p:txBody>
-      </p:sp>
-      <p:sp>
-        <p:nvSpPr>
-          <p:cNvPr id="14" name="Shape 12"/>
+            <a:endParaRPr lang="en-US" sz="1550" dirty="0"/>
+          </a:p>
+        </p:txBody>
+      </p:sp>
+      <p:sp>
+        <p:nvSpPr>
+          <p:cNvPr id="15" name="Shape 13"/>
           <p:cNvSpPr/>
           <p:nvPr/>
         </p:nvSpPr>
@@ -9685,14 +10283,14 @@
       </p:sp>
       <p:sp>
         <p:nvSpPr>
-          <p:cNvPr id="15" name="Text 13"/>
+          <p:cNvPr id="16" name="Text 14"/>
           <p:cNvSpPr/>
           <p:nvPr/>
         </p:nvSpPr>
         <p:spPr>
           <a:xfrm>
             <a:off x="8074152" y="3666744"/>
-            <a:ext cx="2825496" cy="201168"/>
+            <a:ext cx="2825496" cy="256032"/>
           </a:xfrm>
           <a:prstGeom prst="rect">
             <a:avLst/>
@@ -9708,7 +10306,7 @@
               <a:buNone/>
             </a:pPr>
             <a:r>
-              <a:rPr lang="en-US" sz="950" b="1" dirty="0">
+              <a:rPr lang="en-US" sz="1300" b="1" dirty="0">
                 <a:solidFill>
                   <a:srgbClr val="0068B7"/>
                 </a:solidFill>
@@ -9718,20 +10316,20 @@
               </a:rPr>
               <a:t>Use this for</a:t>
             </a:r>
-            <a:endParaRPr lang="en-US" sz="950" dirty="0"/>
-          </a:p>
-        </p:txBody>
-      </p:sp>
-      <p:sp>
-        <p:nvSpPr>
-          <p:cNvPr id="16" name="Text 14"/>
-          <p:cNvSpPr/>
-          <p:nvPr/>
-        </p:nvSpPr>
-        <p:spPr>
-          <a:xfrm>
-            <a:off x="8074152" y="3959352"/>
-            <a:ext cx="2825496" cy="1170432"/>
+            <a:endParaRPr lang="en-US" sz="1300" dirty="0"/>
+          </a:p>
+        </p:txBody>
+      </p:sp>
+      <p:sp>
+        <p:nvSpPr>
+          <p:cNvPr id="17" name="Text 15"/>
+          <p:cNvSpPr/>
+          <p:nvPr/>
+        </p:nvSpPr>
+        <p:spPr>
+          <a:xfrm>
+            <a:off x="8074152" y="4023360"/>
+            <a:ext cx="2825496" cy="1097280"/>
           </a:xfrm>
           <a:prstGeom prst="rect">
             <a:avLst/>
@@ -9749,7 +10347,7 @@
               <a:buNone/>
             </a:pPr>
             <a:r>
-              <a:rPr lang="en-US" sz="1250" dirty="0">
+              <a:rPr lang="en-US" sz="1550" dirty="0">
                 <a:solidFill>
                   <a:srgbClr val="17364A"/>
                 </a:solidFill>
@@ -9759,7 +10357,7 @@
               </a:rPr>
               <a:t>Connect the concept to public health decisions, safeguards, documentation, or implementation work.</a:t>
             </a:r>
-            <a:endParaRPr lang="en-US" sz="1250" dirty="0"/>
+            <a:endParaRPr lang="en-US" sz="1550" dirty="0"/>
           </a:p>
         </p:txBody>
       </p:sp>
@@ -9956,7 +10554,7 @@
                 <a:ea typeface="Aptos" pitchFamily="34" charset="-122"/>
                 <a:cs typeface="Aptos" pitchFamily="34" charset="-120"/>
               </a:rPr>
-              <a:t>© Paula Soper</a:t>
+              <a:t>Â© Paula Soper</a:t>
             </a:r>
             <a:endParaRPr lang="en-US" sz="800" dirty="0"/>
           </a:p>
@@ -9964,7 +10562,46 @@
       </p:sp>
       <p:sp>
         <p:nvSpPr>
-          <p:cNvPr id="7" name="Shape 5"/>
+          <p:cNvPr id="7" name="Text 5"/>
+          <p:cNvSpPr/>
+          <p:nvPr/>
+        </p:nvSpPr>
+        <p:spPr>
+          <a:xfrm>
+            <a:off x="11137392" y="6510528"/>
+            <a:ext cx="411480" cy="201168"/>
+          </a:xfrm>
+          <a:prstGeom prst="rect">
+            <a:avLst/>
+          </a:prstGeom>
+          <a:noFill/>
+          <a:ln/>
+        </p:spPr>
+        <p:txBody>
+          <a:bodyPr wrap="square" lIns="0" tIns="0" rIns="0" bIns="0" rtlCol="0" anchor="ctr"/>
+          <a:lstStyle/>
+          <a:p>
+            <a:pPr algn="r" indent="0" marL="0">
+              <a:buNone/>
+            </a:pPr>
+            <a:r>
+              <a:rPr lang="en-US" sz="900" dirty="0">
+                <a:solidFill>
+                  <a:srgbClr val="5F7181"/>
+                </a:solidFill>
+                <a:latin typeface="Aptos" pitchFamily="34" charset="0"/>
+                <a:ea typeface="Aptos" pitchFamily="34" charset="-122"/>
+                <a:cs typeface="Aptos" pitchFamily="34" charset="-120"/>
+              </a:rPr>
+              <a:t>21</a:t>
+            </a:r>
+            <a:endParaRPr lang="en-US" sz="900" dirty="0"/>
+          </a:p>
+        </p:txBody>
+      </p:sp>
+      <p:sp>
+        <p:nvSpPr>
+          <p:cNvPr id="8" name="Shape 6"/>
           <p:cNvSpPr/>
           <p:nvPr/>
         </p:nvSpPr>
@@ -9989,7 +10626,7 @@
       </p:sp>
       <p:sp>
         <p:nvSpPr>
-          <p:cNvPr id="8" name="Text 6"/>
+          <p:cNvPr id="9" name="Text 7"/>
           <p:cNvSpPr/>
           <p:nvPr/>
         </p:nvSpPr>
@@ -10028,14 +10665,14 @@
       </p:sp>
       <p:sp>
         <p:nvSpPr>
-          <p:cNvPr id="9" name="Text 7"/>
+          <p:cNvPr id="10" name="Text 8"/>
           <p:cNvSpPr/>
           <p:nvPr/>
         </p:nvSpPr>
         <p:spPr>
           <a:xfrm>
             <a:off x="640080" y="621792"/>
-            <a:ext cx="10881360" cy="566928"/>
+            <a:ext cx="10881360" cy="713232"/>
           </a:xfrm>
           <a:prstGeom prst="rect">
             <a:avLst/>
@@ -10053,7 +10690,7 @@
               <a:buNone/>
             </a:pPr>
             <a:r>
-              <a:rPr lang="en-US" sz="2700" b="1" dirty="0">
+              <a:rPr lang="en-US" sz="3400" b="1" dirty="0">
                 <a:solidFill>
                   <a:srgbClr val="003A63"/>
                 </a:solidFill>
@@ -10063,20 +10700,20 @@
               </a:rPr>
               <a:t>Knowledge Check</a:t>
             </a:r>
-            <a:endParaRPr lang="en-US" sz="2700" dirty="0"/>
-          </a:p>
-        </p:txBody>
-      </p:sp>
-      <p:sp>
-        <p:nvSpPr>
-          <p:cNvPr id="10" name="Text 8"/>
-          <p:cNvSpPr/>
-          <p:nvPr/>
-        </p:nvSpPr>
-        <p:spPr>
-          <a:xfrm>
-            <a:off x="868680" y="1417320"/>
-            <a:ext cx="6675120" cy="4434840"/>
+            <a:endParaRPr lang="en-US" sz="3400" dirty="0"/>
+          </a:p>
+        </p:txBody>
+      </p:sp>
+      <p:sp>
+        <p:nvSpPr>
+          <p:cNvPr id="11" name="Text 9"/>
+          <p:cNvSpPr/>
+          <p:nvPr/>
+        </p:nvSpPr>
+        <p:spPr>
+          <a:xfrm>
+            <a:off x="868680" y="1508760"/>
+            <a:ext cx="6537960" cy="4160520"/>
           </a:xfrm>
           <a:prstGeom prst="rect">
             <a:avLst/>
@@ -10091,7 +10728,7 @@
           <a:lstStyle/>
           <a:p>
             <a:r>
-              <a:rPr lang="en-US" sz="1700" dirty="0">
+              <a:rPr lang="en-US" sz="2100" dirty="0">
                 <a:solidFill>
                   <a:srgbClr val="17364A"/>
                 </a:solidFill>
@@ -10101,11 +10738,11 @@
               </a:rPr>
               <a:t>1. What is geocoding?</a:t>
             </a:r>
-            <a:endParaRPr lang="en-US" sz="1700" dirty="0"/>
-          </a:p>
-          <a:p>
-            <a:r>
-              <a:rPr lang="en-US" sz="1700" dirty="0">
+            <a:endParaRPr lang="en-US" sz="2100" dirty="0"/>
+          </a:p>
+          <a:p>
+            <a:r>
+              <a:rPr lang="en-US" sz="2100" dirty="0">
                 <a:solidFill>
                   <a:srgbClr val="17364A"/>
                 </a:solidFill>
@@ -10115,11 +10752,11 @@
               </a:rPr>
               <a:t>2. Why can maps create misleading impressions?</a:t>
             </a:r>
-            <a:endParaRPr lang="en-US" sz="1700" dirty="0"/>
-          </a:p>
-          <a:p>
-            <a:r>
-              <a:rPr lang="en-US" sz="1700" dirty="0">
+            <a:endParaRPr lang="en-US" sz="2100" dirty="0"/>
+          </a:p>
+          <a:p>
+            <a:r>
+              <a:rPr lang="en-US" sz="2100" dirty="0">
                 <a:solidFill>
                   <a:srgbClr val="17364A"/>
                 </a:solidFill>
@@ -10129,27 +10766,13 @@
               </a:rPr>
               <a:t>3. What is the modifiable areal unit problem?</a:t>
             </a:r>
-            <a:endParaRPr lang="en-US" sz="1700" dirty="0"/>
-          </a:p>
-          <a:p>
-            <a:r>
-              <a:rPr lang="en-US" sz="1700" dirty="0">
-                <a:solidFill>
-                  <a:srgbClr val="17364A"/>
-                </a:solidFill>
-                <a:latin typeface="Aptos" pitchFamily="34" charset="0"/>
-                <a:ea typeface="Aptos" pitchFamily="34" charset="-122"/>
-                <a:cs typeface="Aptos" pitchFamily="34" charset="-120"/>
-              </a:rPr>
-              <a:t>4. Which safeguard is appropriate before publishing a small-area health map?</a:t>
-            </a:r>
-            <a:endParaRPr lang="en-US" sz="1700" dirty="0"/>
-          </a:p>
-        </p:txBody>
-      </p:sp>
-      <p:sp>
-        <p:nvSpPr>
-          <p:cNvPr id="11" name="Shape 9"/>
+            <a:endParaRPr lang="en-US" sz="2100" dirty="0"/>
+          </a:p>
+        </p:txBody>
+      </p:sp>
+      <p:sp>
+        <p:nvSpPr>
+          <p:cNvPr id="12" name="Shape 10"/>
           <p:cNvSpPr/>
           <p:nvPr/>
         </p:nvSpPr>
@@ -10176,14 +10799,14 @@
       </p:sp>
       <p:sp>
         <p:nvSpPr>
-          <p:cNvPr id="12" name="Text 10"/>
+          <p:cNvPr id="13" name="Text 11"/>
           <p:cNvSpPr/>
           <p:nvPr/>
         </p:nvSpPr>
         <p:spPr>
           <a:xfrm>
             <a:off x="8074152" y="1563624"/>
-            <a:ext cx="2825496" cy="201168"/>
+            <a:ext cx="2825496" cy="256032"/>
           </a:xfrm>
           <a:prstGeom prst="rect">
             <a:avLst/>
@@ -10199,7 +10822,7 @@
               <a:buNone/>
             </a:pPr>
             <a:r>
-              <a:rPr lang="en-US" sz="950" b="1" dirty="0">
+              <a:rPr lang="en-US" sz="1300" b="1" dirty="0">
                 <a:solidFill>
                   <a:srgbClr val="0068B7"/>
                 </a:solidFill>
@@ -10209,20 +10832,20 @@
               </a:rPr>
               <a:t>Key idea</a:t>
             </a:r>
-            <a:endParaRPr lang="en-US" sz="950" dirty="0"/>
-          </a:p>
-        </p:txBody>
-      </p:sp>
-      <p:sp>
-        <p:nvSpPr>
-          <p:cNvPr id="13" name="Text 11"/>
-          <p:cNvSpPr/>
-          <p:nvPr/>
-        </p:nvSpPr>
-        <p:spPr>
-          <a:xfrm>
-            <a:off x="8074152" y="1856232"/>
-            <a:ext cx="2825496" cy="1261872"/>
+            <a:endParaRPr lang="en-US" sz="1300" dirty="0"/>
+          </a:p>
+        </p:txBody>
+      </p:sp>
+      <p:sp>
+        <p:nvSpPr>
+          <p:cNvPr id="14" name="Text 12"/>
+          <p:cNvSpPr/>
+          <p:nvPr/>
+        </p:nvSpPr>
+        <p:spPr>
+          <a:xfrm>
+            <a:off x="8074152" y="1920240"/>
+            <a:ext cx="2825496" cy="1188720"/>
           </a:xfrm>
           <a:prstGeom prst="rect">
             <a:avLst/>
@@ -10240,7 +10863,7 @@
               <a:buNone/>
             </a:pPr>
             <a:r>
-              <a:rPr lang="en-US" sz="1250" dirty="0">
+              <a:rPr lang="en-US" sz="1550" dirty="0">
                 <a:solidFill>
                   <a:srgbClr val="17364A"/>
                 </a:solidFill>
@@ -10250,13 +10873,13 @@
               </a:rPr>
               <a:t>1. What is geocoding?</a:t>
             </a:r>
-            <a:endParaRPr lang="en-US" sz="1250" dirty="0"/>
-          </a:p>
-        </p:txBody>
-      </p:sp>
-      <p:sp>
-        <p:nvSpPr>
-          <p:cNvPr id="14" name="Shape 12"/>
+            <a:endParaRPr lang="en-US" sz="1550" dirty="0"/>
+          </a:p>
+        </p:txBody>
+      </p:sp>
+      <p:sp>
+        <p:nvSpPr>
+          <p:cNvPr id="15" name="Shape 13"/>
           <p:cNvSpPr/>
           <p:nvPr/>
         </p:nvSpPr>
@@ -10283,14 +10906,14 @@
       </p:sp>
       <p:sp>
         <p:nvSpPr>
-          <p:cNvPr id="15" name="Text 13"/>
+          <p:cNvPr id="16" name="Text 14"/>
           <p:cNvSpPr/>
           <p:nvPr/>
         </p:nvSpPr>
         <p:spPr>
           <a:xfrm>
             <a:off x="8074152" y="3666744"/>
-            <a:ext cx="2825496" cy="201168"/>
+            <a:ext cx="2825496" cy="256032"/>
           </a:xfrm>
           <a:prstGeom prst="rect">
             <a:avLst/>
@@ -10306,7 +10929,7 @@
               <a:buNone/>
             </a:pPr>
             <a:r>
-              <a:rPr lang="en-US" sz="950" b="1" dirty="0">
+              <a:rPr lang="en-US" sz="1300" b="1" dirty="0">
                 <a:solidFill>
                   <a:srgbClr val="0068B7"/>
                 </a:solidFill>
@@ -10316,20 +10939,20 @@
               </a:rPr>
               <a:t>Use this for</a:t>
             </a:r>
-            <a:endParaRPr lang="en-US" sz="950" dirty="0"/>
-          </a:p>
-        </p:txBody>
-      </p:sp>
-      <p:sp>
-        <p:nvSpPr>
-          <p:cNvPr id="16" name="Text 14"/>
-          <p:cNvSpPr/>
-          <p:nvPr/>
-        </p:nvSpPr>
-        <p:spPr>
-          <a:xfrm>
-            <a:off x="8074152" y="3959352"/>
-            <a:ext cx="2825496" cy="1170432"/>
+            <a:endParaRPr lang="en-US" sz="1300" dirty="0"/>
+          </a:p>
+        </p:txBody>
+      </p:sp>
+      <p:sp>
+        <p:nvSpPr>
+          <p:cNvPr id="17" name="Text 15"/>
+          <p:cNvSpPr/>
+          <p:nvPr/>
+        </p:nvSpPr>
+        <p:spPr>
+          <a:xfrm>
+            <a:off x="8074152" y="4023360"/>
+            <a:ext cx="2825496" cy="1097280"/>
           </a:xfrm>
           <a:prstGeom prst="rect">
             <a:avLst/>
@@ -10347,7 +10970,7 @@
               <a:buNone/>
             </a:pPr>
             <a:r>
-              <a:rPr lang="en-US" sz="1250" dirty="0">
+              <a:rPr lang="en-US" sz="1550" dirty="0">
                 <a:solidFill>
                   <a:srgbClr val="17364A"/>
                 </a:solidFill>
@@ -10357,7 +10980,7 @@
               </a:rPr>
               <a:t>Connect the concept to public health decisions, safeguards, documentation, or implementation work.</a:t>
             </a:r>
-            <a:endParaRPr lang="en-US" sz="1250" dirty="0"/>
+            <a:endParaRPr lang="en-US" sz="1550" dirty="0"/>
           </a:p>
         </p:txBody>
       </p:sp>
@@ -10554,7 +11177,7 @@
                 <a:ea typeface="Aptos" pitchFamily="34" charset="-122"/>
                 <a:cs typeface="Aptos" pitchFamily="34" charset="-120"/>
               </a:rPr>
-              <a:t>© Paula Soper</a:t>
+              <a:t>Â© Paula Soper</a:t>
             </a:r>
             <a:endParaRPr lang="en-US" sz="800" dirty="0"/>
           </a:p>
@@ -10562,7 +11185,46 @@
       </p:sp>
       <p:sp>
         <p:nvSpPr>
-          <p:cNvPr id="7" name="Shape 5"/>
+          <p:cNvPr id="7" name="Text 5"/>
+          <p:cNvSpPr/>
+          <p:nvPr/>
+        </p:nvSpPr>
+        <p:spPr>
+          <a:xfrm>
+            <a:off x="11137392" y="6510528"/>
+            <a:ext cx="411480" cy="201168"/>
+          </a:xfrm>
+          <a:prstGeom prst="rect">
+            <a:avLst/>
+          </a:prstGeom>
+          <a:noFill/>
+          <a:ln/>
+        </p:spPr>
+        <p:txBody>
+          <a:bodyPr wrap="square" lIns="0" tIns="0" rIns="0" bIns="0" rtlCol="0" anchor="ctr"/>
+          <a:lstStyle/>
+          <a:p>
+            <a:pPr algn="r" indent="0" marL="0">
+              <a:buNone/>
+            </a:pPr>
+            <a:r>
+              <a:rPr lang="en-US" sz="900" dirty="0">
+                <a:solidFill>
+                  <a:srgbClr val="5F7181"/>
+                </a:solidFill>
+                <a:latin typeface="Aptos" pitchFamily="34" charset="0"/>
+                <a:ea typeface="Aptos" pitchFamily="34" charset="-122"/>
+                <a:cs typeface="Aptos" pitchFamily="34" charset="-120"/>
+              </a:rPr>
+              <a:t>22</a:t>
+            </a:r>
+            <a:endParaRPr lang="en-US" sz="900" dirty="0"/>
+          </a:p>
+        </p:txBody>
+      </p:sp>
+      <p:sp>
+        <p:nvSpPr>
+          <p:cNvPr id="8" name="Shape 6"/>
           <p:cNvSpPr/>
           <p:nvPr/>
         </p:nvSpPr>
@@ -10587,7 +11249,7 @@
       </p:sp>
       <p:sp>
         <p:nvSpPr>
-          <p:cNvPr id="8" name="Text 6"/>
+          <p:cNvPr id="9" name="Text 7"/>
           <p:cNvSpPr/>
           <p:nvPr/>
         </p:nvSpPr>
@@ -10626,14 +11288,14 @@
       </p:sp>
       <p:sp>
         <p:nvSpPr>
-          <p:cNvPr id="9" name="Text 7"/>
+          <p:cNvPr id="10" name="Text 8"/>
           <p:cNvSpPr/>
           <p:nvPr/>
         </p:nvSpPr>
         <p:spPr>
           <a:xfrm>
             <a:off x="640080" y="621792"/>
-            <a:ext cx="10881360" cy="566928"/>
+            <a:ext cx="10881360" cy="713232"/>
           </a:xfrm>
           <a:prstGeom prst="rect">
             <a:avLst/>
@@ -10651,7 +11313,7 @@
               <a:buNone/>
             </a:pPr>
             <a:r>
-              <a:rPr lang="en-US" sz="2700" b="1" dirty="0">
+              <a:rPr lang="en-US" sz="3400" b="1" dirty="0">
                 <a:solidFill>
                   <a:srgbClr val="003A63"/>
                 </a:solidFill>
@@ -10661,20 +11323,20 @@
               </a:rPr>
               <a:t>References and Resources</a:t>
             </a:r>
-            <a:endParaRPr lang="en-US" sz="2700" dirty="0"/>
-          </a:p>
-        </p:txBody>
-      </p:sp>
-      <p:sp>
-        <p:nvSpPr>
-          <p:cNvPr id="10" name="Text 8"/>
-          <p:cNvSpPr/>
-          <p:nvPr/>
-        </p:nvSpPr>
-        <p:spPr>
-          <a:xfrm>
-            <a:off x="868680" y="1417320"/>
-            <a:ext cx="6675120" cy="4434840"/>
+            <a:endParaRPr lang="en-US" sz="3400" dirty="0"/>
+          </a:p>
+        </p:txBody>
+      </p:sp>
+      <p:sp>
+        <p:nvSpPr>
+          <p:cNvPr id="11" name="Text 9"/>
+          <p:cNvSpPr/>
+          <p:nvPr/>
+        </p:nvSpPr>
+        <p:spPr>
+          <a:xfrm>
+            <a:off x="868680" y="1508760"/>
+            <a:ext cx="6537960" cy="4160520"/>
           </a:xfrm>
           <a:prstGeom prst="rect">
             <a:avLst/>
@@ -10689,7 +11351,7 @@
           <a:lstStyle/>
           <a:p>
             <a:r>
-              <a:rPr lang="en-US" sz="1700" dirty="0">
+              <a:rPr lang="en-US" sz="2100" dirty="0">
                 <a:solidFill>
                   <a:srgbClr val="17364A"/>
                 </a:solidFill>
@@ -10699,11 +11361,11 @@
               </a:rPr>
               <a:t>CDC GIS and Public Health Resources: https://www.cdc.gov/gis/</a:t>
             </a:r>
-            <a:endParaRPr lang="en-US" sz="1700" dirty="0"/>
-          </a:p>
-          <a:p>
-            <a:r>
-              <a:rPr lang="en-US" sz="1700" dirty="0">
+            <a:endParaRPr lang="en-US" sz="2100" dirty="0"/>
+          </a:p>
+          <a:p>
+            <a:r>
+              <a:rPr lang="en-US" sz="2100" dirty="0">
                 <a:solidFill>
                   <a:srgbClr val="17364A"/>
                 </a:solidFill>
@@ -10711,13 +11373,13 @@
                 <a:ea typeface="Aptos" pitchFamily="34" charset="-122"/>
                 <a:cs typeface="Aptos" pitchFamily="34" charset="-120"/>
               </a:rPr>
-              <a:t>NIST Artificial Intelligence Risk Management Framework: https://www.nist.gov/itl/ai-risk-management-framework</a:t>
-            </a:r>
-            <a:endParaRPr lang="en-US" sz="1700" dirty="0"/>
-          </a:p>
-          <a:p>
-            <a:r>
-              <a:rPr lang="en-US" sz="1700" dirty="0">
+              <a:t>NIST Artificial Intelligence Risk Management Framework:.</a:t>
+            </a:r>
+            <a:endParaRPr lang="en-US" sz="2100" dirty="0"/>
+          </a:p>
+          <a:p>
+            <a:r>
+              <a:rPr lang="en-US" sz="2100" dirty="0">
                 <a:solidFill>
                   <a:srgbClr val="17364A"/>
                 </a:solidFill>
@@ -10727,27 +11389,13 @@
               </a:rPr>
               <a:t>NIST Privacy Framework: https://www.nist.gov/privacy-framework</a:t>
             </a:r>
-            <a:endParaRPr lang="en-US" sz="1700" dirty="0"/>
-          </a:p>
-          <a:p>
-            <a:r>
-              <a:rPr lang="en-US" sz="1700" dirty="0">
-                <a:solidFill>
-                  <a:srgbClr val="17364A"/>
-                </a:solidFill>
-                <a:latin typeface="Aptos" pitchFamily="34" charset="0"/>
-                <a:ea typeface="Aptos" pitchFamily="34" charset="-122"/>
-                <a:cs typeface="Aptos" pitchFamily="34" charset="-120"/>
-              </a:rPr>
-              <a:t>CDC Public Health Data Strategy: https://www.cdc.gov/public-health-data-strategy/php/about/index.html</a:t>
-            </a:r>
-            <a:endParaRPr lang="en-US" sz="1700" dirty="0"/>
-          </a:p>
-        </p:txBody>
-      </p:sp>
-      <p:sp>
-        <p:nvSpPr>
-          <p:cNvPr id="11" name="Shape 9"/>
+            <a:endParaRPr lang="en-US" sz="2100" dirty="0"/>
+          </a:p>
+        </p:txBody>
+      </p:sp>
+      <p:sp>
+        <p:nvSpPr>
+          <p:cNvPr id="12" name="Shape 10"/>
           <p:cNvSpPr/>
           <p:nvPr/>
         </p:nvSpPr>
@@ -10774,14 +11422,14 @@
       </p:sp>
       <p:sp>
         <p:nvSpPr>
-          <p:cNvPr id="12" name="Text 10"/>
+          <p:cNvPr id="13" name="Text 11"/>
           <p:cNvSpPr/>
           <p:nvPr/>
         </p:nvSpPr>
         <p:spPr>
           <a:xfrm>
             <a:off x="8074152" y="1563624"/>
-            <a:ext cx="2825496" cy="201168"/>
+            <a:ext cx="2825496" cy="256032"/>
           </a:xfrm>
           <a:prstGeom prst="rect">
             <a:avLst/>
@@ -10797,7 +11445,7 @@
               <a:buNone/>
             </a:pPr>
             <a:r>
-              <a:rPr lang="en-US" sz="950" b="1" dirty="0">
+              <a:rPr lang="en-US" sz="1300" b="1" dirty="0">
                 <a:solidFill>
                   <a:srgbClr val="0068B7"/>
                 </a:solidFill>
@@ -10807,20 +11455,20 @@
               </a:rPr>
               <a:t>Key idea</a:t>
             </a:r>
-            <a:endParaRPr lang="en-US" sz="950" dirty="0"/>
-          </a:p>
-        </p:txBody>
-      </p:sp>
-      <p:sp>
-        <p:nvSpPr>
-          <p:cNvPr id="13" name="Text 11"/>
-          <p:cNvSpPr/>
-          <p:nvPr/>
-        </p:nvSpPr>
-        <p:spPr>
-          <a:xfrm>
-            <a:off x="8074152" y="1856232"/>
-            <a:ext cx="2825496" cy="1261872"/>
+            <a:endParaRPr lang="en-US" sz="1300" dirty="0"/>
+          </a:p>
+        </p:txBody>
+      </p:sp>
+      <p:sp>
+        <p:nvSpPr>
+          <p:cNvPr id="14" name="Text 12"/>
+          <p:cNvSpPr/>
+          <p:nvPr/>
+        </p:nvSpPr>
+        <p:spPr>
+          <a:xfrm>
+            <a:off x="8074152" y="1920240"/>
+            <a:ext cx="2825496" cy="1188720"/>
           </a:xfrm>
           <a:prstGeom prst="rect">
             <a:avLst/>
@@ -10838,7 +11486,7 @@
               <a:buNone/>
             </a:pPr>
             <a:r>
-              <a:rPr lang="en-US" sz="1250" dirty="0">
+              <a:rPr lang="en-US" sz="1550" dirty="0">
                 <a:solidFill>
                   <a:srgbClr val="17364A"/>
                 </a:solidFill>
@@ -10848,13 +11496,13 @@
               </a:rPr>
               <a:t>CDC GIS and Public Health Resources: https://www.cdc.gov/gis/</a:t>
             </a:r>
-            <a:endParaRPr lang="en-US" sz="1250" dirty="0"/>
-          </a:p>
-        </p:txBody>
-      </p:sp>
-      <p:sp>
-        <p:nvSpPr>
-          <p:cNvPr id="14" name="Shape 12"/>
+            <a:endParaRPr lang="en-US" sz="1550" dirty="0"/>
+          </a:p>
+        </p:txBody>
+      </p:sp>
+      <p:sp>
+        <p:nvSpPr>
+          <p:cNvPr id="15" name="Shape 13"/>
           <p:cNvSpPr/>
           <p:nvPr/>
         </p:nvSpPr>
@@ -10881,14 +11529,14 @@
       </p:sp>
       <p:sp>
         <p:nvSpPr>
-          <p:cNvPr id="15" name="Text 13"/>
+          <p:cNvPr id="16" name="Text 14"/>
           <p:cNvSpPr/>
           <p:nvPr/>
         </p:nvSpPr>
         <p:spPr>
           <a:xfrm>
             <a:off x="8074152" y="3666744"/>
-            <a:ext cx="2825496" cy="201168"/>
+            <a:ext cx="2825496" cy="256032"/>
           </a:xfrm>
           <a:prstGeom prst="rect">
             <a:avLst/>
@@ -10904,7 +11552,7 @@
               <a:buNone/>
             </a:pPr>
             <a:r>
-              <a:rPr lang="en-US" sz="950" b="1" dirty="0">
+              <a:rPr lang="en-US" sz="1300" b="1" dirty="0">
                 <a:solidFill>
                   <a:srgbClr val="0068B7"/>
                 </a:solidFill>
@@ -10914,20 +11562,20 @@
               </a:rPr>
               <a:t>Use this for</a:t>
             </a:r>
-            <a:endParaRPr lang="en-US" sz="950" dirty="0"/>
-          </a:p>
-        </p:txBody>
-      </p:sp>
-      <p:sp>
-        <p:nvSpPr>
-          <p:cNvPr id="16" name="Text 14"/>
-          <p:cNvSpPr/>
-          <p:nvPr/>
-        </p:nvSpPr>
-        <p:spPr>
-          <a:xfrm>
-            <a:off x="8074152" y="3959352"/>
-            <a:ext cx="2825496" cy="1170432"/>
+            <a:endParaRPr lang="en-US" sz="1300" dirty="0"/>
+          </a:p>
+        </p:txBody>
+      </p:sp>
+      <p:sp>
+        <p:nvSpPr>
+          <p:cNvPr id="17" name="Text 15"/>
+          <p:cNvSpPr/>
+          <p:nvPr/>
+        </p:nvSpPr>
+        <p:spPr>
+          <a:xfrm>
+            <a:off x="8074152" y="4023360"/>
+            <a:ext cx="2825496" cy="1097280"/>
           </a:xfrm>
           <a:prstGeom prst="rect">
             <a:avLst/>
@@ -10945,7 +11593,7 @@
               <a:buNone/>
             </a:pPr>
             <a:r>
-              <a:rPr lang="en-US" sz="1250" dirty="0">
+              <a:rPr lang="en-US" sz="1550" dirty="0">
                 <a:solidFill>
                   <a:srgbClr val="17364A"/>
                 </a:solidFill>
@@ -10955,7 +11603,7 @@
               </a:rPr>
               <a:t>Connect the concept to public health decisions, safeguards, documentation, or implementation work.</a:t>
             </a:r>
-            <a:endParaRPr lang="en-US" sz="1250" dirty="0"/>
+            <a:endParaRPr lang="en-US" sz="1550" dirty="0"/>
           </a:p>
         </p:txBody>
       </p:sp>
@@ -11152,7 +11800,7 @@
                 <a:ea typeface="Aptos" pitchFamily="34" charset="-122"/>
                 <a:cs typeface="Aptos" pitchFamily="34" charset="-120"/>
               </a:rPr>
-              <a:t>© Paula Soper</a:t>
+              <a:t>Â© Paula Soper</a:t>
             </a:r>
             <a:endParaRPr lang="en-US" sz="800" dirty="0"/>
           </a:p>
@@ -11166,8 +11814,47 @@
         </p:nvSpPr>
         <p:spPr>
           <a:xfrm>
+            <a:off x="11137392" y="6510528"/>
+            <a:ext cx="411480" cy="201168"/>
+          </a:xfrm>
+          <a:prstGeom prst="rect">
+            <a:avLst/>
+          </a:prstGeom>
+          <a:noFill/>
+          <a:ln/>
+        </p:spPr>
+        <p:txBody>
+          <a:bodyPr wrap="square" lIns="0" tIns="0" rIns="0" bIns="0" rtlCol="0" anchor="ctr"/>
+          <a:lstStyle/>
+          <a:p>
+            <a:pPr algn="r" indent="0" marL="0">
+              <a:buNone/>
+            </a:pPr>
+            <a:r>
+              <a:rPr lang="en-US" sz="900" dirty="0">
+                <a:solidFill>
+                  <a:srgbClr val="5F7181"/>
+                </a:solidFill>
+                <a:latin typeface="Aptos" pitchFamily="34" charset="0"/>
+                <a:ea typeface="Aptos" pitchFamily="34" charset="-122"/>
+                <a:cs typeface="Aptos" pitchFamily="34" charset="-120"/>
+              </a:rPr>
+              <a:t>3</a:t>
+            </a:r>
+            <a:endParaRPr lang="en-US" sz="900" dirty="0"/>
+          </a:p>
+        </p:txBody>
+      </p:sp>
+      <p:sp>
+        <p:nvSpPr>
+          <p:cNvPr id="8" name="Text 6"/>
+          <p:cNvSpPr/>
+          <p:nvPr/>
+        </p:nvSpPr>
+        <p:spPr>
+          <a:xfrm>
             <a:off x="640080" y="658368"/>
-            <a:ext cx="10881360" cy="566928"/>
+            <a:ext cx="10881360" cy="713232"/>
           </a:xfrm>
           <a:prstGeom prst="rect">
             <a:avLst/>
@@ -11185,7 +11872,7 @@
               <a:buNone/>
             </a:pPr>
             <a:r>
-              <a:rPr lang="en-US" sz="2700" b="1" dirty="0">
+              <a:rPr lang="en-US" sz="3400" b="1" dirty="0">
                 <a:solidFill>
                   <a:srgbClr val="003A63"/>
                 </a:solidFill>
@@ -11195,20 +11882,20 @@
               </a:rPr>
               <a:t>How this module connects to the playbook</a:t>
             </a:r>
-            <a:endParaRPr lang="en-US" sz="2700" dirty="0"/>
-          </a:p>
-        </p:txBody>
-      </p:sp>
-      <p:sp>
-        <p:nvSpPr>
-          <p:cNvPr id="8" name="Text 6"/>
-          <p:cNvSpPr/>
-          <p:nvPr/>
-        </p:nvSpPr>
-        <p:spPr>
-          <a:xfrm>
-            <a:off x="868680" y="1417320"/>
-            <a:ext cx="6903720" cy="4480560"/>
+            <a:endParaRPr lang="en-US" sz="3400" dirty="0"/>
+          </a:p>
+        </p:txBody>
+      </p:sp>
+      <p:sp>
+        <p:nvSpPr>
+          <p:cNvPr id="9" name="Text 7"/>
+          <p:cNvSpPr/>
+          <p:nvPr/>
+        </p:nvSpPr>
+        <p:spPr>
+          <a:xfrm>
+            <a:off x="868680" y="1508760"/>
+            <a:ext cx="6812280" cy="3977640"/>
           </a:xfrm>
           <a:prstGeom prst="rect">
             <a:avLst/>
@@ -11223,7 +11910,7 @@
           <a:lstStyle/>
           <a:p>
             <a:r>
-              <a:rPr lang="en-US" sz="1540" dirty="0">
+              <a:rPr lang="en-US" sz="1900" dirty="0">
                 <a:solidFill>
                   <a:srgbClr val="17364A"/>
                 </a:solidFill>
@@ -11231,13 +11918,13 @@
                 <a:ea typeface="Aptos" pitchFamily="34" charset="-122"/>
                 <a:cs typeface="Aptos" pitchFamily="34" charset="-120"/>
               </a:rPr>
-              <a:t>Play 11: Build and Deploy AI Solutions - This lesson informs Play 11 by helping learners connect the lesson topic to build and deploy.</a:t>
-            </a:r>
-            <a:endParaRPr lang="en-US" sz="1540" dirty="0"/>
-          </a:p>
-          <a:p>
-            <a:r>
-              <a:rPr lang="en-US" sz="1540" dirty="0">
+              <a:t>Play 11: Build and Deploy AI Solutions - This lesson informs Play 11 by helping learners connect the lesson.</a:t>
+            </a:r>
+            <a:endParaRPr lang="en-US" sz="1900" dirty="0"/>
+          </a:p>
+          <a:p>
+            <a:r>
+              <a:rPr lang="en-US" sz="1900" dirty="0">
                 <a:solidFill>
                   <a:srgbClr val="17364A"/>
                 </a:solidFill>
@@ -11245,13 +11932,13 @@
                 <a:ea typeface="Aptos" pitchFamily="34" charset="-122"/>
                 <a:cs typeface="Aptos" pitchFamily="34" charset="-120"/>
               </a:rPr>
-              <a:t>Play 2: Readiness Assessment - This lesson informs Play 2 by helping learners connect the lesson topic to readiness assessment work.</a:t>
-            </a:r>
-            <a:endParaRPr lang="en-US" sz="1540" dirty="0"/>
-          </a:p>
-          <a:p>
-            <a:r>
-              <a:rPr lang="en-US" sz="1540" dirty="0">
+              <a:t>Play 2: Readiness Assessment - This lesson informs Play 2 by helping learners connect the lesson topic to.</a:t>
+            </a:r>
+            <a:endParaRPr lang="en-US" sz="1900" dirty="0"/>
+          </a:p>
+          <a:p>
+            <a:r>
+              <a:rPr lang="en-US" sz="1900" dirty="0">
                 <a:solidFill>
                   <a:srgbClr val="17364A"/>
                 </a:solidFill>
@@ -11259,13 +11946,13 @@
                 <a:ea typeface="Aptos" pitchFamily="34" charset="-122"/>
                 <a:cs typeface="Aptos" pitchFamily="34" charset="-120"/>
               </a:rPr>
-              <a:t>Play 1: Vision &amp; Guardrails - This lesson informs Play 1 by helping learners connect the lesson topic to vision &amp; guardrails work in.</a:t>
-            </a:r>
-            <a:endParaRPr lang="en-US" sz="1540" dirty="0"/>
-          </a:p>
-          <a:p>
-            <a:r>
-              <a:rPr lang="en-US" sz="1540" dirty="0">
+              <a:t>Play 1: Vision &amp; Guardrails - This lesson informs Play 1 by helping learners connect the lesson topic to.</a:t>
+            </a:r>
+            <a:endParaRPr lang="en-US" sz="1900" dirty="0"/>
+          </a:p>
+          <a:p>
+            <a:r>
+              <a:rPr lang="en-US" sz="1900" dirty="0">
                 <a:solidFill>
                   <a:srgbClr val="17364A"/>
                 </a:solidFill>
@@ -11273,15 +11960,15 @@
                 <a:ea typeface="Aptos" pitchFamily="34" charset="-122"/>
                 <a:cs typeface="Aptos" pitchFamily="34" charset="-120"/>
               </a:rPr>
-              <a:t>Play 7: Prioritize Use Cases - This lesson informs Play 7 by helping learners connect the lesson topic to prioritize use cases work.</a:t>
-            </a:r>
-            <a:endParaRPr lang="en-US" sz="1540" dirty="0"/>
-          </a:p>
-        </p:txBody>
-      </p:sp>
-      <p:sp>
-        <p:nvSpPr>
-          <p:cNvPr id="9" name="Shape 7"/>
+              <a:t>Play 7: Prioritize Use Cases - This lesson informs Play 7 by helping learners connect the lesson topic to.</a:t>
+            </a:r>
+            <a:endParaRPr lang="en-US" sz="1900" dirty="0"/>
+          </a:p>
+        </p:txBody>
+      </p:sp>
+      <p:sp>
+        <p:nvSpPr>
+          <p:cNvPr id="10" name="Shape 8"/>
           <p:cNvSpPr/>
           <p:nvPr/>
         </p:nvSpPr>
@@ -11308,14 +11995,14 @@
       </p:sp>
       <p:sp>
         <p:nvSpPr>
-          <p:cNvPr id="10" name="Text 8"/>
+          <p:cNvPr id="11" name="Text 9"/>
           <p:cNvSpPr/>
           <p:nvPr/>
         </p:nvSpPr>
         <p:spPr>
           <a:xfrm>
             <a:off x="8211312" y="1563624"/>
-            <a:ext cx="2734056" cy="201168"/>
+            <a:ext cx="2734056" cy="256032"/>
           </a:xfrm>
           <a:prstGeom prst="rect">
             <a:avLst/>
@@ -11331,7 +12018,7 @@
               <a:buNone/>
             </a:pPr>
             <a:r>
-              <a:rPr lang="en-US" sz="950" b="1" dirty="0">
+              <a:rPr lang="en-US" sz="1300" b="1" dirty="0">
                 <a:solidFill>
                   <a:srgbClr val="0068B7"/>
                 </a:solidFill>
@@ -11341,20 +12028,20 @@
               </a:rPr>
               <a:t>Apply the lesson</a:t>
             </a:r>
-            <a:endParaRPr lang="en-US" sz="950" dirty="0"/>
-          </a:p>
-        </p:txBody>
-      </p:sp>
-      <p:sp>
-        <p:nvSpPr>
-          <p:cNvPr id="11" name="Text 9"/>
-          <p:cNvSpPr/>
-          <p:nvPr/>
-        </p:nvSpPr>
-        <p:spPr>
-          <a:xfrm>
-            <a:off x="8211312" y="1856232"/>
-            <a:ext cx="2734056" cy="1536192"/>
+            <a:endParaRPr lang="en-US" sz="1300" dirty="0"/>
+          </a:p>
+        </p:txBody>
+      </p:sp>
+      <p:sp>
+        <p:nvSpPr>
+          <p:cNvPr id="12" name="Text 10"/>
+          <p:cNvSpPr/>
+          <p:nvPr/>
+        </p:nvSpPr>
+        <p:spPr>
+          <a:xfrm>
+            <a:off x="8211312" y="1920240"/>
+            <a:ext cx="2734056" cy="1463040"/>
           </a:xfrm>
           <a:prstGeom prst="rect">
             <a:avLst/>
@@ -11372,7 +12059,7 @@
               <a:buNone/>
             </a:pPr>
             <a:r>
-              <a:rPr lang="en-US" sz="1250" dirty="0">
+              <a:rPr lang="en-US" sz="1550" dirty="0">
                 <a:solidFill>
                   <a:srgbClr val="17364A"/>
                 </a:solidFill>
@@ -11382,32 +12069,32 @@
               </a:rPr>
               <a:t>Use the related plays to identify decisions, participants, timing, approvals, and documentation needed for responsible implementation.</a:t>
             </a:r>
-            <a:endParaRPr lang="en-US" sz="1250" dirty="0"/>
-          </a:p>
-        </p:txBody>
-      </p:sp>
-      <p:sp>
-        <p:nvSpPr>
-          <p:cNvPr id="12" name="Shape 10"/>
-          <p:cNvSpPr/>
-          <p:nvPr/>
-        </p:nvSpPr>
-        <p:spPr>
-          <a:xfrm>
-            <a:off x="8046720" y="3794760"/>
-            <a:ext cx="3063240" cy="1508760"/>
+            <a:endParaRPr lang="en-US" sz="1550" dirty="0"/>
+          </a:p>
+        </p:txBody>
+      </p:sp>
+      <p:sp>
+        <p:nvSpPr>
+          <p:cNvPr id="13" name="Shape 11"/>
+          <p:cNvSpPr/>
+          <p:nvPr/>
+        </p:nvSpPr>
+        <p:spPr>
+          <a:xfrm>
+            <a:off x="7818120" y="3977640"/>
+            <a:ext cx="972312" cy="749808"/>
           </a:xfrm>
           <a:prstGeom prst="roundRect">
             <a:avLst>
-              <a:gd name="adj" fmla="val 7273"/>
+              <a:gd name="adj" fmla="val 14634"/>
             </a:avLst>
           </a:prstGeom>
           <a:solidFill>
-            <a:srgbClr val="FFF4D9"/>
+            <a:srgbClr val="0068B7"/>
           </a:solidFill>
           <a:ln w="12700">
             <a:solidFill>
-              <a:srgbClr val="B9D7E6"/>
+              <a:srgbClr val="0068B7"/>
             </a:solidFill>
             <a:prstDash val="solid"/>
           </a:ln>
@@ -11415,81 +12102,256 @@
       </p:sp>
       <p:sp>
         <p:nvSpPr>
-          <p:cNvPr id="13" name="Text 11"/>
-          <p:cNvSpPr/>
-          <p:nvPr/>
-        </p:nvSpPr>
-        <p:spPr>
-          <a:xfrm>
-            <a:off x="8211312" y="3941064"/>
-            <a:ext cx="2734056" cy="201168"/>
-          </a:xfrm>
-          <a:prstGeom prst="rect">
-            <a:avLst/>
-          </a:prstGeom>
-          <a:noFill/>
-          <a:ln/>
-        </p:spPr>
-        <p:txBody>
-          <a:bodyPr wrap="square" lIns="0" tIns="0" rIns="0" bIns="0" rtlCol="0" anchor="ctr"/>
-          <a:lstStyle/>
-          <a:p>
-            <a:pPr indent="0" marL="0">
-              <a:buNone/>
-            </a:pPr>
-            <a:r>
-              <a:rPr lang="en-US" sz="950" b="1" dirty="0">
-                <a:solidFill>
-                  <a:srgbClr val="0068B7"/>
-                </a:solidFill>
-                <a:latin typeface="Aptos" pitchFamily="34" charset="0"/>
-                <a:ea typeface="Aptos" pitchFamily="34" charset="-122"/>
-                <a:cs typeface="Aptos" pitchFamily="34" charset="-120"/>
-              </a:rPr>
-              <a:t>Keep in mind</a:t>
-            </a:r>
-            <a:endParaRPr lang="en-US" sz="950" dirty="0"/>
-          </a:p>
-        </p:txBody>
-      </p:sp>
-      <p:sp>
-        <p:nvSpPr>
           <p:cNvPr id="14" name="Text 12"/>
           <p:cNvSpPr/>
           <p:nvPr/>
         </p:nvSpPr>
         <p:spPr>
           <a:xfrm>
-            <a:off x="8211312" y="4233672"/>
-            <a:ext cx="2734056" cy="941832"/>
-          </a:xfrm>
-          <a:prstGeom prst="rect">
-            <a:avLst/>
-          </a:prstGeom>
-          <a:noFill/>
-          <a:ln/>
-        </p:spPr>
-        <p:txBody>
-          <a:bodyPr wrap="square" lIns="0" tIns="0" rIns="0" bIns="0" rtlCol="0" anchor="t">
+            <a:off x="7891272" y="4169664"/>
+            <a:ext cx="826008" cy="310896"/>
+          </a:xfrm>
+          <a:prstGeom prst="rect">
+            <a:avLst/>
+          </a:prstGeom>
+          <a:noFill/>
+          <a:ln/>
+        </p:spPr>
+        <p:txBody>
+          <a:bodyPr wrap="square" lIns="0" tIns="0" rIns="0" bIns="0" rtlCol="0" anchor="ctr">
             <a:normAutofit/>
           </a:bodyPr>
           <a:lstStyle/>
           <a:p>
-            <a:pPr indent="0" marL="0">
-              <a:buNone/>
-            </a:pPr>
-            <a:r>
-              <a:rPr lang="en-US" sz="1250" dirty="0">
-                <a:solidFill>
-                  <a:srgbClr val="17364A"/>
-                </a:solidFill>
-                <a:latin typeface="Aptos" pitchFamily="34" charset="0"/>
-                <a:ea typeface="Aptos" pitchFamily="34" charset="-122"/>
-                <a:cs typeface="Aptos" pitchFamily="34" charset="-120"/>
-              </a:rPr>
-              <a:t>The playbook connection helps turn training into agency work, not just individual knowledge.</a:t>
-            </a:r>
-            <a:endParaRPr lang="en-US" sz="1250" dirty="0"/>
+            <a:pPr algn="ctr" indent="0" marL="0">
+              <a:buNone/>
+            </a:pPr>
+            <a:r>
+              <a:rPr lang="en-US" sz="1500" b="1" dirty="0">
+                <a:solidFill>
+                  <a:srgbClr val="FFFFFF"/>
+                </a:solidFill>
+                <a:latin typeface="Aptos" pitchFamily="34" charset="0"/>
+                <a:ea typeface="Aptos" pitchFamily="34" charset="-122"/>
+                <a:cs typeface="Aptos" pitchFamily="34" charset="-120"/>
+              </a:rPr>
+              <a:t>Lesson</a:t>
+            </a:r>
+            <a:endParaRPr lang="en-US" sz="1500" dirty="0"/>
+          </a:p>
+        </p:txBody>
+      </p:sp>
+      <p:sp>
+        <p:nvSpPr>
+          <p:cNvPr id="15" name="Text 13"/>
+          <p:cNvSpPr/>
+          <p:nvPr/>
+        </p:nvSpPr>
+        <p:spPr>
+          <a:xfrm>
+            <a:off x="8817864" y="4187952"/>
+            <a:ext cx="201168" cy="256032"/>
+          </a:xfrm>
+          <a:prstGeom prst="rect">
+            <a:avLst/>
+          </a:prstGeom>
+          <a:noFill/>
+          <a:ln/>
+        </p:spPr>
+        <p:txBody>
+          <a:bodyPr wrap="square" lIns="0" tIns="0" rIns="0" bIns="0" rtlCol="0" anchor="ctr"/>
+          <a:lstStyle/>
+          <a:p>
+            <a:pPr algn="ctr" indent="0" marL="0">
+              <a:buNone/>
+            </a:pPr>
+            <a:r>
+              <a:rPr lang="en-US" sz="1800" b="1" dirty="0">
+                <a:solidFill>
+                  <a:srgbClr val="0068B7"/>
+                </a:solidFill>
+                <a:latin typeface="Aptos" pitchFamily="34" charset="0"/>
+                <a:ea typeface="Aptos" pitchFamily="34" charset="-122"/>
+                <a:cs typeface="Aptos" pitchFamily="34" charset="-120"/>
+              </a:rPr>
+              <a:t>â†’</a:t>
+            </a:r>
+            <a:endParaRPr lang="en-US" sz="1800" dirty="0"/>
+          </a:p>
+        </p:txBody>
+      </p:sp>
+      <p:sp>
+        <p:nvSpPr>
+          <p:cNvPr id="16" name="Shape 14"/>
+          <p:cNvSpPr/>
+          <p:nvPr/>
+        </p:nvSpPr>
+        <p:spPr>
+          <a:xfrm>
+            <a:off x="9046464" y="3977640"/>
+            <a:ext cx="972312" cy="749808"/>
+          </a:xfrm>
+          <a:prstGeom prst="roundRect">
+            <a:avLst>
+              <a:gd name="adj" fmla="val 14634"/>
+            </a:avLst>
+          </a:prstGeom>
+          <a:solidFill>
+            <a:srgbClr val="2F8A28"/>
+          </a:solidFill>
+          <a:ln w="12700">
+            <a:solidFill>
+              <a:srgbClr val="2F8A28"/>
+            </a:solidFill>
+            <a:prstDash val="solid"/>
+          </a:ln>
+        </p:spPr>
+      </p:sp>
+      <p:sp>
+        <p:nvSpPr>
+          <p:cNvPr id="17" name="Text 15"/>
+          <p:cNvSpPr/>
+          <p:nvPr/>
+        </p:nvSpPr>
+        <p:spPr>
+          <a:xfrm>
+            <a:off x="9119616" y="4169664"/>
+            <a:ext cx="826008" cy="310896"/>
+          </a:xfrm>
+          <a:prstGeom prst="rect">
+            <a:avLst/>
+          </a:prstGeom>
+          <a:noFill/>
+          <a:ln/>
+        </p:spPr>
+        <p:txBody>
+          <a:bodyPr wrap="square" lIns="0" tIns="0" rIns="0" bIns="0" rtlCol="0" anchor="ctr">
+            <a:normAutofit/>
+          </a:bodyPr>
+          <a:lstStyle/>
+          <a:p>
+            <a:pPr algn="ctr" indent="0" marL="0">
+              <a:buNone/>
+            </a:pPr>
+            <a:r>
+              <a:rPr lang="en-US" sz="1500" b="1" dirty="0">
+                <a:solidFill>
+                  <a:srgbClr val="FFFFFF"/>
+                </a:solidFill>
+                <a:latin typeface="Aptos" pitchFamily="34" charset="0"/>
+                <a:ea typeface="Aptos" pitchFamily="34" charset="-122"/>
+                <a:cs typeface="Aptos" pitchFamily="34" charset="-120"/>
+              </a:rPr>
+              <a:t>Plays</a:t>
+            </a:r>
+            <a:endParaRPr lang="en-US" sz="1500" dirty="0"/>
+          </a:p>
+        </p:txBody>
+      </p:sp>
+      <p:sp>
+        <p:nvSpPr>
+          <p:cNvPr id="18" name="Text 16"/>
+          <p:cNvSpPr/>
+          <p:nvPr/>
+        </p:nvSpPr>
+        <p:spPr>
+          <a:xfrm>
+            <a:off x="10046208" y="4187952"/>
+            <a:ext cx="201168" cy="256032"/>
+          </a:xfrm>
+          <a:prstGeom prst="rect">
+            <a:avLst/>
+          </a:prstGeom>
+          <a:noFill/>
+          <a:ln/>
+        </p:spPr>
+        <p:txBody>
+          <a:bodyPr wrap="square" lIns="0" tIns="0" rIns="0" bIns="0" rtlCol="0" anchor="ctr"/>
+          <a:lstStyle/>
+          <a:p>
+            <a:pPr algn="ctr" indent="0" marL="0">
+              <a:buNone/>
+            </a:pPr>
+            <a:r>
+              <a:rPr lang="en-US" sz="1800" b="1" dirty="0">
+                <a:solidFill>
+                  <a:srgbClr val="0068B7"/>
+                </a:solidFill>
+                <a:latin typeface="Aptos" pitchFamily="34" charset="0"/>
+                <a:ea typeface="Aptos" pitchFamily="34" charset="-122"/>
+                <a:cs typeface="Aptos" pitchFamily="34" charset="-120"/>
+              </a:rPr>
+              <a:t>â†’</a:t>
+            </a:r>
+            <a:endParaRPr lang="en-US" sz="1800" dirty="0"/>
+          </a:p>
+        </p:txBody>
+      </p:sp>
+      <p:sp>
+        <p:nvSpPr>
+          <p:cNvPr id="19" name="Shape 17"/>
+          <p:cNvSpPr/>
+          <p:nvPr/>
+        </p:nvSpPr>
+        <p:spPr>
+          <a:xfrm>
+            <a:off x="10274808" y="3977640"/>
+            <a:ext cx="972312" cy="749808"/>
+          </a:xfrm>
+          <a:prstGeom prst="roundRect">
+            <a:avLst>
+              <a:gd name="adj" fmla="val 14634"/>
+            </a:avLst>
+          </a:prstGeom>
+          <a:solidFill>
+            <a:srgbClr val="6A4CA3"/>
+          </a:solidFill>
+          <a:ln w="12700">
+            <a:solidFill>
+              <a:srgbClr val="6A4CA3"/>
+            </a:solidFill>
+            <a:prstDash val="solid"/>
+          </a:ln>
+        </p:spPr>
+      </p:sp>
+      <p:sp>
+        <p:nvSpPr>
+          <p:cNvPr id="20" name="Text 18"/>
+          <p:cNvSpPr/>
+          <p:nvPr/>
+        </p:nvSpPr>
+        <p:spPr>
+          <a:xfrm>
+            <a:off x="10347960" y="4169664"/>
+            <a:ext cx="826008" cy="310896"/>
+          </a:xfrm>
+          <a:prstGeom prst="rect">
+            <a:avLst/>
+          </a:prstGeom>
+          <a:noFill/>
+          <a:ln/>
+        </p:spPr>
+        <p:txBody>
+          <a:bodyPr wrap="square" lIns="0" tIns="0" rIns="0" bIns="0" rtlCol="0" anchor="ctr">
+            <a:normAutofit/>
+          </a:bodyPr>
+          <a:lstStyle/>
+          <a:p>
+            <a:pPr algn="ctr" indent="0" marL="0">
+              <a:buNone/>
+            </a:pPr>
+            <a:r>
+              <a:rPr lang="en-US" sz="1500" b="1" dirty="0">
+                <a:solidFill>
+                  <a:srgbClr val="FFFFFF"/>
+                </a:solidFill>
+                <a:latin typeface="Aptos" pitchFamily="34" charset="0"/>
+                <a:ea typeface="Aptos" pitchFamily="34" charset="-122"/>
+                <a:cs typeface="Aptos" pitchFamily="34" charset="-120"/>
+              </a:rPr>
+              <a:t>Action</a:t>
+            </a:r>
+            <a:endParaRPr lang="en-US" sz="1500" dirty="0"/>
           </a:p>
         </p:txBody>
       </p:sp>
@@ -11686,7 +12548,7 @@
                 <a:ea typeface="Aptos" pitchFamily="34" charset="-122"/>
                 <a:cs typeface="Aptos" pitchFamily="34" charset="-120"/>
               </a:rPr>
-              <a:t>© Paula Soper</a:t>
+              <a:t>Â© Paula Soper</a:t>
             </a:r>
             <a:endParaRPr lang="en-US" sz="800" dirty="0"/>
           </a:p>
@@ -11700,8 +12562,47 @@
         </p:nvSpPr>
         <p:spPr>
           <a:xfrm>
+            <a:off x="11137392" y="6510528"/>
+            <a:ext cx="411480" cy="201168"/>
+          </a:xfrm>
+          <a:prstGeom prst="rect">
+            <a:avLst/>
+          </a:prstGeom>
+          <a:noFill/>
+          <a:ln/>
+        </p:spPr>
+        <p:txBody>
+          <a:bodyPr wrap="square" lIns="0" tIns="0" rIns="0" bIns="0" rtlCol="0" anchor="ctr"/>
+          <a:lstStyle/>
+          <a:p>
+            <a:pPr algn="r" indent="0" marL="0">
+              <a:buNone/>
+            </a:pPr>
+            <a:r>
+              <a:rPr lang="en-US" sz="900" dirty="0">
+                <a:solidFill>
+                  <a:srgbClr val="5F7181"/>
+                </a:solidFill>
+                <a:latin typeface="Aptos" pitchFamily="34" charset="0"/>
+                <a:ea typeface="Aptos" pitchFamily="34" charset="-122"/>
+                <a:cs typeface="Aptos" pitchFamily="34" charset="-120"/>
+              </a:rPr>
+              <a:t>4</a:t>
+            </a:r>
+            <a:endParaRPr lang="en-US" sz="900" dirty="0"/>
+          </a:p>
+        </p:txBody>
+      </p:sp>
+      <p:sp>
+        <p:nvSpPr>
+          <p:cNvPr id="8" name="Text 6"/>
+          <p:cNvSpPr/>
+          <p:nvPr/>
+        </p:nvSpPr>
+        <p:spPr>
+          <a:xfrm>
             <a:off x="640080" y="658368"/>
-            <a:ext cx="10881360" cy="566928"/>
+            <a:ext cx="10881360" cy="713232"/>
           </a:xfrm>
           <a:prstGeom prst="rect">
             <a:avLst/>
@@ -11719,7 +12620,7 @@
               <a:buNone/>
             </a:pPr>
             <a:r>
-              <a:rPr lang="en-US" sz="2700" b="1" dirty="0">
+              <a:rPr lang="en-US" sz="3400" b="1" dirty="0">
                 <a:solidFill>
                   <a:srgbClr val="003A63"/>
                 </a:solidFill>
@@ -11729,20 +12630,20 @@
               </a:rPr>
               <a:t>Related toolkit resources</a:t>
             </a:r>
-            <a:endParaRPr lang="en-US" sz="2700" dirty="0"/>
-          </a:p>
-        </p:txBody>
-      </p:sp>
-      <p:sp>
-        <p:nvSpPr>
-          <p:cNvPr id="8" name="Text 6"/>
-          <p:cNvSpPr/>
-          <p:nvPr/>
-        </p:nvSpPr>
-        <p:spPr>
-          <a:xfrm>
-            <a:off x="868680" y="1417320"/>
-            <a:ext cx="6903720" cy="4480560"/>
+            <a:endParaRPr lang="en-US" sz="3400" dirty="0"/>
+          </a:p>
+        </p:txBody>
+      </p:sp>
+      <p:sp>
+        <p:nvSpPr>
+          <p:cNvPr id="9" name="Text 7"/>
+          <p:cNvSpPr/>
+          <p:nvPr/>
+        </p:nvSpPr>
+        <p:spPr>
+          <a:xfrm>
+            <a:off x="868680" y="1508760"/>
+            <a:ext cx="6812280" cy="3977640"/>
           </a:xfrm>
           <a:prstGeom prst="rect">
             <a:avLst/>
@@ -11757,7 +12658,7 @@
           <a:lstStyle/>
           <a:p>
             <a:r>
-              <a:rPr lang="en-US" sz="1460" dirty="0">
+              <a:rPr lang="en-US" sz="1850" dirty="0">
                 <a:solidFill>
                   <a:srgbClr val="17364A"/>
                 </a:solidFill>
@@ -11765,13 +12666,13 @@
                 <a:ea typeface="Aptos" pitchFamily="34" charset="-122"/>
                 <a:cs typeface="Aptos" pitchFamily="34" charset="-120"/>
               </a:rPr>
-              <a:t>Tool 3: Equity Impact Assessment Checklist (Checklist) - Use this tool to complete or strengthen the practical exercise for the.</a:t>
-            </a:r>
-            <a:endParaRPr lang="en-US" sz="1460" dirty="0"/>
-          </a:p>
-          <a:p>
-            <a:r>
-              <a:rPr lang="en-US" sz="1460" dirty="0">
+              <a:t>Tool 3: Equity Impact Assessment Checklist (Checklist) - Use this tool to complete or strengthen the.</a:t>
+            </a:r>
+            <a:endParaRPr lang="en-US" sz="1850" dirty="0"/>
+          </a:p>
+          <a:p>
+            <a:r>
+              <a:rPr lang="en-US" sz="1850" dirty="0">
                 <a:solidFill>
                   <a:srgbClr val="17364A"/>
                 </a:solidFill>
@@ -11779,13 +12680,13 @@
                 <a:ea typeface="Aptos" pitchFamily="34" charset="-122"/>
                 <a:cs typeface="Aptos" pitchFamily="34" charset="-120"/>
               </a:rPr>
-              <a:t>Tool 4: AI Policy Landscape Scan (Worksheet) - Use AI Policy Landscape Scan to translate this lesson into a documented public health.</a:t>
-            </a:r>
-            <a:endParaRPr lang="en-US" sz="1460" dirty="0"/>
-          </a:p>
-          <a:p>
-            <a:r>
-              <a:rPr lang="en-US" sz="1460" dirty="0">
+              <a:t>Tool 4: AI Policy Landscape Scan (Worksheet) - Use AI Policy Landscape Scan to translate this lesson into a.</a:t>
+            </a:r>
+            <a:endParaRPr lang="en-US" sz="1850" dirty="0"/>
+          </a:p>
+          <a:p>
+            <a:r>
+              <a:rPr lang="en-US" sz="1850" dirty="0">
                 <a:solidFill>
                   <a:srgbClr val="17364A"/>
                 </a:solidFill>
@@ -11793,13 +12694,13 @@
                 <a:ea typeface="Aptos" pitchFamily="34" charset="-122"/>
                 <a:cs typeface="Aptos" pitchFamily="34" charset="-120"/>
               </a:rPr>
-              <a:t>Tool 5: AI Environmental and Resource Impact Review (Checklist) - Use AI Environmental and Resource Impact Review to translate this.</a:t>
-            </a:r>
-            <a:endParaRPr lang="en-US" sz="1460" dirty="0"/>
-          </a:p>
-          <a:p>
-            <a:r>
-              <a:rPr lang="en-US" sz="1460" dirty="0">
+              <a:t>Tool 5: AI Environmental and Resource Impact Review (Checklist) - Use AI Environmental and Resource Impact.</a:t>
+            </a:r>
+            <a:endParaRPr lang="en-US" sz="1850" dirty="0"/>
+          </a:p>
+          <a:p>
+            <a:r>
+              <a:rPr lang="en-US" sz="1850" dirty="0">
                 <a:solidFill>
                   <a:srgbClr val="17364A"/>
                 </a:solidFill>
@@ -11807,29 +12708,15 @@
                 <a:ea typeface="Aptos" pitchFamily="34" charset="-122"/>
                 <a:cs typeface="Aptos" pitchFamily="34" charset="-120"/>
               </a:rPr>
-              <a:t>Tool 6: Human-Centered AI Decision Rule Checklist (Checklist) - Use Human-Centered AI Decision Rule Checklist to translate this.</a:t>
-            </a:r>
-            <a:endParaRPr lang="en-US" sz="1460" dirty="0"/>
-          </a:p>
-          <a:p>
-            <a:r>
-              <a:rPr lang="en-US" sz="1460" dirty="0">
-                <a:solidFill>
-                  <a:srgbClr val="17364A"/>
-                </a:solidFill>
-                <a:latin typeface="Aptos" pitchFamily="34" charset="0"/>
-                <a:ea typeface="Aptos" pitchFamily="34" charset="-122"/>
-                <a:cs typeface="Aptos" pitchFamily="34" charset="-120"/>
-              </a:rPr>
-              <a:t>Tool 8: AI Project Charter (Planning) - Use AI Project Charter to translate this lesson into a documented public health AI planning,.</a:t>
-            </a:r>
-            <a:endParaRPr lang="en-US" sz="1460" dirty="0"/>
-          </a:p>
-        </p:txBody>
-      </p:sp>
-      <p:sp>
-        <p:nvSpPr>
-          <p:cNvPr id="9" name="Shape 7"/>
+              <a:t>Tool 6: Human-Centered AI Decision Rule Checklist (Checklist) - Use Human-Centered AI Decision Rule.</a:t>
+            </a:r>
+            <a:endParaRPr lang="en-US" sz="1850" dirty="0"/>
+          </a:p>
+        </p:txBody>
+      </p:sp>
+      <p:sp>
+        <p:nvSpPr>
+          <p:cNvPr id="10" name="Shape 8"/>
           <p:cNvSpPr/>
           <p:nvPr/>
         </p:nvSpPr>
@@ -11856,14 +12743,14 @@
       </p:sp>
       <p:sp>
         <p:nvSpPr>
-          <p:cNvPr id="10" name="Text 8"/>
+          <p:cNvPr id="11" name="Text 9"/>
           <p:cNvSpPr/>
           <p:nvPr/>
         </p:nvSpPr>
         <p:spPr>
           <a:xfrm>
             <a:off x="8211312" y="1563624"/>
-            <a:ext cx="2734056" cy="201168"/>
+            <a:ext cx="2734056" cy="256032"/>
           </a:xfrm>
           <a:prstGeom prst="rect">
             <a:avLst/>
@@ -11879,7 +12766,7 @@
               <a:buNone/>
             </a:pPr>
             <a:r>
-              <a:rPr lang="en-US" sz="950" b="1" dirty="0">
+              <a:rPr lang="en-US" sz="1300" b="1" dirty="0">
                 <a:solidFill>
                   <a:srgbClr val="0068B7"/>
                 </a:solidFill>
@@ -11889,20 +12776,20 @@
               </a:rPr>
               <a:t>Use the tools</a:t>
             </a:r>
-            <a:endParaRPr lang="en-US" sz="950" dirty="0"/>
-          </a:p>
-        </p:txBody>
-      </p:sp>
-      <p:sp>
-        <p:nvSpPr>
-          <p:cNvPr id="11" name="Text 9"/>
-          <p:cNvSpPr/>
-          <p:nvPr/>
-        </p:nvSpPr>
-        <p:spPr>
-          <a:xfrm>
-            <a:off x="8211312" y="1856232"/>
-            <a:ext cx="2734056" cy="1536192"/>
+            <a:endParaRPr lang="en-US" sz="1300" dirty="0"/>
+          </a:p>
+        </p:txBody>
+      </p:sp>
+      <p:sp>
+        <p:nvSpPr>
+          <p:cNvPr id="12" name="Text 10"/>
+          <p:cNvSpPr/>
+          <p:nvPr/>
+        </p:nvSpPr>
+        <p:spPr>
+          <a:xfrm>
+            <a:off x="8211312" y="1920240"/>
+            <a:ext cx="2734056" cy="1463040"/>
           </a:xfrm>
           <a:prstGeom prst="rect">
             <a:avLst/>
@@ -11920,7 +12807,7 @@
               <a:buNone/>
             </a:pPr>
             <a:r>
-              <a:rPr lang="en-US" sz="1250" dirty="0">
+              <a:rPr lang="en-US" sz="1550" dirty="0">
                 <a:solidFill>
                   <a:srgbClr val="17364A"/>
                 </a:solidFill>
@@ -11930,32 +12817,32 @@
               </a:rPr>
               <a:t>Use linked tools when your department needs a structured worksheet, template, checklist, review process, or documentation artifact.</a:t>
             </a:r>
-            <a:endParaRPr lang="en-US" sz="1250" dirty="0"/>
-          </a:p>
-        </p:txBody>
-      </p:sp>
-      <p:sp>
-        <p:nvSpPr>
-          <p:cNvPr id="12" name="Shape 10"/>
-          <p:cNvSpPr/>
-          <p:nvPr/>
-        </p:nvSpPr>
-        <p:spPr>
-          <a:xfrm>
-            <a:off x="8046720" y="3794760"/>
-            <a:ext cx="3063240" cy="1508760"/>
+            <a:endParaRPr lang="en-US" sz="1550" dirty="0"/>
+          </a:p>
+        </p:txBody>
+      </p:sp>
+      <p:sp>
+        <p:nvSpPr>
+          <p:cNvPr id="13" name="Shape 11"/>
+          <p:cNvSpPr/>
+          <p:nvPr/>
+        </p:nvSpPr>
+        <p:spPr>
+          <a:xfrm>
+            <a:off x="7818120" y="3977640"/>
+            <a:ext cx="972312" cy="749808"/>
           </a:xfrm>
           <a:prstGeom prst="roundRect">
             <a:avLst>
-              <a:gd name="adj" fmla="val 7273"/>
+              <a:gd name="adj" fmla="val 14634"/>
             </a:avLst>
           </a:prstGeom>
           <a:solidFill>
-            <a:srgbClr val="EEF8ED"/>
+            <a:srgbClr val="0068B7"/>
           </a:solidFill>
           <a:ln w="12700">
             <a:solidFill>
-              <a:srgbClr val="B9D7E6"/>
+              <a:srgbClr val="0068B7"/>
             </a:solidFill>
             <a:prstDash val="solid"/>
           </a:ln>
@@ -11963,81 +12850,256 @@
       </p:sp>
       <p:sp>
         <p:nvSpPr>
-          <p:cNvPr id="13" name="Text 11"/>
-          <p:cNvSpPr/>
-          <p:nvPr/>
-        </p:nvSpPr>
-        <p:spPr>
-          <a:xfrm>
-            <a:off x="8211312" y="3941064"/>
-            <a:ext cx="2734056" cy="201168"/>
-          </a:xfrm>
-          <a:prstGeom prst="rect">
-            <a:avLst/>
-          </a:prstGeom>
-          <a:noFill/>
-          <a:ln/>
-        </p:spPr>
-        <p:txBody>
-          <a:bodyPr wrap="square" lIns="0" tIns="0" rIns="0" bIns="0" rtlCol="0" anchor="ctr"/>
-          <a:lstStyle/>
-          <a:p>
-            <a:pPr indent="0" marL="0">
-              <a:buNone/>
-            </a:pPr>
-            <a:r>
-              <a:rPr lang="en-US" sz="950" b="1" dirty="0">
-                <a:solidFill>
-                  <a:srgbClr val="0068B7"/>
-                </a:solidFill>
-                <a:latin typeface="Aptos" pitchFamily="34" charset="0"/>
-                <a:ea typeface="Aptos" pitchFamily="34" charset="-122"/>
-                <a:cs typeface="Aptos" pitchFamily="34" charset="-120"/>
-              </a:rPr>
-              <a:t>Avoid duplication</a:t>
-            </a:r>
-            <a:endParaRPr lang="en-US" sz="950" dirty="0"/>
-          </a:p>
-        </p:txBody>
-      </p:sp>
-      <p:sp>
-        <p:nvSpPr>
           <p:cNvPr id="14" name="Text 12"/>
           <p:cNvSpPr/>
           <p:nvPr/>
         </p:nvSpPr>
         <p:spPr>
           <a:xfrm>
-            <a:off x="8211312" y="4233672"/>
-            <a:ext cx="2734056" cy="941832"/>
-          </a:xfrm>
-          <a:prstGeom prst="rect">
-            <a:avLst/>
-          </a:prstGeom>
-          <a:noFill/>
-          <a:ln/>
-        </p:spPr>
-        <p:txBody>
-          <a:bodyPr wrap="square" lIns="0" tIns="0" rIns="0" bIns="0" rtlCol="0" anchor="t">
+            <a:off x="7891272" y="4169664"/>
+            <a:ext cx="826008" cy="310896"/>
+          </a:xfrm>
+          <a:prstGeom prst="rect">
+            <a:avLst/>
+          </a:prstGeom>
+          <a:noFill/>
+          <a:ln/>
+        </p:spPr>
+        <p:txBody>
+          <a:bodyPr wrap="square" lIns="0" tIns="0" rIns="0" bIns="0" rtlCol="0" anchor="ctr">
             <a:normAutofit/>
           </a:bodyPr>
           <a:lstStyle/>
           <a:p>
-            <a:pPr indent="0" marL="0">
-              <a:buNone/>
-            </a:pPr>
-            <a:r>
-              <a:rPr lang="en-US" sz="1250" dirty="0">
-                <a:solidFill>
-                  <a:srgbClr val="17364A"/>
-                </a:solidFill>
-                <a:latin typeface="Aptos" pitchFamily="34" charset="0"/>
-                <a:ea typeface="Aptos" pitchFamily="34" charset="-122"/>
-                <a:cs typeface="Aptos" pitchFamily="34" charset="-120"/>
-              </a:rPr>
-              <a:t>If your department already has a strong equivalent tool, adapt or use the existing process instead of recreating it.</a:t>
-            </a:r>
-            <a:endParaRPr lang="en-US" sz="1250" dirty="0"/>
+            <a:pPr algn="ctr" indent="0" marL="0">
+              <a:buNone/>
+            </a:pPr>
+            <a:r>
+              <a:rPr lang="en-US" sz="1500" b="1" dirty="0">
+                <a:solidFill>
+                  <a:srgbClr val="FFFFFF"/>
+                </a:solidFill>
+                <a:latin typeface="Aptos" pitchFamily="34" charset="0"/>
+                <a:ea typeface="Aptos" pitchFamily="34" charset="-122"/>
+                <a:cs typeface="Aptos" pitchFamily="34" charset="-120"/>
+              </a:rPr>
+              <a:t>Concept</a:t>
+            </a:r>
+            <a:endParaRPr lang="en-US" sz="1500" dirty="0"/>
+          </a:p>
+        </p:txBody>
+      </p:sp>
+      <p:sp>
+        <p:nvSpPr>
+          <p:cNvPr id="15" name="Text 13"/>
+          <p:cNvSpPr/>
+          <p:nvPr/>
+        </p:nvSpPr>
+        <p:spPr>
+          <a:xfrm>
+            <a:off x="8817864" y="4187952"/>
+            <a:ext cx="201168" cy="256032"/>
+          </a:xfrm>
+          <a:prstGeom prst="rect">
+            <a:avLst/>
+          </a:prstGeom>
+          <a:noFill/>
+          <a:ln/>
+        </p:spPr>
+        <p:txBody>
+          <a:bodyPr wrap="square" lIns="0" tIns="0" rIns="0" bIns="0" rtlCol="0" anchor="ctr"/>
+          <a:lstStyle/>
+          <a:p>
+            <a:pPr algn="ctr" indent="0" marL="0">
+              <a:buNone/>
+            </a:pPr>
+            <a:r>
+              <a:rPr lang="en-US" sz="1800" b="1" dirty="0">
+                <a:solidFill>
+                  <a:srgbClr val="0068B7"/>
+                </a:solidFill>
+                <a:latin typeface="Aptos" pitchFamily="34" charset="0"/>
+                <a:ea typeface="Aptos" pitchFamily="34" charset="-122"/>
+                <a:cs typeface="Aptos" pitchFamily="34" charset="-120"/>
+              </a:rPr>
+              <a:t>â†’</a:t>
+            </a:r>
+            <a:endParaRPr lang="en-US" sz="1800" dirty="0"/>
+          </a:p>
+        </p:txBody>
+      </p:sp>
+      <p:sp>
+        <p:nvSpPr>
+          <p:cNvPr id="16" name="Shape 14"/>
+          <p:cNvSpPr/>
+          <p:nvPr/>
+        </p:nvSpPr>
+        <p:spPr>
+          <a:xfrm>
+            <a:off x="9046464" y="3977640"/>
+            <a:ext cx="972312" cy="749808"/>
+          </a:xfrm>
+          <a:prstGeom prst="roundRect">
+            <a:avLst>
+              <a:gd name="adj" fmla="val 14634"/>
+            </a:avLst>
+          </a:prstGeom>
+          <a:solidFill>
+            <a:srgbClr val="2F8A28"/>
+          </a:solidFill>
+          <a:ln w="12700">
+            <a:solidFill>
+              <a:srgbClr val="2F8A28"/>
+            </a:solidFill>
+            <a:prstDash val="solid"/>
+          </a:ln>
+        </p:spPr>
+      </p:sp>
+      <p:sp>
+        <p:nvSpPr>
+          <p:cNvPr id="17" name="Text 15"/>
+          <p:cNvSpPr/>
+          <p:nvPr/>
+        </p:nvSpPr>
+        <p:spPr>
+          <a:xfrm>
+            <a:off x="9119616" y="4169664"/>
+            <a:ext cx="826008" cy="310896"/>
+          </a:xfrm>
+          <a:prstGeom prst="rect">
+            <a:avLst/>
+          </a:prstGeom>
+          <a:noFill/>
+          <a:ln/>
+        </p:spPr>
+        <p:txBody>
+          <a:bodyPr wrap="square" lIns="0" tIns="0" rIns="0" bIns="0" rtlCol="0" anchor="ctr">
+            <a:normAutofit/>
+          </a:bodyPr>
+          <a:lstStyle/>
+          <a:p>
+            <a:pPr algn="ctr" indent="0" marL="0">
+              <a:buNone/>
+            </a:pPr>
+            <a:r>
+              <a:rPr lang="en-US" sz="1500" b="1" dirty="0">
+                <a:solidFill>
+                  <a:srgbClr val="FFFFFF"/>
+                </a:solidFill>
+                <a:latin typeface="Aptos" pitchFamily="34" charset="0"/>
+                <a:ea typeface="Aptos" pitchFamily="34" charset="-122"/>
+                <a:cs typeface="Aptos" pitchFamily="34" charset="-120"/>
+              </a:rPr>
+              <a:t>Tool</a:t>
+            </a:r>
+            <a:endParaRPr lang="en-US" sz="1500" dirty="0"/>
+          </a:p>
+        </p:txBody>
+      </p:sp>
+      <p:sp>
+        <p:nvSpPr>
+          <p:cNvPr id="18" name="Text 16"/>
+          <p:cNvSpPr/>
+          <p:nvPr/>
+        </p:nvSpPr>
+        <p:spPr>
+          <a:xfrm>
+            <a:off x="10046208" y="4187952"/>
+            <a:ext cx="201168" cy="256032"/>
+          </a:xfrm>
+          <a:prstGeom prst="rect">
+            <a:avLst/>
+          </a:prstGeom>
+          <a:noFill/>
+          <a:ln/>
+        </p:spPr>
+        <p:txBody>
+          <a:bodyPr wrap="square" lIns="0" tIns="0" rIns="0" bIns="0" rtlCol="0" anchor="ctr"/>
+          <a:lstStyle/>
+          <a:p>
+            <a:pPr algn="ctr" indent="0" marL="0">
+              <a:buNone/>
+            </a:pPr>
+            <a:r>
+              <a:rPr lang="en-US" sz="1800" b="1" dirty="0">
+                <a:solidFill>
+                  <a:srgbClr val="0068B7"/>
+                </a:solidFill>
+                <a:latin typeface="Aptos" pitchFamily="34" charset="0"/>
+                <a:ea typeface="Aptos" pitchFamily="34" charset="-122"/>
+                <a:cs typeface="Aptos" pitchFamily="34" charset="-120"/>
+              </a:rPr>
+              <a:t>â†’</a:t>
+            </a:r>
+            <a:endParaRPr lang="en-US" sz="1800" dirty="0"/>
+          </a:p>
+        </p:txBody>
+      </p:sp>
+      <p:sp>
+        <p:nvSpPr>
+          <p:cNvPr id="19" name="Shape 17"/>
+          <p:cNvSpPr/>
+          <p:nvPr/>
+        </p:nvSpPr>
+        <p:spPr>
+          <a:xfrm>
+            <a:off x="10274808" y="3977640"/>
+            <a:ext cx="972312" cy="749808"/>
+          </a:xfrm>
+          <a:prstGeom prst="roundRect">
+            <a:avLst>
+              <a:gd name="adj" fmla="val 14634"/>
+            </a:avLst>
+          </a:prstGeom>
+          <a:solidFill>
+            <a:srgbClr val="D69A2D"/>
+          </a:solidFill>
+          <a:ln w="12700">
+            <a:solidFill>
+              <a:srgbClr val="D69A2D"/>
+            </a:solidFill>
+            <a:prstDash val="solid"/>
+          </a:ln>
+        </p:spPr>
+      </p:sp>
+      <p:sp>
+        <p:nvSpPr>
+          <p:cNvPr id="20" name="Text 18"/>
+          <p:cNvSpPr/>
+          <p:nvPr/>
+        </p:nvSpPr>
+        <p:spPr>
+          <a:xfrm>
+            <a:off x="10347960" y="4169664"/>
+            <a:ext cx="826008" cy="310896"/>
+          </a:xfrm>
+          <a:prstGeom prst="rect">
+            <a:avLst/>
+          </a:prstGeom>
+          <a:noFill/>
+          <a:ln/>
+        </p:spPr>
+        <p:txBody>
+          <a:bodyPr wrap="square" lIns="0" tIns="0" rIns="0" bIns="0" rtlCol="0" anchor="ctr">
+            <a:normAutofit/>
+          </a:bodyPr>
+          <a:lstStyle/>
+          <a:p>
+            <a:pPr algn="ctr" indent="0" marL="0">
+              <a:buNone/>
+            </a:pPr>
+            <a:r>
+              <a:rPr lang="en-US" sz="1500" b="1" dirty="0">
+                <a:solidFill>
+                  <a:srgbClr val="FFFFFF"/>
+                </a:solidFill>
+                <a:latin typeface="Aptos" pitchFamily="34" charset="0"/>
+                <a:ea typeface="Aptos" pitchFamily="34" charset="-122"/>
+                <a:cs typeface="Aptos" pitchFamily="34" charset="-120"/>
+              </a:rPr>
+              <a:t>Artifact</a:t>
+            </a:r>
+            <a:endParaRPr lang="en-US" sz="1500" dirty="0"/>
           </a:p>
         </p:txBody>
       </p:sp>
@@ -12234,7 +13296,7 @@
                 <a:ea typeface="Aptos" pitchFamily="34" charset="-122"/>
                 <a:cs typeface="Aptos" pitchFamily="34" charset="-120"/>
               </a:rPr>
-              <a:t>© Paula Soper</a:t>
+              <a:t>Â© Paula Soper</a:t>
             </a:r>
             <a:endParaRPr lang="en-US" sz="800" dirty="0"/>
           </a:p>
@@ -12242,7 +13304,46 @@
       </p:sp>
       <p:sp>
         <p:nvSpPr>
-          <p:cNvPr id="7" name="Shape 5"/>
+          <p:cNvPr id="7" name="Text 5"/>
+          <p:cNvSpPr/>
+          <p:nvPr/>
+        </p:nvSpPr>
+        <p:spPr>
+          <a:xfrm>
+            <a:off x="11137392" y="6510528"/>
+            <a:ext cx="411480" cy="201168"/>
+          </a:xfrm>
+          <a:prstGeom prst="rect">
+            <a:avLst/>
+          </a:prstGeom>
+          <a:noFill/>
+          <a:ln/>
+        </p:spPr>
+        <p:txBody>
+          <a:bodyPr wrap="square" lIns="0" tIns="0" rIns="0" bIns="0" rtlCol="0" anchor="ctr"/>
+          <a:lstStyle/>
+          <a:p>
+            <a:pPr algn="r" indent="0" marL="0">
+              <a:buNone/>
+            </a:pPr>
+            <a:r>
+              <a:rPr lang="en-US" sz="900" dirty="0">
+                <a:solidFill>
+                  <a:srgbClr val="5F7181"/>
+                </a:solidFill>
+                <a:latin typeface="Aptos" pitchFamily="34" charset="0"/>
+                <a:ea typeface="Aptos" pitchFamily="34" charset="-122"/>
+                <a:cs typeface="Aptos" pitchFamily="34" charset="-120"/>
+              </a:rPr>
+              <a:t>5</a:t>
+            </a:r>
+            <a:endParaRPr lang="en-US" sz="900" dirty="0"/>
+          </a:p>
+        </p:txBody>
+      </p:sp>
+      <p:sp>
+        <p:nvSpPr>
+          <p:cNvPr id="8" name="Shape 6"/>
           <p:cNvSpPr/>
           <p:nvPr/>
         </p:nvSpPr>
@@ -12267,7 +13368,7 @@
       </p:sp>
       <p:sp>
         <p:nvSpPr>
-          <p:cNvPr id="8" name="Text 6"/>
+          <p:cNvPr id="9" name="Text 7"/>
           <p:cNvSpPr/>
           <p:nvPr/>
         </p:nvSpPr>
@@ -12306,14 +13407,14 @@
       </p:sp>
       <p:sp>
         <p:nvSpPr>
-          <p:cNvPr id="9" name="Text 7"/>
+          <p:cNvPr id="10" name="Text 8"/>
           <p:cNvSpPr/>
           <p:nvPr/>
         </p:nvSpPr>
         <p:spPr>
           <a:xfrm>
             <a:off x="640080" y="621792"/>
-            <a:ext cx="10881360" cy="566928"/>
+            <a:ext cx="10881360" cy="713232"/>
           </a:xfrm>
           <a:prstGeom prst="rect">
             <a:avLst/>
@@ -12331,7 +13432,7 @@
               <a:buNone/>
             </a:pPr>
             <a:r>
-              <a:rPr lang="en-US" sz="2700" b="1" dirty="0">
+              <a:rPr lang="en-US" sz="3400" b="1" dirty="0">
                 <a:solidFill>
                   <a:srgbClr val="003A63"/>
                 </a:solidFill>
@@ -12341,20 +13442,20 @@
               </a:rPr>
               <a:t>Learning Objectives</a:t>
             </a:r>
-            <a:endParaRPr lang="en-US" sz="2700" dirty="0"/>
-          </a:p>
-        </p:txBody>
-      </p:sp>
-      <p:sp>
-        <p:nvSpPr>
-          <p:cNvPr id="10" name="Text 8"/>
-          <p:cNvSpPr/>
-          <p:nvPr/>
-        </p:nvSpPr>
-        <p:spPr>
-          <a:xfrm>
-            <a:off x="868680" y="1417320"/>
-            <a:ext cx="6675120" cy="4434840"/>
+            <a:endParaRPr lang="en-US" sz="3400" dirty="0"/>
+          </a:p>
+        </p:txBody>
+      </p:sp>
+      <p:sp>
+        <p:nvSpPr>
+          <p:cNvPr id="11" name="Text 9"/>
+          <p:cNvSpPr/>
+          <p:nvPr/>
+        </p:nvSpPr>
+        <p:spPr>
+          <a:xfrm>
+            <a:off x="868680" y="1508760"/>
+            <a:ext cx="6537960" cy="4160520"/>
           </a:xfrm>
           <a:prstGeom prst="rect">
             <a:avLst/>
@@ -12369,7 +13470,7 @@
           <a:lstStyle/>
           <a:p>
             <a:r>
-              <a:rPr lang="en-US" sz="1700" dirty="0">
+              <a:rPr lang="en-US" sz="2100" dirty="0">
                 <a:solidFill>
                   <a:srgbClr val="17364A"/>
                 </a:solidFill>
@@ -12379,11 +13480,11 @@
               </a:rPr>
               <a:t>Define geospatial AI and spatial epidemiology in public health terms.</a:t>
             </a:r>
-            <a:endParaRPr lang="en-US" sz="1700" dirty="0"/>
-          </a:p>
-          <a:p>
-            <a:r>
-              <a:rPr lang="en-US" sz="1700" dirty="0">
+            <a:endParaRPr lang="en-US" sz="2100" dirty="0"/>
+          </a:p>
+          <a:p>
+            <a:r>
+              <a:rPr lang="en-US" sz="2100" dirty="0">
                 <a:solidFill>
                   <a:srgbClr val="17364A"/>
                 </a:solidFill>
@@ -12391,13 +13492,13 @@
                 <a:ea typeface="Aptos" pitchFamily="34" charset="-122"/>
                 <a:cs typeface="Aptos" pitchFamily="34" charset="-120"/>
               </a:rPr>
-              <a:t>Explain how geocoding, aggregation, spatial scale, and data quality affect AI-supported maps and analyses.</a:t>
-            </a:r>
-            <a:endParaRPr lang="en-US" sz="1700" dirty="0"/>
-          </a:p>
-          <a:p>
-            <a:r>
-              <a:rPr lang="en-US" sz="1700" dirty="0">
+              <a:t>Explain how geocoding, aggregation, spatial scale, and data quality affect AI-supported maps and.</a:t>
+            </a:r>
+            <a:endParaRPr lang="en-US" sz="2100" dirty="0"/>
+          </a:p>
+          <a:p>
+            <a:r>
+              <a:rPr lang="en-US" sz="2100" dirty="0">
                 <a:solidFill>
                   <a:srgbClr val="17364A"/>
                 </a:solidFill>
@@ -12407,27 +13508,13 @@
               </a:rPr>
               <a:t>Identify privacy and re-identification risks related to location data.</a:t>
             </a:r>
-            <a:endParaRPr lang="en-US" sz="1700" dirty="0"/>
-          </a:p>
-          <a:p>
-            <a:r>
-              <a:rPr lang="en-US" sz="1700" dirty="0">
-                <a:solidFill>
-                  <a:srgbClr val="17364A"/>
-                </a:solidFill>
-                <a:latin typeface="Aptos" pitchFamily="34" charset="0"/>
-                <a:ea typeface="Aptos" pitchFamily="34" charset="-122"/>
-                <a:cs typeface="Aptos" pitchFamily="34" charset="-120"/>
-              </a:rPr>
-              <a:t>Recognize spatial bias, modifiable areal unit problems, and ecological interpretation risks.</a:t>
-            </a:r>
-            <a:endParaRPr lang="en-US" sz="1700" dirty="0"/>
-          </a:p>
-        </p:txBody>
-      </p:sp>
-      <p:sp>
-        <p:nvSpPr>
-          <p:cNvPr id="11" name="Shape 9"/>
+            <a:endParaRPr lang="en-US" sz="2100" dirty="0"/>
+          </a:p>
+        </p:txBody>
+      </p:sp>
+      <p:sp>
+        <p:nvSpPr>
+          <p:cNvPr id="12" name="Shape 10"/>
           <p:cNvSpPr/>
           <p:nvPr/>
         </p:nvSpPr>
@@ -12454,14 +13541,14 @@
       </p:sp>
       <p:sp>
         <p:nvSpPr>
-          <p:cNvPr id="12" name="Text 10"/>
+          <p:cNvPr id="13" name="Text 11"/>
           <p:cNvSpPr/>
           <p:nvPr/>
         </p:nvSpPr>
         <p:spPr>
           <a:xfrm>
             <a:off x="8074152" y="1563624"/>
-            <a:ext cx="2825496" cy="201168"/>
+            <a:ext cx="2825496" cy="256032"/>
           </a:xfrm>
           <a:prstGeom prst="rect">
             <a:avLst/>
@@ -12477,7 +13564,7 @@
               <a:buNone/>
             </a:pPr>
             <a:r>
-              <a:rPr lang="en-US" sz="950" b="1" dirty="0">
+              <a:rPr lang="en-US" sz="1300" b="1" dirty="0">
                 <a:solidFill>
                   <a:srgbClr val="0068B7"/>
                 </a:solidFill>
@@ -12487,20 +13574,20 @@
               </a:rPr>
               <a:t>Key idea</a:t>
             </a:r>
-            <a:endParaRPr lang="en-US" sz="950" dirty="0"/>
-          </a:p>
-        </p:txBody>
-      </p:sp>
-      <p:sp>
-        <p:nvSpPr>
-          <p:cNvPr id="13" name="Text 11"/>
-          <p:cNvSpPr/>
-          <p:nvPr/>
-        </p:nvSpPr>
-        <p:spPr>
-          <a:xfrm>
-            <a:off x="8074152" y="1856232"/>
-            <a:ext cx="2825496" cy="1261872"/>
+            <a:endParaRPr lang="en-US" sz="1300" dirty="0"/>
+          </a:p>
+        </p:txBody>
+      </p:sp>
+      <p:sp>
+        <p:nvSpPr>
+          <p:cNvPr id="14" name="Text 12"/>
+          <p:cNvSpPr/>
+          <p:nvPr/>
+        </p:nvSpPr>
+        <p:spPr>
+          <a:xfrm>
+            <a:off x="8074152" y="1920240"/>
+            <a:ext cx="2825496" cy="1188720"/>
           </a:xfrm>
           <a:prstGeom prst="rect">
             <a:avLst/>
@@ -12518,7 +13605,7 @@
               <a:buNone/>
             </a:pPr>
             <a:r>
-              <a:rPr lang="en-US" sz="1250" dirty="0">
+              <a:rPr lang="en-US" sz="1550" dirty="0">
                 <a:solidFill>
                   <a:srgbClr val="17364A"/>
                 </a:solidFill>
@@ -12528,13 +13615,13 @@
               </a:rPr>
               <a:t>Define geospatial AI and spatial epidemiology in public health terms.</a:t>
             </a:r>
-            <a:endParaRPr lang="en-US" sz="1250" dirty="0"/>
-          </a:p>
-        </p:txBody>
-      </p:sp>
-      <p:sp>
-        <p:nvSpPr>
-          <p:cNvPr id="14" name="Shape 12"/>
+            <a:endParaRPr lang="en-US" sz="1550" dirty="0"/>
+          </a:p>
+        </p:txBody>
+      </p:sp>
+      <p:sp>
+        <p:nvSpPr>
+          <p:cNvPr id="15" name="Shape 13"/>
           <p:cNvSpPr/>
           <p:nvPr/>
         </p:nvSpPr>
@@ -12561,14 +13648,14 @@
       </p:sp>
       <p:sp>
         <p:nvSpPr>
-          <p:cNvPr id="15" name="Text 13"/>
+          <p:cNvPr id="16" name="Text 14"/>
           <p:cNvSpPr/>
           <p:nvPr/>
         </p:nvSpPr>
         <p:spPr>
           <a:xfrm>
             <a:off x="8074152" y="3666744"/>
-            <a:ext cx="2825496" cy="201168"/>
+            <a:ext cx="2825496" cy="256032"/>
           </a:xfrm>
           <a:prstGeom prst="rect">
             <a:avLst/>
@@ -12584,7 +13671,7 @@
               <a:buNone/>
             </a:pPr>
             <a:r>
-              <a:rPr lang="en-US" sz="950" b="1" dirty="0">
+              <a:rPr lang="en-US" sz="1300" b="1" dirty="0">
                 <a:solidFill>
                   <a:srgbClr val="0068B7"/>
                 </a:solidFill>
@@ -12594,20 +13681,20 @@
               </a:rPr>
               <a:t>Use this for</a:t>
             </a:r>
-            <a:endParaRPr lang="en-US" sz="950" dirty="0"/>
-          </a:p>
-        </p:txBody>
-      </p:sp>
-      <p:sp>
-        <p:nvSpPr>
-          <p:cNvPr id="16" name="Text 14"/>
-          <p:cNvSpPr/>
-          <p:nvPr/>
-        </p:nvSpPr>
-        <p:spPr>
-          <a:xfrm>
-            <a:off x="8074152" y="3959352"/>
-            <a:ext cx="2825496" cy="1170432"/>
+            <a:endParaRPr lang="en-US" sz="1300" dirty="0"/>
+          </a:p>
+        </p:txBody>
+      </p:sp>
+      <p:sp>
+        <p:nvSpPr>
+          <p:cNvPr id="17" name="Text 15"/>
+          <p:cNvSpPr/>
+          <p:nvPr/>
+        </p:nvSpPr>
+        <p:spPr>
+          <a:xfrm>
+            <a:off x="8074152" y="4023360"/>
+            <a:ext cx="2825496" cy="1097280"/>
           </a:xfrm>
           <a:prstGeom prst="rect">
             <a:avLst/>
@@ -12625,7 +13712,7 @@
               <a:buNone/>
             </a:pPr>
             <a:r>
-              <a:rPr lang="en-US" sz="1250" dirty="0">
+              <a:rPr lang="en-US" sz="1550" dirty="0">
                 <a:solidFill>
                   <a:srgbClr val="17364A"/>
                 </a:solidFill>
@@ -12635,7 +13722,7 @@
               </a:rPr>
               <a:t>Connect the concept to public health decisions, safeguards, documentation, or implementation work.</a:t>
             </a:r>
-            <a:endParaRPr lang="en-US" sz="1250" dirty="0"/>
+            <a:endParaRPr lang="en-US" sz="1550" dirty="0"/>
           </a:p>
         </p:txBody>
       </p:sp>
@@ -12832,7 +13919,7 @@
                 <a:ea typeface="Aptos" pitchFamily="34" charset="-122"/>
                 <a:cs typeface="Aptos" pitchFamily="34" charset="-120"/>
               </a:rPr>
-              <a:t>© Paula Soper</a:t>
+              <a:t>Â© Paula Soper</a:t>
             </a:r>
             <a:endParaRPr lang="en-US" sz="800" dirty="0"/>
           </a:p>
@@ -12846,8 +13933,47 @@
         </p:nvSpPr>
         <p:spPr>
           <a:xfrm>
+            <a:off x="11137392" y="6510528"/>
+            <a:ext cx="411480" cy="201168"/>
+          </a:xfrm>
+          <a:prstGeom prst="rect">
+            <a:avLst/>
+          </a:prstGeom>
+          <a:noFill/>
+          <a:ln/>
+        </p:spPr>
+        <p:txBody>
+          <a:bodyPr wrap="square" lIns="0" tIns="0" rIns="0" bIns="0" rtlCol="0" anchor="ctr"/>
+          <a:lstStyle/>
+          <a:p>
+            <a:pPr algn="r" indent="0" marL="0">
+              <a:buNone/>
+            </a:pPr>
+            <a:r>
+              <a:rPr lang="en-US" sz="900" dirty="0">
+                <a:solidFill>
+                  <a:srgbClr val="5F7181"/>
+                </a:solidFill>
+                <a:latin typeface="Aptos" pitchFamily="34" charset="0"/>
+                <a:ea typeface="Aptos" pitchFamily="34" charset="-122"/>
+                <a:cs typeface="Aptos" pitchFamily="34" charset="-120"/>
+              </a:rPr>
+              <a:t>6</a:t>
+            </a:r>
+            <a:endParaRPr lang="en-US" sz="900" dirty="0"/>
+          </a:p>
+        </p:txBody>
+      </p:sp>
+      <p:sp>
+        <p:nvSpPr>
+          <p:cNvPr id="8" name="Text 6"/>
+          <p:cNvSpPr/>
+          <p:nvPr/>
+        </p:nvSpPr>
+        <p:spPr>
+          <a:xfrm>
             <a:off x="640080" y="658368"/>
-            <a:ext cx="10881360" cy="566928"/>
+            <a:ext cx="10881360" cy="713232"/>
           </a:xfrm>
           <a:prstGeom prst="rect">
             <a:avLst/>
@@ -12865,7 +13991,7 @@
               <a:buNone/>
             </a:pPr>
             <a:r>
-              <a:rPr lang="en-US" sz="2700" b="1" dirty="0">
+              <a:rPr lang="en-US" sz="3400" b="1" dirty="0">
                 <a:solidFill>
                   <a:srgbClr val="003A63"/>
                 </a:solidFill>
@@ -12875,20 +14001,20 @@
               </a:rPr>
               <a:t>Learning Objectives Continued</a:t>
             </a:r>
-            <a:endParaRPr lang="en-US" sz="2700" dirty="0"/>
-          </a:p>
-        </p:txBody>
-      </p:sp>
-      <p:sp>
-        <p:nvSpPr>
-          <p:cNvPr id="8" name="Text 6"/>
-          <p:cNvSpPr/>
-          <p:nvPr/>
-        </p:nvSpPr>
-        <p:spPr>
-          <a:xfrm>
-            <a:off x="868680" y="1417320"/>
-            <a:ext cx="6675120" cy="4434840"/>
+            <a:endParaRPr lang="en-US" sz="3400" dirty="0"/>
+          </a:p>
+        </p:txBody>
+      </p:sp>
+      <p:sp>
+        <p:nvSpPr>
+          <p:cNvPr id="9" name="Text 7"/>
+          <p:cNvSpPr/>
+          <p:nvPr/>
+        </p:nvSpPr>
+        <p:spPr>
+          <a:xfrm>
+            <a:off x="868680" y="1508760"/>
+            <a:ext cx="6537960" cy="4160520"/>
           </a:xfrm>
           <a:prstGeom prst="rect">
             <a:avLst/>
@@ -12903,7 +14029,7 @@
           <a:lstStyle/>
           <a:p>
             <a:r>
-              <a:rPr lang="en-US" sz="1700" dirty="0">
+              <a:rPr lang="en-US" sz="2100" dirty="0">
                 <a:solidFill>
                   <a:srgbClr val="17364A"/>
                 </a:solidFill>
@@ -12913,13 +14039,13 @@
               </a:rPr>
               <a:t>Produce a geospatial AI readiness worksheet for a public health workflow.</a:t>
             </a:r>
-            <a:endParaRPr lang="en-US" sz="1700" dirty="0"/>
-          </a:p>
-        </p:txBody>
-      </p:sp>
-      <p:sp>
-        <p:nvSpPr>
-          <p:cNvPr id="9" name="Shape 7"/>
+            <a:endParaRPr lang="en-US" sz="2100" dirty="0"/>
+          </a:p>
+        </p:txBody>
+      </p:sp>
+      <p:sp>
+        <p:nvSpPr>
+          <p:cNvPr id="10" name="Shape 8"/>
           <p:cNvSpPr/>
           <p:nvPr/>
         </p:nvSpPr>
@@ -12946,14 +14072,14 @@
       </p:sp>
       <p:sp>
         <p:nvSpPr>
-          <p:cNvPr id="10" name="Text 8"/>
+          <p:cNvPr id="11" name="Text 9"/>
           <p:cNvSpPr/>
           <p:nvPr/>
         </p:nvSpPr>
         <p:spPr>
           <a:xfrm>
             <a:off x="8074152" y="1563624"/>
-            <a:ext cx="2825496" cy="201168"/>
+            <a:ext cx="2825496" cy="256032"/>
           </a:xfrm>
           <a:prstGeom prst="rect">
             <a:avLst/>
@@ -12969,7 +14095,7 @@
               <a:buNone/>
             </a:pPr>
             <a:r>
-              <a:rPr lang="en-US" sz="950" b="1" dirty="0">
+              <a:rPr lang="en-US" sz="1300" b="1" dirty="0">
                 <a:solidFill>
                   <a:srgbClr val="0068B7"/>
                 </a:solidFill>
@@ -12979,20 +14105,20 @@
               </a:rPr>
               <a:t>Key idea</a:t>
             </a:r>
-            <a:endParaRPr lang="en-US" sz="950" dirty="0"/>
-          </a:p>
-        </p:txBody>
-      </p:sp>
-      <p:sp>
-        <p:nvSpPr>
-          <p:cNvPr id="11" name="Text 9"/>
-          <p:cNvSpPr/>
-          <p:nvPr/>
-        </p:nvSpPr>
-        <p:spPr>
-          <a:xfrm>
-            <a:off x="8074152" y="1856232"/>
-            <a:ext cx="2825496" cy="1261872"/>
+            <a:endParaRPr lang="en-US" sz="1300" dirty="0"/>
+          </a:p>
+        </p:txBody>
+      </p:sp>
+      <p:sp>
+        <p:nvSpPr>
+          <p:cNvPr id="12" name="Text 10"/>
+          <p:cNvSpPr/>
+          <p:nvPr/>
+        </p:nvSpPr>
+        <p:spPr>
+          <a:xfrm>
+            <a:off x="8074152" y="1920240"/>
+            <a:ext cx="2825496" cy="1188720"/>
           </a:xfrm>
           <a:prstGeom prst="rect">
             <a:avLst/>
@@ -13010,7 +14136,7 @@
               <a:buNone/>
             </a:pPr>
             <a:r>
-              <a:rPr lang="en-US" sz="1250" dirty="0">
+              <a:rPr lang="en-US" sz="1550" dirty="0">
                 <a:solidFill>
                   <a:srgbClr val="17364A"/>
                 </a:solidFill>
@@ -13020,13 +14146,13 @@
               </a:rPr>
               <a:t>Produce a geospatial AI readiness worksheet for a public health workflow.</a:t>
             </a:r>
-            <a:endParaRPr lang="en-US" sz="1250" dirty="0"/>
-          </a:p>
-        </p:txBody>
-      </p:sp>
-      <p:sp>
-        <p:nvSpPr>
-          <p:cNvPr id="12" name="Shape 10"/>
+            <a:endParaRPr lang="en-US" sz="1550" dirty="0"/>
+          </a:p>
+        </p:txBody>
+      </p:sp>
+      <p:sp>
+        <p:nvSpPr>
+          <p:cNvPr id="13" name="Shape 11"/>
           <p:cNvSpPr/>
           <p:nvPr/>
         </p:nvSpPr>
@@ -13053,14 +14179,14 @@
       </p:sp>
       <p:sp>
         <p:nvSpPr>
-          <p:cNvPr id="13" name="Text 11"/>
+          <p:cNvPr id="14" name="Text 12"/>
           <p:cNvSpPr/>
           <p:nvPr/>
         </p:nvSpPr>
         <p:spPr>
           <a:xfrm>
             <a:off x="8074152" y="3666744"/>
-            <a:ext cx="2825496" cy="201168"/>
+            <a:ext cx="2825496" cy="256032"/>
           </a:xfrm>
           <a:prstGeom prst="rect">
             <a:avLst/>
@@ -13076,7 +14202,7 @@
               <a:buNone/>
             </a:pPr>
             <a:r>
-              <a:rPr lang="en-US" sz="950" b="1" dirty="0">
+              <a:rPr lang="en-US" sz="1300" b="1" dirty="0">
                 <a:solidFill>
                   <a:srgbClr val="0068B7"/>
                 </a:solidFill>
@@ -13086,20 +14212,20 @@
               </a:rPr>
               <a:t>Use this for</a:t>
             </a:r>
-            <a:endParaRPr lang="en-US" sz="950" dirty="0"/>
-          </a:p>
-        </p:txBody>
-      </p:sp>
-      <p:sp>
-        <p:nvSpPr>
-          <p:cNvPr id="14" name="Text 12"/>
-          <p:cNvSpPr/>
-          <p:nvPr/>
-        </p:nvSpPr>
-        <p:spPr>
-          <a:xfrm>
-            <a:off x="8074152" y="3959352"/>
-            <a:ext cx="2825496" cy="1170432"/>
+            <a:endParaRPr lang="en-US" sz="1300" dirty="0"/>
+          </a:p>
+        </p:txBody>
+      </p:sp>
+      <p:sp>
+        <p:nvSpPr>
+          <p:cNvPr id="15" name="Text 13"/>
+          <p:cNvSpPr/>
+          <p:nvPr/>
+        </p:nvSpPr>
+        <p:spPr>
+          <a:xfrm>
+            <a:off x="8074152" y="4023360"/>
+            <a:ext cx="2825496" cy="1097280"/>
           </a:xfrm>
           <a:prstGeom prst="rect">
             <a:avLst/>
@@ -13117,7 +14243,7 @@
               <a:buNone/>
             </a:pPr>
             <a:r>
-              <a:rPr lang="en-US" sz="1250" dirty="0">
+              <a:rPr lang="en-US" sz="1550" dirty="0">
                 <a:solidFill>
                   <a:srgbClr val="17364A"/>
                 </a:solidFill>
@@ -13127,7 +14253,7 @@
               </a:rPr>
               <a:t>Connect the concept to public health decisions, safeguards, documentation, or implementation work.</a:t>
             </a:r>
-            <a:endParaRPr lang="en-US" sz="1250" dirty="0"/>
+            <a:endParaRPr lang="en-US" sz="1550" dirty="0"/>
           </a:p>
         </p:txBody>
       </p:sp>
@@ -13324,7 +14450,7 @@
                 <a:ea typeface="Aptos" pitchFamily="34" charset="-122"/>
                 <a:cs typeface="Aptos" pitchFamily="34" charset="-120"/>
               </a:rPr>
-              <a:t>© Paula Soper</a:t>
+              <a:t>Â© Paula Soper</a:t>
             </a:r>
             <a:endParaRPr lang="en-US" sz="800" dirty="0"/>
           </a:p>
@@ -13332,7 +14458,46 @@
       </p:sp>
       <p:sp>
         <p:nvSpPr>
-          <p:cNvPr id="7" name="Shape 5"/>
+          <p:cNvPr id="7" name="Text 5"/>
+          <p:cNvSpPr/>
+          <p:nvPr/>
+        </p:nvSpPr>
+        <p:spPr>
+          <a:xfrm>
+            <a:off x="11137392" y="6510528"/>
+            <a:ext cx="411480" cy="201168"/>
+          </a:xfrm>
+          <a:prstGeom prst="rect">
+            <a:avLst/>
+          </a:prstGeom>
+          <a:noFill/>
+          <a:ln/>
+        </p:spPr>
+        <p:txBody>
+          <a:bodyPr wrap="square" lIns="0" tIns="0" rIns="0" bIns="0" rtlCol="0" anchor="ctr"/>
+          <a:lstStyle/>
+          <a:p>
+            <a:pPr algn="r" indent="0" marL="0">
+              <a:buNone/>
+            </a:pPr>
+            <a:r>
+              <a:rPr lang="en-US" sz="900" dirty="0">
+                <a:solidFill>
+                  <a:srgbClr val="5F7181"/>
+                </a:solidFill>
+                <a:latin typeface="Aptos" pitchFamily="34" charset="0"/>
+                <a:ea typeface="Aptos" pitchFamily="34" charset="-122"/>
+                <a:cs typeface="Aptos" pitchFamily="34" charset="-120"/>
+              </a:rPr>
+              <a:t>7</a:t>
+            </a:r>
+            <a:endParaRPr lang="en-US" sz="900" dirty="0"/>
+          </a:p>
+        </p:txBody>
+      </p:sp>
+      <p:sp>
+        <p:nvSpPr>
+          <p:cNvPr id="8" name="Shape 6"/>
           <p:cNvSpPr/>
           <p:nvPr/>
         </p:nvSpPr>
@@ -13357,7 +14522,7 @@
       </p:sp>
       <p:sp>
         <p:nvSpPr>
-          <p:cNvPr id="8" name="Text 6"/>
+          <p:cNvPr id="9" name="Text 7"/>
           <p:cNvSpPr/>
           <p:nvPr/>
         </p:nvSpPr>
@@ -13396,14 +14561,14 @@
       </p:sp>
       <p:sp>
         <p:nvSpPr>
-          <p:cNvPr id="9" name="Text 7"/>
+          <p:cNvPr id="10" name="Text 8"/>
           <p:cNvSpPr/>
           <p:nvPr/>
         </p:nvSpPr>
         <p:spPr>
           <a:xfrm>
             <a:off x="640080" y="621792"/>
-            <a:ext cx="10881360" cy="566928"/>
+            <a:ext cx="10881360" cy="713232"/>
           </a:xfrm>
           <a:prstGeom prst="rect">
             <a:avLst/>
@@ -13421,7 +14586,7 @@
               <a:buNone/>
             </a:pPr>
             <a:r>
-              <a:rPr lang="en-US" sz="2700" b="1" dirty="0">
+              <a:rPr lang="en-US" sz="3400" b="1" dirty="0">
                 <a:solidFill>
                   <a:srgbClr val="003A63"/>
                 </a:solidFill>
@@ -13431,20 +14596,20 @@
               </a:rPr>
               <a:t>Module Overview</a:t>
             </a:r>
-            <a:endParaRPr lang="en-US" sz="2700" dirty="0"/>
-          </a:p>
-        </p:txBody>
-      </p:sp>
-      <p:sp>
-        <p:nvSpPr>
-          <p:cNvPr id="10" name="Text 8"/>
-          <p:cNvSpPr/>
-          <p:nvPr/>
-        </p:nvSpPr>
-        <p:spPr>
-          <a:xfrm>
-            <a:off x="868680" y="1417320"/>
-            <a:ext cx="6675120" cy="4434840"/>
+            <a:endParaRPr lang="en-US" sz="3400" dirty="0"/>
+          </a:p>
+        </p:txBody>
+      </p:sp>
+      <p:sp>
+        <p:nvSpPr>
+          <p:cNvPr id="11" name="Text 9"/>
+          <p:cNvSpPr/>
+          <p:nvPr/>
+        </p:nvSpPr>
+        <p:spPr>
+          <a:xfrm>
+            <a:off x="868680" y="1508760"/>
+            <a:ext cx="6537960" cy="4160520"/>
           </a:xfrm>
           <a:prstGeom prst="rect">
             <a:avLst/>
@@ -13459,7 +14624,7 @@
           <a:lstStyle/>
           <a:p>
             <a:r>
-              <a:rPr lang="en-US" sz="1700" dirty="0">
+              <a:rPr lang="en-US" sz="2100" dirty="0">
                 <a:solidFill>
                   <a:srgbClr val="17364A"/>
                 </a:solidFill>
@@ -13467,13 +14632,13 @@
                 <a:ea typeface="Aptos" pitchFamily="34" charset="-122"/>
                 <a:cs typeface="Aptos" pitchFamily="34" charset="-120"/>
               </a:rPr>
-              <a:t>Geospatial AI combines spatial data, geographic analysis, and AI methods to identify patterns across place.</a:t>
-            </a:r>
-            <a:endParaRPr lang="en-US" sz="1700" dirty="0"/>
-          </a:p>
-          <a:p>
-            <a:r>
-              <a:rPr lang="en-US" sz="1700" dirty="0">
+              <a:t>Geospatial AI combines spatial data, geographic analysis, and AI methods to identify patterns across.</a:t>
+            </a:r>
+            <a:endParaRPr lang="en-US" sz="2100" dirty="0"/>
+          </a:p>
+          <a:p>
+            <a:r>
+              <a:rPr lang="en-US" sz="2100" dirty="0">
                 <a:solidFill>
                   <a:srgbClr val="17364A"/>
                 </a:solidFill>
@@ -13481,13 +14646,13 @@
                 <a:ea typeface="Aptos" pitchFamily="34" charset="-122"/>
                 <a:cs typeface="Aptos" pitchFamily="34" charset="-120"/>
               </a:rPr>
-              <a:t>In public health, spatial analysis is already central to outbreak response, environmental health, emergency preparedness,.</a:t>
-            </a:r>
-            <a:endParaRPr lang="en-US" sz="1700" dirty="0"/>
-          </a:p>
-          <a:p>
-            <a:r>
-              <a:rPr lang="en-US" sz="1700" dirty="0">
+              <a:t>In public health, spatial analysis is already central to outbreak response, environmental health,.</a:t>
+            </a:r>
+            <a:endParaRPr lang="en-US" sz="2100" dirty="0"/>
+          </a:p>
+          <a:p>
+            <a:r>
+              <a:rPr lang="en-US" sz="2100" dirty="0">
                 <a:solidFill>
                   <a:srgbClr val="17364A"/>
                 </a:solidFill>
@@ -13495,29 +14660,15 @@
                 <a:ea typeface="Aptos" pitchFamily="34" charset="-122"/>
                 <a:cs typeface="Aptos" pitchFamily="34" charset="-120"/>
               </a:rPr>
-              <a:t>AI can strengthen these activities when it helps detect clusters, estimate access barriers, classify imagery, prioritize.</a:t>
-            </a:r>
-            <a:endParaRPr lang="en-US" sz="1700" dirty="0"/>
-          </a:p>
-          <a:p>
-            <a:r>
-              <a:rPr lang="en-US" sz="1700" dirty="0">
-                <a:solidFill>
-                  <a:srgbClr val="17364A"/>
-                </a:solidFill>
-                <a:latin typeface="Aptos" pitchFamily="34" charset="0"/>
-                <a:ea typeface="Aptos" pitchFamily="34" charset="-122"/>
-                <a:cs typeface="Aptos" pitchFamily="34" charset="-120"/>
-              </a:rPr>
-              <a:t>This module introduces the technical and governance issues that arise when AI uses location.</a:t>
-            </a:r>
-            <a:endParaRPr lang="en-US" sz="1700" dirty="0"/>
-          </a:p>
-        </p:txBody>
-      </p:sp>
-      <p:sp>
-        <p:nvSpPr>
-          <p:cNvPr id="11" name="Shape 9"/>
+              <a:t>AI can strengthen these activities when it helps detect clusters, estimate access barriers, classify.</a:t>
+            </a:r>
+            <a:endParaRPr lang="en-US" sz="2100" dirty="0"/>
+          </a:p>
+        </p:txBody>
+      </p:sp>
+      <p:sp>
+        <p:nvSpPr>
+          <p:cNvPr id="12" name="Shape 10"/>
           <p:cNvSpPr/>
           <p:nvPr/>
         </p:nvSpPr>
@@ -13544,14 +14695,14 @@
       </p:sp>
       <p:sp>
         <p:nvSpPr>
-          <p:cNvPr id="12" name="Text 10"/>
+          <p:cNvPr id="13" name="Text 11"/>
           <p:cNvSpPr/>
           <p:nvPr/>
         </p:nvSpPr>
         <p:spPr>
           <a:xfrm>
             <a:off x="8074152" y="1563624"/>
-            <a:ext cx="2825496" cy="201168"/>
+            <a:ext cx="2825496" cy="256032"/>
           </a:xfrm>
           <a:prstGeom prst="rect">
             <a:avLst/>
@@ -13567,7 +14718,7 @@
               <a:buNone/>
             </a:pPr>
             <a:r>
-              <a:rPr lang="en-US" sz="950" b="1" dirty="0">
+              <a:rPr lang="en-US" sz="1300" b="1" dirty="0">
                 <a:solidFill>
                   <a:srgbClr val="0068B7"/>
                 </a:solidFill>
@@ -13577,20 +14728,20 @@
               </a:rPr>
               <a:t>Key idea</a:t>
             </a:r>
-            <a:endParaRPr lang="en-US" sz="950" dirty="0"/>
-          </a:p>
-        </p:txBody>
-      </p:sp>
-      <p:sp>
-        <p:nvSpPr>
-          <p:cNvPr id="13" name="Text 11"/>
-          <p:cNvSpPr/>
-          <p:nvPr/>
-        </p:nvSpPr>
-        <p:spPr>
-          <a:xfrm>
-            <a:off x="8074152" y="1856232"/>
-            <a:ext cx="2825496" cy="1261872"/>
+            <a:endParaRPr lang="en-US" sz="1300" dirty="0"/>
+          </a:p>
+        </p:txBody>
+      </p:sp>
+      <p:sp>
+        <p:nvSpPr>
+          <p:cNvPr id="14" name="Text 12"/>
+          <p:cNvSpPr/>
+          <p:nvPr/>
+        </p:nvSpPr>
+        <p:spPr>
+          <a:xfrm>
+            <a:off x="8074152" y="1920240"/>
+            <a:ext cx="2825496" cy="1188720"/>
           </a:xfrm>
           <a:prstGeom prst="rect">
             <a:avLst/>
@@ -13608,7 +14759,7 @@
               <a:buNone/>
             </a:pPr>
             <a:r>
-              <a:rPr lang="en-US" sz="1250" dirty="0">
+              <a:rPr lang="en-US" sz="1550" dirty="0">
                 <a:solidFill>
                   <a:srgbClr val="17364A"/>
                 </a:solidFill>
@@ -13616,15 +14767,15 @@
                 <a:ea typeface="Aptos" pitchFamily="34" charset="-122"/>
                 <a:cs typeface="Aptos" pitchFamily="34" charset="-120"/>
               </a:rPr>
-              <a:t>Geospatial AI combines spatial data, geographic analysis, and AI methods to identify patterns across place.</a:t>
-            </a:r>
-            <a:endParaRPr lang="en-US" sz="1250" dirty="0"/>
-          </a:p>
-        </p:txBody>
-      </p:sp>
-      <p:sp>
-        <p:nvSpPr>
-          <p:cNvPr id="14" name="Shape 12"/>
+              <a:t>Geospatial AI combines spatial data, geographic analysis, and AI methods to identify patterns across.</a:t>
+            </a:r>
+            <a:endParaRPr lang="en-US" sz="1550" dirty="0"/>
+          </a:p>
+        </p:txBody>
+      </p:sp>
+      <p:sp>
+        <p:nvSpPr>
+          <p:cNvPr id="15" name="Shape 13"/>
           <p:cNvSpPr/>
           <p:nvPr/>
         </p:nvSpPr>
@@ -13651,14 +14802,14 @@
       </p:sp>
       <p:sp>
         <p:nvSpPr>
-          <p:cNvPr id="15" name="Text 13"/>
+          <p:cNvPr id="16" name="Text 14"/>
           <p:cNvSpPr/>
           <p:nvPr/>
         </p:nvSpPr>
         <p:spPr>
           <a:xfrm>
             <a:off x="8074152" y="3666744"/>
-            <a:ext cx="2825496" cy="201168"/>
+            <a:ext cx="2825496" cy="256032"/>
           </a:xfrm>
           <a:prstGeom prst="rect">
             <a:avLst/>
@@ -13674,7 +14825,7 @@
               <a:buNone/>
             </a:pPr>
             <a:r>
-              <a:rPr lang="en-US" sz="950" b="1" dirty="0">
+              <a:rPr lang="en-US" sz="1300" b="1" dirty="0">
                 <a:solidFill>
                   <a:srgbClr val="0068B7"/>
                 </a:solidFill>
@@ -13684,20 +14835,20 @@
               </a:rPr>
               <a:t>Use this for</a:t>
             </a:r>
-            <a:endParaRPr lang="en-US" sz="950" dirty="0"/>
-          </a:p>
-        </p:txBody>
-      </p:sp>
-      <p:sp>
-        <p:nvSpPr>
-          <p:cNvPr id="16" name="Text 14"/>
-          <p:cNvSpPr/>
-          <p:nvPr/>
-        </p:nvSpPr>
-        <p:spPr>
-          <a:xfrm>
-            <a:off x="8074152" y="3959352"/>
-            <a:ext cx="2825496" cy="1170432"/>
+            <a:endParaRPr lang="en-US" sz="1300" dirty="0"/>
+          </a:p>
+        </p:txBody>
+      </p:sp>
+      <p:sp>
+        <p:nvSpPr>
+          <p:cNvPr id="17" name="Text 15"/>
+          <p:cNvSpPr/>
+          <p:nvPr/>
+        </p:nvSpPr>
+        <p:spPr>
+          <a:xfrm>
+            <a:off x="8074152" y="4023360"/>
+            <a:ext cx="2825496" cy="1097280"/>
           </a:xfrm>
           <a:prstGeom prst="rect">
             <a:avLst/>
@@ -13715,7 +14866,7 @@
               <a:buNone/>
             </a:pPr>
             <a:r>
-              <a:rPr lang="en-US" sz="1250" dirty="0">
+              <a:rPr lang="en-US" sz="1550" dirty="0">
                 <a:solidFill>
                   <a:srgbClr val="17364A"/>
                 </a:solidFill>
@@ -13725,7 +14876,7 @@
               </a:rPr>
               <a:t>Connect the concept to public health decisions, safeguards, documentation, or implementation work.</a:t>
             </a:r>
-            <a:endParaRPr lang="en-US" sz="1250" dirty="0"/>
+            <a:endParaRPr lang="en-US" sz="1550" dirty="0"/>
           </a:p>
         </p:txBody>
       </p:sp>
@@ -13922,7 +15073,7 @@
                 <a:ea typeface="Aptos" pitchFamily="34" charset="-122"/>
                 <a:cs typeface="Aptos" pitchFamily="34" charset="-120"/>
               </a:rPr>
-              <a:t>© Paula Soper</a:t>
+              <a:t>Â© Paula Soper</a:t>
             </a:r>
             <a:endParaRPr lang="en-US" sz="800" dirty="0"/>
           </a:p>
@@ -13930,7 +15081,46 @@
       </p:sp>
       <p:sp>
         <p:nvSpPr>
-          <p:cNvPr id="7" name="Shape 5"/>
+          <p:cNvPr id="7" name="Text 5"/>
+          <p:cNvSpPr/>
+          <p:nvPr/>
+        </p:nvSpPr>
+        <p:spPr>
+          <a:xfrm>
+            <a:off x="11137392" y="6510528"/>
+            <a:ext cx="411480" cy="201168"/>
+          </a:xfrm>
+          <a:prstGeom prst="rect">
+            <a:avLst/>
+          </a:prstGeom>
+          <a:noFill/>
+          <a:ln/>
+        </p:spPr>
+        <p:txBody>
+          <a:bodyPr wrap="square" lIns="0" tIns="0" rIns="0" bIns="0" rtlCol="0" anchor="ctr"/>
+          <a:lstStyle/>
+          <a:p>
+            <a:pPr algn="r" indent="0" marL="0">
+              <a:buNone/>
+            </a:pPr>
+            <a:r>
+              <a:rPr lang="en-US" sz="900" dirty="0">
+                <a:solidFill>
+                  <a:srgbClr val="5F7181"/>
+                </a:solidFill>
+                <a:latin typeface="Aptos" pitchFamily="34" charset="0"/>
+                <a:ea typeface="Aptos" pitchFamily="34" charset="-122"/>
+                <a:cs typeface="Aptos" pitchFamily="34" charset="-120"/>
+              </a:rPr>
+              <a:t>8</a:t>
+            </a:r>
+            <a:endParaRPr lang="en-US" sz="900" dirty="0"/>
+          </a:p>
+        </p:txBody>
+      </p:sp>
+      <p:sp>
+        <p:nvSpPr>
+          <p:cNvPr id="8" name="Shape 6"/>
           <p:cNvSpPr/>
           <p:nvPr/>
         </p:nvSpPr>
@@ -13955,7 +15145,7 @@
       </p:sp>
       <p:sp>
         <p:nvSpPr>
-          <p:cNvPr id="8" name="Text 6"/>
+          <p:cNvPr id="9" name="Text 7"/>
           <p:cNvSpPr/>
           <p:nvPr/>
         </p:nvSpPr>
@@ -13994,14 +15184,14 @@
       </p:sp>
       <p:sp>
         <p:nvSpPr>
-          <p:cNvPr id="9" name="Text 7"/>
+          <p:cNvPr id="10" name="Text 8"/>
           <p:cNvSpPr/>
           <p:nvPr/>
         </p:nvSpPr>
         <p:spPr>
           <a:xfrm>
             <a:off x="640080" y="621792"/>
-            <a:ext cx="10881360" cy="566928"/>
+            <a:ext cx="10881360" cy="713232"/>
           </a:xfrm>
           <a:prstGeom prst="rect">
             <a:avLst/>
@@ -14019,7 +15209,7 @@
               <a:buNone/>
             </a:pPr>
             <a:r>
-              <a:rPr lang="en-US" sz="2700" b="1" dirty="0">
+              <a:rPr lang="en-US" sz="3400" b="1" dirty="0">
                 <a:solidFill>
                   <a:srgbClr val="003A63"/>
                 </a:solidFill>
@@ -14029,20 +15219,20 @@
               </a:rPr>
               <a:t>Why This Topic Matters for Public Health AI</a:t>
             </a:r>
-            <a:endParaRPr lang="en-US" sz="2700" dirty="0"/>
-          </a:p>
-        </p:txBody>
-      </p:sp>
-      <p:sp>
-        <p:nvSpPr>
-          <p:cNvPr id="10" name="Text 8"/>
-          <p:cNvSpPr/>
-          <p:nvPr/>
-        </p:nvSpPr>
-        <p:spPr>
-          <a:xfrm>
-            <a:off x="868680" y="1417320"/>
-            <a:ext cx="6675120" cy="4434840"/>
+            <a:endParaRPr lang="en-US" sz="3400" dirty="0"/>
+          </a:p>
+        </p:txBody>
+      </p:sp>
+      <p:sp>
+        <p:nvSpPr>
+          <p:cNvPr id="11" name="Text 9"/>
+          <p:cNvSpPr/>
+          <p:nvPr/>
+        </p:nvSpPr>
+        <p:spPr>
+          <a:xfrm>
+            <a:off x="868680" y="1508760"/>
+            <a:ext cx="6537960" cy="4160520"/>
           </a:xfrm>
           <a:prstGeom prst="rect">
             <a:avLst/>
@@ -14057,7 +15247,7 @@
           <a:lstStyle/>
           <a:p>
             <a:r>
-              <a:rPr lang="en-US" sz="1700" dirty="0">
+              <a:rPr lang="en-US" sz="2100" dirty="0">
                 <a:solidFill>
                   <a:srgbClr val="17364A"/>
                 </a:solidFill>
@@ -14067,11 +15257,11 @@
               </a:rPr>
               <a:t>Geospatial AI matters because public health decisions are often place-based.</a:t>
             </a:r>
-            <a:endParaRPr lang="en-US" sz="1700" dirty="0"/>
-          </a:p>
-          <a:p>
-            <a:r>
-              <a:rPr lang="en-US" sz="1700" dirty="0">
+            <a:endParaRPr lang="en-US" sz="2100" dirty="0"/>
+          </a:p>
+          <a:p>
+            <a:r>
+              <a:rPr lang="en-US" sz="2100" dirty="0">
                 <a:solidFill>
                   <a:srgbClr val="17364A"/>
                 </a:solidFill>
@@ -14079,13 +15269,13 @@
                 <a:ea typeface="Aptos" pitchFamily="34" charset="-122"/>
                 <a:cs typeface="Aptos" pitchFamily="34" charset="-120"/>
               </a:rPr>
-              <a:t>Agencies decide where to conduct outreach, deploy mobile services, inspect facilities, respond to environmental hazards,.</a:t>
-            </a:r>
-            <a:endParaRPr lang="en-US" sz="1700" dirty="0"/>
-          </a:p>
-          <a:p>
-            <a:r>
-              <a:rPr lang="en-US" sz="1700" dirty="0">
+              <a:t>Agencies decide where to conduct outreach, deploy mobile services, inspect facilities, respond to.</a:t>
+            </a:r>
+            <a:endParaRPr lang="en-US" sz="2100" dirty="0"/>
+          </a:p>
+          <a:p>
+            <a:r>
+              <a:rPr lang="en-US" sz="2100" dirty="0">
                 <a:solidFill>
                   <a:srgbClr val="17364A"/>
                 </a:solidFill>
@@ -14093,29 +15283,15 @@
                 <a:ea typeface="Aptos" pitchFamily="34" charset="-122"/>
                 <a:cs typeface="Aptos" pitchFamily="34" charset="-120"/>
               </a:rPr>
-              <a:t>AI-supported spatial tools can help analyze large volumes of geographic information and identify patterns that may not be.</a:t>
-            </a:r>
-            <a:endParaRPr lang="en-US" sz="1700" dirty="0"/>
-          </a:p>
-          <a:p>
-            <a:r>
-              <a:rPr lang="en-US" sz="1700" dirty="0">
-                <a:solidFill>
-                  <a:srgbClr val="17364A"/>
-                </a:solidFill>
-                <a:latin typeface="Aptos" pitchFamily="34" charset="0"/>
-                <a:ea typeface="Aptos" pitchFamily="34" charset="-122"/>
-                <a:cs typeface="Aptos" pitchFamily="34" charset="-120"/>
-              </a:rPr>
-              <a:t>However, maps can create a false sense of objectivity.</a:t>
-            </a:r>
-            <a:endParaRPr lang="en-US" sz="1700" dirty="0"/>
-          </a:p>
-        </p:txBody>
-      </p:sp>
-      <p:sp>
-        <p:nvSpPr>
-          <p:cNvPr id="11" name="Shape 9"/>
+              <a:t>AI-supported spatial tools can help analyze large volumes of geographic information and identify.</a:t>
+            </a:r>
+            <a:endParaRPr lang="en-US" sz="2100" dirty="0"/>
+          </a:p>
+        </p:txBody>
+      </p:sp>
+      <p:sp>
+        <p:nvSpPr>
+          <p:cNvPr id="12" name="Shape 10"/>
           <p:cNvSpPr/>
           <p:nvPr/>
         </p:nvSpPr>
@@ -14142,14 +15318,14 @@
       </p:sp>
       <p:sp>
         <p:nvSpPr>
-          <p:cNvPr id="12" name="Text 10"/>
+          <p:cNvPr id="13" name="Text 11"/>
           <p:cNvSpPr/>
           <p:nvPr/>
         </p:nvSpPr>
         <p:spPr>
           <a:xfrm>
             <a:off x="8074152" y="1563624"/>
-            <a:ext cx="2825496" cy="201168"/>
+            <a:ext cx="2825496" cy="256032"/>
           </a:xfrm>
           <a:prstGeom prst="rect">
             <a:avLst/>
@@ -14165,7 +15341,7 @@
               <a:buNone/>
             </a:pPr>
             <a:r>
-              <a:rPr lang="en-US" sz="950" b="1" dirty="0">
+              <a:rPr lang="en-US" sz="1300" b="1" dirty="0">
                 <a:solidFill>
                   <a:srgbClr val="0068B7"/>
                 </a:solidFill>
@@ -14175,20 +15351,20 @@
               </a:rPr>
               <a:t>Key idea</a:t>
             </a:r>
-            <a:endParaRPr lang="en-US" sz="950" dirty="0"/>
-          </a:p>
-        </p:txBody>
-      </p:sp>
-      <p:sp>
-        <p:nvSpPr>
-          <p:cNvPr id="13" name="Text 11"/>
-          <p:cNvSpPr/>
-          <p:nvPr/>
-        </p:nvSpPr>
-        <p:spPr>
-          <a:xfrm>
-            <a:off x="8074152" y="1856232"/>
-            <a:ext cx="2825496" cy="1261872"/>
+            <a:endParaRPr lang="en-US" sz="1300" dirty="0"/>
+          </a:p>
+        </p:txBody>
+      </p:sp>
+      <p:sp>
+        <p:nvSpPr>
+          <p:cNvPr id="14" name="Text 12"/>
+          <p:cNvSpPr/>
+          <p:nvPr/>
+        </p:nvSpPr>
+        <p:spPr>
+          <a:xfrm>
+            <a:off x="8074152" y="1920240"/>
+            <a:ext cx="2825496" cy="1188720"/>
           </a:xfrm>
           <a:prstGeom prst="rect">
             <a:avLst/>
@@ -14206,7 +15382,7 @@
               <a:buNone/>
             </a:pPr>
             <a:r>
-              <a:rPr lang="en-US" sz="1250" dirty="0">
+              <a:rPr lang="en-US" sz="1550" dirty="0">
                 <a:solidFill>
                   <a:srgbClr val="17364A"/>
                 </a:solidFill>
@@ -14216,13 +15392,13 @@
               </a:rPr>
               <a:t>Geospatial AI matters because public health decisions are often place-based.</a:t>
             </a:r>
-            <a:endParaRPr lang="en-US" sz="1250" dirty="0"/>
-          </a:p>
-        </p:txBody>
-      </p:sp>
-      <p:sp>
-        <p:nvSpPr>
-          <p:cNvPr id="14" name="Shape 12"/>
+            <a:endParaRPr lang="en-US" sz="1550" dirty="0"/>
+          </a:p>
+        </p:txBody>
+      </p:sp>
+      <p:sp>
+        <p:nvSpPr>
+          <p:cNvPr id="15" name="Shape 13"/>
           <p:cNvSpPr/>
           <p:nvPr/>
         </p:nvSpPr>
@@ -14249,14 +15425,14 @@
       </p:sp>
       <p:sp>
         <p:nvSpPr>
-          <p:cNvPr id="15" name="Text 13"/>
+          <p:cNvPr id="16" name="Text 14"/>
           <p:cNvSpPr/>
           <p:nvPr/>
         </p:nvSpPr>
         <p:spPr>
           <a:xfrm>
             <a:off x="8074152" y="3666744"/>
-            <a:ext cx="2825496" cy="201168"/>
+            <a:ext cx="2825496" cy="256032"/>
           </a:xfrm>
           <a:prstGeom prst="rect">
             <a:avLst/>
@@ -14272,7 +15448,7 @@
               <a:buNone/>
             </a:pPr>
             <a:r>
-              <a:rPr lang="en-US" sz="950" b="1" dirty="0">
+              <a:rPr lang="en-US" sz="1300" b="1" dirty="0">
                 <a:solidFill>
                   <a:srgbClr val="0068B7"/>
                 </a:solidFill>
@@ -14282,20 +15458,20 @@
               </a:rPr>
               <a:t>Use this for</a:t>
             </a:r>
-            <a:endParaRPr lang="en-US" sz="950" dirty="0"/>
-          </a:p>
-        </p:txBody>
-      </p:sp>
-      <p:sp>
-        <p:nvSpPr>
-          <p:cNvPr id="16" name="Text 14"/>
-          <p:cNvSpPr/>
-          <p:nvPr/>
-        </p:nvSpPr>
-        <p:spPr>
-          <a:xfrm>
-            <a:off x="8074152" y="3959352"/>
-            <a:ext cx="2825496" cy="1170432"/>
+            <a:endParaRPr lang="en-US" sz="1300" dirty="0"/>
+          </a:p>
+        </p:txBody>
+      </p:sp>
+      <p:sp>
+        <p:nvSpPr>
+          <p:cNvPr id="17" name="Text 15"/>
+          <p:cNvSpPr/>
+          <p:nvPr/>
+        </p:nvSpPr>
+        <p:spPr>
+          <a:xfrm>
+            <a:off x="8074152" y="4023360"/>
+            <a:ext cx="2825496" cy="1097280"/>
           </a:xfrm>
           <a:prstGeom prst="rect">
             <a:avLst/>
@@ -14313,7 +15489,7 @@
               <a:buNone/>
             </a:pPr>
             <a:r>
-              <a:rPr lang="en-US" sz="1250" dirty="0">
+              <a:rPr lang="en-US" sz="1550" dirty="0">
                 <a:solidFill>
                   <a:srgbClr val="17364A"/>
                 </a:solidFill>
@@ -14323,7 +15499,7 @@
               </a:rPr>
               <a:t>Connect the concept to public health decisions, safeguards, documentation, or implementation work.</a:t>
             </a:r>
-            <a:endParaRPr lang="en-US" sz="1250" dirty="0"/>
+            <a:endParaRPr lang="en-US" sz="1550" dirty="0"/>
           </a:p>
         </p:txBody>
       </p:sp>
@@ -14520,7 +15696,7 @@
                 <a:ea typeface="Aptos" pitchFamily="34" charset="-122"/>
                 <a:cs typeface="Aptos" pitchFamily="34" charset="-120"/>
               </a:rPr>
-              <a:t>© Paula Soper</a:t>
+              <a:t>Â© Paula Soper</a:t>
             </a:r>
             <a:endParaRPr lang="en-US" sz="800" dirty="0"/>
           </a:p>
@@ -14528,7 +15704,46 @@
       </p:sp>
       <p:sp>
         <p:nvSpPr>
-          <p:cNvPr id="7" name="Shape 5"/>
+          <p:cNvPr id="7" name="Text 5"/>
+          <p:cNvSpPr/>
+          <p:nvPr/>
+        </p:nvSpPr>
+        <p:spPr>
+          <a:xfrm>
+            <a:off x="11137392" y="6510528"/>
+            <a:ext cx="411480" cy="201168"/>
+          </a:xfrm>
+          <a:prstGeom prst="rect">
+            <a:avLst/>
+          </a:prstGeom>
+          <a:noFill/>
+          <a:ln/>
+        </p:spPr>
+        <p:txBody>
+          <a:bodyPr wrap="square" lIns="0" tIns="0" rIns="0" bIns="0" rtlCol="0" anchor="ctr"/>
+          <a:lstStyle/>
+          <a:p>
+            <a:pPr algn="r" indent="0" marL="0">
+              <a:buNone/>
+            </a:pPr>
+            <a:r>
+              <a:rPr lang="en-US" sz="900" dirty="0">
+                <a:solidFill>
+                  <a:srgbClr val="5F7181"/>
+                </a:solidFill>
+                <a:latin typeface="Aptos" pitchFamily="34" charset="0"/>
+                <a:ea typeface="Aptos" pitchFamily="34" charset="-122"/>
+                <a:cs typeface="Aptos" pitchFamily="34" charset="-120"/>
+              </a:rPr>
+              <a:t>9</a:t>
+            </a:r>
+            <a:endParaRPr lang="en-US" sz="900" dirty="0"/>
+          </a:p>
+        </p:txBody>
+      </p:sp>
+      <p:sp>
+        <p:nvSpPr>
+          <p:cNvPr id="8" name="Shape 6"/>
           <p:cNvSpPr/>
           <p:nvPr/>
         </p:nvSpPr>
@@ -14553,7 +15768,7 @@
       </p:sp>
       <p:sp>
         <p:nvSpPr>
-          <p:cNvPr id="8" name="Text 6"/>
+          <p:cNvPr id="9" name="Text 7"/>
           <p:cNvSpPr/>
           <p:nvPr/>
         </p:nvSpPr>
@@ -14592,14 +15807,14 @@
       </p:sp>
       <p:sp>
         <p:nvSpPr>
-          <p:cNvPr id="9" name="Text 7"/>
+          <p:cNvPr id="10" name="Text 8"/>
           <p:cNvSpPr/>
           <p:nvPr/>
         </p:nvSpPr>
         <p:spPr>
           <a:xfrm>
             <a:off x="640080" y="621792"/>
-            <a:ext cx="10881360" cy="566928"/>
+            <a:ext cx="10881360" cy="713232"/>
           </a:xfrm>
           <a:prstGeom prst="rect">
             <a:avLst/>
@@ -14617,7 +15832,7 @@
               <a:buNone/>
             </a:pPr>
             <a:r>
-              <a:rPr lang="en-US" sz="2700" b="1" dirty="0">
+              <a:rPr lang="en-US" sz="3400" b="1" dirty="0">
                 <a:solidFill>
                   <a:srgbClr val="003A63"/>
                 </a:solidFill>
@@ -14627,20 +15842,20 @@
               </a:rPr>
               <a:t>Public Health Example</a:t>
             </a:r>
-            <a:endParaRPr lang="en-US" sz="2700" dirty="0"/>
-          </a:p>
-        </p:txBody>
-      </p:sp>
-      <p:sp>
-        <p:nvSpPr>
-          <p:cNvPr id="10" name="Text 8"/>
-          <p:cNvSpPr/>
-          <p:nvPr/>
-        </p:nvSpPr>
-        <p:spPr>
-          <a:xfrm>
-            <a:off x="868680" y="1417320"/>
-            <a:ext cx="6675120" cy="4434840"/>
+            <a:endParaRPr lang="en-US" sz="3400" dirty="0"/>
+          </a:p>
+        </p:txBody>
+      </p:sp>
+      <p:sp>
+        <p:nvSpPr>
+          <p:cNvPr id="11" name="Text 9"/>
+          <p:cNvSpPr/>
+          <p:nvPr/>
+        </p:nvSpPr>
+        <p:spPr>
+          <a:xfrm>
+            <a:off x="868680" y="1508760"/>
+            <a:ext cx="6537960" cy="4160520"/>
           </a:xfrm>
           <a:prstGeom prst="rect">
             <a:avLst/>
@@ -14655,7 +15870,7 @@
           <a:lstStyle/>
           <a:p>
             <a:r>
-              <a:rPr lang="en-US" sz="1700" dirty="0">
+              <a:rPr lang="en-US" sz="2100" dirty="0">
                 <a:solidFill>
                   <a:srgbClr val="17364A"/>
                 </a:solidFill>
@@ -14663,13 +15878,13 @@
                 <a:ea typeface="Aptos" pitchFamily="34" charset="-122"/>
                 <a:cs typeface="Aptos" pitchFamily="34" charset="-120"/>
               </a:rPr>
-              <a:t>A health department may use AI-supported geospatial analysis to identify areas where mobile vaccination clinics could.</a:t>
-            </a:r>
-            <a:endParaRPr lang="en-US" sz="1700" dirty="0"/>
-          </a:p>
-          <a:p>
-            <a:r>
-              <a:rPr lang="en-US" sz="1700" dirty="0">
+              <a:t>A health department may use AI-supported geospatial analysis to identify areas where mobile vaccination.</a:t>
+            </a:r>
+            <a:endParaRPr lang="en-US" sz="2100" dirty="0"/>
+          </a:p>
+          <a:p>
+            <a:r>
+              <a:rPr lang="en-US" sz="2100" dirty="0">
                 <a:solidFill>
                   <a:srgbClr val="17364A"/>
                 </a:solidFill>
@@ -14677,13 +15892,13 @@
                 <a:ea typeface="Aptos" pitchFamily="34" charset="-122"/>
                 <a:cs typeface="Aptos" pitchFamily="34" charset="-120"/>
               </a:rPr>
-              <a:t>The tool may combine immunization coverage, school locations, transportation routes, census variables, provider locations,.</a:t>
-            </a:r>
-            <a:endParaRPr lang="en-US" sz="1700" dirty="0"/>
-          </a:p>
-          <a:p>
-            <a:r>
-              <a:rPr lang="en-US" sz="1700" dirty="0">
+              <a:t>The tool may combine immunization coverage, school locations, transportation routes, census variables,.</a:t>
+            </a:r>
+            <a:endParaRPr lang="en-US" sz="2100" dirty="0"/>
+          </a:p>
+          <a:p>
+            <a:r>
+              <a:rPr lang="en-US" sz="2100" dirty="0">
                 <a:solidFill>
                   <a:srgbClr val="17364A"/>
                 </a:solidFill>
@@ -14693,27 +15908,13 @@
               </a:rPr>
               <a:t>The output may recommend priority areas for outreach and clinic placement.</a:t>
             </a:r>
-            <a:endParaRPr lang="en-US" sz="1700" dirty="0"/>
-          </a:p>
-          <a:p>
-            <a:r>
-              <a:rPr lang="en-US" sz="1700" dirty="0">
-                <a:solidFill>
-                  <a:srgbClr val="17364A"/>
-                </a:solidFill>
-                <a:latin typeface="Aptos" pitchFamily="34" charset="0"/>
-                <a:ea typeface="Aptos" pitchFamily="34" charset="-122"/>
-                <a:cs typeface="Aptos" pitchFamily="34" charset="-120"/>
-              </a:rPr>
-              <a:t>This workflow can advance equity if it identifies access barriers and supports community partnership.</a:t>
-            </a:r>
-            <a:endParaRPr lang="en-US" sz="1700" dirty="0"/>
-          </a:p>
-        </p:txBody>
-      </p:sp>
-      <p:sp>
-        <p:nvSpPr>
-          <p:cNvPr id="11" name="Shape 9"/>
+            <a:endParaRPr lang="en-US" sz="2100" dirty="0"/>
+          </a:p>
+        </p:txBody>
+      </p:sp>
+      <p:sp>
+        <p:nvSpPr>
+          <p:cNvPr id="12" name="Shape 10"/>
           <p:cNvSpPr/>
           <p:nvPr/>
         </p:nvSpPr>
@@ -14740,14 +15941,14 @@
       </p:sp>
       <p:sp>
         <p:nvSpPr>
-          <p:cNvPr id="12" name="Text 10"/>
+          <p:cNvPr id="13" name="Text 11"/>
           <p:cNvSpPr/>
           <p:nvPr/>
         </p:nvSpPr>
         <p:spPr>
           <a:xfrm>
             <a:off x="8074152" y="1563624"/>
-            <a:ext cx="2825496" cy="201168"/>
+            <a:ext cx="2825496" cy="256032"/>
           </a:xfrm>
           <a:prstGeom prst="rect">
             <a:avLst/>
@@ -14763,7 +15964,7 @@
               <a:buNone/>
             </a:pPr>
             <a:r>
-              <a:rPr lang="en-US" sz="950" b="1" dirty="0">
+              <a:rPr lang="en-US" sz="1300" b="1" dirty="0">
                 <a:solidFill>
                   <a:srgbClr val="0068B7"/>
                 </a:solidFill>
@@ -14773,20 +15974,20 @@
               </a:rPr>
               <a:t>Key idea</a:t>
             </a:r>
-            <a:endParaRPr lang="en-US" sz="950" dirty="0"/>
-          </a:p>
-        </p:txBody>
-      </p:sp>
-      <p:sp>
-        <p:nvSpPr>
-          <p:cNvPr id="13" name="Text 11"/>
-          <p:cNvSpPr/>
-          <p:nvPr/>
-        </p:nvSpPr>
-        <p:spPr>
-          <a:xfrm>
-            <a:off x="8074152" y="1856232"/>
-            <a:ext cx="2825496" cy="1261872"/>
+            <a:endParaRPr lang="en-US" sz="1300" dirty="0"/>
+          </a:p>
+        </p:txBody>
+      </p:sp>
+      <p:sp>
+        <p:nvSpPr>
+          <p:cNvPr id="14" name="Text 12"/>
+          <p:cNvSpPr/>
+          <p:nvPr/>
+        </p:nvSpPr>
+        <p:spPr>
+          <a:xfrm>
+            <a:off x="8074152" y="1920240"/>
+            <a:ext cx="2825496" cy="1188720"/>
           </a:xfrm>
           <a:prstGeom prst="rect">
             <a:avLst/>
@@ -14804,7 +16005,7 @@
               <a:buNone/>
             </a:pPr>
             <a:r>
-              <a:rPr lang="en-US" sz="1250" dirty="0">
+              <a:rPr lang="en-US" sz="1550" dirty="0">
                 <a:solidFill>
                   <a:srgbClr val="17364A"/>
                 </a:solidFill>
@@ -14812,15 +16013,15 @@
                 <a:ea typeface="Aptos" pitchFamily="34" charset="-122"/>
                 <a:cs typeface="Aptos" pitchFamily="34" charset="-120"/>
               </a:rPr>
-              <a:t>A health department may use AI-supported geospatial analysis to identify areas where mobile vaccination clinics could.</a:t>
-            </a:r>
-            <a:endParaRPr lang="en-US" sz="1250" dirty="0"/>
-          </a:p>
-        </p:txBody>
-      </p:sp>
-      <p:sp>
-        <p:nvSpPr>
-          <p:cNvPr id="14" name="Shape 12"/>
+              <a:t>A health department may use AI-supported geospatial analysis to identify areas where mobile vaccination.</a:t>
+            </a:r>
+            <a:endParaRPr lang="en-US" sz="1550" dirty="0"/>
+          </a:p>
+        </p:txBody>
+      </p:sp>
+      <p:sp>
+        <p:nvSpPr>
+          <p:cNvPr id="15" name="Shape 13"/>
           <p:cNvSpPr/>
           <p:nvPr/>
         </p:nvSpPr>
@@ -14847,14 +16048,14 @@
       </p:sp>
       <p:sp>
         <p:nvSpPr>
-          <p:cNvPr id="15" name="Text 13"/>
+          <p:cNvPr id="16" name="Text 14"/>
           <p:cNvSpPr/>
           <p:nvPr/>
         </p:nvSpPr>
         <p:spPr>
           <a:xfrm>
             <a:off x="8074152" y="3666744"/>
-            <a:ext cx="2825496" cy="201168"/>
+            <a:ext cx="2825496" cy="256032"/>
           </a:xfrm>
           <a:prstGeom prst="rect">
             <a:avLst/>
@@ -14870,7 +16071,7 @@
               <a:buNone/>
             </a:pPr>
             <a:r>
-              <a:rPr lang="en-US" sz="950" b="1" dirty="0">
+              <a:rPr lang="en-US" sz="1300" b="1" dirty="0">
                 <a:solidFill>
                   <a:srgbClr val="0068B7"/>
                 </a:solidFill>
@@ -14880,20 +16081,20 @@
               </a:rPr>
               <a:t>Use this for</a:t>
             </a:r>
-            <a:endParaRPr lang="en-US" sz="950" dirty="0"/>
-          </a:p>
-        </p:txBody>
-      </p:sp>
-      <p:sp>
-        <p:nvSpPr>
-          <p:cNvPr id="16" name="Text 14"/>
-          <p:cNvSpPr/>
-          <p:nvPr/>
-        </p:nvSpPr>
-        <p:spPr>
-          <a:xfrm>
-            <a:off x="8074152" y="3959352"/>
-            <a:ext cx="2825496" cy="1170432"/>
+            <a:endParaRPr lang="en-US" sz="1300" dirty="0"/>
+          </a:p>
+        </p:txBody>
+      </p:sp>
+      <p:sp>
+        <p:nvSpPr>
+          <p:cNvPr id="17" name="Text 15"/>
+          <p:cNvSpPr/>
+          <p:nvPr/>
+        </p:nvSpPr>
+        <p:spPr>
+          <a:xfrm>
+            <a:off x="8074152" y="4023360"/>
+            <a:ext cx="2825496" cy="1097280"/>
           </a:xfrm>
           <a:prstGeom prst="rect">
             <a:avLst/>
@@ -14911,7 +16112,7 @@
               <a:buNone/>
             </a:pPr>
             <a:r>
-              <a:rPr lang="en-US" sz="1250" dirty="0">
+              <a:rPr lang="en-US" sz="1550" dirty="0">
                 <a:solidFill>
                   <a:srgbClr val="17364A"/>
                 </a:solidFill>
@@ -14921,7 +16122,7 @@
               </a:rPr>
               <a:t>Connect the concept to public health decisions, safeguards, documentation, or implementation work.</a:t>
             </a:r>
-            <a:endParaRPr lang="en-US" sz="1250" dirty="0"/>
+            <a:endParaRPr lang="en-US" sz="1550" dirty="0"/>
           </a:p>
         </p:txBody>
       </p:sp>
